--- a/slides/3_LLMs.pptx
+++ b/slides/3_LLMs.pptx
@@ -7207,7 +7207,7 @@
           <a:p>
             <a:fld id="{B854A0A5-3125-4A93-A463-B2CA0DCE058B}" type="datetimeFigureOut">
               <a:rPr lang="en-GB" smtClean="0"/>
-              <a:t>18/07/2025</a:t>
+              <a:t>10/09/2025</a:t>
             </a:fld>
             <a:endParaRPr lang="en-GB"/>
           </a:p>
@@ -7624,7 +7624,7 @@
           <a:p>
             <a:fld id="{7128456D-5ACD-4673-BCE9-52505EC32CEF}" type="datetime1">
               <a:rPr lang="en-GB" smtClean="0"/>
-              <a:t>18/07/2025</a:t>
+              <a:t>10/09/2025</a:t>
             </a:fld>
             <a:endParaRPr lang="en-GB"/>
           </a:p>
@@ -7824,7 +7824,7 @@
           <a:p>
             <a:fld id="{D99A2639-5270-4811-807B-89D4AE95E7ED}" type="datetime1">
               <a:rPr lang="en-GB" smtClean="0"/>
-              <a:t>18/07/2025</a:t>
+              <a:t>10/09/2025</a:t>
             </a:fld>
             <a:endParaRPr lang="en-GB"/>
           </a:p>
@@ -8034,7 +8034,7 @@
           <a:p>
             <a:fld id="{B552976C-D408-4E27-8D02-D7795F6D8A01}" type="datetime1">
               <a:rPr lang="en-GB" smtClean="0"/>
-              <a:t>18/07/2025</a:t>
+              <a:t>10/09/2025</a:t>
             </a:fld>
             <a:endParaRPr lang="en-GB"/>
           </a:p>
@@ -8234,7 +8234,7 @@
           <a:p>
             <a:fld id="{0B763083-041D-491F-A9FE-D51D99E0B41E}" type="datetime1">
               <a:rPr lang="en-GB" smtClean="0"/>
-              <a:t>18/07/2025</a:t>
+              <a:t>10/09/2025</a:t>
             </a:fld>
             <a:endParaRPr lang="en-GB"/>
           </a:p>
@@ -8510,7 +8510,7 @@
           <a:p>
             <a:fld id="{409455E6-A1CA-4CB6-9964-88D5086DA5CA}" type="datetime1">
               <a:rPr lang="en-GB" smtClean="0"/>
-              <a:t>18/07/2025</a:t>
+              <a:t>10/09/2025</a:t>
             </a:fld>
             <a:endParaRPr lang="en-GB"/>
           </a:p>
@@ -8778,7 +8778,7 @@
           <a:p>
             <a:fld id="{FAD82E38-24C1-4A8F-B916-1E714FC129DD}" type="datetime1">
               <a:rPr lang="en-GB" smtClean="0"/>
-              <a:t>18/07/2025</a:t>
+              <a:t>10/09/2025</a:t>
             </a:fld>
             <a:endParaRPr lang="en-GB"/>
           </a:p>
@@ -9193,7 +9193,7 @@
           <a:p>
             <a:fld id="{BC17BCDC-BAA6-44B5-B642-6F28D623ABB1}" type="datetime1">
               <a:rPr lang="en-GB" smtClean="0"/>
-              <a:t>18/07/2025</a:t>
+              <a:t>10/09/2025</a:t>
             </a:fld>
             <a:endParaRPr lang="en-GB"/>
           </a:p>
@@ -9335,7 +9335,7 @@
           <a:p>
             <a:fld id="{01D4BEC3-2CF9-4B19-A0A5-E70A0675B677}" type="datetime1">
               <a:rPr lang="en-GB" smtClean="0"/>
-              <a:t>18/07/2025</a:t>
+              <a:t>10/09/2025</a:t>
             </a:fld>
             <a:endParaRPr lang="en-GB"/>
           </a:p>
@@ -9448,7 +9448,7 @@
           <a:p>
             <a:fld id="{98E28BFD-B06D-4A45-8453-724AC7BA29C5}" type="datetime1">
               <a:rPr lang="en-GB" smtClean="0"/>
-              <a:t>18/07/2025</a:t>
+              <a:t>10/09/2025</a:t>
             </a:fld>
             <a:endParaRPr lang="en-GB"/>
           </a:p>
@@ -9761,7 +9761,7 @@
           <a:p>
             <a:fld id="{A14D99B0-2926-4194-B668-6A0D6123824C}" type="datetime1">
               <a:rPr lang="en-GB" smtClean="0"/>
-              <a:t>18/07/2025</a:t>
+              <a:t>10/09/2025</a:t>
             </a:fld>
             <a:endParaRPr lang="en-GB"/>
           </a:p>
@@ -10050,7 +10050,7 @@
           <a:p>
             <a:fld id="{29F03426-21FD-40F4-9F0B-AD19F2317DCA}" type="datetime1">
               <a:rPr lang="en-GB" smtClean="0"/>
-              <a:t>18/07/2025</a:t>
+              <a:t>10/09/2025</a:t>
             </a:fld>
             <a:endParaRPr lang="en-GB"/>
           </a:p>
@@ -10293,7 +10293,7 @@
           <a:p>
             <a:fld id="{0369896D-5D36-4D31-A0CE-0C2BFB17B225}" type="datetime1">
               <a:rPr lang="en-GB" smtClean="0"/>
-              <a:t>18/07/2025</a:t>
+              <a:t>10/09/2025</a:t>
             </a:fld>
             <a:endParaRPr lang="en-GB"/>
           </a:p>
@@ -12691,42 +12691,6 @@
           </a:p>
         </p:txBody>
       </p:sp>
-      <p:pic>
-        <p:nvPicPr>
-          <p:cNvPr id="4" name="Grafik 3" descr="Ein Bild, das Text, Screenshot, Zahl, Schrift enthält.&#10;&#10;KI-generierte Inhalte können fehlerhaft sein.">
-            <a:extLst>
-              <a:ext uri="{FF2B5EF4-FFF2-40B4-BE49-F238E27FC236}">
-                <a16:creationId xmlns:a16="http://schemas.microsoft.com/office/drawing/2014/main" id="{2000A6A5-E9A0-2305-24AE-48ABFAD0CDDA}"/>
-              </a:ext>
-            </a:extLst>
-          </p:cNvPr>
-          <p:cNvPicPr>
-            <a:picLocks noChangeAspect="1"/>
-          </p:cNvPicPr>
-          <p:nvPr/>
-        </p:nvPicPr>
-        <p:blipFill>
-          <a:blip r:embed="rId2">
-            <a:extLst>
-              <a:ext uri="{28A0092B-C50C-407E-A947-70E740481C1C}">
-                <a14:useLocalDpi xmlns:a14="http://schemas.microsoft.com/office/drawing/2010/main" val="0"/>
-              </a:ext>
-            </a:extLst>
-          </a:blip>
-          <a:stretch>
-            <a:fillRect/>
-          </a:stretch>
-        </p:blipFill>
-        <p:spPr>
-          <a:xfrm>
-            <a:off x="2918817" y="0"/>
-            <a:ext cx="6354366" cy="6858000"/>
-          </a:xfrm>
-          <a:prstGeom prst="rect">
-            <a:avLst/>
-          </a:prstGeom>
-        </p:spPr>
-      </p:pic>
       <p:sp>
         <p:nvSpPr>
           <p:cNvPr id="5" name="Textfeld 4">
@@ -12757,7 +12721,7 @@
           <a:p>
             <a:r>
               <a:rPr lang="de-DE" sz="2600" dirty="0" err="1">
-                <a:hlinkClick r:id="rId3"/>
+                <a:hlinkClick r:id="rId2"/>
               </a:rPr>
               <a:t>LMArena</a:t>
             </a:r>
@@ -12765,6 +12729,42 @@
           </a:p>
         </p:txBody>
       </p:sp>
+      <p:pic>
+        <p:nvPicPr>
+          <p:cNvPr id="6" name="Grafik 5" descr="Ein Bild, das Text, Screenshot, Zahl, Dokument enthält.&#10;&#10;KI-generierte Inhalte können fehlerhaft sein.">
+            <a:extLst>
+              <a:ext uri="{FF2B5EF4-FFF2-40B4-BE49-F238E27FC236}">
+                <a16:creationId xmlns:a16="http://schemas.microsoft.com/office/drawing/2014/main" id="{1C8EDB32-B071-B136-B60D-35BBB7E9CE68}"/>
+              </a:ext>
+            </a:extLst>
+          </p:cNvPr>
+          <p:cNvPicPr>
+            <a:picLocks noChangeAspect="1"/>
+          </p:cNvPicPr>
+          <p:nvPr/>
+        </p:nvPicPr>
+        <p:blipFill>
+          <a:blip r:embed="rId3">
+            <a:extLst>
+              <a:ext uri="{28A0092B-C50C-407E-A947-70E740481C1C}">
+                <a14:useLocalDpi xmlns:a14="http://schemas.microsoft.com/office/drawing/2010/main" val="0"/>
+              </a:ext>
+            </a:extLst>
+          </a:blip>
+          <a:stretch>
+            <a:fillRect/>
+          </a:stretch>
+        </p:blipFill>
+        <p:spPr>
+          <a:xfrm>
+            <a:off x="2209800" y="226415"/>
+            <a:ext cx="7772400" cy="6405170"/>
+          </a:xfrm>
+          <a:prstGeom prst="rect">
+            <a:avLst/>
+          </a:prstGeom>
+        </p:spPr>
+      </p:pic>
     </p:spTree>
     <p:extLst>
       <p:ext uri="{BB962C8B-B14F-4D97-AF65-F5344CB8AC3E}">
@@ -14456,8 +14456,8 @@
           </a:p>
         </p:txBody>
       </p:sp>
-      <mc:AlternateContent xmlns:mc="http://schemas.openxmlformats.org/markup-compatibility/2006">
-        <mc:Choice xmlns:a14="http://schemas.microsoft.com/office/drawing/2010/main" Requires="a14">
+      <mc:AlternateContent xmlns:mc="http://schemas.openxmlformats.org/markup-compatibility/2006" xmlns:a14="http://schemas.microsoft.com/office/drawing/2010/main">
+        <mc:Choice Requires="a14">
           <p:sp>
             <p:nvSpPr>
               <p:cNvPr id="3" name="Content Placeholder 2">
@@ -14597,7 +14597,7 @@
             </p:txBody>
           </p:sp>
         </mc:Choice>
-        <mc:Fallback>
+        <mc:Fallback xmlns="">
           <p:sp>
             <p:nvSpPr>
               <p:cNvPr id="3" name="Content Placeholder 2">
@@ -15236,33 +15236,623 @@
         </p:nvSpPr>
         <p:spPr/>
         <p:txBody>
-          <a:bodyPr/>
+          <a:bodyPr>
+            <a:normAutofit lnSpcReduction="10000"/>
+          </a:bodyPr>
           <a:lstStyle/>
-          <a:p>
-            <a:r>
-              <a:rPr lang="de-DE" dirty="0" err="1"/>
-              <a:t>RoBERTa</a:t>
-            </a:r>
-            <a:r>
-              <a:rPr lang="de-DE" dirty="0"/>
-              <a:t> …</a:t>
-            </a:r>
-          </a:p>
           <a:p>
             <a:pPr marL="0" indent="0">
               <a:buNone/>
             </a:pPr>
-            <a:endParaRPr lang="de-DE" dirty="0"/>
-          </a:p>
-          <a:p>
-            <a:r>
-              <a:rPr lang="de-DE" dirty="0" err="1"/>
+            <a:r>
+              <a:rPr lang="de-DE" sz="2400" b="1" dirty="0"/>
+              <a:t>BERT</a:t>
+            </a:r>
+            <a:r>
+              <a:rPr lang="de-DE" sz="2400" dirty="0"/>
+              <a:t>: </a:t>
+            </a:r>
+            <a:r>
+              <a:rPr lang="de-DE" sz="2400" dirty="0" err="1"/>
+              <a:t>effective</a:t>
+            </a:r>
+            <a:r>
+              <a:rPr lang="de-DE" sz="2400" dirty="0"/>
+              <a:t> but </a:t>
+            </a:r>
+            <a:r>
+              <a:rPr lang="de-DE" sz="2400" dirty="0" err="1"/>
+              <a:t>computationally</a:t>
+            </a:r>
+            <a:r>
+              <a:rPr lang="de-DE" sz="2400" dirty="0"/>
+              <a:t> heavy (large </a:t>
+            </a:r>
+            <a:r>
+              <a:rPr lang="de-DE" sz="2400" dirty="0" err="1"/>
+              <a:t>models</a:t>
+            </a:r>
+            <a:r>
+              <a:rPr lang="de-DE" sz="2400" dirty="0"/>
+              <a:t>, slow </a:t>
+            </a:r>
+            <a:r>
+              <a:rPr lang="de-DE" sz="2400" dirty="0" err="1"/>
+              <a:t>inference</a:t>
+            </a:r>
+            <a:r>
+              <a:rPr lang="de-DE" sz="2400" dirty="0"/>
+              <a:t>)</a:t>
+            </a:r>
+          </a:p>
+          <a:p>
+            <a:pPr marL="0" indent="0">
+              <a:buNone/>
+            </a:pPr>
+            <a:endParaRPr lang="de-DE" sz="2400" dirty="0"/>
+          </a:p>
+          <a:p>
+            <a:pPr marL="0" indent="0">
+              <a:buNone/>
+            </a:pPr>
+            <a:r>
+              <a:rPr lang="de-DE" sz="2400" b="1" dirty="0">
+                <a:hlinkClick r:id="rId2"/>
+              </a:rPr>
+              <a:t>RoBERTa</a:t>
+            </a:r>
+            <a:r>
+              <a:rPr lang="de-DE" sz="2400" b="1" dirty="0"/>
+              <a:t>: </a:t>
+            </a:r>
+            <a:r>
+              <a:rPr lang="de-DE" sz="2400" dirty="0" err="1"/>
+              <a:t>even</a:t>
+            </a:r>
+            <a:r>
+              <a:rPr lang="de-DE" sz="2400" dirty="0"/>
+              <a:t> </a:t>
+            </a:r>
+            <a:r>
+              <a:rPr lang="de-DE" sz="2400" dirty="0" err="1"/>
+              <a:t>better</a:t>
+            </a:r>
+            <a:r>
+              <a:rPr lang="de-DE" sz="2400" dirty="0"/>
+              <a:t> </a:t>
+            </a:r>
+            <a:r>
+              <a:rPr lang="de-DE" sz="2400" dirty="0" err="1"/>
+              <a:t>than</a:t>
+            </a:r>
+            <a:r>
+              <a:rPr lang="de-DE" sz="2400" dirty="0"/>
+              <a:t> BERT but still heavy</a:t>
+            </a:r>
+          </a:p>
+          <a:p>
+            <a:r>
+              <a:rPr lang="de-DE" sz="1800" dirty="0" err="1"/>
+              <a:t>removed</a:t>
+            </a:r>
+            <a:r>
+              <a:rPr lang="de-DE" sz="1800" dirty="0"/>
+              <a:t> </a:t>
+            </a:r>
+            <a:r>
+              <a:rPr lang="de-DE" sz="1800" dirty="0" err="1"/>
+              <a:t>next</a:t>
+            </a:r>
+            <a:r>
+              <a:rPr lang="de-DE" sz="1800" dirty="0"/>
+              <a:t> </a:t>
+            </a:r>
+            <a:r>
+              <a:rPr lang="de-DE" sz="1800" dirty="0" err="1"/>
+              <a:t>sentence</a:t>
+            </a:r>
+            <a:r>
+              <a:rPr lang="de-DE" sz="1800" dirty="0"/>
+              <a:t> </a:t>
+            </a:r>
+            <a:r>
+              <a:rPr lang="de-DE" sz="1800" dirty="0" err="1"/>
+              <a:t>prediction</a:t>
+            </a:r>
+            <a:r>
+              <a:rPr lang="de-DE" sz="1800" dirty="0"/>
+              <a:t> </a:t>
+            </a:r>
+            <a:r>
+              <a:rPr lang="de-DE" sz="1800" dirty="0" err="1"/>
+              <a:t>as</a:t>
+            </a:r>
+            <a:r>
+              <a:rPr lang="de-DE" sz="1800" dirty="0"/>
+              <a:t> </a:t>
+            </a:r>
+            <a:r>
+              <a:rPr lang="de-DE" sz="1800" dirty="0" err="1"/>
+              <a:t>pretraining</a:t>
+            </a:r>
+            <a:r>
+              <a:rPr lang="de-DE" sz="1800" dirty="0"/>
+              <a:t> </a:t>
+            </a:r>
+            <a:r>
+              <a:rPr lang="de-DE" sz="1800" dirty="0" err="1"/>
+              <a:t>objective</a:t>
+            </a:r>
+            <a:endParaRPr lang="de-DE" sz="1800" dirty="0"/>
+          </a:p>
+          <a:p>
+            <a:r>
+              <a:rPr lang="de-DE" sz="1800" dirty="0"/>
+              <a:t>~</a:t>
+            </a:r>
+            <a:r>
+              <a:rPr lang="de-DE" sz="1800" dirty="0" err="1"/>
+              <a:t>ten</a:t>
+            </a:r>
+            <a:r>
+              <a:rPr lang="de-DE" sz="1800" dirty="0"/>
+              <a:t> </a:t>
+            </a:r>
+            <a:r>
+              <a:rPr lang="de-DE" sz="1800" dirty="0" err="1"/>
+              <a:t>times</a:t>
+            </a:r>
+            <a:r>
+              <a:rPr lang="de-DE" sz="1800" dirty="0"/>
+              <a:t> </a:t>
+            </a:r>
+            <a:r>
+              <a:rPr lang="de-DE" sz="1800" dirty="0" err="1"/>
+              <a:t>more</a:t>
+            </a:r>
+            <a:r>
+              <a:rPr lang="de-DE" sz="1800" dirty="0"/>
+              <a:t> </a:t>
+            </a:r>
+            <a:r>
+              <a:rPr lang="de-DE" sz="1800" dirty="0" err="1"/>
+              <a:t>training</a:t>
+            </a:r>
+            <a:r>
+              <a:rPr lang="de-DE" sz="1800" dirty="0"/>
+              <a:t> </a:t>
+            </a:r>
+            <a:r>
+              <a:rPr lang="de-DE" sz="1800" dirty="0" err="1"/>
+              <a:t>data</a:t>
+            </a:r>
+            <a:r>
+              <a:rPr lang="de-DE" sz="1800" dirty="0"/>
+              <a:t>, </a:t>
+            </a:r>
+            <a:r>
+              <a:rPr lang="de-DE" sz="1800" dirty="0" err="1"/>
+              <a:t>longer</a:t>
+            </a:r>
+            <a:r>
+              <a:rPr lang="de-DE" sz="1800" dirty="0"/>
+              <a:t> </a:t>
+            </a:r>
+            <a:r>
+              <a:rPr lang="de-DE" sz="1800" dirty="0" err="1"/>
+              <a:t>training</a:t>
+            </a:r>
+            <a:r>
+              <a:rPr lang="de-DE" sz="1800" dirty="0"/>
+              <a:t>, larger </a:t>
+            </a:r>
+            <a:r>
+              <a:rPr lang="de-DE" sz="1800" dirty="0" err="1"/>
+              <a:t>batches</a:t>
+            </a:r>
+            <a:r>
+              <a:rPr lang="de-DE" sz="1800" dirty="0"/>
+              <a:t>, </a:t>
+            </a:r>
+            <a:r>
+              <a:rPr lang="de-DE" sz="1800" dirty="0" err="1"/>
+              <a:t>longer</a:t>
+            </a:r>
+            <a:r>
+              <a:rPr lang="de-DE" sz="1800" dirty="0"/>
+              <a:t> </a:t>
+            </a:r>
+            <a:r>
+              <a:rPr lang="de-DE" sz="1800" dirty="0" err="1"/>
+              <a:t>sequences</a:t>
+            </a:r>
+            <a:endParaRPr lang="de-DE" sz="1800" dirty="0"/>
+          </a:p>
+          <a:p>
+            <a:r>
+              <a:rPr lang="de-DE" sz="1800" dirty="0" err="1"/>
+              <a:t>dynamic</a:t>
+            </a:r>
+            <a:r>
+              <a:rPr lang="de-DE" sz="1800" dirty="0"/>
+              <a:t> </a:t>
+            </a:r>
+            <a:r>
+              <a:rPr lang="de-DE" sz="1800" dirty="0" err="1"/>
+              <a:t>masking</a:t>
+            </a:r>
+            <a:r>
+              <a:rPr lang="de-DE" sz="1800" dirty="0"/>
+              <a:t>: </a:t>
+            </a:r>
+            <a:r>
+              <a:rPr lang="de-DE" sz="1800" dirty="0" err="1"/>
+              <a:t>instead</a:t>
+            </a:r>
+            <a:r>
+              <a:rPr lang="de-DE" sz="1800" dirty="0"/>
+              <a:t> </a:t>
+            </a:r>
+            <a:r>
+              <a:rPr lang="de-DE" sz="1800" dirty="0" err="1"/>
+              <a:t>of</a:t>
+            </a:r>
+            <a:r>
+              <a:rPr lang="de-DE" sz="1800" dirty="0"/>
+              <a:t> </a:t>
+            </a:r>
+            <a:r>
+              <a:rPr lang="de-DE" sz="1800" dirty="0" err="1"/>
+              <a:t>fixed</a:t>
+            </a:r>
+            <a:r>
+              <a:rPr lang="de-DE" sz="1800" dirty="0"/>
+              <a:t> </a:t>
+            </a:r>
+            <a:r>
+              <a:rPr lang="de-DE" sz="1800" dirty="0" err="1"/>
+              <a:t>masked</a:t>
+            </a:r>
+            <a:r>
+              <a:rPr lang="de-DE" sz="1800" dirty="0"/>
+              <a:t> </a:t>
+            </a:r>
+            <a:r>
+              <a:rPr lang="de-DE" sz="1800" dirty="0" err="1"/>
+              <a:t>tokens</a:t>
+            </a:r>
+            <a:r>
+              <a:rPr lang="de-DE" sz="1800" dirty="0"/>
+              <a:t> </a:t>
+            </a:r>
+            <a:r>
+              <a:rPr lang="de-DE" sz="1800" dirty="0" err="1"/>
+              <a:t>for</a:t>
+            </a:r>
+            <a:r>
+              <a:rPr lang="de-DE" sz="1800" dirty="0"/>
+              <a:t> </a:t>
+            </a:r>
+            <a:r>
+              <a:rPr lang="de-DE" sz="1800" dirty="0" err="1"/>
+              <a:t>each</a:t>
+            </a:r>
+            <a:r>
+              <a:rPr lang="de-DE" sz="1800" dirty="0"/>
+              <a:t> </a:t>
+            </a:r>
+            <a:r>
+              <a:rPr lang="de-DE" sz="1800" dirty="0" err="1"/>
+              <a:t>sequence</a:t>
+            </a:r>
+            <a:r>
+              <a:rPr lang="de-DE" sz="1800" dirty="0"/>
+              <a:t>, </a:t>
+            </a:r>
+            <a:r>
+              <a:rPr lang="de-DE" sz="1800" dirty="0" err="1"/>
+              <a:t>masks</a:t>
+            </a:r>
+            <a:r>
+              <a:rPr lang="de-DE" sz="1800" dirty="0"/>
+              <a:t> </a:t>
+            </a:r>
+            <a:r>
+              <a:rPr lang="de-DE" sz="1800" dirty="0" err="1"/>
+              <a:t>change</a:t>
+            </a:r>
+            <a:r>
+              <a:rPr lang="de-DE" sz="1800" dirty="0"/>
+              <a:t> </a:t>
+            </a:r>
+            <a:r>
+              <a:rPr lang="de-DE" sz="1800" dirty="0" err="1"/>
+              <a:t>each</a:t>
+            </a:r>
+            <a:r>
+              <a:rPr lang="de-DE" sz="1800" dirty="0"/>
+              <a:t> </a:t>
+            </a:r>
+            <a:r>
+              <a:rPr lang="de-DE" sz="1800" dirty="0" err="1"/>
+              <a:t>epoch</a:t>
+            </a:r>
+            <a:endParaRPr lang="de-DE" sz="1800" dirty="0"/>
+          </a:p>
+          <a:p>
+            <a:pPr marL="0" indent="0">
+              <a:buNone/>
+            </a:pPr>
+            <a:endParaRPr lang="de-DE" sz="2400" dirty="0"/>
+          </a:p>
+          <a:p>
+            <a:pPr marL="0" indent="0">
+              <a:buNone/>
+            </a:pPr>
+            <a:r>
+              <a:rPr lang="de-DE" sz="2400" b="1" dirty="0" err="1">
+                <a:hlinkClick r:id="rId3"/>
+              </a:rPr>
               <a:t>DistilBERT</a:t>
             </a:r>
             <a:r>
-              <a:rPr lang="de-DE" dirty="0"/>
-              <a:t> …</a:t>
-            </a:r>
+              <a:rPr lang="de-DE" sz="2400" dirty="0"/>
+              <a:t>: </a:t>
+            </a:r>
+            <a:r>
+              <a:rPr lang="de-DE" sz="2400" dirty="0" err="1"/>
+              <a:t>much</a:t>
+            </a:r>
+            <a:r>
+              <a:rPr lang="de-DE" sz="2400" dirty="0"/>
+              <a:t> </a:t>
+            </a:r>
+            <a:r>
+              <a:rPr lang="de-DE" sz="2400" dirty="0" err="1"/>
+              <a:t>lighter</a:t>
+            </a:r>
+            <a:r>
+              <a:rPr lang="de-DE" sz="2400" dirty="0"/>
+              <a:t> and </a:t>
+            </a:r>
+            <a:r>
+              <a:rPr lang="de-DE" sz="2400" dirty="0" err="1"/>
+              <a:t>faster</a:t>
+            </a:r>
+            <a:r>
+              <a:rPr lang="de-DE" sz="2400" dirty="0"/>
+              <a:t>, </a:t>
+            </a:r>
+            <a:r>
+              <a:rPr lang="de-DE" sz="2400" dirty="0" err="1"/>
+              <a:t>retaining</a:t>
+            </a:r>
+            <a:r>
+              <a:rPr lang="de-DE" sz="2400" dirty="0"/>
+              <a:t> ~95% </a:t>
+            </a:r>
+            <a:r>
+              <a:rPr lang="de-DE" sz="2400" dirty="0" err="1"/>
+              <a:t>of</a:t>
+            </a:r>
+            <a:r>
+              <a:rPr lang="de-DE" sz="2400" dirty="0"/>
+              <a:t> </a:t>
+            </a:r>
+            <a:r>
+              <a:rPr lang="de-DE" sz="2400" dirty="0" err="1"/>
+              <a:t>BERT’s</a:t>
+            </a:r>
+            <a:r>
+              <a:rPr lang="de-DE" sz="2400" dirty="0"/>
+              <a:t> </a:t>
+            </a:r>
+            <a:r>
+              <a:rPr lang="de-DE" sz="2400" dirty="0" err="1"/>
+              <a:t>performance</a:t>
+            </a:r>
+            <a:endParaRPr lang="de-DE" sz="2400" dirty="0"/>
+          </a:p>
+          <a:p>
+            <a:r>
+              <a:rPr lang="de-DE" sz="1800" dirty="0"/>
+              <a:t>a </a:t>
+            </a:r>
+            <a:r>
+              <a:rPr lang="de-DE" sz="1800" dirty="0" err="1"/>
+              <a:t>smaller</a:t>
+            </a:r>
+            <a:r>
+              <a:rPr lang="de-DE" sz="1800" dirty="0"/>
+              <a:t> “</a:t>
+            </a:r>
+            <a:r>
+              <a:rPr lang="de-DE" sz="1800" dirty="0" err="1"/>
+              <a:t>student</a:t>
+            </a:r>
+            <a:r>
+              <a:rPr lang="de-DE" sz="1800" dirty="0"/>
+              <a:t>” </a:t>
+            </a:r>
+            <a:r>
+              <a:rPr lang="de-DE" sz="1800" dirty="0" err="1"/>
+              <a:t>model</a:t>
+            </a:r>
+            <a:r>
+              <a:rPr lang="de-DE" sz="1800" dirty="0"/>
+              <a:t> </a:t>
+            </a:r>
+            <a:r>
+              <a:rPr lang="de-DE" sz="1800" dirty="0" err="1"/>
+              <a:t>is</a:t>
+            </a:r>
+            <a:r>
+              <a:rPr lang="de-DE" sz="1800" dirty="0"/>
+              <a:t> </a:t>
+            </a:r>
+            <a:r>
+              <a:rPr lang="de-DE" sz="1800" dirty="0" err="1"/>
+              <a:t>trained</a:t>
+            </a:r>
+            <a:r>
+              <a:rPr lang="de-DE" sz="1800" dirty="0"/>
+              <a:t> </a:t>
+            </a:r>
+            <a:r>
+              <a:rPr lang="de-DE" sz="1800" dirty="0" err="1"/>
+              <a:t>to</a:t>
+            </a:r>
+            <a:r>
+              <a:rPr lang="de-DE" sz="1800" dirty="0"/>
+              <a:t> </a:t>
+            </a:r>
+            <a:r>
+              <a:rPr lang="de-DE" sz="1800" dirty="0" err="1"/>
+              <a:t>mimic</a:t>
+            </a:r>
+            <a:r>
+              <a:rPr lang="de-DE" sz="1800" dirty="0"/>
+              <a:t> </a:t>
+            </a:r>
+            <a:r>
+              <a:rPr lang="de-DE" sz="1800" dirty="0" err="1"/>
+              <a:t>BERT’s</a:t>
+            </a:r>
+            <a:r>
+              <a:rPr lang="de-DE" sz="1800" dirty="0"/>
+              <a:t> </a:t>
+            </a:r>
+            <a:r>
+              <a:rPr lang="de-DE" sz="1800" dirty="0" err="1"/>
+              <a:t>predictions</a:t>
+            </a:r>
+            <a:endParaRPr lang="de-DE" sz="1800" dirty="0"/>
+          </a:p>
+          <a:p>
+            <a:r>
+              <a:rPr lang="de-DE" sz="1800" dirty="0"/>
+              <a:t>40% </a:t>
+            </a:r>
+            <a:r>
+              <a:rPr lang="de-DE" sz="1800" dirty="0" err="1"/>
+              <a:t>fewer</a:t>
+            </a:r>
+            <a:r>
+              <a:rPr lang="de-DE" sz="1800" dirty="0"/>
+              <a:t> </a:t>
+            </a:r>
+            <a:r>
+              <a:rPr lang="de-DE" sz="1800" dirty="0" err="1"/>
+              <a:t>parameters</a:t>
+            </a:r>
+            <a:r>
+              <a:rPr lang="de-DE" sz="1800" dirty="0"/>
+              <a:t> </a:t>
+            </a:r>
+            <a:r>
+              <a:rPr lang="de-DE" sz="1800" dirty="0" err="1"/>
+              <a:t>than</a:t>
+            </a:r>
+            <a:r>
+              <a:rPr lang="de-DE" sz="1800" dirty="0"/>
+              <a:t> BERT, 60% </a:t>
+            </a:r>
+            <a:r>
+              <a:rPr lang="de-DE" sz="1800" dirty="0" err="1"/>
+              <a:t>faster</a:t>
+            </a:r>
+            <a:r>
+              <a:rPr lang="de-DE" sz="1800" dirty="0"/>
+              <a:t> </a:t>
+            </a:r>
+            <a:r>
+              <a:rPr lang="de-DE" sz="1800" dirty="0" err="1"/>
+              <a:t>inference</a:t>
+            </a:r>
+            <a:r>
+              <a:rPr lang="de-DE" sz="1800" dirty="0"/>
+              <a:t>, </a:t>
+            </a:r>
+            <a:r>
+              <a:rPr lang="de-DE" sz="1800" dirty="0" err="1"/>
+              <a:t>using</a:t>
+            </a:r>
+            <a:r>
+              <a:rPr lang="de-DE" sz="1800" dirty="0"/>
+              <a:t> half </a:t>
+            </a:r>
+            <a:r>
+              <a:rPr lang="de-DE" sz="1800" dirty="0" err="1"/>
+              <a:t>the</a:t>
+            </a:r>
+            <a:r>
+              <a:rPr lang="de-DE" sz="1800" dirty="0"/>
+              <a:t> </a:t>
+            </a:r>
+            <a:r>
+              <a:rPr lang="de-DE" sz="1800" dirty="0" err="1"/>
+              <a:t>memory</a:t>
+            </a:r>
+            <a:endParaRPr lang="de-DE" sz="1800" dirty="0"/>
+          </a:p>
+          <a:p>
+            <a:r>
+              <a:rPr lang="de-DE" sz="1800" dirty="0"/>
+              <a:t>also </a:t>
+            </a:r>
+            <a:r>
+              <a:rPr lang="de-DE" sz="1800" dirty="0" err="1"/>
+              <a:t>removed</a:t>
+            </a:r>
+            <a:r>
+              <a:rPr lang="de-DE" sz="1800" dirty="0"/>
+              <a:t> </a:t>
+            </a:r>
+            <a:r>
+              <a:rPr lang="de-DE" sz="1800" dirty="0" err="1"/>
+              <a:t>next</a:t>
+            </a:r>
+            <a:r>
+              <a:rPr lang="de-DE" sz="1800" dirty="0"/>
+              <a:t> </a:t>
+            </a:r>
+            <a:r>
+              <a:rPr lang="de-DE" sz="1800" dirty="0" err="1"/>
+              <a:t>sentence</a:t>
+            </a:r>
+            <a:r>
+              <a:rPr lang="de-DE" sz="1800" dirty="0"/>
+              <a:t> </a:t>
+            </a:r>
+            <a:r>
+              <a:rPr lang="de-DE" sz="1800" dirty="0" err="1"/>
+              <a:t>prediction</a:t>
+            </a:r>
+            <a:r>
+              <a:rPr lang="de-DE" sz="1800" dirty="0"/>
+              <a:t> </a:t>
+            </a:r>
+            <a:r>
+              <a:rPr lang="de-DE" sz="1800" dirty="0" err="1"/>
+              <a:t>as</a:t>
+            </a:r>
+            <a:r>
+              <a:rPr lang="de-DE" sz="1800" dirty="0"/>
+              <a:t> </a:t>
+            </a:r>
+            <a:r>
+              <a:rPr lang="de-DE" sz="1800" dirty="0" err="1"/>
+              <a:t>pretraining</a:t>
+            </a:r>
+            <a:r>
+              <a:rPr lang="de-DE" sz="1800" dirty="0"/>
+              <a:t> </a:t>
+            </a:r>
+            <a:r>
+              <a:rPr lang="de-DE" sz="1800" dirty="0" err="1"/>
+              <a:t>objective</a:t>
+            </a:r>
+            <a:endParaRPr lang="de-DE" sz="1800" dirty="0"/>
           </a:p>
         </p:txBody>
       </p:sp>

--- a/slides/3_LLMs.pptx
+++ b/slides/3_LLMs.pptx
@@ -11,21 +11,21 @@
     <p:sldId id="256" r:id="rId2"/>
     <p:sldId id="792" r:id="rId3"/>
     <p:sldId id="790" r:id="rId4"/>
-    <p:sldId id="696" r:id="rId5"/>
-    <p:sldId id="309" r:id="rId6"/>
-    <p:sldId id="802" r:id="rId7"/>
-    <p:sldId id="814" r:id="rId8"/>
-    <p:sldId id="813" r:id="rId9"/>
-    <p:sldId id="285" r:id="rId10"/>
-    <p:sldId id="803" r:id="rId11"/>
-    <p:sldId id="799" r:id="rId12"/>
-    <p:sldId id="807" r:id="rId13"/>
-    <p:sldId id="806" r:id="rId14"/>
-    <p:sldId id="810" r:id="rId15"/>
-    <p:sldId id="797" r:id="rId16"/>
-    <p:sldId id="809" r:id="rId17"/>
-    <p:sldId id="808" r:id="rId18"/>
-    <p:sldId id="804" r:id="rId19"/>
+    <p:sldId id="343" r:id="rId5"/>
+    <p:sldId id="814" r:id="rId6"/>
+    <p:sldId id="827" r:id="rId7"/>
+    <p:sldId id="285" r:id="rId8"/>
+    <p:sldId id="828" r:id="rId9"/>
+    <p:sldId id="803" r:id="rId10"/>
+    <p:sldId id="799" r:id="rId11"/>
+    <p:sldId id="807" r:id="rId12"/>
+    <p:sldId id="806" r:id="rId13"/>
+    <p:sldId id="810" r:id="rId14"/>
+    <p:sldId id="797" r:id="rId15"/>
+    <p:sldId id="809" r:id="rId16"/>
+    <p:sldId id="808" r:id="rId17"/>
+    <p:sldId id="804" r:id="rId18"/>
+    <p:sldId id="829" r:id="rId19"/>
     <p:sldId id="811" r:id="rId20"/>
   </p:sldIdLst>
   <p:sldSz cx="12192000" cy="6858000"/>
@@ -4456,42 +4456,6 @@
         </a:p>
       </dgm:t>
     </dgm:pt>
-    <dgm:pt modelId="{769F0AC1-E7CF-C944-B9AF-EA28932D2656}">
-      <dgm:prSet/>
-      <dgm:spPr/>
-      <dgm:t>
-        <a:bodyPr/>
-        <a:lstStyle/>
-        <a:p>
-          <a:r>
-            <a:rPr lang="en-US" b="0" dirty="0"/>
-            <a:t>Instruction Tuning</a:t>
-          </a:r>
-        </a:p>
-      </dgm:t>
-    </dgm:pt>
-    <dgm:pt modelId="{8FBFB482-1FAC-2647-9582-FBF2BE51B42C}" type="parTrans" cxnId="{B2C31AC5-CC8D-7848-BF48-4E93CF15F78C}">
-      <dgm:prSet/>
-      <dgm:spPr/>
-      <dgm:t>
-        <a:bodyPr/>
-        <a:lstStyle/>
-        <a:p>
-          <a:endParaRPr lang="de-DE"/>
-        </a:p>
-      </dgm:t>
-    </dgm:pt>
-    <dgm:pt modelId="{202C7746-1898-184B-8901-869D8C7ADB05}" type="sibTrans" cxnId="{B2C31AC5-CC8D-7848-BF48-4E93CF15F78C}">
-      <dgm:prSet/>
-      <dgm:spPr/>
-      <dgm:t>
-        <a:bodyPr/>
-        <a:lstStyle/>
-        <a:p>
-          <a:endParaRPr lang="de-DE"/>
-        </a:p>
-      </dgm:t>
-    </dgm:pt>
     <dgm:pt modelId="{A5BBF571-5253-6E40-82D7-7DFA55C403EE}">
       <dgm:prSet/>
       <dgm:spPr/>
@@ -4539,7 +4503,7 @@
       <dgm:spPr/>
     </dgm:pt>
     <dgm:pt modelId="{4F1690E2-16BD-2B42-AE98-F2A735104EFA}" type="pres">
-      <dgm:prSet presAssocID="{1EA944AD-327D-427D-A5F0-7AE39B4AFACB}" presName="thickLine" presStyleLbl="alignNode1" presStyleIdx="0" presStyleCnt="8"/>
+      <dgm:prSet presAssocID="{1EA944AD-327D-427D-A5F0-7AE39B4AFACB}" presName="thickLine" presStyleLbl="alignNode1" presStyleIdx="0" presStyleCnt="7"/>
       <dgm:spPr/>
     </dgm:pt>
     <dgm:pt modelId="{7B746AAE-0D31-DE44-A5F6-86F76B8A3E80}" type="pres">
@@ -4547,7 +4511,7 @@
       <dgm:spPr/>
     </dgm:pt>
     <dgm:pt modelId="{D28CB533-C51E-334E-9261-65C425A19706}" type="pres">
-      <dgm:prSet presAssocID="{1EA944AD-327D-427D-A5F0-7AE39B4AFACB}" presName="tx1" presStyleLbl="revTx" presStyleIdx="0" presStyleCnt="8"/>
+      <dgm:prSet presAssocID="{1EA944AD-327D-427D-A5F0-7AE39B4AFACB}" presName="tx1" presStyleLbl="revTx" presStyleIdx="0" presStyleCnt="7"/>
       <dgm:spPr/>
     </dgm:pt>
     <dgm:pt modelId="{4B5756DB-F77A-B44F-B3F7-F3894F36872A}" type="pres">
@@ -4555,7 +4519,7 @@
       <dgm:spPr/>
     </dgm:pt>
     <dgm:pt modelId="{A11F9CE2-7889-D042-B67A-3B946F072596}" type="pres">
-      <dgm:prSet presAssocID="{0C6B1536-6269-470E-891B-548B1A1741C8}" presName="thickLine" presStyleLbl="alignNode1" presStyleIdx="1" presStyleCnt="8"/>
+      <dgm:prSet presAssocID="{0C6B1536-6269-470E-891B-548B1A1741C8}" presName="thickLine" presStyleLbl="alignNode1" presStyleIdx="1" presStyleCnt="7"/>
       <dgm:spPr/>
     </dgm:pt>
     <dgm:pt modelId="{FDBEDC87-8791-4D44-8FD8-85B48AD39373}" type="pres">
@@ -4563,7 +4527,7 @@
       <dgm:spPr/>
     </dgm:pt>
     <dgm:pt modelId="{8D7BB36B-DCB0-1945-8136-BD40AAFC958C}" type="pres">
-      <dgm:prSet presAssocID="{0C6B1536-6269-470E-891B-548B1A1741C8}" presName="tx1" presStyleLbl="revTx" presStyleIdx="1" presStyleCnt="8"/>
+      <dgm:prSet presAssocID="{0C6B1536-6269-470E-891B-548B1A1741C8}" presName="tx1" presStyleLbl="revTx" presStyleIdx="1" presStyleCnt="7"/>
       <dgm:spPr/>
     </dgm:pt>
     <dgm:pt modelId="{DCBD3594-6E80-0B41-BD87-AFAFE90B7B0C}" type="pres">
@@ -4571,7 +4535,7 @@
       <dgm:spPr/>
     </dgm:pt>
     <dgm:pt modelId="{9D950D6B-5C89-8A48-9960-CA8B4C499A1A}" type="pres">
-      <dgm:prSet presAssocID="{A5BBF571-5253-6E40-82D7-7DFA55C403EE}" presName="thickLine" presStyleLbl="alignNode1" presStyleIdx="2" presStyleCnt="8"/>
+      <dgm:prSet presAssocID="{A5BBF571-5253-6E40-82D7-7DFA55C403EE}" presName="thickLine" presStyleLbl="alignNode1" presStyleIdx="2" presStyleCnt="7"/>
       <dgm:spPr/>
     </dgm:pt>
     <dgm:pt modelId="{743C7BE5-F107-5047-8108-35976C730BE6}" type="pres">
@@ -4579,7 +4543,7 @@
       <dgm:spPr/>
     </dgm:pt>
     <dgm:pt modelId="{1B96839A-94C6-3747-AECB-6AFE26E91254}" type="pres">
-      <dgm:prSet presAssocID="{A5BBF571-5253-6E40-82D7-7DFA55C403EE}" presName="tx1" presStyleLbl="revTx" presStyleIdx="2" presStyleCnt="8"/>
+      <dgm:prSet presAssocID="{A5BBF571-5253-6E40-82D7-7DFA55C403EE}" presName="tx1" presStyleLbl="revTx" presStyleIdx="2" presStyleCnt="7"/>
       <dgm:spPr/>
     </dgm:pt>
     <dgm:pt modelId="{437624BB-39AA-794C-B0F6-B2CF5CA2B5A0}" type="pres">
@@ -4587,7 +4551,7 @@
       <dgm:spPr/>
     </dgm:pt>
     <dgm:pt modelId="{34CF0AAF-5C3E-5349-AD9D-2034F634313C}" type="pres">
-      <dgm:prSet presAssocID="{5F8A9840-886B-1549-86FA-DFF28283C6F7}" presName="thickLine" presStyleLbl="alignNode1" presStyleIdx="3" presStyleCnt="8"/>
+      <dgm:prSet presAssocID="{5F8A9840-886B-1549-86FA-DFF28283C6F7}" presName="thickLine" presStyleLbl="alignNode1" presStyleIdx="3" presStyleCnt="7"/>
       <dgm:spPr/>
     </dgm:pt>
     <dgm:pt modelId="{2F409A89-4A7E-3D4A-93C7-15493EA49A4E}" type="pres">
@@ -4595,7 +4559,7 @@
       <dgm:spPr/>
     </dgm:pt>
     <dgm:pt modelId="{D2ABD2C0-EDD7-194E-81CA-D9A5311A1607}" type="pres">
-      <dgm:prSet presAssocID="{5F8A9840-886B-1549-86FA-DFF28283C6F7}" presName="tx1" presStyleLbl="revTx" presStyleIdx="3" presStyleCnt="8"/>
+      <dgm:prSet presAssocID="{5F8A9840-886B-1549-86FA-DFF28283C6F7}" presName="tx1" presStyleLbl="revTx" presStyleIdx="3" presStyleCnt="7"/>
       <dgm:spPr/>
     </dgm:pt>
     <dgm:pt modelId="{F666EF11-8510-CD40-BB10-489FF0DA3CFF}" type="pres">
@@ -4603,7 +4567,7 @@
       <dgm:spPr/>
     </dgm:pt>
     <dgm:pt modelId="{8A505F94-65E4-9D41-AC2C-CCE8BD4C175F}" type="pres">
-      <dgm:prSet presAssocID="{288D3E87-5781-4F83-84CB-1610EAD21773}" presName="thickLine" presStyleLbl="alignNode1" presStyleIdx="4" presStyleCnt="8"/>
+      <dgm:prSet presAssocID="{288D3E87-5781-4F83-84CB-1610EAD21773}" presName="thickLine" presStyleLbl="alignNode1" presStyleIdx="4" presStyleCnt="7"/>
       <dgm:spPr/>
     </dgm:pt>
     <dgm:pt modelId="{B678B193-63FE-3044-8C53-579A035591F8}" type="pres">
@@ -4611,31 +4575,15 @@
       <dgm:spPr/>
     </dgm:pt>
     <dgm:pt modelId="{6E572D5D-DE9A-BF49-8B86-50D4250D1411}" type="pres">
-      <dgm:prSet presAssocID="{288D3E87-5781-4F83-84CB-1610EAD21773}" presName="tx1" presStyleLbl="revTx" presStyleIdx="4" presStyleCnt="8"/>
+      <dgm:prSet presAssocID="{288D3E87-5781-4F83-84CB-1610EAD21773}" presName="tx1" presStyleLbl="revTx" presStyleIdx="4" presStyleCnt="7"/>
       <dgm:spPr/>
     </dgm:pt>
     <dgm:pt modelId="{7F071049-5D5A-2445-8B31-652B1063C281}" type="pres">
       <dgm:prSet presAssocID="{288D3E87-5781-4F83-84CB-1610EAD21773}" presName="vert1" presStyleCnt="0"/>
       <dgm:spPr/>
     </dgm:pt>
-    <dgm:pt modelId="{322460D7-6763-F646-87E9-10A1FE9FDC20}" type="pres">
-      <dgm:prSet presAssocID="{769F0AC1-E7CF-C944-B9AF-EA28932D2656}" presName="thickLine" presStyleLbl="alignNode1" presStyleIdx="5" presStyleCnt="8"/>
-      <dgm:spPr/>
-    </dgm:pt>
-    <dgm:pt modelId="{2E474F08-D54F-E14D-9A99-2C037C893DD5}" type="pres">
-      <dgm:prSet presAssocID="{769F0AC1-E7CF-C944-B9AF-EA28932D2656}" presName="horz1" presStyleCnt="0"/>
-      <dgm:spPr/>
-    </dgm:pt>
-    <dgm:pt modelId="{9B5DA0EB-3C02-EE40-A02E-5B28D39BEF31}" type="pres">
-      <dgm:prSet presAssocID="{769F0AC1-E7CF-C944-B9AF-EA28932D2656}" presName="tx1" presStyleLbl="revTx" presStyleIdx="5" presStyleCnt="8"/>
-      <dgm:spPr/>
-    </dgm:pt>
-    <dgm:pt modelId="{062608B4-F5A4-C943-8091-EEFBA40E325A}" type="pres">
-      <dgm:prSet presAssocID="{769F0AC1-E7CF-C944-B9AF-EA28932D2656}" presName="vert1" presStyleCnt="0"/>
-      <dgm:spPr/>
-    </dgm:pt>
     <dgm:pt modelId="{3D5DC94A-13EE-9348-AB63-BA6D7AB77EF3}" type="pres">
-      <dgm:prSet presAssocID="{DDA901FD-5C05-41F1-A824-5C833C35698E}" presName="thickLine" presStyleLbl="alignNode1" presStyleIdx="6" presStyleCnt="8"/>
+      <dgm:prSet presAssocID="{DDA901FD-5C05-41F1-A824-5C833C35698E}" presName="thickLine" presStyleLbl="alignNode1" presStyleIdx="5" presStyleCnt="7"/>
       <dgm:spPr/>
     </dgm:pt>
     <dgm:pt modelId="{27EB4548-6597-7A48-B8EB-8D5D075E0879}" type="pres">
@@ -4643,7 +4591,7 @@
       <dgm:spPr/>
     </dgm:pt>
     <dgm:pt modelId="{B71E94BA-938F-EC4F-AA59-749EE236EA14}" type="pres">
-      <dgm:prSet presAssocID="{DDA901FD-5C05-41F1-A824-5C833C35698E}" presName="tx1" presStyleLbl="revTx" presStyleIdx="6" presStyleCnt="8"/>
+      <dgm:prSet presAssocID="{DDA901FD-5C05-41F1-A824-5C833C35698E}" presName="tx1" presStyleLbl="revTx" presStyleIdx="5" presStyleCnt="7"/>
       <dgm:spPr/>
     </dgm:pt>
     <dgm:pt modelId="{AB286E63-B7A7-4244-8719-A27E1E499373}" type="pres">
@@ -4651,7 +4599,7 @@
       <dgm:spPr/>
     </dgm:pt>
     <dgm:pt modelId="{20D72B1E-AD82-9E49-86D8-09A4DD4D6212}" type="pres">
-      <dgm:prSet presAssocID="{5F30F6BE-7A6E-4F0D-B3AA-2B05FD8FA60B}" presName="thickLine" presStyleLbl="alignNode1" presStyleIdx="7" presStyleCnt="8"/>
+      <dgm:prSet presAssocID="{5F30F6BE-7A6E-4F0D-B3AA-2B05FD8FA60B}" presName="thickLine" presStyleLbl="alignNode1" presStyleIdx="6" presStyleCnt="7"/>
       <dgm:spPr/>
     </dgm:pt>
     <dgm:pt modelId="{FE30EA44-022B-FF41-BE9E-EF735E26A50E}" type="pres">
@@ -4659,7 +4607,7 @@
       <dgm:spPr/>
     </dgm:pt>
     <dgm:pt modelId="{08701614-A5A0-9544-95A3-640A46D860BF}" type="pres">
-      <dgm:prSet presAssocID="{5F30F6BE-7A6E-4F0D-B3AA-2B05FD8FA60B}" presName="tx1" presStyleLbl="revTx" presStyleIdx="7" presStyleCnt="8"/>
+      <dgm:prSet presAssocID="{5F30F6BE-7A6E-4F0D-B3AA-2B05FD8FA60B}" presName="tx1" presStyleLbl="revTx" presStyleIdx="6" presStyleCnt="7"/>
       <dgm:spPr/>
     </dgm:pt>
     <dgm:pt modelId="{5BC0372B-66B7-0640-8199-37B331256C9A}" type="pres">
@@ -4671,7 +4619,7 @@
     <dgm:cxn modelId="{48E2F92B-7174-CF40-BB56-062756623EA4}" type="presOf" srcId="{288D3E87-5781-4F83-84CB-1610EAD21773}" destId="{6E572D5D-DE9A-BF49-8B86-50D4250D1411}" srcOrd="0" destOrd="0" presId="urn:microsoft.com/office/officeart/2008/layout/LinedList"/>
     <dgm:cxn modelId="{7F381230-3114-44FB-913E-0CD35BF36BA2}" srcId="{56648FB5-C09B-4C87-AEF3-A553C798BCF5}" destId="{0C6B1536-6269-470E-891B-548B1A1741C8}" srcOrd="1" destOrd="0" parTransId="{BA3188B2-0301-4CA0-AC58-59A0732D4CC9}" sibTransId="{E7BF0292-5C5E-44B5-9020-5B605116E8F8}"/>
     <dgm:cxn modelId="{47933137-DA02-BE4A-92B7-574CA30C7525}" srcId="{56648FB5-C09B-4C87-AEF3-A553C798BCF5}" destId="{A5BBF571-5253-6E40-82D7-7DFA55C403EE}" srcOrd="2" destOrd="0" parTransId="{3F510184-3A7A-F04A-AB3A-A6DA046D9501}" sibTransId="{EBB0758C-E85A-AE4B-A658-5E0A4625321C}"/>
-    <dgm:cxn modelId="{76557D45-55A9-46E4-80D0-E1396A52CE52}" srcId="{56648FB5-C09B-4C87-AEF3-A553C798BCF5}" destId="{DDA901FD-5C05-41F1-A824-5C833C35698E}" srcOrd="6" destOrd="0" parTransId="{D760294E-1D9B-408E-B689-8391D4CF7D9C}" sibTransId="{EDCB14DE-D3C3-4E5C-A331-71113C0250BD}"/>
+    <dgm:cxn modelId="{76557D45-55A9-46E4-80D0-E1396A52CE52}" srcId="{56648FB5-C09B-4C87-AEF3-A553C798BCF5}" destId="{DDA901FD-5C05-41F1-A824-5C833C35698E}" srcOrd="5" destOrd="0" parTransId="{D760294E-1D9B-408E-B689-8391D4CF7D9C}" sibTransId="{EDCB14DE-D3C3-4E5C-A331-71113C0250BD}"/>
     <dgm:cxn modelId="{DC6A2B55-9959-9E41-8C4C-FB8FF415BF70}" type="presOf" srcId="{A5BBF571-5253-6E40-82D7-7DFA55C403EE}" destId="{1B96839A-94C6-3747-AECB-6AFE26E91254}" srcOrd="0" destOrd="0" presId="urn:microsoft.com/office/officeart/2008/layout/LinedList"/>
     <dgm:cxn modelId="{5328FF68-AF12-2640-82DD-4A8558848644}" type="presOf" srcId="{5F8A9840-886B-1549-86FA-DFF28283C6F7}" destId="{D2ABD2C0-EDD7-194E-81CA-D9A5311A1607}" srcOrd="0" destOrd="0" presId="urn:microsoft.com/office/officeart/2008/layout/LinedList"/>
     <dgm:cxn modelId="{B8B43377-1557-2042-BB5A-D55D04913284}" type="presOf" srcId="{0C6B1536-6269-470E-891B-548B1A1741C8}" destId="{8D7BB36B-DCB0-1945-8136-BD40AAFC958C}" srcOrd="0" destOrd="0" presId="urn:microsoft.com/office/officeart/2008/layout/LinedList"/>
@@ -4679,10 +4627,8 @@
     <dgm:cxn modelId="{D9602A80-E4B9-A44F-8F18-41878FC23717}" type="presOf" srcId="{1EA944AD-327D-427D-A5F0-7AE39B4AFACB}" destId="{D28CB533-C51E-334E-9261-65C425A19706}" srcOrd="0" destOrd="0" presId="urn:microsoft.com/office/officeart/2008/layout/LinedList"/>
     <dgm:cxn modelId="{4B05A8AF-8E44-411A-9840-24940C52F31E}" srcId="{56648FB5-C09B-4C87-AEF3-A553C798BCF5}" destId="{288D3E87-5781-4F83-84CB-1610EAD21773}" srcOrd="4" destOrd="0" parTransId="{5D1CA44E-A2B8-416C-AF5D-FE642F689AF8}" sibTransId="{E930F8F9-CD27-4F21-8645-528352089D37}"/>
     <dgm:cxn modelId="{946460B5-6A24-4AD5-9BDB-D5E7AE78994B}" srcId="{56648FB5-C09B-4C87-AEF3-A553C798BCF5}" destId="{1EA944AD-327D-427D-A5F0-7AE39B4AFACB}" srcOrd="0" destOrd="0" parTransId="{C379FD06-505A-41F8-9A66-4E9F695F9C1A}" sibTransId="{AD9B37F6-7A60-4E62-AE70-54601B347097}"/>
-    <dgm:cxn modelId="{5E824FB9-2CC4-6F45-B749-FE401FFAEECB}" type="presOf" srcId="{769F0AC1-E7CF-C944-B9AF-EA28932D2656}" destId="{9B5DA0EB-3C02-EE40-A02E-5B28D39BEF31}" srcOrd="0" destOrd="0" presId="urn:microsoft.com/office/officeart/2008/layout/LinedList"/>
-    <dgm:cxn modelId="{B2C31AC5-CC8D-7848-BF48-4E93CF15F78C}" srcId="{56648FB5-C09B-4C87-AEF3-A553C798BCF5}" destId="{769F0AC1-E7CF-C944-B9AF-EA28932D2656}" srcOrd="5" destOrd="0" parTransId="{8FBFB482-1FAC-2647-9582-FBF2BE51B42C}" sibTransId="{202C7746-1898-184B-8901-869D8C7ADB05}"/>
     <dgm:cxn modelId="{AA560ECB-5494-694A-8753-2D77B2337369}" type="presOf" srcId="{DDA901FD-5C05-41F1-A824-5C833C35698E}" destId="{B71E94BA-938F-EC4F-AA59-749EE236EA14}" srcOrd="0" destOrd="0" presId="urn:microsoft.com/office/officeart/2008/layout/LinedList"/>
-    <dgm:cxn modelId="{336AE3DC-37F1-4955-813F-D94B74C0A559}" srcId="{56648FB5-C09B-4C87-AEF3-A553C798BCF5}" destId="{5F30F6BE-7A6E-4F0D-B3AA-2B05FD8FA60B}" srcOrd="7" destOrd="0" parTransId="{204DD833-1CD5-42F1-B596-8D8B6D369E5E}" sibTransId="{838162BB-5917-468F-85CC-DC0FE427929A}"/>
+    <dgm:cxn modelId="{336AE3DC-37F1-4955-813F-D94B74C0A559}" srcId="{56648FB5-C09B-4C87-AEF3-A553C798BCF5}" destId="{5F30F6BE-7A6E-4F0D-B3AA-2B05FD8FA60B}" srcOrd="6" destOrd="0" parTransId="{204DD833-1CD5-42F1-B596-8D8B6D369E5E}" sibTransId="{838162BB-5917-468F-85CC-DC0FE427929A}"/>
     <dgm:cxn modelId="{9C4437E1-A996-CF40-B2F7-2FD90BC18B8E}" srcId="{56648FB5-C09B-4C87-AEF3-A553C798BCF5}" destId="{5F8A9840-886B-1549-86FA-DFF28283C6F7}" srcOrd="3" destOrd="0" parTransId="{A0E52CAA-BC0A-2241-8286-5195FC90ACDB}" sibTransId="{1EDED046-CF50-0248-AC64-C3620E7361E1}"/>
     <dgm:cxn modelId="{83FBB8F5-9153-F24C-B359-92AB22A3F5BF}" type="presOf" srcId="{56648FB5-C09B-4C87-AEF3-A553C798BCF5}" destId="{7852B3C2-A44C-F446-9060-CA21A0D28991}" srcOrd="0" destOrd="0" presId="urn:microsoft.com/office/officeart/2008/layout/LinedList"/>
     <dgm:cxn modelId="{F5D2E861-C6DE-FB42-B7C6-B065F1F84377}" type="presParOf" srcId="{7852B3C2-A44C-F446-9060-CA21A0D28991}" destId="{4F1690E2-16BD-2B42-AE98-F2A735104EFA}" srcOrd="0" destOrd="0" presId="urn:microsoft.com/office/officeart/2008/layout/LinedList"/>
@@ -4705,16 +4651,12 @@
     <dgm:cxn modelId="{0B980FB1-5585-2342-BD3C-2366897F0984}" type="presParOf" srcId="{7852B3C2-A44C-F446-9060-CA21A0D28991}" destId="{B678B193-63FE-3044-8C53-579A035591F8}" srcOrd="9" destOrd="0" presId="urn:microsoft.com/office/officeart/2008/layout/LinedList"/>
     <dgm:cxn modelId="{240D9A74-D193-CC40-97CA-ADC859B1D81F}" type="presParOf" srcId="{B678B193-63FE-3044-8C53-579A035591F8}" destId="{6E572D5D-DE9A-BF49-8B86-50D4250D1411}" srcOrd="0" destOrd="0" presId="urn:microsoft.com/office/officeart/2008/layout/LinedList"/>
     <dgm:cxn modelId="{3B1F9830-A4D6-E140-AE33-31C05CB5B37E}" type="presParOf" srcId="{B678B193-63FE-3044-8C53-579A035591F8}" destId="{7F071049-5D5A-2445-8B31-652B1063C281}" srcOrd="1" destOrd="0" presId="urn:microsoft.com/office/officeart/2008/layout/LinedList"/>
-    <dgm:cxn modelId="{9A7F5AD0-DD95-3843-95C2-CCB3573D0F7B}" type="presParOf" srcId="{7852B3C2-A44C-F446-9060-CA21A0D28991}" destId="{322460D7-6763-F646-87E9-10A1FE9FDC20}" srcOrd="10" destOrd="0" presId="urn:microsoft.com/office/officeart/2008/layout/LinedList"/>
-    <dgm:cxn modelId="{0F8C97D4-B05E-6947-AB11-E0CE7BA1FBBB}" type="presParOf" srcId="{7852B3C2-A44C-F446-9060-CA21A0D28991}" destId="{2E474F08-D54F-E14D-9A99-2C037C893DD5}" srcOrd="11" destOrd="0" presId="urn:microsoft.com/office/officeart/2008/layout/LinedList"/>
-    <dgm:cxn modelId="{24B86091-C966-5641-9975-3A18E8CC2451}" type="presParOf" srcId="{2E474F08-D54F-E14D-9A99-2C037C893DD5}" destId="{9B5DA0EB-3C02-EE40-A02E-5B28D39BEF31}" srcOrd="0" destOrd="0" presId="urn:microsoft.com/office/officeart/2008/layout/LinedList"/>
-    <dgm:cxn modelId="{C6076B37-8BDA-7348-B420-D00A46E8547E}" type="presParOf" srcId="{2E474F08-D54F-E14D-9A99-2C037C893DD5}" destId="{062608B4-F5A4-C943-8091-EEFBA40E325A}" srcOrd="1" destOrd="0" presId="urn:microsoft.com/office/officeart/2008/layout/LinedList"/>
-    <dgm:cxn modelId="{7A9EE529-C307-D440-8910-336F08C35B83}" type="presParOf" srcId="{7852B3C2-A44C-F446-9060-CA21A0D28991}" destId="{3D5DC94A-13EE-9348-AB63-BA6D7AB77EF3}" srcOrd="12" destOrd="0" presId="urn:microsoft.com/office/officeart/2008/layout/LinedList"/>
-    <dgm:cxn modelId="{B6134942-BB7E-6A49-B625-7DF71CC12E8A}" type="presParOf" srcId="{7852B3C2-A44C-F446-9060-CA21A0D28991}" destId="{27EB4548-6597-7A48-B8EB-8D5D075E0879}" srcOrd="13" destOrd="0" presId="urn:microsoft.com/office/officeart/2008/layout/LinedList"/>
+    <dgm:cxn modelId="{7A9EE529-C307-D440-8910-336F08C35B83}" type="presParOf" srcId="{7852B3C2-A44C-F446-9060-CA21A0D28991}" destId="{3D5DC94A-13EE-9348-AB63-BA6D7AB77EF3}" srcOrd="10" destOrd="0" presId="urn:microsoft.com/office/officeart/2008/layout/LinedList"/>
+    <dgm:cxn modelId="{B6134942-BB7E-6A49-B625-7DF71CC12E8A}" type="presParOf" srcId="{7852B3C2-A44C-F446-9060-CA21A0D28991}" destId="{27EB4548-6597-7A48-B8EB-8D5D075E0879}" srcOrd="11" destOrd="0" presId="urn:microsoft.com/office/officeart/2008/layout/LinedList"/>
     <dgm:cxn modelId="{305C651D-0D92-1E46-AC15-0FFBF9C77550}" type="presParOf" srcId="{27EB4548-6597-7A48-B8EB-8D5D075E0879}" destId="{B71E94BA-938F-EC4F-AA59-749EE236EA14}" srcOrd="0" destOrd="0" presId="urn:microsoft.com/office/officeart/2008/layout/LinedList"/>
     <dgm:cxn modelId="{6A8C2A6C-DA48-E74E-9F29-7B72A279E967}" type="presParOf" srcId="{27EB4548-6597-7A48-B8EB-8D5D075E0879}" destId="{AB286E63-B7A7-4244-8719-A27E1E499373}" srcOrd="1" destOrd="0" presId="urn:microsoft.com/office/officeart/2008/layout/LinedList"/>
-    <dgm:cxn modelId="{D4FDD938-A0E5-1344-91E8-DB626E229B73}" type="presParOf" srcId="{7852B3C2-A44C-F446-9060-CA21A0D28991}" destId="{20D72B1E-AD82-9E49-86D8-09A4DD4D6212}" srcOrd="14" destOrd="0" presId="urn:microsoft.com/office/officeart/2008/layout/LinedList"/>
-    <dgm:cxn modelId="{3CB3EB14-3FB4-7040-B2C6-572E38DFBAF8}" type="presParOf" srcId="{7852B3C2-A44C-F446-9060-CA21A0D28991}" destId="{FE30EA44-022B-FF41-BE9E-EF735E26A50E}" srcOrd="15" destOrd="0" presId="urn:microsoft.com/office/officeart/2008/layout/LinedList"/>
+    <dgm:cxn modelId="{D4FDD938-A0E5-1344-91E8-DB626E229B73}" type="presParOf" srcId="{7852B3C2-A44C-F446-9060-CA21A0D28991}" destId="{20D72B1E-AD82-9E49-86D8-09A4DD4D6212}" srcOrd="12" destOrd="0" presId="urn:microsoft.com/office/officeart/2008/layout/LinedList"/>
+    <dgm:cxn modelId="{3CB3EB14-3FB4-7040-B2C6-572E38DFBAF8}" type="presParOf" srcId="{7852B3C2-A44C-F446-9060-CA21A0D28991}" destId="{FE30EA44-022B-FF41-BE9E-EF735E26A50E}" srcOrd="13" destOrd="0" presId="urn:microsoft.com/office/officeart/2008/layout/LinedList"/>
     <dgm:cxn modelId="{0ECA1AF6-D499-C74C-B742-8D288CCF75FA}" type="presParOf" srcId="{FE30EA44-022B-FF41-BE9E-EF735E26A50E}" destId="{08701614-A5A0-9544-95A3-640A46D860BF}" srcOrd="0" destOrd="0" presId="urn:microsoft.com/office/officeart/2008/layout/LinedList"/>
     <dgm:cxn modelId="{AD84564D-97AD-C847-ACA7-6607F1C92514}" type="presParOf" srcId="{FE30EA44-022B-FF41-BE9E-EF735E26A50E}" destId="{5BC0372B-66B7-0640-8199-37B331256C9A}" srcOrd="1" destOrd="0" presId="urn:microsoft.com/office/officeart/2008/layout/LinedList"/>
   </dgm:cxnLst>
@@ -4743,7 +4685,7 @@
       </dsp:nvSpPr>
       <dsp:spPr>
         <a:xfrm>
-          <a:off x="0" y="0"/>
+          <a:off x="0" y="531"/>
           <a:ext cx="10515600" cy="0"/>
         </a:xfrm>
         <a:prstGeom prst="line">
@@ -4793,8 +4735,8 @@
       </dsp:nvSpPr>
       <dsp:spPr>
         <a:xfrm>
-          <a:off x="0" y="0"/>
-          <a:ext cx="10515600" cy="543917"/>
+          <a:off x="0" y="531"/>
+          <a:ext cx="10515600" cy="621467"/>
         </a:xfrm>
         <a:prstGeom prst="rect">
           <a:avLst/>
@@ -4818,12 +4760,12 @@
         <a:fontRef idx="minor"/>
       </dsp:style>
       <dsp:txBody>
-        <a:bodyPr spcFirstLastPara="0" vert="horz" wrap="square" lIns="95250" tIns="95250" rIns="95250" bIns="95250" numCol="1" spcCol="1270" anchor="t" anchorCtr="0">
+        <a:bodyPr spcFirstLastPara="0" vert="horz" wrap="square" lIns="106680" tIns="106680" rIns="106680" bIns="106680" numCol="1" spcCol="1270" anchor="t" anchorCtr="0">
           <a:noAutofit/>
         </a:bodyPr>
         <a:lstStyle/>
         <a:p>
-          <a:pPr marL="0" lvl="0" indent="0" algn="l" defTabSz="1111250">
+          <a:pPr marL="0" lvl="0" indent="0" algn="l" defTabSz="1244600">
             <a:lnSpc>
               <a:spcPct val="90000"/>
             </a:lnSpc>
@@ -4836,15 +4778,15 @@
             <a:buNone/>
           </a:pPr>
           <a:r>
-            <a:rPr lang="de-DE" sz="2500" b="0" kern="1200" dirty="0"/>
+            <a:rPr lang="de-DE" sz="2800" b="0" kern="1200" dirty="0"/>
             <a:t>Deep Learning</a:t>
           </a:r>
-          <a:endParaRPr lang="en-US" sz="2500" b="0" kern="1200" dirty="0"/>
+          <a:endParaRPr lang="en-US" sz="2800" b="0" kern="1200" dirty="0"/>
         </a:p>
       </dsp:txBody>
       <dsp:txXfrm>
-        <a:off x="0" y="0"/>
-        <a:ext cx="10515600" cy="543917"/>
+        <a:off x="0" y="531"/>
+        <a:ext cx="10515600" cy="621467"/>
       </dsp:txXfrm>
     </dsp:sp>
     <dsp:sp modelId="{A11F9CE2-7889-D042-B67A-3B946F072596}">
@@ -4854,7 +4796,7 @@
       </dsp:nvSpPr>
       <dsp:spPr>
         <a:xfrm>
-          <a:off x="0" y="543917"/>
+          <a:off x="0" y="621999"/>
           <a:ext cx="10515600" cy="0"/>
         </a:xfrm>
         <a:prstGeom prst="line">
@@ -4904,8 +4846,8 @@
       </dsp:nvSpPr>
       <dsp:spPr>
         <a:xfrm>
-          <a:off x="0" y="543917"/>
-          <a:ext cx="10515600" cy="543917"/>
+          <a:off x="0" y="621999"/>
+          <a:ext cx="10515600" cy="621467"/>
         </a:xfrm>
         <a:prstGeom prst="rect">
           <a:avLst/>
@@ -4929,12 +4871,12 @@
         <a:fontRef idx="minor"/>
       </dsp:style>
       <dsp:txBody>
-        <a:bodyPr spcFirstLastPara="0" vert="horz" wrap="square" lIns="95250" tIns="95250" rIns="95250" bIns="95250" numCol="1" spcCol="1270" anchor="t" anchorCtr="0">
+        <a:bodyPr spcFirstLastPara="0" vert="horz" wrap="square" lIns="106680" tIns="106680" rIns="106680" bIns="106680" numCol="1" spcCol="1270" anchor="t" anchorCtr="0">
           <a:noAutofit/>
         </a:bodyPr>
         <a:lstStyle/>
         <a:p>
-          <a:pPr marL="0" lvl="0" indent="0" algn="l" defTabSz="1111250">
+          <a:pPr marL="0" lvl="0" indent="0" algn="l" defTabSz="1244600">
             <a:lnSpc>
               <a:spcPct val="90000"/>
             </a:lnSpc>
@@ -4947,15 +4889,15 @@
             <a:buNone/>
           </a:pPr>
           <a:r>
-            <a:rPr lang="de-DE" sz="2500" b="0" kern="1200" dirty="0"/>
+            <a:rPr lang="de-DE" sz="2800" b="0" kern="1200" dirty="0"/>
             <a:t>Transformer</a:t>
           </a:r>
-          <a:endParaRPr lang="en-US" sz="2500" b="0" kern="1200" dirty="0"/>
+          <a:endParaRPr lang="en-US" sz="2800" b="0" kern="1200" dirty="0"/>
         </a:p>
       </dsp:txBody>
       <dsp:txXfrm>
-        <a:off x="0" y="543917"/>
-        <a:ext cx="10515600" cy="543917"/>
+        <a:off x="0" y="621999"/>
+        <a:ext cx="10515600" cy="621467"/>
       </dsp:txXfrm>
     </dsp:sp>
     <dsp:sp modelId="{9D950D6B-5C89-8A48-9960-CA8B4C499A1A}">
@@ -4965,7 +4907,7 @@
       </dsp:nvSpPr>
       <dsp:spPr>
         <a:xfrm>
-          <a:off x="0" y="1087834"/>
+          <a:off x="0" y="1243467"/>
           <a:ext cx="10515600" cy="0"/>
         </a:xfrm>
         <a:prstGeom prst="line">
@@ -5015,8 +4957,8 @@
       </dsp:nvSpPr>
       <dsp:spPr>
         <a:xfrm>
-          <a:off x="0" y="1087834"/>
-          <a:ext cx="10515600" cy="543917"/>
+          <a:off x="0" y="1243467"/>
+          <a:ext cx="10515600" cy="621467"/>
         </a:xfrm>
         <a:prstGeom prst="rect">
           <a:avLst/>
@@ -5040,12 +4982,12 @@
         <a:fontRef idx="minor"/>
       </dsp:style>
       <dsp:txBody>
-        <a:bodyPr spcFirstLastPara="0" vert="horz" wrap="square" lIns="95250" tIns="95250" rIns="95250" bIns="95250" numCol="1" spcCol="1270" anchor="t" anchorCtr="0">
+        <a:bodyPr spcFirstLastPara="0" vert="horz" wrap="square" lIns="106680" tIns="106680" rIns="106680" bIns="106680" numCol="1" spcCol="1270" anchor="t" anchorCtr="0">
           <a:noAutofit/>
         </a:bodyPr>
         <a:lstStyle/>
         <a:p>
-          <a:pPr marL="0" lvl="0" indent="0" algn="l" defTabSz="1111250">
+          <a:pPr marL="0" lvl="0" indent="0" algn="l" defTabSz="1244600">
             <a:lnSpc>
               <a:spcPct val="90000"/>
             </a:lnSpc>
@@ -5058,14 +5000,14 @@
             <a:buNone/>
           </a:pPr>
           <a:r>
-            <a:rPr lang="en-US" sz="2500" b="1" kern="1200" dirty="0"/>
+            <a:rPr lang="en-US" sz="2800" b="1" kern="1200" dirty="0"/>
             <a:t>LLMs</a:t>
           </a:r>
         </a:p>
       </dsp:txBody>
       <dsp:txXfrm>
-        <a:off x="0" y="1087834"/>
-        <a:ext cx="10515600" cy="543917"/>
+        <a:off x="0" y="1243467"/>
+        <a:ext cx="10515600" cy="621467"/>
       </dsp:txXfrm>
     </dsp:sp>
     <dsp:sp modelId="{34CF0AAF-5C3E-5349-AD9D-2034F634313C}">
@@ -5075,7 +5017,7 @@
       </dsp:nvSpPr>
       <dsp:spPr>
         <a:xfrm>
-          <a:off x="0" y="1631751"/>
+          <a:off x="0" y="1864935"/>
           <a:ext cx="10515600" cy="0"/>
         </a:xfrm>
         <a:prstGeom prst="line">
@@ -5125,8 +5067,8 @@
       </dsp:nvSpPr>
       <dsp:spPr>
         <a:xfrm>
-          <a:off x="0" y="1631751"/>
-          <a:ext cx="10515600" cy="543917"/>
+          <a:off x="0" y="1864935"/>
+          <a:ext cx="10515600" cy="621467"/>
         </a:xfrm>
         <a:prstGeom prst="rect">
           <a:avLst/>
@@ -5150,12 +5092,12 @@
         <a:fontRef idx="minor"/>
       </dsp:style>
       <dsp:txBody>
-        <a:bodyPr spcFirstLastPara="0" vert="horz" wrap="square" lIns="95250" tIns="95250" rIns="95250" bIns="95250" numCol="1" spcCol="1270" anchor="t" anchorCtr="0">
+        <a:bodyPr spcFirstLastPara="0" vert="horz" wrap="square" lIns="106680" tIns="106680" rIns="106680" bIns="106680" numCol="1" spcCol="1270" anchor="t" anchorCtr="0">
           <a:noAutofit/>
         </a:bodyPr>
         <a:lstStyle/>
         <a:p>
-          <a:pPr marL="0" lvl="0" indent="0" algn="l" defTabSz="1111250">
+          <a:pPr marL="0" lvl="0" indent="0" algn="l" defTabSz="1244600">
             <a:lnSpc>
               <a:spcPct val="90000"/>
             </a:lnSpc>
@@ -5168,14 +5110,14 @@
             <a:buNone/>
           </a:pPr>
           <a:r>
-            <a:rPr lang="en-US" sz="2500" b="0" kern="1200" dirty="0"/>
+            <a:rPr lang="en-US" sz="2800" b="0" kern="1200" dirty="0"/>
             <a:t>Context Engineering</a:t>
           </a:r>
         </a:p>
       </dsp:txBody>
       <dsp:txXfrm>
-        <a:off x="0" y="1631751"/>
-        <a:ext cx="10515600" cy="543917"/>
+        <a:off x="0" y="1864935"/>
+        <a:ext cx="10515600" cy="621467"/>
       </dsp:txXfrm>
     </dsp:sp>
     <dsp:sp modelId="{8A505F94-65E4-9D41-AC2C-CCE8BD4C175F}">
@@ -5185,7 +5127,7 @@
       </dsp:nvSpPr>
       <dsp:spPr>
         <a:xfrm>
-          <a:off x="0" y="2175669"/>
+          <a:off x="0" y="2486402"/>
           <a:ext cx="10515600" cy="0"/>
         </a:xfrm>
         <a:prstGeom prst="line">
@@ -5235,8 +5177,8 @@
       </dsp:nvSpPr>
       <dsp:spPr>
         <a:xfrm>
-          <a:off x="0" y="2175669"/>
-          <a:ext cx="10515600" cy="543917"/>
+          <a:off x="0" y="2486402"/>
+          <a:ext cx="10515600" cy="621467"/>
         </a:xfrm>
         <a:prstGeom prst="rect">
           <a:avLst/>
@@ -5260,12 +5202,12 @@
         <a:fontRef idx="minor"/>
       </dsp:style>
       <dsp:txBody>
-        <a:bodyPr spcFirstLastPara="0" vert="horz" wrap="square" lIns="95250" tIns="95250" rIns="95250" bIns="95250" numCol="1" spcCol="1270" anchor="t" anchorCtr="0">
+        <a:bodyPr spcFirstLastPara="0" vert="horz" wrap="square" lIns="106680" tIns="106680" rIns="106680" bIns="106680" numCol="1" spcCol="1270" anchor="t" anchorCtr="0">
           <a:noAutofit/>
         </a:bodyPr>
         <a:lstStyle/>
         <a:p>
-          <a:pPr marL="0" lvl="0" indent="0" algn="l" defTabSz="1111250">
+          <a:pPr marL="0" lvl="0" indent="0" algn="l" defTabSz="1244600">
             <a:lnSpc>
               <a:spcPct val="90000"/>
             </a:lnSpc>
@@ -5278,125 +5220,15 @@
             <a:buNone/>
           </a:pPr>
           <a:r>
-            <a:rPr lang="de-DE" sz="2500" b="0" kern="1200" dirty="0"/>
+            <a:rPr lang="de-DE" sz="2800" b="0" kern="1200" dirty="0"/>
             <a:t>Finetuning</a:t>
           </a:r>
-          <a:endParaRPr lang="en-US" sz="2500" b="0" kern="1200" dirty="0"/>
+          <a:endParaRPr lang="en-US" sz="2800" b="0" kern="1200" dirty="0"/>
         </a:p>
       </dsp:txBody>
       <dsp:txXfrm>
-        <a:off x="0" y="2175669"/>
-        <a:ext cx="10515600" cy="543917"/>
-      </dsp:txXfrm>
-    </dsp:sp>
-    <dsp:sp modelId="{322460D7-6763-F646-87E9-10A1FE9FDC20}">
-      <dsp:nvSpPr>
-        <dsp:cNvPr id="0" name=""/>
-        <dsp:cNvSpPr/>
-      </dsp:nvSpPr>
-      <dsp:spPr>
-        <a:xfrm>
-          <a:off x="0" y="2719586"/>
-          <a:ext cx="10515600" cy="0"/>
-        </a:xfrm>
-        <a:prstGeom prst="line">
-          <a:avLst/>
-        </a:prstGeom>
-        <a:solidFill>
-          <a:schemeClr val="accent1">
-            <a:hueOff val="0"/>
-            <a:satOff val="0"/>
-            <a:lumOff val="0"/>
-            <a:alphaOff val="0"/>
-          </a:schemeClr>
-        </a:solidFill>
-        <a:ln w="19050" cap="flat" cmpd="sng" algn="ctr">
-          <a:solidFill>
-            <a:schemeClr val="accent1">
-              <a:hueOff val="0"/>
-              <a:satOff val="0"/>
-              <a:lumOff val="0"/>
-              <a:alphaOff val="0"/>
-            </a:schemeClr>
-          </a:solidFill>
-          <a:prstDash val="solid"/>
-          <a:miter lim="800000"/>
-        </a:ln>
-        <a:effectLst/>
-      </dsp:spPr>
-      <dsp:style>
-        <a:lnRef idx="2">
-          <a:scrgbClr r="0" g="0" b="0"/>
-        </a:lnRef>
-        <a:fillRef idx="1">
-          <a:scrgbClr r="0" g="0" b="0"/>
-        </a:fillRef>
-        <a:effectRef idx="0">
-          <a:scrgbClr r="0" g="0" b="0"/>
-        </a:effectRef>
-        <a:fontRef idx="minor">
-          <a:schemeClr val="lt1"/>
-        </a:fontRef>
-      </dsp:style>
-    </dsp:sp>
-    <dsp:sp modelId="{9B5DA0EB-3C02-EE40-A02E-5B28D39BEF31}">
-      <dsp:nvSpPr>
-        <dsp:cNvPr id="0" name=""/>
-        <dsp:cNvSpPr/>
-      </dsp:nvSpPr>
-      <dsp:spPr>
-        <a:xfrm>
-          <a:off x="0" y="2719586"/>
-          <a:ext cx="10515600" cy="543917"/>
-        </a:xfrm>
-        <a:prstGeom prst="rect">
-          <a:avLst/>
-        </a:prstGeom>
-        <a:noFill/>
-        <a:ln>
-          <a:noFill/>
-        </a:ln>
-        <a:effectLst/>
-      </dsp:spPr>
-      <dsp:style>
-        <a:lnRef idx="0">
-          <a:scrgbClr r="0" g="0" b="0"/>
-        </a:lnRef>
-        <a:fillRef idx="0">
-          <a:scrgbClr r="0" g="0" b="0"/>
-        </a:fillRef>
-        <a:effectRef idx="0">
-          <a:scrgbClr r="0" g="0" b="0"/>
-        </a:effectRef>
-        <a:fontRef idx="minor"/>
-      </dsp:style>
-      <dsp:txBody>
-        <a:bodyPr spcFirstLastPara="0" vert="horz" wrap="square" lIns="95250" tIns="95250" rIns="95250" bIns="95250" numCol="1" spcCol="1270" anchor="t" anchorCtr="0">
-          <a:noAutofit/>
-        </a:bodyPr>
-        <a:lstStyle/>
-        <a:p>
-          <a:pPr marL="0" lvl="0" indent="0" algn="l" defTabSz="1111250">
-            <a:lnSpc>
-              <a:spcPct val="90000"/>
-            </a:lnSpc>
-            <a:spcBef>
-              <a:spcPct val="0"/>
-            </a:spcBef>
-            <a:spcAft>
-              <a:spcPct val="35000"/>
-            </a:spcAft>
-            <a:buNone/>
-          </a:pPr>
-          <a:r>
-            <a:rPr lang="en-US" sz="2500" b="0" kern="1200" dirty="0"/>
-            <a:t>Instruction Tuning</a:t>
-          </a:r>
-        </a:p>
-      </dsp:txBody>
-      <dsp:txXfrm>
-        <a:off x="0" y="2719586"/>
-        <a:ext cx="10515600" cy="543917"/>
+        <a:off x="0" y="2486402"/>
+        <a:ext cx="10515600" cy="621467"/>
       </dsp:txXfrm>
     </dsp:sp>
     <dsp:sp modelId="{3D5DC94A-13EE-9348-AB63-BA6D7AB77EF3}">
@@ -5406,7 +5238,7 @@
       </dsp:nvSpPr>
       <dsp:spPr>
         <a:xfrm>
-          <a:off x="0" y="3263503"/>
+          <a:off x="0" y="3107870"/>
           <a:ext cx="10515600" cy="0"/>
         </a:xfrm>
         <a:prstGeom prst="line">
@@ -5456,8 +5288,8 @@
       </dsp:nvSpPr>
       <dsp:spPr>
         <a:xfrm>
-          <a:off x="0" y="3263503"/>
-          <a:ext cx="10515600" cy="543917"/>
+          <a:off x="0" y="3107870"/>
+          <a:ext cx="10515600" cy="621467"/>
         </a:xfrm>
         <a:prstGeom prst="rect">
           <a:avLst/>
@@ -5481,12 +5313,12 @@
         <a:fontRef idx="minor"/>
       </dsp:style>
       <dsp:txBody>
-        <a:bodyPr spcFirstLastPara="0" vert="horz" wrap="square" lIns="95250" tIns="95250" rIns="95250" bIns="95250" numCol="1" spcCol="1270" anchor="t" anchorCtr="0">
+        <a:bodyPr spcFirstLastPara="0" vert="horz" wrap="square" lIns="106680" tIns="106680" rIns="106680" bIns="106680" numCol="1" spcCol="1270" anchor="t" anchorCtr="0">
           <a:noAutofit/>
         </a:bodyPr>
         <a:lstStyle/>
         <a:p>
-          <a:pPr marL="0" lvl="0" indent="0" algn="l" defTabSz="1111250">
+          <a:pPr marL="0" lvl="0" indent="0" algn="l" defTabSz="1244600">
             <a:lnSpc>
               <a:spcPct val="90000"/>
             </a:lnSpc>
@@ -5499,15 +5331,15 @@
             <a:buNone/>
           </a:pPr>
           <a:r>
-            <a:rPr lang="de-DE" sz="2500" kern="1200" dirty="0" err="1"/>
+            <a:rPr lang="de-DE" sz="2800" kern="1200" dirty="0" err="1"/>
             <a:t>Agents</a:t>
           </a:r>
-          <a:endParaRPr lang="en-US" sz="2500" kern="1200" dirty="0"/>
+          <a:endParaRPr lang="en-US" sz="2800" kern="1200" dirty="0"/>
         </a:p>
       </dsp:txBody>
       <dsp:txXfrm>
-        <a:off x="0" y="3263503"/>
-        <a:ext cx="10515600" cy="543917"/>
+        <a:off x="0" y="3107870"/>
+        <a:ext cx="10515600" cy="621467"/>
       </dsp:txXfrm>
     </dsp:sp>
     <dsp:sp modelId="{20D72B1E-AD82-9E49-86D8-09A4DD4D6212}">
@@ -5517,7 +5349,7 @@
       </dsp:nvSpPr>
       <dsp:spPr>
         <a:xfrm>
-          <a:off x="0" y="3807420"/>
+          <a:off x="0" y="3729338"/>
           <a:ext cx="10515600" cy="0"/>
         </a:xfrm>
         <a:prstGeom prst="line">
@@ -5567,8 +5399,8 @@
       </dsp:nvSpPr>
       <dsp:spPr>
         <a:xfrm>
-          <a:off x="0" y="3807420"/>
-          <a:ext cx="10515600" cy="543917"/>
+          <a:off x="0" y="3729338"/>
+          <a:ext cx="10515600" cy="621467"/>
         </a:xfrm>
         <a:prstGeom prst="rect">
           <a:avLst/>
@@ -5592,12 +5424,12 @@
         <a:fontRef idx="minor"/>
       </dsp:style>
       <dsp:txBody>
-        <a:bodyPr spcFirstLastPara="0" vert="horz" wrap="square" lIns="95250" tIns="95250" rIns="95250" bIns="95250" numCol="1" spcCol="1270" anchor="t" anchorCtr="0">
+        <a:bodyPr spcFirstLastPara="0" vert="horz" wrap="square" lIns="106680" tIns="106680" rIns="106680" bIns="106680" numCol="1" spcCol="1270" anchor="t" anchorCtr="0">
           <a:noAutofit/>
         </a:bodyPr>
         <a:lstStyle/>
         <a:p>
-          <a:pPr marL="0" lvl="0" indent="0" algn="l" defTabSz="1111250">
+          <a:pPr marL="0" lvl="0" indent="0" algn="l" defTabSz="1244600">
             <a:lnSpc>
               <a:spcPct val="90000"/>
             </a:lnSpc>
@@ -5610,15 +5442,15 @@
             <a:buNone/>
           </a:pPr>
           <a:r>
-            <a:rPr lang="de-DE" sz="2500" b="0" kern="1200" dirty="0"/>
+            <a:rPr lang="de-DE" sz="2800" b="0" kern="1200" dirty="0"/>
             <a:t>The Bigger Picture</a:t>
           </a:r>
-          <a:endParaRPr lang="en-US" sz="2500" b="0" kern="1200" dirty="0"/>
+          <a:endParaRPr lang="en-US" sz="2800" b="0" kern="1200" dirty="0"/>
         </a:p>
       </dsp:txBody>
       <dsp:txXfrm>
-        <a:off x="0" y="3807420"/>
-        <a:ext cx="10515600" cy="543917"/>
+        <a:off x="0" y="3729338"/>
+        <a:ext cx="10515600" cy="621467"/>
       </dsp:txXfrm>
     </dsp:sp>
   </dsp:spTree>
@@ -7207,7 +7039,7 @@
           <a:p>
             <a:fld id="{B854A0A5-3125-4A93-A463-B2CA0DCE058B}" type="datetimeFigureOut">
               <a:rPr lang="en-GB" smtClean="0"/>
-              <a:t>10/09/2025</a:t>
+              <a:t>12/09/2025</a:t>
             </a:fld>
             <a:endParaRPr lang="en-GB"/>
           </a:p>
@@ -7624,7 +7456,7 @@
           <a:p>
             <a:fld id="{7128456D-5ACD-4673-BCE9-52505EC32CEF}" type="datetime1">
               <a:rPr lang="en-GB" smtClean="0"/>
-              <a:t>10/09/2025</a:t>
+              <a:t>12/09/2025</a:t>
             </a:fld>
             <a:endParaRPr lang="en-GB"/>
           </a:p>
@@ -7824,7 +7656,7 @@
           <a:p>
             <a:fld id="{D99A2639-5270-4811-807B-89D4AE95E7ED}" type="datetime1">
               <a:rPr lang="en-GB" smtClean="0"/>
-              <a:t>10/09/2025</a:t>
+              <a:t>12/09/2025</a:t>
             </a:fld>
             <a:endParaRPr lang="en-GB"/>
           </a:p>
@@ -8034,7 +7866,7 @@
           <a:p>
             <a:fld id="{B552976C-D408-4E27-8D02-D7795F6D8A01}" type="datetime1">
               <a:rPr lang="en-GB" smtClean="0"/>
-              <a:t>10/09/2025</a:t>
+              <a:t>12/09/2025</a:t>
             </a:fld>
             <a:endParaRPr lang="en-GB"/>
           </a:p>
@@ -8234,7 +8066,7 @@
           <a:p>
             <a:fld id="{0B763083-041D-491F-A9FE-D51D99E0B41E}" type="datetime1">
               <a:rPr lang="en-GB" smtClean="0"/>
-              <a:t>10/09/2025</a:t>
+              <a:t>12/09/2025</a:t>
             </a:fld>
             <a:endParaRPr lang="en-GB"/>
           </a:p>
@@ -8510,7 +8342,7 @@
           <a:p>
             <a:fld id="{409455E6-A1CA-4CB6-9964-88D5086DA5CA}" type="datetime1">
               <a:rPr lang="en-GB" smtClean="0"/>
-              <a:t>10/09/2025</a:t>
+              <a:t>12/09/2025</a:t>
             </a:fld>
             <a:endParaRPr lang="en-GB"/>
           </a:p>
@@ -8778,7 +8610,7 @@
           <a:p>
             <a:fld id="{FAD82E38-24C1-4A8F-B916-1E714FC129DD}" type="datetime1">
               <a:rPr lang="en-GB" smtClean="0"/>
-              <a:t>10/09/2025</a:t>
+              <a:t>12/09/2025</a:t>
             </a:fld>
             <a:endParaRPr lang="en-GB"/>
           </a:p>
@@ -9193,7 +9025,7 @@
           <a:p>
             <a:fld id="{BC17BCDC-BAA6-44B5-B642-6F28D623ABB1}" type="datetime1">
               <a:rPr lang="en-GB" smtClean="0"/>
-              <a:t>10/09/2025</a:t>
+              <a:t>12/09/2025</a:t>
             </a:fld>
             <a:endParaRPr lang="en-GB"/>
           </a:p>
@@ -9335,7 +9167,7 @@
           <a:p>
             <a:fld id="{01D4BEC3-2CF9-4B19-A0A5-E70A0675B677}" type="datetime1">
               <a:rPr lang="en-GB" smtClean="0"/>
-              <a:t>10/09/2025</a:t>
+              <a:t>12/09/2025</a:t>
             </a:fld>
             <a:endParaRPr lang="en-GB"/>
           </a:p>
@@ -9448,7 +9280,7 @@
           <a:p>
             <a:fld id="{98E28BFD-B06D-4A45-8453-724AC7BA29C5}" type="datetime1">
               <a:rPr lang="en-GB" smtClean="0"/>
-              <a:t>10/09/2025</a:t>
+              <a:t>12/09/2025</a:t>
             </a:fld>
             <a:endParaRPr lang="en-GB"/>
           </a:p>
@@ -9761,7 +9593,7 @@
           <a:p>
             <a:fld id="{A14D99B0-2926-4194-B668-6A0D6123824C}" type="datetime1">
               <a:rPr lang="en-GB" smtClean="0"/>
-              <a:t>10/09/2025</a:t>
+              <a:t>12/09/2025</a:t>
             </a:fld>
             <a:endParaRPr lang="en-GB"/>
           </a:p>
@@ -10050,7 +9882,7 @@
           <a:p>
             <a:fld id="{29F03426-21FD-40F4-9F0B-AD19F2317DCA}" type="datetime1">
               <a:rPr lang="en-GB" smtClean="0"/>
-              <a:t>10/09/2025</a:t>
+              <a:t>12/09/2025</a:t>
             </a:fld>
             <a:endParaRPr lang="en-GB"/>
           </a:p>
@@ -10293,7 +10125,7 @@
           <a:p>
             <a:fld id="{0369896D-5D36-4D31-A0CE-0C2BFB17B225}" type="datetime1">
               <a:rPr lang="en-GB" smtClean="0"/>
-              <a:t>10/09/2025</a:t>
+              <a:t>12/09/2025</a:t>
             </a:fld>
             <a:endParaRPr lang="en-GB"/>
           </a:p>
@@ -10804,285 +10636,6 @@
           <p:cNvPr id="2" name="Title 1">
             <a:extLst>
               <a:ext uri="{FF2B5EF4-FFF2-40B4-BE49-F238E27FC236}">
-                <a16:creationId xmlns:a16="http://schemas.microsoft.com/office/drawing/2014/main" id="{F89B18D8-662F-8E62-9266-15406EC258A0}"/>
-              </a:ext>
-            </a:extLst>
-          </p:cNvPr>
-          <p:cNvSpPr>
-            <a:spLocks noGrp="1"/>
-          </p:cNvSpPr>
-          <p:nvPr>
-            <p:ph type="title"/>
-          </p:nvPr>
-        </p:nvSpPr>
-        <p:spPr/>
-        <p:txBody>
-          <a:bodyPr/>
-          <a:lstStyle/>
-          <a:p>
-            <a:r>
-              <a:rPr lang="en-DE" dirty="0"/>
-              <a:t>Size Matters</a:t>
-            </a:r>
-            <a:r>
-              <a:rPr lang="en-GB" dirty="0"/>
-              <a:t>: </a:t>
-            </a:r>
-            <a:r>
-              <a:rPr lang="en-GB" b="1" dirty="0"/>
-              <a:t>LARGE</a:t>
-            </a:r>
-            <a:r>
-              <a:rPr lang="en-GB" dirty="0"/>
-              <a:t> Language Models</a:t>
-            </a:r>
-            <a:endParaRPr lang="en-DE" dirty="0"/>
-          </a:p>
-        </p:txBody>
-      </p:sp>
-      <p:sp>
-        <p:nvSpPr>
-          <p:cNvPr id="3" name="Content Placeholder 2">
-            <a:extLst>
-              <a:ext uri="{FF2B5EF4-FFF2-40B4-BE49-F238E27FC236}">
-                <a16:creationId xmlns:a16="http://schemas.microsoft.com/office/drawing/2014/main" id="{8E0F4078-2FDF-FC34-76CD-ACB22B47969E}"/>
-              </a:ext>
-            </a:extLst>
-          </p:cNvPr>
-          <p:cNvSpPr>
-            <a:spLocks noGrp="1"/>
-          </p:cNvSpPr>
-          <p:nvPr>
-            <p:ph idx="1"/>
-          </p:nvPr>
-        </p:nvSpPr>
-        <p:spPr>
-          <a:xfrm>
-            <a:off x="838198" y="1825625"/>
-            <a:ext cx="8936197" cy="4351338"/>
-          </a:xfrm>
-        </p:spPr>
-        <p:txBody>
-          <a:bodyPr>
-            <a:normAutofit/>
-          </a:bodyPr>
-          <a:lstStyle/>
-          <a:p>
-            <a:pPr marL="0" indent="0">
-              <a:buNone/>
-            </a:pPr>
-            <a:r>
-              <a:rPr lang="en-GB" sz="2600" dirty="0">
-                <a:hlinkClick r:id="rId2"/>
-              </a:rPr>
-              <a:t>scaling laws</a:t>
-            </a:r>
-            <a:r>
-              <a:rPr lang="en-GB" sz="2600" dirty="0"/>
-              <a:t>, </a:t>
-            </a:r>
-            <a:r>
-              <a:rPr lang="en-GB" sz="2600" dirty="0">
-                <a:hlinkClick r:id="rId3"/>
-              </a:rPr>
-              <a:t>Chinchilla</a:t>
-            </a:r>
-            <a:r>
-              <a:rPr lang="en-GB" sz="2600" dirty="0"/>
-              <a:t>: coupled performance power laws with model size, amount of training data, and compute</a:t>
-            </a:r>
-          </a:p>
-          <a:p>
-            <a:pPr marL="0" indent="0">
-              <a:buNone/>
-            </a:pPr>
-            <a:r>
-              <a:rPr lang="en-GB" sz="2600" dirty="0">
-                <a:sym typeface="Wingdings" panose="05000000000000000000" pitchFamily="2" charset="2"/>
-              </a:rPr>
-              <a:t> </a:t>
-            </a:r>
-            <a:r>
-              <a:rPr lang="en-GB" sz="2600" dirty="0"/>
-              <a:t>era of large-scale models</a:t>
-            </a:r>
-          </a:p>
-          <a:p>
-            <a:pPr marL="0" indent="0">
-              <a:buNone/>
-            </a:pPr>
-            <a:endParaRPr lang="en-GB" sz="2600" dirty="0"/>
-          </a:p>
-          <a:p>
-            <a:pPr marL="0" indent="0">
-              <a:buNone/>
-            </a:pPr>
-            <a:r>
-              <a:rPr lang="en-GB" sz="2600" dirty="0"/>
-              <a:t>emergent abilities of LLMs:</a:t>
-            </a:r>
-          </a:p>
-          <a:p>
-            <a:r>
-              <a:rPr lang="en-GB" sz="2600" dirty="0"/>
-              <a:t>multi-task learning: perform new tasks at test time without task-specific training (via </a:t>
-            </a:r>
-            <a:r>
-              <a:rPr lang="en-GB" sz="2600" dirty="0">
-                <a:sym typeface="Wingdings" pitchFamily="2" charset="2"/>
-              </a:rPr>
-              <a:t>p</a:t>
-            </a:r>
-            <a:r>
-              <a:rPr lang="en-GB" sz="2600" dirty="0"/>
-              <a:t>rompting)</a:t>
-            </a:r>
-          </a:p>
-          <a:p>
-            <a:r>
-              <a:rPr lang="en-GB" sz="2600" dirty="0">
-                <a:solidFill>
-                  <a:srgbClr val="212529"/>
-                </a:solidFill>
-              </a:rPr>
-              <a:t>reasoning capabilities</a:t>
-            </a:r>
-            <a:endParaRPr lang="en-GB" sz="2600" dirty="0"/>
-          </a:p>
-        </p:txBody>
-      </p:sp>
-      <p:sp>
-        <p:nvSpPr>
-          <p:cNvPr id="4" name="Slide Number Placeholder 3">
-            <a:extLst>
-              <a:ext uri="{FF2B5EF4-FFF2-40B4-BE49-F238E27FC236}">
-                <a16:creationId xmlns:a16="http://schemas.microsoft.com/office/drawing/2014/main" id="{649F0045-E4C4-0C38-5A9B-7A5BA0214CE7}"/>
-              </a:ext>
-            </a:extLst>
-          </p:cNvPr>
-          <p:cNvSpPr>
-            <a:spLocks noGrp="1"/>
-          </p:cNvSpPr>
-          <p:nvPr>
-            <p:ph type="sldNum" sz="quarter" idx="12"/>
-          </p:nvPr>
-        </p:nvSpPr>
-        <p:spPr/>
-        <p:txBody>
-          <a:bodyPr/>
-          <a:lstStyle/>
-          <a:p>
-            <a:fld id="{849D05A8-43E9-1C49-8606-50AB68220DEC}" type="slidenum">
-              <a:rPr lang="en-DE" smtClean="0"/>
-              <a:t>10</a:t>
-            </a:fld>
-            <a:endParaRPr lang="en-DE"/>
-          </a:p>
-        </p:txBody>
-      </p:sp>
-      <p:pic>
-        <p:nvPicPr>
-          <p:cNvPr id="6" name="Picture 5">
-            <a:extLst>
-              <a:ext uri="{FF2B5EF4-FFF2-40B4-BE49-F238E27FC236}">
-                <a16:creationId xmlns:a16="http://schemas.microsoft.com/office/drawing/2014/main" id="{B671ACDA-58DE-C671-C490-9A25C570A67D}"/>
-              </a:ext>
-            </a:extLst>
-          </p:cNvPr>
-          <p:cNvPicPr>
-            <a:picLocks noChangeAspect="1"/>
-          </p:cNvPicPr>
-          <p:nvPr/>
-        </p:nvPicPr>
-        <p:blipFill>
-          <a:blip r:embed="rId4"/>
-          <a:stretch>
-            <a:fillRect/>
-          </a:stretch>
-        </p:blipFill>
-        <p:spPr>
-          <a:xfrm>
-            <a:off x="9774395" y="1005021"/>
-            <a:ext cx="2390243" cy="5344539"/>
-          </a:xfrm>
-          <a:prstGeom prst="rect">
-            <a:avLst/>
-          </a:prstGeom>
-        </p:spPr>
-      </p:pic>
-      <p:sp>
-        <p:nvSpPr>
-          <p:cNvPr id="7" name="TextBox 6">
-            <a:extLst>
-              <a:ext uri="{FF2B5EF4-FFF2-40B4-BE49-F238E27FC236}">
-                <a16:creationId xmlns:a16="http://schemas.microsoft.com/office/drawing/2014/main" id="{0467208A-C2CD-8126-638D-2517BFC96589}"/>
-              </a:ext>
-            </a:extLst>
-          </p:cNvPr>
-          <p:cNvSpPr txBox="1"/>
-          <p:nvPr/>
-        </p:nvSpPr>
-        <p:spPr>
-          <a:xfrm>
-            <a:off x="11632120" y="6349560"/>
-            <a:ext cx="532518" cy="246221"/>
-          </a:xfrm>
-          <a:prstGeom prst="rect">
-            <a:avLst/>
-          </a:prstGeom>
-          <a:noFill/>
-        </p:spPr>
-        <p:txBody>
-          <a:bodyPr wrap="none" rtlCol="0">
-            <a:spAutoFit/>
-          </a:bodyPr>
-          <a:lstStyle/>
-          <a:p>
-            <a:r>
-              <a:rPr lang="de-DE" sz="1000" dirty="0">
-                <a:hlinkClick r:id="rId5"/>
-              </a:rPr>
-              <a:t>source</a:t>
-            </a:r>
-            <a:endParaRPr lang="de-DE" sz="1000" dirty="0"/>
-          </a:p>
-        </p:txBody>
-      </p:sp>
-    </p:spTree>
-    <p:extLst>
-      <p:ext uri="{BB962C8B-B14F-4D97-AF65-F5344CB8AC3E}">
-        <p14:creationId xmlns:p14="http://schemas.microsoft.com/office/powerpoint/2010/main" val="839114839"/>
-      </p:ext>
-    </p:extLst>
-  </p:cSld>
-  <p:clrMapOvr>
-    <a:masterClrMapping/>
-  </p:clrMapOvr>
-</p:sld>
-</file>
-
-<file path=ppt/slides/slide11.xml><?xml version="1.0" encoding="utf-8"?>
-<p:sld xmlns:a="http://schemas.openxmlformats.org/drawingml/2006/main" xmlns:r="http://schemas.openxmlformats.org/officeDocument/2006/relationships" xmlns:p="http://schemas.openxmlformats.org/presentationml/2006/main">
-  <p:cSld>
-    <p:spTree>
-      <p:nvGrpSpPr>
-        <p:cNvPr id="1" name=""/>
-        <p:cNvGrpSpPr/>
-        <p:nvPr/>
-      </p:nvGrpSpPr>
-      <p:grpSpPr>
-        <a:xfrm>
-          <a:off x="0" y="0"/>
-          <a:ext cx="0" cy="0"/>
-          <a:chOff x="0" y="0"/>
-          <a:chExt cx="0" cy="0"/>
-        </a:xfrm>
-      </p:grpSpPr>
-      <p:sp>
-        <p:nvSpPr>
-          <p:cNvPr id="2" name="Title 1">
-            <a:extLst>
-              <a:ext uri="{FF2B5EF4-FFF2-40B4-BE49-F238E27FC236}">
                 <a16:creationId xmlns:a16="http://schemas.microsoft.com/office/drawing/2014/main" id="{6485C368-8592-0C01-7155-B0402DBC5A37}"/>
               </a:ext>
             </a:extLst>
@@ -11238,7 +10791,7 @@
           <a:p>
             <a:fld id="{849D05A8-43E9-1C49-8606-50AB68220DEC}" type="slidenum">
               <a:rPr lang="en-DE" smtClean="0"/>
-              <a:t>11</a:t>
+              <a:t>10</a:t>
             </a:fld>
             <a:endParaRPr lang="en-DE"/>
           </a:p>
@@ -11456,7 +11009,7 @@
 </p:sld>
 </file>
 
-<file path=ppt/slides/slide12.xml><?xml version="1.0" encoding="utf-8"?>
+<file path=ppt/slides/slide11.xml><?xml version="1.0" encoding="utf-8"?>
 <p:sld xmlns:a="http://schemas.openxmlformats.org/drawingml/2006/main" xmlns:r="http://schemas.openxmlformats.org/officeDocument/2006/relationships" xmlns:p="http://schemas.openxmlformats.org/presentationml/2006/main">
   <p:cSld>
     <p:spTree>
@@ -11496,7 +11049,7 @@
           <a:p>
             <a:fld id="{3D4C94FE-FF23-4504-88E9-14D481113291}" type="slidenum">
               <a:rPr lang="en-GB" smtClean="0"/>
-              <a:t>12</a:t>
+              <a:t>11</a:t>
             </a:fld>
             <a:endParaRPr lang="en-GB"/>
           </a:p>
@@ -11600,7 +11153,7 @@
 </p:sld>
 </file>
 
-<file path=ppt/slides/slide13.xml><?xml version="1.0" encoding="utf-8"?>
+<file path=ppt/slides/slide12.xml><?xml version="1.0" encoding="utf-8"?>
 <p:sld xmlns:a="http://schemas.openxmlformats.org/drawingml/2006/main" xmlns:r="http://schemas.openxmlformats.org/officeDocument/2006/relationships" xmlns:p="http://schemas.openxmlformats.org/presentationml/2006/main">
   <p:cSld>
     <p:spTree>
@@ -11677,7 +11230,7 @@
           <a:p>
             <a:fld id="{3D4C94FE-FF23-4504-88E9-14D481113291}" type="slidenum">
               <a:rPr lang="en-GB" smtClean="0"/>
-              <a:t>13</a:t>
+              <a:t>12</a:t>
             </a:fld>
             <a:endParaRPr lang="en-GB"/>
           </a:p>
@@ -12199,7 +11752,7 @@
 </p:sld>
 </file>
 
-<file path=ppt/slides/slide14.xml><?xml version="1.0" encoding="utf-8"?>
+<file path=ppt/slides/slide13.xml><?xml version="1.0" encoding="utf-8"?>
 <p:sld xmlns:a="http://schemas.openxmlformats.org/drawingml/2006/main" xmlns:r="http://schemas.openxmlformats.org/officeDocument/2006/relationships" xmlns:p="http://schemas.openxmlformats.org/presentationml/2006/main">
   <p:cSld>
     <p:spTree>
@@ -12239,7 +11792,7 @@
           <a:p>
             <a:fld id="{3D4C94FE-FF23-4504-88E9-14D481113291}" type="slidenum">
               <a:rPr lang="en-GB" smtClean="0"/>
-              <a:t>14</a:t>
+              <a:t>13</a:t>
             </a:fld>
             <a:endParaRPr lang="en-GB"/>
           </a:p>
@@ -12446,7 +11999,7 @@
 </p:sld>
 </file>
 
-<file path=ppt/slides/slide15.xml><?xml version="1.0" encoding="utf-8"?>
+<file path=ppt/slides/slide14.xml><?xml version="1.0" encoding="utf-8"?>
 <p:sld xmlns:a="http://schemas.openxmlformats.org/drawingml/2006/main" xmlns:r="http://schemas.openxmlformats.org/officeDocument/2006/relationships" xmlns:p="http://schemas.openxmlformats.org/presentationml/2006/main">
   <p:cSld>
     <p:spTree>
@@ -12486,7 +12039,7 @@
           <a:p>
             <a:fld id="{849D05A8-43E9-1C49-8606-50AB68220DEC}" type="slidenum">
               <a:rPr lang="en-DE" smtClean="0"/>
-              <a:t>15</a:t>
+              <a:t>14</a:t>
             </a:fld>
             <a:endParaRPr lang="en-DE" dirty="0"/>
           </a:p>
@@ -12645,7 +12198,7 @@
 </p:sld>
 </file>
 
-<file path=ppt/slides/slide16.xml><?xml version="1.0" encoding="utf-8"?>
+<file path=ppt/slides/slide15.xml><?xml version="1.0" encoding="utf-8"?>
 <p:sld xmlns:a="http://schemas.openxmlformats.org/drawingml/2006/main" xmlns:r="http://schemas.openxmlformats.org/officeDocument/2006/relationships" xmlns:p="http://schemas.openxmlformats.org/presentationml/2006/main">
   <p:cSld>
     <p:spTree>
@@ -12685,7 +12238,7 @@
           <a:p>
             <a:fld id="{3D4C94FE-FF23-4504-88E9-14D481113291}" type="slidenum">
               <a:rPr lang="en-GB" smtClean="0"/>
-              <a:t>16</a:t>
+              <a:t>15</a:t>
             </a:fld>
             <a:endParaRPr lang="en-GB"/>
           </a:p>
@@ -12778,7 +12331,7 @@
 </p:sld>
 </file>
 
-<file path=ppt/slides/slide17.xml><?xml version="1.0" encoding="utf-8"?>
+<file path=ppt/slides/slide16.xml><?xml version="1.0" encoding="utf-8"?>
 <p:sld xmlns:a="http://schemas.openxmlformats.org/drawingml/2006/main" xmlns:r="http://schemas.openxmlformats.org/officeDocument/2006/relationships" xmlns:p="http://schemas.openxmlformats.org/presentationml/2006/main">
   <p:cSld>
     <p:spTree>
@@ -12818,7 +12371,7 @@
           <a:p>
             <a:fld id="{3D4C94FE-FF23-4504-88E9-14D481113291}" type="slidenum">
               <a:rPr lang="en-GB" smtClean="0"/>
-              <a:t>17</a:t>
+              <a:t>16</a:t>
             </a:fld>
             <a:endParaRPr lang="en-GB"/>
           </a:p>
@@ -12911,7 +12464,7 @@
 </p:sld>
 </file>
 
-<file path=ppt/slides/slide18.xml><?xml version="1.0" encoding="utf-8"?>
+<file path=ppt/slides/slide17.xml><?xml version="1.0" encoding="utf-8"?>
 <p:sld xmlns:a="http://schemas.openxmlformats.org/drawingml/2006/main" xmlns:r="http://schemas.openxmlformats.org/officeDocument/2006/relationships" xmlns:p="http://schemas.openxmlformats.org/presentationml/2006/main">
   <p:cSld>
     <p:spTree>
@@ -13095,7 +12648,7 @@
             </a:pPr>
             <a:r>
               <a:rPr lang="en-GB" dirty="0"/>
-              <a:t>easier fine-tuning </a:t>
+              <a:t>easier finetuning </a:t>
             </a:r>
             <a:r>
               <a:rPr lang="en-GB" dirty="0">
@@ -13130,7 +12683,7 @@
           <a:p>
             <a:fld id="{849D05A8-43E9-1C49-8606-50AB68220DEC}" type="slidenum">
               <a:rPr lang="en-DE" smtClean="0"/>
-              <a:t>18</a:t>
+              <a:t>17</a:t>
             </a:fld>
             <a:endParaRPr lang="en-DE"/>
           </a:p>
@@ -13140,6 +12693,133 @@
     <p:extLst>
       <p:ext uri="{BB962C8B-B14F-4D97-AF65-F5344CB8AC3E}">
         <p14:creationId xmlns:p14="http://schemas.microsoft.com/office/powerpoint/2010/main" val="2061575047"/>
+      </p:ext>
+    </p:extLst>
+  </p:cSld>
+  <p:clrMapOvr>
+    <a:masterClrMapping/>
+  </p:clrMapOvr>
+</p:sld>
+</file>
+
+<file path=ppt/slides/slide18.xml><?xml version="1.0" encoding="utf-8"?>
+<p:sld xmlns:a="http://schemas.openxmlformats.org/drawingml/2006/main" xmlns:r="http://schemas.openxmlformats.org/officeDocument/2006/relationships" xmlns:p="http://schemas.openxmlformats.org/presentationml/2006/main">
+  <p:cSld>
+    <p:spTree>
+      <p:nvGrpSpPr>
+        <p:cNvPr id="1" name=""/>
+        <p:cNvGrpSpPr/>
+        <p:nvPr/>
+      </p:nvGrpSpPr>
+      <p:grpSpPr>
+        <a:xfrm>
+          <a:off x="0" y="0"/>
+          <a:ext cx="0" cy="0"/>
+          <a:chOff x="0" y="0"/>
+          <a:chExt cx="0" cy="0"/>
+        </a:xfrm>
+      </p:grpSpPr>
+      <p:sp>
+        <p:nvSpPr>
+          <p:cNvPr id="2" name="Titel 1">
+            <a:extLst>
+              <a:ext uri="{FF2B5EF4-FFF2-40B4-BE49-F238E27FC236}">
+                <a16:creationId xmlns:a16="http://schemas.microsoft.com/office/drawing/2014/main" id="{E77154EE-7A8C-2773-665E-B2A05E03F867}"/>
+              </a:ext>
+            </a:extLst>
+          </p:cNvPr>
+          <p:cNvSpPr>
+            <a:spLocks noGrp="1"/>
+          </p:cNvSpPr>
+          <p:nvPr>
+            <p:ph type="title"/>
+          </p:nvPr>
+        </p:nvSpPr>
+        <p:spPr/>
+        <p:txBody>
+          <a:bodyPr/>
+          <a:lstStyle/>
+          <a:p>
+            <a:endParaRPr lang="de-DE"/>
+          </a:p>
+        </p:txBody>
+      </p:sp>
+      <p:sp>
+        <p:nvSpPr>
+          <p:cNvPr id="3" name="Inhaltsplatzhalter 2">
+            <a:extLst>
+              <a:ext uri="{FF2B5EF4-FFF2-40B4-BE49-F238E27FC236}">
+                <a16:creationId xmlns:a16="http://schemas.microsoft.com/office/drawing/2014/main" id="{FAD48910-CDD5-B74C-490B-67A9064FE212}"/>
+              </a:ext>
+            </a:extLst>
+          </p:cNvPr>
+          <p:cNvSpPr>
+            <a:spLocks noGrp="1"/>
+          </p:cNvSpPr>
+          <p:nvPr>
+            <p:ph idx="1"/>
+          </p:nvPr>
+        </p:nvSpPr>
+        <p:spPr/>
+        <p:txBody>
+          <a:bodyPr/>
+          <a:lstStyle/>
+          <a:p>
+            <a:pPr marL="0" indent="0">
+              <a:buNone/>
+            </a:pPr>
+            <a:r>
+              <a:rPr lang="de-DE" dirty="0">
+                <a:hlinkClick r:id="rId2"/>
+              </a:rPr>
+              <a:t>gpt-oss</a:t>
+            </a:r>
+            <a:endParaRPr lang="de-DE" dirty="0"/>
+          </a:p>
+          <a:p>
+            <a:pPr marL="0" indent="0">
+              <a:buNone/>
+            </a:pPr>
+            <a:r>
+              <a:rPr lang="de-DE" dirty="0"/>
+              <a:t>…</a:t>
+            </a:r>
+          </a:p>
+        </p:txBody>
+      </p:sp>
+      <p:sp>
+        <p:nvSpPr>
+          <p:cNvPr id="4" name="Foliennummernplatzhalter 3">
+            <a:extLst>
+              <a:ext uri="{FF2B5EF4-FFF2-40B4-BE49-F238E27FC236}">
+                <a16:creationId xmlns:a16="http://schemas.microsoft.com/office/drawing/2014/main" id="{726ADE04-7C97-6AE2-CEFE-595EB9E1A6A8}"/>
+              </a:ext>
+            </a:extLst>
+          </p:cNvPr>
+          <p:cNvSpPr>
+            <a:spLocks noGrp="1"/>
+          </p:cNvSpPr>
+          <p:nvPr>
+            <p:ph type="sldNum" sz="quarter" idx="12"/>
+          </p:nvPr>
+        </p:nvSpPr>
+        <p:spPr/>
+        <p:txBody>
+          <a:bodyPr/>
+          <a:lstStyle/>
+          <a:p>
+            <a:fld id="{3D4C94FE-FF23-4504-88E9-14D481113291}" type="slidenum">
+              <a:rPr lang="en-GB" smtClean="0"/>
+              <a:t>18</a:t>
+            </a:fld>
+            <a:endParaRPr lang="en-GB"/>
+          </a:p>
+        </p:txBody>
+      </p:sp>
+    </p:spTree>
+    <p:extLst>
+      <p:ext uri="{BB962C8B-B14F-4D97-AF65-F5344CB8AC3E}">
+        <p14:creationId xmlns:p14="http://schemas.microsoft.com/office/powerpoint/2010/main" val="3302101948"/>
       </p:ext>
     </p:extLst>
   </p:cSld>
@@ -13472,11 +13152,11 @@
             </a:r>
             <a:r>
               <a:rPr lang="de-DE" dirty="0" err="1"/>
-              <a:t>encoder</a:t>
+              <a:t>encoder-only</a:t>
             </a:r>
             <a:r>
               <a:rPr lang="de-DE" dirty="0"/>
-              <a:t> LLM)</a:t>
+              <a:t>)</a:t>
             </a:r>
           </a:p>
           <a:p>
@@ -13498,11 +13178,11 @@
             </a:r>
             <a:r>
               <a:rPr lang="de-DE" dirty="0" err="1"/>
-              <a:t>decoder</a:t>
+              <a:t>decoder-only</a:t>
             </a:r>
             <a:r>
               <a:rPr lang="de-DE" dirty="0"/>
-              <a:t> LLM), </a:t>
+              <a:t>), </a:t>
             </a:r>
             <a:r>
               <a:rPr lang="de-DE" dirty="0" err="1"/>
@@ -13751,7 +13431,7 @@
             <p:ph idx="1"/>
             <p:extLst>
               <p:ext uri="{D42A27DB-BD31-4B8C-83A1-F6EECF244321}">
-                <p14:modId xmlns:p14="http://schemas.microsoft.com/office/powerpoint/2010/main" val="4114562827"/>
+                <p14:modId xmlns:p14="http://schemas.microsoft.com/office/powerpoint/2010/main" val="140516857"/>
               </p:ext>
             </p:extLst>
           </p:nvPr>
@@ -13854,21 +13534,42 @@
           </a:p>
           <a:p>
             <a:r>
+              <a:rPr lang="de-DE" dirty="0"/>
+              <a:t>generative AI</a:t>
+            </a:r>
+          </a:p>
+          <a:p>
+            <a:pPr marL="0" indent="0">
+              <a:buNone/>
+            </a:pPr>
+            <a:endParaRPr lang="de-DE" dirty="0"/>
+          </a:p>
+          <a:p>
+            <a:r>
+              <a:rPr lang="en-GB" dirty="0"/>
+              <a:t>a</a:t>
+            </a:r>
+            <a:r>
+              <a:rPr lang="en-DE"/>
+              <a:t>utoregressive</a:t>
+            </a:r>
+            <a:r>
+              <a:rPr lang="de-DE" dirty="0"/>
+              <a:t> </a:t>
+            </a:r>
+            <a:r>
               <a:rPr lang="de-DE" dirty="0" err="1"/>
-              <a:t>encoder</a:t>
+              <a:t>text</a:t>
             </a:r>
             <a:r>
               <a:rPr lang="de-DE" dirty="0"/>
-              <a:t> and </a:t>
+              <a:t> </a:t>
             </a:r>
             <a:r>
               <a:rPr lang="de-DE" dirty="0" err="1"/>
-              <a:t>decoder</a:t>
-            </a:r>
-            <a:r>
-              <a:rPr lang="de-DE" dirty="0"/>
-              <a:t> LLMs</a:t>
-            </a:r>
+              <a:t>generation</a:t>
+            </a:r>
+            <a:endParaRPr lang="de-DE" dirty="0"/>
           </a:p>
           <a:p>
             <a:pPr marL="0" indent="0">
@@ -13974,7 +13675,7 @@
           <p:cNvPr id="2" name="Title 1">
             <a:extLst>
               <a:ext uri="{FF2B5EF4-FFF2-40B4-BE49-F238E27FC236}">
-                <a16:creationId xmlns:a16="http://schemas.microsoft.com/office/drawing/2014/main" id="{B3CEFB21-2CCA-564A-D312-3A4B41E5AAE8}"/>
+                <a16:creationId xmlns:a16="http://schemas.microsoft.com/office/drawing/2014/main" id="{817A8D56-2C17-0071-998B-2AC3465CEFF9}"/>
               </a:ext>
             </a:extLst>
           </p:cNvPr>
@@ -13987,147 +13688,297 @@
         </p:nvSpPr>
         <p:spPr/>
         <p:txBody>
-          <a:bodyPr/>
+          <a:bodyPr>
+            <a:normAutofit/>
+          </a:bodyPr>
           <a:lstStyle/>
           <a:p>
             <a:r>
-              <a:rPr lang="en-DE" dirty="0"/>
-              <a:t>Transformer Architectures</a:t>
-            </a:r>
-            <a:r>
-              <a:rPr lang="en-GB" dirty="0"/>
-              <a:t> for LLMs</a:t>
-            </a:r>
-            <a:endParaRPr lang="en-DE" dirty="0"/>
+              <a:rPr lang="en-DE" sz="4300" dirty="0"/>
+              <a:t>Generative vs </a:t>
+            </a:r>
+            <a:r>
+              <a:rPr lang="en-GB" sz="4300" dirty="0"/>
+              <a:t>Predictive/</a:t>
+            </a:r>
+            <a:r>
+              <a:rPr lang="en-DE" sz="4300" dirty="0"/>
+              <a:t>Discriminative Models</a:t>
+            </a:r>
           </a:p>
         </p:txBody>
       </p:sp>
-      <p:sp>
-        <p:nvSpPr>
-          <p:cNvPr id="3" name="Content Placeholder 2">
-            <a:extLst>
-              <a:ext uri="{FF2B5EF4-FFF2-40B4-BE49-F238E27FC236}">
-                <a16:creationId xmlns:a16="http://schemas.microsoft.com/office/drawing/2014/main" id="{372A853E-ED3E-6E47-BE06-20A4A0B49340}"/>
-              </a:ext>
-            </a:extLst>
-          </p:cNvPr>
-          <p:cNvSpPr>
-            <a:spLocks noGrp="1"/>
-          </p:cNvSpPr>
-          <p:nvPr>
-            <p:ph sz="half" idx="1"/>
-          </p:nvPr>
-        </p:nvSpPr>
-        <p:spPr>
-          <a:xfrm>
-            <a:off x="838200" y="2265405"/>
-            <a:ext cx="5181600" cy="2486483"/>
-          </a:xfrm>
-        </p:spPr>
-        <p:txBody>
-          <a:bodyPr>
-            <a:normAutofit fontScale="92500" lnSpcReduction="10000"/>
-          </a:bodyPr>
-          <a:lstStyle/>
-          <a:p>
-            <a:pPr marL="0" indent="0">
-              <a:buNone/>
-            </a:pPr>
-            <a:r>
-              <a:rPr lang="en-GB" sz="2400" b="1" dirty="0"/>
-              <a:t>encoder-only</a:t>
-            </a:r>
-            <a:r>
-              <a:rPr lang="en-GB" sz="2400" dirty="0"/>
-              <a:t> LLMs:</a:t>
-            </a:r>
-          </a:p>
-          <a:p>
-            <a:r>
-              <a:rPr lang="en-GB" sz="2400" dirty="0"/>
-              <a:t>learning of contextual embeddings (for subsequent fine-tuning)</a:t>
-            </a:r>
-          </a:p>
-          <a:p>
-            <a:r>
-              <a:rPr lang="en-GB" sz="2400" dirty="0"/>
-              <a:t>training: prediction of masked words</a:t>
-            </a:r>
-          </a:p>
-          <a:p>
-            <a:r>
-              <a:rPr lang="en-GB" sz="2400" dirty="0"/>
-              <a:t>can’t generate text, can’t be prompted</a:t>
-            </a:r>
-          </a:p>
-        </p:txBody>
-      </p:sp>
-      <p:sp>
-        <p:nvSpPr>
-          <p:cNvPr id="14" name="Content Placeholder 13">
-            <a:extLst>
-              <a:ext uri="{FF2B5EF4-FFF2-40B4-BE49-F238E27FC236}">
-                <a16:creationId xmlns:a16="http://schemas.microsoft.com/office/drawing/2014/main" id="{5991A755-4AE3-485E-1F18-F18CA40611B3}"/>
-              </a:ext>
-            </a:extLst>
-          </p:cNvPr>
-          <p:cNvSpPr>
-            <a:spLocks noGrp="1"/>
-          </p:cNvSpPr>
-          <p:nvPr>
-            <p:ph sz="half" idx="2"/>
-          </p:nvPr>
-        </p:nvSpPr>
-        <p:spPr>
-          <a:xfrm>
-            <a:off x="6172200" y="2265405"/>
-            <a:ext cx="5181600" cy="2486483"/>
-          </a:xfrm>
-        </p:spPr>
-        <p:txBody>
-          <a:bodyPr>
-            <a:normAutofit fontScale="92500" lnSpcReduction="10000"/>
-          </a:bodyPr>
-          <a:lstStyle/>
-          <a:p>
-            <a:pPr marL="0" indent="0">
-              <a:buNone/>
-            </a:pPr>
-            <a:r>
-              <a:rPr lang="en-GB" sz="2400" b="1" dirty="0"/>
-              <a:t>decoder-only</a:t>
-            </a:r>
-            <a:r>
-              <a:rPr lang="en-GB" sz="2400" dirty="0"/>
-              <a:t> LLMs:</a:t>
-            </a:r>
-          </a:p>
-          <a:p>
-            <a:r>
-              <a:rPr lang="en-GB" sz="2400" dirty="0"/>
-              <a:t>text generation: e.g., chat bot (after instruction tuning)</a:t>
-            </a:r>
-          </a:p>
-          <a:p>
-            <a:r>
-              <a:rPr lang="en-GB" sz="2400" dirty="0"/>
-              <a:t>training: next-word prediction</a:t>
-            </a:r>
-          </a:p>
-          <a:p>
-            <a:r>
-              <a:rPr lang="en-GB" sz="2400" dirty="0"/>
-              <a:t>output one token at a time (auto-regressive: consuming its own output, potentially starting with prompts)</a:t>
-            </a:r>
-          </a:p>
-        </p:txBody>
-      </p:sp>
+      <mc:AlternateContent xmlns:mc="http://schemas.openxmlformats.org/markup-compatibility/2006" xmlns:a14="http://schemas.microsoft.com/office/drawing/2010/main">
+        <mc:Choice Requires="a14">
+          <p:sp>
+            <p:nvSpPr>
+              <p:cNvPr id="3" name="Content Placeholder 2">
+                <a:extLst>
+                  <a:ext uri="{FF2B5EF4-FFF2-40B4-BE49-F238E27FC236}">
+                    <a16:creationId xmlns:a16="http://schemas.microsoft.com/office/drawing/2014/main" id="{8E216029-E185-B135-4087-B6C224078F33}"/>
+                  </a:ext>
+                </a:extLst>
+              </p:cNvPr>
+              <p:cNvSpPr>
+                <a:spLocks noGrp="1"/>
+              </p:cNvSpPr>
+              <p:nvPr>
+                <p:ph idx="1"/>
+              </p:nvPr>
+            </p:nvSpPr>
+            <p:spPr>
+              <a:xfrm>
+                <a:off x="838200" y="1944163"/>
+                <a:ext cx="6203731" cy="3286850"/>
+              </a:xfrm>
+            </p:spPr>
+            <p:txBody>
+              <a:bodyPr>
+                <a:normAutofit/>
+              </a:bodyPr>
+              <a:lstStyle/>
+              <a:p>
+                <a:pPr marL="0" indent="0">
+                  <a:buNone/>
+                </a:pPr>
+                <a:r>
+                  <a:rPr lang="en-GB" sz="2400" dirty="0"/>
+                  <a:t>discriminative models:</a:t>
+                </a:r>
+              </a:p>
+              <a:p>
+                <a:pPr marL="0" indent="0">
+                  <a:buNone/>
+                </a:pPr>
+                <a:r>
+                  <a:rPr lang="en-GB" sz="2400" dirty="0"/>
+                  <a:t>predict conditional probability </a:t>
+                </a:r>
+                <a14:m>
+                  <m:oMath xmlns:m="http://schemas.openxmlformats.org/officeDocument/2006/math">
+                    <m:r>
+                      <a:rPr lang="en-US" sz="2400" i="1" smtClean="0">
+                        <a:latin typeface="Cambria Math" panose="02040503050406030204" pitchFamily="18" charset="0"/>
+                      </a:rPr>
+                      <m:t>𝑃</m:t>
+                    </m:r>
+                    <m:d>
+                      <m:dPr>
+                        <m:ctrlPr>
+                          <a:rPr lang="en-US" sz="2400" i="1">
+                            <a:latin typeface="Cambria Math" panose="02040503050406030204" pitchFamily="18" charset="0"/>
+                          </a:rPr>
+                        </m:ctrlPr>
+                      </m:dPr>
+                      <m:e>
+                        <m:r>
+                          <a:rPr lang="en-US" sz="2400" i="1">
+                            <a:latin typeface="Cambria Math" panose="02040503050406030204" pitchFamily="18" charset="0"/>
+                          </a:rPr>
+                          <m:t>𝑌</m:t>
+                        </m:r>
+                        <m:r>
+                          <a:rPr lang="en-US" sz="2400" b="1" i="1" smtClean="0">
+                            <a:latin typeface="Cambria Math" panose="02040503050406030204" pitchFamily="18" charset="0"/>
+                          </a:rPr>
+                          <m:t>|</m:t>
+                        </m:r>
+                        <m:r>
+                          <a:rPr lang="en-US" sz="2400" b="1" i="1">
+                            <a:latin typeface="Cambria Math" panose="02040503050406030204" pitchFamily="18" charset="0"/>
+                          </a:rPr>
+                          <m:t>𝑿</m:t>
+                        </m:r>
+                      </m:e>
+                    </m:d>
+                  </m:oMath>
+                </a14:m>
+                <a:endParaRPr lang="en-GB" sz="2400" dirty="0"/>
+              </a:p>
+              <a:p>
+                <a:pPr marL="0" indent="0">
+                  <a:buNone/>
+                </a:pPr>
+                <a:endParaRPr lang="en-GB" sz="2400" dirty="0"/>
+              </a:p>
+              <a:p>
+                <a:pPr marL="0" indent="0">
+                  <a:buNone/>
+                </a:pPr>
+                <a:r>
+                  <a:rPr lang="en-GB" sz="2400" dirty="0"/>
+                  <a:t>generative models:</a:t>
+                </a:r>
+              </a:p>
+              <a:p>
+                <a:pPr marL="0" indent="0">
+                  <a:buNone/>
+                </a:pPr>
+                <a:r>
+                  <a:rPr lang="en-GB" sz="2400" dirty="0"/>
+                  <a:t>predict joint probability </a:t>
+                </a:r>
+                <a14:m>
+                  <m:oMath xmlns:m="http://schemas.openxmlformats.org/officeDocument/2006/math">
+                    <m:r>
+                      <a:rPr lang="en-US" sz="2400" i="1" smtClean="0">
+                        <a:latin typeface="Cambria Math" panose="02040503050406030204" pitchFamily="18" charset="0"/>
+                      </a:rPr>
+                      <m:t>𝑃</m:t>
+                    </m:r>
+                    <m:d>
+                      <m:dPr>
+                        <m:ctrlPr>
+                          <a:rPr lang="en-US" sz="2400" i="1">
+                            <a:latin typeface="Cambria Math" panose="02040503050406030204" pitchFamily="18" charset="0"/>
+                          </a:rPr>
+                        </m:ctrlPr>
+                      </m:dPr>
+                      <m:e>
+                        <m:r>
+                          <a:rPr lang="en-US" sz="2400" i="1">
+                            <a:latin typeface="Cambria Math" panose="02040503050406030204" pitchFamily="18" charset="0"/>
+                          </a:rPr>
+                          <m:t>𝑌</m:t>
+                        </m:r>
+                        <m:r>
+                          <a:rPr lang="en-US" sz="2400" i="1">
+                            <a:latin typeface="Cambria Math" panose="02040503050406030204" pitchFamily="18" charset="0"/>
+                          </a:rPr>
+                          <m:t>,</m:t>
+                        </m:r>
+                        <m:r>
+                          <a:rPr lang="en-US" sz="2400" b="1" i="1">
+                            <a:latin typeface="Cambria Math" panose="02040503050406030204" pitchFamily="18" charset="0"/>
+                          </a:rPr>
+                          <m:t>𝑿</m:t>
+                        </m:r>
+                      </m:e>
+                    </m:d>
+                  </m:oMath>
+                </a14:m>
+                <a:endParaRPr lang="en-GB" sz="2400" b="1" dirty="0"/>
+              </a:p>
+              <a:p>
+                <a:pPr marL="0" indent="0">
+                  <a:buNone/>
+                </a:pPr>
+                <a:r>
+                  <a:rPr lang="en-GB" sz="2400" dirty="0"/>
+                  <a:t>(or just </a:t>
+                </a:r>
+                <a14:m>
+                  <m:oMath xmlns:m="http://schemas.openxmlformats.org/officeDocument/2006/math">
+                    <m:r>
+                      <a:rPr lang="en-US" sz="2400" i="1">
+                        <a:latin typeface="Cambria Math" panose="02040503050406030204" pitchFamily="18" charset="0"/>
+                      </a:rPr>
+                      <m:t>𝑃</m:t>
+                    </m:r>
+                    <m:d>
+                      <m:dPr>
+                        <m:ctrlPr>
+                          <a:rPr lang="en-US" sz="2400" i="1">
+                            <a:latin typeface="Cambria Math" panose="02040503050406030204" pitchFamily="18" charset="0"/>
+                          </a:rPr>
+                        </m:ctrlPr>
+                      </m:dPr>
+                      <m:e>
+                        <m:r>
+                          <a:rPr lang="en-US" sz="2400" b="1" i="1">
+                            <a:latin typeface="Cambria Math" panose="02040503050406030204" pitchFamily="18" charset="0"/>
+                          </a:rPr>
+                          <m:t>𝑿</m:t>
+                        </m:r>
+                      </m:e>
+                    </m:d>
+                  </m:oMath>
+                </a14:m>
+                <a:r>
+                  <a:rPr lang="en-GB" sz="2400" b="1" dirty="0">
+                    <a:sym typeface="Wingdings" panose="05000000000000000000" pitchFamily="2" charset="2"/>
+                  </a:rPr>
+                  <a:t> </a:t>
+                </a:r>
+                <a:r>
+                  <a:rPr lang="en-GB" sz="2400" dirty="0">
+                    <a:sym typeface="Wingdings" panose="05000000000000000000" pitchFamily="2" charset="2"/>
+                  </a:rPr>
+                  <a:t></a:t>
+                </a:r>
+                <a:r>
+                  <a:rPr lang="en-GB" sz="2400" dirty="0"/>
+                  <a:t> unsupervised learning)</a:t>
+                </a:r>
+              </a:p>
+              <a:p>
+                <a:pPr marL="0" indent="0">
+                  <a:buNone/>
+                </a:pPr>
+                <a:r>
+                  <a:rPr lang="en-GB" sz="2400" dirty="0">
+                    <a:sym typeface="Wingdings" panose="05000000000000000000" pitchFamily="2" charset="2"/>
+                  </a:rPr>
+                  <a:t> </a:t>
+                </a:r>
+                <a:r>
+                  <a:rPr lang="en-GB" sz="2400" dirty="0"/>
+                  <a:t>allow to generate new data samples</a:t>
+                </a:r>
+              </a:p>
+            </p:txBody>
+          </p:sp>
+        </mc:Choice>
+        <mc:Fallback xmlns="">
+          <p:sp>
+            <p:nvSpPr>
+              <p:cNvPr id="3" name="Content Placeholder 2">
+                <a:extLst>
+                  <a:ext uri="{FF2B5EF4-FFF2-40B4-BE49-F238E27FC236}">
+                    <a16:creationId xmlns:a16="http://schemas.microsoft.com/office/drawing/2014/main" id="{8E216029-E185-B135-4087-B6C224078F33}"/>
+                  </a:ext>
+                </a:extLst>
+              </p:cNvPr>
+              <p:cNvSpPr>
+                <a:spLocks noGrp="1" noRot="1" noChangeAspect="1" noMove="1" noResize="1" noEditPoints="1" noAdjustHandles="1" noChangeArrowheads="1" noChangeShapeType="1" noTextEdit="1"/>
+              </p:cNvSpPr>
+              <p:nvPr>
+                <p:ph idx="1"/>
+              </p:nvPr>
+            </p:nvSpPr>
+            <p:spPr>
+              <a:xfrm>
+                <a:off x="838200" y="1944163"/>
+                <a:ext cx="6203731" cy="3286850"/>
+              </a:xfrm>
+              <a:blipFill>
+                <a:blip r:embed="rId2"/>
+                <a:stretch>
+                  <a:fillRect l="-1573" t="-2597" b="-371"/>
+                </a:stretch>
+              </a:blipFill>
+            </p:spPr>
+            <p:txBody>
+              <a:bodyPr/>
+              <a:lstStyle/>
+              <a:p>
+                <a:r>
+                  <a:rPr lang="en-GB">
+                    <a:noFill/>
+                  </a:rPr>
+                  <a:t> </a:t>
+                </a:r>
+              </a:p>
+            </p:txBody>
+          </p:sp>
+        </mc:Fallback>
+      </mc:AlternateContent>
       <p:sp>
         <p:nvSpPr>
           <p:cNvPr id="4" name="Slide Number Placeholder 3">
             <a:extLst>
               <a:ext uri="{FF2B5EF4-FFF2-40B4-BE49-F238E27FC236}">
-                <a16:creationId xmlns:a16="http://schemas.microsoft.com/office/drawing/2014/main" id="{FDB15F20-2568-EEBA-AF76-03A86D63DFE2}"/>
+                <a16:creationId xmlns:a16="http://schemas.microsoft.com/office/drawing/2014/main" id="{93DAAF07-FB21-CD30-E67D-9DAC73268A62}"/>
               </a:ext>
             </a:extLst>
           </p:cNvPr>
@@ -14143,7 +13994,7 @@
           <a:bodyPr/>
           <a:lstStyle/>
           <a:p>
-            <a:fld id="{849D05A8-43E9-1C49-8606-50AB68220DEC}" type="slidenum">
+            <a:fld id="{15FEAD7E-BF4A-2941-8FC0-E96033F99716}" type="slidenum">
               <a:rPr lang="en-DE" smtClean="0"/>
               <a:t>4</a:t>
             </a:fld>
@@ -14153,10 +14004,10 @@
       </p:sp>
       <p:pic>
         <p:nvPicPr>
-          <p:cNvPr id="6" name="Picture 5">
+          <p:cNvPr id="6" name="Picture 5" descr="Diagram&#10;&#10;Description automatically generated">
             <a:extLst>
               <a:ext uri="{FF2B5EF4-FFF2-40B4-BE49-F238E27FC236}">
-                <a16:creationId xmlns:a16="http://schemas.microsoft.com/office/drawing/2014/main" id="{1D1AF36F-30AB-F03C-EEDA-14C11DB2749D}"/>
+                <a16:creationId xmlns:a16="http://schemas.microsoft.com/office/drawing/2014/main" id="{0AE53A09-11A6-7D5D-5752-79C56178BB99}"/>
               </a:ext>
             </a:extLst>
           </p:cNvPr>
@@ -14166,15 +14017,15 @@
           <p:nvPr/>
         </p:nvPicPr>
         <p:blipFill>
-          <a:blip r:embed="rId2"/>
+          <a:blip r:embed="rId3"/>
           <a:stretch>
             <a:fillRect/>
           </a:stretch>
         </p:blipFill>
         <p:spPr>
           <a:xfrm>
-            <a:off x="3033992" y="4751888"/>
-            <a:ext cx="6124016" cy="2052222"/>
+            <a:off x="7160497" y="1938867"/>
+            <a:ext cx="4977491" cy="2239351"/>
           </a:xfrm>
           <a:prstGeom prst="rect">
             <a:avLst/>
@@ -14183,10 +14034,10 @@
       </p:pic>
       <p:sp>
         <p:nvSpPr>
-          <p:cNvPr id="11" name="TextBox 10">
+          <p:cNvPr id="7" name="TextBox 6">
             <a:extLst>
               <a:ext uri="{FF2B5EF4-FFF2-40B4-BE49-F238E27FC236}">
-                <a16:creationId xmlns:a16="http://schemas.microsoft.com/office/drawing/2014/main" id="{EB014B46-C4F9-0DAE-FD32-807ACBBF4785}"/>
+                <a16:creationId xmlns:a16="http://schemas.microsoft.com/office/drawing/2014/main" id="{86B7DFFE-3017-F778-312F-CE533FE365F9}"/>
               </a:ext>
             </a:extLst>
           </p:cNvPr>
@@ -14195,8 +14046,8 @@
         </p:nvSpPr>
         <p:spPr>
           <a:xfrm>
-            <a:off x="5829740" y="6502032"/>
-            <a:ext cx="585067" cy="246221"/>
+            <a:off x="10821282" y="3788751"/>
+            <a:ext cx="532518" cy="246221"/>
           </a:xfrm>
           <a:prstGeom prst="rect">
             <a:avLst/>
@@ -14211,7 +14062,7 @@
           <a:p>
             <a:r>
               <a:rPr lang="de-DE" sz="1000" dirty="0">
-                <a:hlinkClick r:id="rId3"/>
+                <a:hlinkClick r:id="rId4"/>
               </a:rPr>
               <a:t>source</a:t>
             </a:r>
@@ -14221,10 +14072,10 @@
       </p:sp>
       <p:sp>
         <p:nvSpPr>
-          <p:cNvPr id="5" name="TextBox 4">
+          <p:cNvPr id="8" name="TextBox 7">
             <a:extLst>
               <a:ext uri="{FF2B5EF4-FFF2-40B4-BE49-F238E27FC236}">
-                <a16:creationId xmlns:a16="http://schemas.microsoft.com/office/drawing/2014/main" id="{0569F717-FB14-0FE7-4F5C-30954C7F0AE0}"/>
+                <a16:creationId xmlns:a16="http://schemas.microsoft.com/office/drawing/2014/main" id="{177A5682-5BEA-BBAD-A038-0421C08772E7}"/>
               </a:ext>
             </a:extLst>
           </p:cNvPr>
@@ -14233,8 +14084,82 @@
         </p:nvSpPr>
         <p:spPr>
           <a:xfrm>
-            <a:off x="838200" y="1579179"/>
-            <a:ext cx="10515600" cy="461665"/>
+            <a:off x="7160497" y="1434598"/>
+            <a:ext cx="2143985" cy="369332"/>
+          </a:xfrm>
+          <a:prstGeom prst="rect">
+            <a:avLst/>
+          </a:prstGeom>
+          <a:noFill/>
+        </p:spPr>
+        <p:txBody>
+          <a:bodyPr wrap="none" rtlCol="0">
+            <a:spAutoFit/>
+          </a:bodyPr>
+          <a:lstStyle/>
+          <a:p>
+            <a:r>
+              <a:rPr lang="en-GB" dirty="0"/>
+              <a:t>d</a:t>
+            </a:r>
+            <a:r>
+              <a:rPr lang="en-DE" dirty="0"/>
+              <a:t>iscriminative model</a:t>
+            </a:r>
+          </a:p>
+        </p:txBody>
+      </p:sp>
+      <p:sp>
+        <p:nvSpPr>
+          <p:cNvPr id="9" name="TextBox 8">
+            <a:extLst>
+              <a:ext uri="{FF2B5EF4-FFF2-40B4-BE49-F238E27FC236}">
+                <a16:creationId xmlns:a16="http://schemas.microsoft.com/office/drawing/2014/main" id="{EA3C9F72-7BD7-E913-FC6F-BB09F8C18FD1}"/>
+              </a:ext>
+            </a:extLst>
+          </p:cNvPr>
+          <p:cNvSpPr txBox="1"/>
+          <p:nvPr/>
+        </p:nvSpPr>
+        <p:spPr>
+          <a:xfrm>
+            <a:off x="9644682" y="1428767"/>
+            <a:ext cx="1824730" cy="369332"/>
+          </a:xfrm>
+          <a:prstGeom prst="rect">
+            <a:avLst/>
+          </a:prstGeom>
+          <a:noFill/>
+        </p:spPr>
+        <p:txBody>
+          <a:bodyPr wrap="none" rtlCol="0">
+            <a:spAutoFit/>
+          </a:bodyPr>
+          <a:lstStyle/>
+          <a:p>
+            <a:r>
+              <a:rPr lang="en-DE" dirty="0"/>
+              <a:t>generative model</a:t>
+            </a:r>
+          </a:p>
+        </p:txBody>
+      </p:sp>
+      <p:sp>
+        <p:nvSpPr>
+          <p:cNvPr id="10" name="TextBox 9">
+            <a:extLst>
+              <a:ext uri="{FF2B5EF4-FFF2-40B4-BE49-F238E27FC236}">
+                <a16:creationId xmlns:a16="http://schemas.microsoft.com/office/drawing/2014/main" id="{546DFC40-2123-31B5-7B07-7C24DA60F552}"/>
+              </a:ext>
+            </a:extLst>
+          </p:cNvPr>
+          <p:cNvSpPr txBox="1"/>
+          <p:nvPr/>
+        </p:nvSpPr>
+        <p:spPr>
+          <a:xfrm>
+            <a:off x="838201" y="5563290"/>
+            <a:ext cx="9602518" cy="830997"/>
           </a:xfrm>
           <a:prstGeom prst="rect">
             <a:avLst/>
@@ -14248,22 +14173,24 @@
           <a:lstStyle/>
           <a:p>
             <a:r>
-              <a:rPr lang="en-GB" sz="2400" b="1" dirty="0"/>
-              <a:t>encoder-decoder</a:t>
-            </a:r>
-            <a:r>
               <a:rPr lang="en-GB" sz="2400" dirty="0"/>
-              <a:t> LLMs: sequence-to-sequence, e.g., machine translation</a:t>
+              <a:t>Generative models can be used for predictive tasks (Bayes theorem).</a:t>
+            </a:r>
+          </a:p>
+          <a:p>
+            <a:r>
+              <a:rPr lang="en-GB" sz="2400" dirty="0"/>
+              <a:t>But predictive models are usually better at it.</a:t>
             </a:r>
           </a:p>
         </p:txBody>
       </p:sp>
       <p:sp>
         <p:nvSpPr>
-          <p:cNvPr id="8" name="TextBox 7">
+          <p:cNvPr id="13" name="TextBox 12">
             <a:extLst>
               <a:ext uri="{FF2B5EF4-FFF2-40B4-BE49-F238E27FC236}">
-                <a16:creationId xmlns:a16="http://schemas.microsoft.com/office/drawing/2014/main" id="{EC6FAC6A-FEB5-ED22-6F4E-7015532B77F5}"/>
+                <a16:creationId xmlns:a16="http://schemas.microsoft.com/office/drawing/2014/main" id="{9C9DE10A-881C-D96E-639E-D4428BF368A7}"/>
               </a:ext>
             </a:extLst>
           </p:cNvPr>
@@ -14272,8 +14199,8 @@
         </p:nvSpPr>
         <p:spPr>
           <a:xfrm>
-            <a:off x="1384752" y="5316334"/>
-            <a:ext cx="1452562" cy="769441"/>
+            <a:off x="6946003" y="4227883"/>
+            <a:ext cx="5191985" cy="923330"/>
           </a:xfrm>
           <a:prstGeom prst="rect">
             <a:avLst/>
@@ -14287,83 +14214,20 @@
           <a:lstStyle/>
           <a:p>
             <a:r>
-              <a:rPr lang="en-GB" sz="2200" dirty="0"/>
-              <a:t>example: </a:t>
-            </a:r>
-            <a:r>
-              <a:rPr lang="en-DE" sz="2200" dirty="0"/>
-              <a:t>BERT</a:t>
-            </a:r>
-            <a:endParaRPr lang="en-GB" sz="2200" dirty="0"/>
-          </a:p>
-        </p:txBody>
-      </p:sp>
-      <p:sp>
-        <p:nvSpPr>
-          <p:cNvPr id="10" name="TextBox 9">
-            <a:extLst>
-              <a:ext uri="{FF2B5EF4-FFF2-40B4-BE49-F238E27FC236}">
-                <a16:creationId xmlns:a16="http://schemas.microsoft.com/office/drawing/2014/main" id="{BBC7CC66-9A7D-E61A-CC1D-388886D1504D}"/>
-              </a:ext>
-            </a:extLst>
-          </p:cNvPr>
-          <p:cNvSpPr txBox="1"/>
-          <p:nvPr/>
-        </p:nvSpPr>
-        <p:spPr>
-          <a:xfrm>
-            <a:off x="9551365" y="5316334"/>
-            <a:ext cx="1489168" cy="769441"/>
-          </a:xfrm>
-          <a:prstGeom prst="rect">
-            <a:avLst/>
-          </a:prstGeom>
-          <a:noFill/>
-        </p:spPr>
-        <p:txBody>
-          <a:bodyPr wrap="square">
-            <a:spAutoFit/>
-          </a:bodyPr>
-          <a:lstStyle/>
-          <a:p>
-            <a:r>
-              <a:rPr lang="en-GB" sz="2200" dirty="0"/>
-              <a:t>example: GPT</a:t>
-            </a:r>
-          </a:p>
-        </p:txBody>
-      </p:sp>
-      <p:sp>
-        <p:nvSpPr>
-          <p:cNvPr id="7" name="TextBox 6">
-            <a:extLst>
-              <a:ext uri="{FF2B5EF4-FFF2-40B4-BE49-F238E27FC236}">
-                <a16:creationId xmlns:a16="http://schemas.microsoft.com/office/drawing/2014/main" id="{1F92F603-5333-9879-080E-7B3AE86BF4F1}"/>
-              </a:ext>
-            </a:extLst>
-          </p:cNvPr>
-          <p:cNvSpPr txBox="1"/>
-          <p:nvPr/>
-        </p:nvSpPr>
-        <p:spPr>
-          <a:xfrm>
-            <a:off x="6502395" y="4947002"/>
-            <a:ext cx="1140569" cy="369332"/>
-          </a:xfrm>
-          <a:prstGeom prst="rect">
-            <a:avLst/>
-          </a:prstGeom>
-          <a:noFill/>
-        </p:spPr>
-        <p:txBody>
-          <a:bodyPr wrap="none" rtlCol="0">
-            <a:spAutoFit/>
-          </a:bodyPr>
-          <a:lstStyle/>
-          <a:p>
-            <a:r>
-              <a:rPr lang="en-GB" dirty="0"/>
-              <a:t>aka causal</a:t>
+              <a:rPr lang="en-GB" sz="1800" dirty="0"/>
+              <a:t>task of g</a:t>
+            </a:r>
+            <a:r>
+              <a:rPr lang="en-DE" sz="1800" dirty="0"/>
+              <a:t>enerative models more difficult: </a:t>
+            </a:r>
+            <a:r>
+              <a:rPr lang="en-GB" sz="1800" dirty="0"/>
+              <a:t>need to </a:t>
+            </a:r>
+            <a:r>
+              <a:rPr lang="en-DE" sz="1800" dirty="0"/>
+              <a:t>model full data distribution rather than merely find patterns in inputs to distinguish outputs</a:t>
             </a:r>
           </a:p>
         </p:txBody>
@@ -14371,7 +14235,7 @@
     </p:spTree>
     <p:extLst>
       <p:ext uri="{BB962C8B-B14F-4D97-AF65-F5344CB8AC3E}">
-        <p14:creationId xmlns:p14="http://schemas.microsoft.com/office/powerpoint/2010/main" val="1609967323"/>
+        <p14:creationId xmlns:p14="http://schemas.microsoft.com/office/powerpoint/2010/main" val="2882629002"/>
       </p:ext>
     </p:extLst>
   </p:cSld>
@@ -14398,42 +14262,12 @@
           <a:chExt cx="0" cy="0"/>
         </a:xfrm>
       </p:grpSpPr>
-      <p:pic>
-        <p:nvPicPr>
-          <p:cNvPr id="8" name="Picture 11">
+      <p:sp>
+        <p:nvSpPr>
+          <p:cNvPr id="2" name="Titel 1">
             <a:extLst>
               <a:ext uri="{FF2B5EF4-FFF2-40B4-BE49-F238E27FC236}">
-                <a16:creationId xmlns:a16="http://schemas.microsoft.com/office/drawing/2014/main" id="{C95613AD-E005-497D-EB03-7E2F66A33818}"/>
-              </a:ext>
-            </a:extLst>
-          </p:cNvPr>
-          <p:cNvPicPr>
-            <a:picLocks noChangeAspect="1"/>
-          </p:cNvPicPr>
-          <p:nvPr/>
-        </p:nvPicPr>
-        <p:blipFill>
-          <a:blip r:embed="rId2"/>
-          <a:stretch>
-            <a:fillRect/>
-          </a:stretch>
-        </p:blipFill>
-        <p:spPr>
-          <a:xfrm>
-            <a:off x="7321954" y="3815869"/>
-            <a:ext cx="4043487" cy="2884586"/>
-          </a:xfrm>
-          <a:prstGeom prst="rect">
-            <a:avLst/>
-          </a:prstGeom>
-        </p:spPr>
-      </p:pic>
-      <p:sp>
-        <p:nvSpPr>
-          <p:cNvPr id="2" name="Title 1">
-            <a:extLst>
-              <a:ext uri="{FF2B5EF4-FFF2-40B4-BE49-F238E27FC236}">
-                <a16:creationId xmlns:a16="http://schemas.microsoft.com/office/drawing/2014/main" id="{EE2AC643-1392-D338-CC96-97F0A5512BA1}"/>
+                <a16:creationId xmlns:a16="http://schemas.microsoft.com/office/drawing/2014/main" id="{57CC447E-0429-2D97-567A-FF3AB92BB514}"/>
               </a:ext>
             </a:extLst>
           </p:cNvPr>
@@ -14450,203 +14284,395 @@
           <a:lstStyle/>
           <a:p>
             <a:r>
-              <a:rPr lang="en-DE" dirty="0"/>
-              <a:t>Encoder-Decoder Attention</a:t>
+              <a:rPr lang="de-DE" dirty="0"/>
+              <a:t>Autoregressive Text Generation</a:t>
             </a:r>
           </a:p>
         </p:txBody>
       </p:sp>
-      <mc:AlternateContent xmlns:mc="http://schemas.openxmlformats.org/markup-compatibility/2006" xmlns:a14="http://schemas.microsoft.com/office/drawing/2010/main">
-        <mc:Choice Requires="a14">
-          <p:sp>
-            <p:nvSpPr>
-              <p:cNvPr id="3" name="Content Placeholder 2">
-                <a:extLst>
-                  <a:ext uri="{FF2B5EF4-FFF2-40B4-BE49-F238E27FC236}">
-                    <a16:creationId xmlns:a16="http://schemas.microsoft.com/office/drawing/2014/main" id="{297768F7-8663-624F-0843-642682FAD6F6}"/>
-                  </a:ext>
-                </a:extLst>
-              </p:cNvPr>
-              <p:cNvSpPr>
-                <a:spLocks noGrp="1"/>
-              </p:cNvSpPr>
-              <p:nvPr>
-                <p:ph idx="1"/>
-              </p:nvPr>
-            </p:nvSpPr>
-            <p:spPr>
-              <a:xfrm>
-                <a:off x="596464" y="1825625"/>
-                <a:ext cx="6483753" cy="4351338"/>
-              </a:xfrm>
-            </p:spPr>
-            <p:txBody>
-              <a:bodyPr>
-                <a:normAutofit fontScale="92500" lnSpcReduction="10000"/>
-              </a:bodyPr>
-              <a:lstStyle/>
-              <a:p>
-                <a:pPr marL="0" indent="0">
-                  <a:buNone/>
-                </a:pPr>
-                <a:r>
-                  <a:rPr lang="en-GB" dirty="0"/>
-                  <a:t>popular use case: machine translation</a:t>
-                </a:r>
-              </a:p>
-              <a:p>
-                <a:pPr marL="0" indent="0">
-                  <a:buNone/>
-                </a:pPr>
-                <a:endParaRPr lang="en-GB" dirty="0"/>
-              </a:p>
-              <a:p>
-                <a:pPr marL="0" indent="0">
-                  <a:buNone/>
-                </a:pPr>
-                <a:r>
-                  <a:rPr lang="en-GB" dirty="0"/>
-                  <a:t>aka cross-attention:</a:t>
-                </a:r>
-              </a:p>
-              <a:p>
-                <a:pPr marL="0" indent="0">
-                  <a:buNone/>
-                </a:pPr>
-                <a:r>
-                  <a:rPr lang="en-GB" dirty="0"/>
-                  <a:t>connection between encoder and decoder, helping decoder to focus on relevant parts of input sentence</a:t>
-                </a:r>
-              </a:p>
-              <a:p>
-                <a:pPr marL="0" indent="0">
-                  <a:buNone/>
-                </a:pPr>
-                <a:endParaRPr lang="en-GB" dirty="0"/>
-              </a:p>
-              <a:p>
-                <a:pPr marL="0" indent="0">
-                  <a:buNone/>
-                </a:pPr>
-                <a:r>
-                  <a:rPr lang="en-GB" dirty="0"/>
-                  <a:t>output of last encoder transformed into </a:t>
-                </a:r>
-                <a14:m>
-                  <m:oMath xmlns:m="http://schemas.openxmlformats.org/officeDocument/2006/math">
-                    <m:r>
-                      <m:rPr>
-                        <m:sty m:val="p"/>
-                      </m:rPr>
-                      <a:rPr lang="en-US">
-                        <a:latin typeface="Cambria Math" panose="02040503050406030204" pitchFamily="18" charset="0"/>
-                      </a:rPr>
-                      <m:t>K</m:t>
-                    </m:r>
-                  </m:oMath>
-                </a14:m>
-                <a:r>
-                  <a:rPr lang="en-GB" dirty="0"/>
-                  <a:t> and </a:t>
-                </a:r>
-                <a14:m>
-                  <m:oMath xmlns:m="http://schemas.openxmlformats.org/officeDocument/2006/math">
-                    <m:r>
-                      <m:rPr>
-                        <m:sty m:val="p"/>
-                      </m:rPr>
-                      <a:rPr lang="en-US" b="0" i="0" smtClean="0">
-                        <a:latin typeface="Cambria Math" panose="02040503050406030204" pitchFamily="18" charset="0"/>
-                      </a:rPr>
-                      <m:t>V</m:t>
-                    </m:r>
-                  </m:oMath>
-                </a14:m>
-                <a:endParaRPr lang="en-US" dirty="0">
-                  <a:latin typeface="Cambria Math" panose="02040503050406030204" pitchFamily="18" charset="0"/>
-                </a:endParaRPr>
-              </a:p>
-              <a:p>
-                <a:pPr marL="0" indent="0">
-                  <a:buNone/>
-                </a:pPr>
-                <a14:m>
-                  <m:oMath xmlns:m="http://schemas.openxmlformats.org/officeDocument/2006/math">
-                    <m:r>
-                      <m:rPr>
-                        <m:sty m:val="p"/>
-                      </m:rPr>
-                      <a:rPr lang="en-US">
-                        <a:latin typeface="Cambria Math" panose="02040503050406030204" pitchFamily="18" charset="0"/>
-                      </a:rPr>
-                      <m:t>Q</m:t>
-                    </m:r>
-                  </m:oMath>
-                </a14:m>
-                <a:r>
-                  <a:rPr lang="en-GB" dirty="0">
-                    <a:sym typeface="Wingdings" pitchFamily="2" charset="2"/>
-                  </a:rPr>
-                  <a:t> from </a:t>
-                </a:r>
-                <a:r>
-                  <a:rPr lang="en-GB" dirty="0"/>
-                  <a:t>each decoder’s cross-attention layer</a:t>
-                </a:r>
-              </a:p>
-            </p:txBody>
-          </p:sp>
-        </mc:Choice>
-        <mc:Fallback xmlns="">
-          <p:sp>
-            <p:nvSpPr>
-              <p:cNvPr id="3" name="Content Placeholder 2">
-                <a:extLst>
-                  <a:ext uri="{FF2B5EF4-FFF2-40B4-BE49-F238E27FC236}">
-                    <a16:creationId xmlns:a16="http://schemas.microsoft.com/office/drawing/2014/main" id="{297768F7-8663-624F-0843-642682FAD6F6}"/>
-                  </a:ext>
-                </a:extLst>
-              </p:cNvPr>
-              <p:cNvSpPr>
-                <a:spLocks noGrp="1" noRot="1" noChangeAspect="1" noMove="1" noResize="1" noEditPoints="1" noAdjustHandles="1" noChangeArrowheads="1" noChangeShapeType="1" noTextEdit="1"/>
-              </p:cNvSpPr>
-              <p:nvPr>
-                <p:ph idx="1"/>
-              </p:nvPr>
-            </p:nvSpPr>
-            <p:spPr>
-              <a:xfrm>
-                <a:off x="596464" y="1825625"/>
-                <a:ext cx="6483753" cy="4351338"/>
-              </a:xfrm>
-              <a:blipFill>
-                <a:blip r:embed="rId3"/>
-                <a:stretch>
-                  <a:fillRect l="-1761" t="-2616" r="-587"/>
-                </a:stretch>
-              </a:blipFill>
-            </p:spPr>
-            <p:txBody>
-              <a:bodyPr/>
-              <a:lstStyle/>
-              <a:p>
-                <a:r>
-                  <a:rPr lang="de-DE">
-                    <a:noFill/>
-                  </a:rPr>
-                  <a:t> </a:t>
-                </a:r>
-              </a:p>
-            </p:txBody>
-          </p:sp>
-        </mc:Fallback>
-      </mc:AlternateContent>
       <p:sp>
         <p:nvSpPr>
-          <p:cNvPr id="4" name="Slide Number Placeholder 3">
+          <p:cNvPr id="3" name="Inhaltsplatzhalter 2">
             <a:extLst>
               <a:ext uri="{FF2B5EF4-FFF2-40B4-BE49-F238E27FC236}">
-                <a16:creationId xmlns:a16="http://schemas.microsoft.com/office/drawing/2014/main" id="{37098BBA-7090-7AEB-3E42-79B81AA3FF44}"/>
+                <a16:creationId xmlns:a16="http://schemas.microsoft.com/office/drawing/2014/main" id="{AC0B0DCB-4295-F0FB-A4D6-FB056FA7F767}"/>
+              </a:ext>
+            </a:extLst>
+          </p:cNvPr>
+          <p:cNvSpPr>
+            <a:spLocks noGrp="1"/>
+          </p:cNvSpPr>
+          <p:nvPr>
+            <p:ph idx="1"/>
+          </p:nvPr>
+        </p:nvSpPr>
+        <p:spPr/>
+        <p:txBody>
+          <a:bodyPr/>
+          <a:lstStyle/>
+          <a:p>
+            <a:pPr marL="0" indent="0">
+              <a:buNone/>
+            </a:pPr>
+            <a:r>
+              <a:rPr lang="de-DE" dirty="0"/>
+              <a:t>LLMs (autoregressive </a:t>
+            </a:r>
+            <a:r>
+              <a:rPr lang="de-DE" dirty="0" err="1"/>
+              <a:t>transformers</a:t>
+            </a:r>
+            <a:r>
+              <a:rPr lang="de-DE" dirty="0"/>
+              <a:t>) </a:t>
+            </a:r>
+            <a:r>
+              <a:rPr lang="de-DE" dirty="0" err="1">
+                <a:sym typeface="Wingdings" pitchFamily="2" charset="2"/>
+              </a:rPr>
+              <a:t>generate</a:t>
+            </a:r>
+            <a:r>
+              <a:rPr lang="de-DE" dirty="0">
+                <a:sym typeface="Wingdings" pitchFamily="2" charset="2"/>
+              </a:rPr>
+              <a:t> </a:t>
+            </a:r>
+            <a:r>
+              <a:rPr lang="en-DE">
+                <a:sym typeface="Wingdings" pitchFamily="2" charset="2"/>
+              </a:rPr>
+              <a:t>one output token </a:t>
+            </a:r>
+            <a:r>
+              <a:rPr lang="de-DE" dirty="0">
+                <a:sym typeface="Wingdings" pitchFamily="2" charset="2"/>
+              </a:rPr>
+              <a:t>at a time (</a:t>
+            </a:r>
+            <a:r>
+              <a:rPr lang="de-DE" dirty="0" err="1">
+                <a:sym typeface="Wingdings" pitchFamily="2" charset="2"/>
+              </a:rPr>
+              <a:t>according</a:t>
+            </a:r>
+            <a:r>
+              <a:rPr lang="de-DE" dirty="0">
+                <a:sym typeface="Wingdings" pitchFamily="2" charset="2"/>
+              </a:rPr>
+              <a:t> </a:t>
+            </a:r>
+            <a:r>
+              <a:rPr lang="de-DE" dirty="0" err="1">
+                <a:sym typeface="Wingdings" pitchFamily="2" charset="2"/>
+              </a:rPr>
+              <a:t>to</a:t>
+            </a:r>
+            <a:r>
+              <a:rPr lang="de-DE" dirty="0">
+                <a:sym typeface="Wingdings" pitchFamily="2" charset="2"/>
+              </a:rPr>
+              <a:t> </a:t>
+            </a:r>
+            <a:r>
+              <a:rPr lang="de-DE" dirty="0" err="1">
+                <a:sym typeface="Wingdings" pitchFamily="2" charset="2"/>
+              </a:rPr>
+              <a:t>predicted</a:t>
+            </a:r>
+            <a:r>
+              <a:rPr lang="de-DE" dirty="0">
+                <a:sym typeface="Wingdings" pitchFamily="2" charset="2"/>
+              </a:rPr>
+              <a:t> </a:t>
+            </a:r>
+            <a:r>
+              <a:rPr lang="de-DE" dirty="0" err="1">
+                <a:sym typeface="Wingdings" pitchFamily="2" charset="2"/>
+              </a:rPr>
+              <a:t>probabilities</a:t>
+            </a:r>
+            <a:r>
+              <a:rPr lang="de-DE" dirty="0">
+                <a:sym typeface="Wingdings" pitchFamily="2" charset="2"/>
+              </a:rPr>
+              <a:t>)</a:t>
+            </a:r>
+          </a:p>
+          <a:p>
+            <a:pPr marL="0" indent="0">
+              <a:buNone/>
+            </a:pPr>
+            <a:endParaRPr lang="de-DE" dirty="0">
+              <a:sym typeface="Wingdings" pitchFamily="2" charset="2"/>
+            </a:endParaRPr>
+          </a:p>
+          <a:p>
+            <a:pPr marL="0" indent="0">
+              <a:buNone/>
+            </a:pPr>
+            <a:r>
+              <a:rPr lang="de-DE" dirty="0" err="1">
+                <a:sym typeface="Wingdings" pitchFamily="2" charset="2"/>
+              </a:rPr>
+              <a:t>then</a:t>
+            </a:r>
+            <a:r>
+              <a:rPr lang="de-DE" dirty="0">
+                <a:sym typeface="Wingdings" pitchFamily="2" charset="2"/>
+              </a:rPr>
+              <a:t> </a:t>
+            </a:r>
+            <a:r>
+              <a:rPr lang="de-DE" dirty="0" err="1">
+                <a:sym typeface="Wingdings" pitchFamily="2" charset="2"/>
+              </a:rPr>
+              <a:t>add</a:t>
+            </a:r>
+            <a:r>
+              <a:rPr lang="de-DE" dirty="0">
+                <a:sym typeface="Wingdings" pitchFamily="2" charset="2"/>
+              </a:rPr>
+              <a:t> </a:t>
+            </a:r>
+            <a:r>
+              <a:rPr lang="de-DE" dirty="0" err="1">
+                <a:sym typeface="Wingdings" pitchFamily="2" charset="2"/>
+              </a:rPr>
+              <a:t>it</a:t>
+            </a:r>
+            <a:r>
+              <a:rPr lang="de-DE" dirty="0">
+                <a:sym typeface="Wingdings" pitchFamily="2" charset="2"/>
+              </a:rPr>
+              <a:t> </a:t>
+            </a:r>
+            <a:r>
+              <a:rPr lang="de-DE" dirty="0" err="1">
+                <a:sym typeface="Wingdings" pitchFamily="2" charset="2"/>
+              </a:rPr>
+              <a:t>to</a:t>
+            </a:r>
+            <a:r>
+              <a:rPr lang="de-DE" dirty="0">
+                <a:sym typeface="Wingdings" pitchFamily="2" charset="2"/>
+              </a:rPr>
+              <a:t> </a:t>
+            </a:r>
+            <a:r>
+              <a:rPr lang="de-DE" dirty="0" err="1">
+                <a:sym typeface="Wingdings" pitchFamily="2" charset="2"/>
+              </a:rPr>
+              <a:t>the</a:t>
+            </a:r>
+            <a:r>
+              <a:rPr lang="de-DE" dirty="0">
+                <a:sym typeface="Wingdings" pitchFamily="2" charset="2"/>
+              </a:rPr>
+              <a:t> </a:t>
+            </a:r>
+            <a:r>
+              <a:rPr lang="de-DE" dirty="0" err="1">
+                <a:sym typeface="Wingdings" pitchFamily="2" charset="2"/>
+              </a:rPr>
+              <a:t>context</a:t>
+            </a:r>
+            <a:r>
+              <a:rPr lang="de-DE" dirty="0">
+                <a:sym typeface="Wingdings" pitchFamily="2" charset="2"/>
+              </a:rPr>
+              <a:t> </a:t>
+            </a:r>
+            <a:r>
+              <a:rPr lang="de-DE" dirty="0" err="1">
+                <a:sym typeface="Wingdings" pitchFamily="2" charset="2"/>
+              </a:rPr>
+              <a:t>for</a:t>
+            </a:r>
+            <a:r>
+              <a:rPr lang="de-DE" dirty="0">
+                <a:sym typeface="Wingdings" pitchFamily="2" charset="2"/>
+              </a:rPr>
+              <a:t> </a:t>
+            </a:r>
+            <a:r>
+              <a:rPr lang="de-DE" dirty="0" err="1">
+                <a:sym typeface="Wingdings" pitchFamily="2" charset="2"/>
+              </a:rPr>
+              <a:t>the</a:t>
+            </a:r>
+            <a:r>
+              <a:rPr lang="de-DE" dirty="0">
+                <a:sym typeface="Wingdings" pitchFamily="2" charset="2"/>
+              </a:rPr>
+              <a:t> </a:t>
+            </a:r>
+            <a:r>
+              <a:rPr lang="de-DE" dirty="0" err="1">
+                <a:sym typeface="Wingdings" pitchFamily="2" charset="2"/>
+              </a:rPr>
+              <a:t>prediction</a:t>
+            </a:r>
+            <a:r>
+              <a:rPr lang="de-DE" dirty="0">
+                <a:sym typeface="Wingdings" pitchFamily="2" charset="2"/>
+              </a:rPr>
+              <a:t> </a:t>
+            </a:r>
+            <a:r>
+              <a:rPr lang="de-DE" dirty="0" err="1">
+                <a:sym typeface="Wingdings" pitchFamily="2" charset="2"/>
+              </a:rPr>
+              <a:t>of</a:t>
+            </a:r>
+            <a:r>
+              <a:rPr lang="de-DE" dirty="0">
+                <a:sym typeface="Wingdings" pitchFamily="2" charset="2"/>
+              </a:rPr>
+              <a:t> </a:t>
+            </a:r>
+            <a:r>
+              <a:rPr lang="de-DE" dirty="0" err="1">
+                <a:sym typeface="Wingdings" pitchFamily="2" charset="2"/>
+              </a:rPr>
+              <a:t>the</a:t>
+            </a:r>
+            <a:r>
+              <a:rPr lang="de-DE" dirty="0">
+                <a:sym typeface="Wingdings" pitchFamily="2" charset="2"/>
+              </a:rPr>
+              <a:t> </a:t>
+            </a:r>
+            <a:r>
+              <a:rPr lang="de-DE" dirty="0" err="1">
+                <a:sym typeface="Wingdings" pitchFamily="2" charset="2"/>
+              </a:rPr>
+              <a:t>next</a:t>
+            </a:r>
+            <a:r>
+              <a:rPr lang="de-DE" dirty="0">
+                <a:sym typeface="Wingdings" pitchFamily="2" charset="2"/>
+              </a:rPr>
+              <a:t> </a:t>
+            </a:r>
+            <a:r>
+              <a:rPr lang="de-DE" dirty="0" err="1">
+                <a:sym typeface="Wingdings" pitchFamily="2" charset="2"/>
+              </a:rPr>
+              <a:t>token</a:t>
+            </a:r>
+            <a:endParaRPr lang="de-DE" dirty="0">
+              <a:sym typeface="Wingdings" pitchFamily="2" charset="2"/>
+            </a:endParaRPr>
+          </a:p>
+          <a:p>
+            <a:pPr marL="0" indent="0">
+              <a:buNone/>
+            </a:pPr>
+            <a:endParaRPr lang="de-DE" dirty="0">
+              <a:sym typeface="Wingdings" pitchFamily="2" charset="2"/>
+            </a:endParaRPr>
+          </a:p>
+          <a:p>
+            <a:pPr marL="0" indent="0">
+              <a:buNone/>
+            </a:pPr>
+            <a:r>
+              <a:rPr lang="de-DE" dirty="0">
+                <a:sym typeface="Wingdings" pitchFamily="2" charset="2"/>
+              </a:rPr>
+              <a:t> </a:t>
+            </a:r>
+            <a:r>
+              <a:rPr lang="de-DE" dirty="0" err="1">
+                <a:sym typeface="Wingdings" pitchFamily="2" charset="2"/>
+              </a:rPr>
+              <a:t>resulting</a:t>
+            </a:r>
+            <a:r>
+              <a:rPr lang="de-DE" dirty="0">
+                <a:sym typeface="Wingdings" pitchFamily="2" charset="2"/>
+              </a:rPr>
+              <a:t> in a </a:t>
+            </a:r>
+            <a:r>
+              <a:rPr lang="de-DE" dirty="0" err="1">
+                <a:sym typeface="Wingdings" pitchFamily="2" charset="2"/>
+              </a:rPr>
+              <a:t>full</a:t>
+            </a:r>
+            <a:r>
+              <a:rPr lang="de-DE" dirty="0">
+                <a:sym typeface="Wingdings" pitchFamily="2" charset="2"/>
+              </a:rPr>
+              <a:t> </a:t>
+            </a:r>
+            <a:r>
+              <a:rPr lang="de-DE" dirty="0" err="1">
+                <a:sym typeface="Wingdings" pitchFamily="2" charset="2"/>
+              </a:rPr>
+              <a:t>text</a:t>
+            </a:r>
+            <a:r>
+              <a:rPr lang="de-DE" dirty="0">
+                <a:sym typeface="Wingdings" pitchFamily="2" charset="2"/>
+              </a:rPr>
+              <a:t>, </a:t>
+            </a:r>
+            <a:r>
+              <a:rPr lang="de-DE" dirty="0" err="1">
+                <a:sym typeface="Wingdings" pitchFamily="2" charset="2"/>
+              </a:rPr>
+              <a:t>sampled</a:t>
+            </a:r>
+            <a:r>
+              <a:rPr lang="de-DE" dirty="0">
+                <a:sym typeface="Wingdings" pitchFamily="2" charset="2"/>
+              </a:rPr>
+              <a:t> </a:t>
+            </a:r>
+            <a:r>
+              <a:rPr lang="de-DE" dirty="0" err="1">
+                <a:sym typeface="Wingdings" pitchFamily="2" charset="2"/>
+              </a:rPr>
+              <a:t>from</a:t>
+            </a:r>
+            <a:r>
+              <a:rPr lang="de-DE" dirty="0">
+                <a:sym typeface="Wingdings" pitchFamily="2" charset="2"/>
+              </a:rPr>
+              <a:t> </a:t>
+            </a:r>
+            <a:r>
+              <a:rPr lang="de-DE" dirty="0" err="1">
+                <a:sym typeface="Wingdings" pitchFamily="2" charset="2"/>
+              </a:rPr>
+              <a:t>predicted</a:t>
+            </a:r>
+            <a:r>
+              <a:rPr lang="de-DE" dirty="0">
+                <a:sym typeface="Wingdings" pitchFamily="2" charset="2"/>
+              </a:rPr>
+              <a:t> </a:t>
+            </a:r>
+            <a:r>
+              <a:rPr lang="de-DE" dirty="0" err="1">
+                <a:sym typeface="Wingdings" pitchFamily="2" charset="2"/>
+              </a:rPr>
+              <a:t>probabilities</a:t>
+            </a:r>
+            <a:endParaRPr lang="de-DE" dirty="0">
+              <a:sym typeface="Wingdings" pitchFamily="2" charset="2"/>
+            </a:endParaRPr>
+          </a:p>
+        </p:txBody>
+      </p:sp>
+      <p:sp>
+        <p:nvSpPr>
+          <p:cNvPr id="4" name="Foliennummernplatzhalter 3">
+            <a:extLst>
+              <a:ext uri="{FF2B5EF4-FFF2-40B4-BE49-F238E27FC236}">
+                <a16:creationId xmlns:a16="http://schemas.microsoft.com/office/drawing/2014/main" id="{029B1226-05C9-DC10-1D27-CC10304632E1}"/>
               </a:ext>
             </a:extLst>
           </p:cNvPr>
@@ -14662,138 +14688,18 @@
           <a:bodyPr/>
           <a:lstStyle/>
           <a:p>
-            <a:fld id="{849D05A8-43E9-1C49-8606-50AB68220DEC}" type="slidenum">
-              <a:rPr lang="en-DE" smtClean="0"/>
+            <a:fld id="{4055531C-5681-6B44-B2CA-926D7A74B06D}" type="slidenum">
+              <a:rPr lang="de-DE" smtClean="0"/>
               <a:t>5</a:t>
             </a:fld>
-            <a:endParaRPr lang="en-DE"/>
-          </a:p>
-        </p:txBody>
-      </p:sp>
-      <p:pic>
-        <p:nvPicPr>
-          <p:cNvPr id="5" name="Picture 4">
-            <a:extLst>
-              <a:ext uri="{FF2B5EF4-FFF2-40B4-BE49-F238E27FC236}">
-                <a16:creationId xmlns:a16="http://schemas.microsoft.com/office/drawing/2014/main" id="{089BAAB4-9057-2145-ACB4-054C604BB981}"/>
-              </a:ext>
-            </a:extLst>
-          </p:cNvPr>
-          <p:cNvPicPr>
-            <a:picLocks noChangeAspect="1"/>
-          </p:cNvPicPr>
-          <p:nvPr/>
-        </p:nvPicPr>
-        <p:blipFill>
-          <a:blip r:embed="rId4"/>
-          <a:stretch>
-            <a:fillRect/>
-          </a:stretch>
-        </p:blipFill>
-        <p:spPr>
-          <a:xfrm>
-            <a:off x="7693578" y="41005"/>
-            <a:ext cx="2566467" cy="3647085"/>
-          </a:xfrm>
-          <a:prstGeom prst="rect">
-            <a:avLst/>
-          </a:prstGeom>
-        </p:spPr>
-      </p:pic>
-      <p:sp>
-        <p:nvSpPr>
-          <p:cNvPr id="7" name="Rounded Rectangle 6">
-            <a:extLst>
-              <a:ext uri="{FF2B5EF4-FFF2-40B4-BE49-F238E27FC236}">
-                <a16:creationId xmlns:a16="http://schemas.microsoft.com/office/drawing/2014/main" id="{DB1A21D9-4A69-2CFC-CD45-9DB36AB5CD91}"/>
-              </a:ext>
-            </a:extLst>
-          </p:cNvPr>
-          <p:cNvSpPr/>
-          <p:nvPr/>
-        </p:nvSpPr>
-        <p:spPr>
-          <a:xfrm>
-            <a:off x="8934771" y="1492469"/>
-            <a:ext cx="829345" cy="409903"/>
-          </a:xfrm>
-          <a:prstGeom prst="roundRect">
-            <a:avLst/>
-          </a:prstGeom>
-          <a:noFill/>
-          <a:ln w="38100">
-            <a:solidFill>
-              <a:srgbClr val="FF0000"/>
-            </a:solidFill>
-          </a:ln>
-        </p:spPr>
-        <p:style>
-          <a:lnRef idx="2">
-            <a:schemeClr val="accent1">
-              <a:shade val="50000"/>
-            </a:schemeClr>
-          </a:lnRef>
-          <a:fillRef idx="1">
-            <a:schemeClr val="accent1"/>
-          </a:fillRef>
-          <a:effectRef idx="0">
-            <a:schemeClr val="accent1"/>
-          </a:effectRef>
-          <a:fontRef idx="minor">
-            <a:schemeClr val="lt1"/>
-          </a:fontRef>
-        </p:style>
-        <p:txBody>
-          <a:bodyPr rtlCol="0" anchor="ctr"/>
-          <a:lstStyle/>
-          <a:p>
-            <a:pPr algn="ctr"/>
-            <a:endParaRPr lang="en-DE"/>
-          </a:p>
-        </p:txBody>
-      </p:sp>
-      <p:sp>
-        <p:nvSpPr>
-          <p:cNvPr id="9" name="TextBox 15">
-            <a:extLst>
-              <a:ext uri="{FF2B5EF4-FFF2-40B4-BE49-F238E27FC236}">
-                <a16:creationId xmlns:a16="http://schemas.microsoft.com/office/drawing/2014/main" id="{83C9C157-D468-BC5B-F9B7-69D715FF4CD3}"/>
-              </a:ext>
-            </a:extLst>
-          </p:cNvPr>
-          <p:cNvSpPr txBox="1"/>
-          <p:nvPr/>
-        </p:nvSpPr>
-        <p:spPr>
-          <a:xfrm>
-            <a:off x="6726915" y="6515374"/>
-            <a:ext cx="595039" cy="246221"/>
-          </a:xfrm>
-          <a:prstGeom prst="rect">
-            <a:avLst/>
-          </a:prstGeom>
-          <a:noFill/>
-        </p:spPr>
-        <p:txBody>
-          <a:bodyPr wrap="square" rtlCol="0">
-            <a:spAutoFit/>
-          </a:bodyPr>
-          <a:lstStyle/>
-          <a:p>
-            <a:r>
-              <a:rPr lang="de-DE" sz="1000" dirty="0">
-                <a:hlinkClick r:id="rId5"/>
-              </a:rPr>
-              <a:t>source</a:t>
-            </a:r>
-            <a:endParaRPr lang="de-DE" sz="1000" dirty="0"/>
+            <a:endParaRPr lang="de-DE"/>
           </a:p>
         </p:txBody>
       </p:sp>
     </p:spTree>
     <p:extLst>
       <p:ext uri="{BB962C8B-B14F-4D97-AF65-F5344CB8AC3E}">
-        <p14:creationId xmlns:p14="http://schemas.microsoft.com/office/powerpoint/2010/main" val="294765695"/>
+        <p14:creationId xmlns:p14="http://schemas.microsoft.com/office/powerpoint/2010/main" val="3570366867"/>
       </p:ext>
     </p:extLst>
   </p:cSld>
@@ -14822,10 +14728,10 @@
       </p:grpSpPr>
       <p:sp>
         <p:nvSpPr>
-          <p:cNvPr id="2" name="Title 1">
+          <p:cNvPr id="2" name="Titel 1">
             <a:extLst>
               <a:ext uri="{FF2B5EF4-FFF2-40B4-BE49-F238E27FC236}">
-                <a16:creationId xmlns:a16="http://schemas.microsoft.com/office/drawing/2014/main" id="{90B6E34D-E690-5083-4D7A-A4FD8CBC0D85}"/>
+                <a16:creationId xmlns:a16="http://schemas.microsoft.com/office/drawing/2014/main" id="{75E5F3DB-B3C1-A7DB-3470-528028E1A36E}"/>
               </a:ext>
             </a:extLst>
           </p:cNvPr>
@@ -14842,152 +14748,888 @@
           <a:lstStyle/>
           <a:p>
             <a:r>
-              <a:rPr lang="en-GB" dirty="0"/>
-              <a:t>Example for E</a:t>
-            </a:r>
-            <a:r>
-              <a:rPr lang="en-DE" dirty="0"/>
-              <a:t>ncoder-Only </a:t>
-            </a:r>
-            <a:r>
-              <a:rPr lang="en-GB" dirty="0"/>
-              <a:t>LLM</a:t>
-            </a:r>
-            <a:endParaRPr lang="en-DE" dirty="0"/>
+              <a:rPr lang="de-DE" dirty="0" err="1"/>
+              <a:t>How</a:t>
+            </a:r>
+            <a:r>
+              <a:rPr lang="de-DE" dirty="0"/>
+              <a:t> </a:t>
+            </a:r>
+            <a:r>
+              <a:rPr lang="de-DE" dirty="0" err="1"/>
+              <a:t>are</a:t>
+            </a:r>
+            <a:r>
+              <a:rPr lang="de-DE" dirty="0"/>
+              <a:t> LLMs Generative Models </a:t>
+            </a:r>
+            <a:r>
+              <a:rPr lang="de-DE" dirty="0" err="1"/>
+              <a:t>then</a:t>
+            </a:r>
+            <a:r>
+              <a:rPr lang="de-DE" dirty="0"/>
+              <a:t>?</a:t>
+            </a:r>
           </a:p>
         </p:txBody>
       </p:sp>
+      <mc:AlternateContent xmlns:mc="http://schemas.openxmlformats.org/markup-compatibility/2006" xmlns:a14="http://schemas.microsoft.com/office/drawing/2010/main">
+        <mc:Choice Requires="a14">
+          <p:sp>
+            <p:nvSpPr>
+              <p:cNvPr id="3" name="Inhaltsplatzhalter 2">
+                <a:extLst>
+                  <a:ext uri="{FF2B5EF4-FFF2-40B4-BE49-F238E27FC236}">
+                    <a16:creationId xmlns:a16="http://schemas.microsoft.com/office/drawing/2014/main" id="{ECD50DE5-65E1-5BF4-D606-8B8555BA99A3}"/>
+                  </a:ext>
+                </a:extLst>
+              </p:cNvPr>
+              <p:cNvSpPr>
+                <a:spLocks noGrp="1"/>
+              </p:cNvSpPr>
+              <p:nvPr>
+                <p:ph idx="1"/>
+              </p:nvPr>
+            </p:nvSpPr>
+            <p:spPr/>
+            <p:txBody>
+              <a:bodyPr>
+                <a:normAutofit/>
+              </a:bodyPr>
+              <a:lstStyle/>
+              <a:p>
+                <a:pPr marL="0" indent="0">
+                  <a:buNone/>
+                </a:pPr>
+                <a:r>
+                  <a:rPr lang="de-DE" sz="2400" dirty="0"/>
+                  <a:t>at </a:t>
+                </a:r>
+                <a:r>
+                  <a:rPr lang="de-DE" sz="2400" dirty="0" err="1"/>
+                  <a:t>each</a:t>
+                </a:r>
+                <a:r>
+                  <a:rPr lang="de-DE" sz="2400" dirty="0"/>
+                  <a:t> </a:t>
+                </a:r>
+                <a:r>
+                  <a:rPr lang="de-DE" sz="2400" dirty="0" err="1"/>
+                  <a:t>step</a:t>
+                </a:r>
+                <a:r>
+                  <a:rPr lang="de-DE" sz="2400" dirty="0"/>
+                  <a:t>, </a:t>
+                </a:r>
+                <a:r>
+                  <a:rPr lang="de-DE" sz="2400" dirty="0" err="1"/>
+                  <a:t>take</a:t>
+                </a:r>
+                <a:r>
+                  <a:rPr lang="de-DE" sz="2400" dirty="0"/>
+                  <a:t> </a:t>
+                </a:r>
+                <a:r>
+                  <a:rPr lang="de-DE" sz="2400" dirty="0" err="1"/>
+                  <a:t>the</a:t>
+                </a:r>
+                <a:r>
+                  <a:rPr lang="de-DE" sz="2400" dirty="0"/>
+                  <a:t> </a:t>
+                </a:r>
+                <a:r>
+                  <a:rPr lang="de-DE" sz="2400" dirty="0" err="1"/>
+                  <a:t>sequence</a:t>
+                </a:r>
+                <a:r>
+                  <a:rPr lang="de-DE" sz="2400" dirty="0"/>
+                  <a:t> </a:t>
+                </a:r>
+                <a:r>
+                  <a:rPr lang="de-DE" sz="2400" dirty="0" err="1"/>
+                  <a:t>of</a:t>
+                </a:r>
+                <a:r>
+                  <a:rPr lang="de-DE" sz="2400" dirty="0"/>
+                  <a:t> </a:t>
+                </a:r>
+                <a:r>
+                  <a:rPr lang="de-DE" sz="2400" dirty="0" err="1"/>
+                  <a:t>previous</a:t>
+                </a:r>
+                <a:r>
+                  <a:rPr lang="de-DE" sz="2400" dirty="0"/>
+                  <a:t> </a:t>
+                </a:r>
+                <a:r>
+                  <a:rPr lang="de-DE" sz="2400" dirty="0" err="1"/>
+                  <a:t>tokens</a:t>
+                </a:r>
+                <a:r>
+                  <a:rPr lang="de-DE" sz="2400" dirty="0"/>
+                  <a:t> </a:t>
+                </a:r>
+                <a14:m>
+                  <m:oMath xmlns:m="http://schemas.openxmlformats.org/officeDocument/2006/math">
+                    <m:sSub>
+                      <m:sSubPr>
+                        <m:ctrlPr>
+                          <a:rPr lang="de-DE" sz="2400" i="1">
+                            <a:latin typeface="Cambria Math" panose="02040503050406030204" pitchFamily="18" charset="0"/>
+                          </a:rPr>
+                        </m:ctrlPr>
+                      </m:sSubPr>
+                      <m:e>
+                        <m:r>
+                          <a:rPr lang="de-DE" sz="2400" i="1">
+                            <a:latin typeface="Cambria Math" panose="02040503050406030204" pitchFamily="18" charset="0"/>
+                          </a:rPr>
+                          <m:t>𝑥</m:t>
+                        </m:r>
+                      </m:e>
+                      <m:sub>
+                        <m:r>
+                          <a:rPr lang="de-DE" sz="2400" i="1">
+                            <a:latin typeface="Cambria Math" panose="02040503050406030204" pitchFamily="18" charset="0"/>
+                          </a:rPr>
+                          <m:t>&lt;</m:t>
+                        </m:r>
+                        <m:r>
+                          <a:rPr lang="de-DE" sz="2400" i="1">
+                            <a:latin typeface="Cambria Math" panose="02040503050406030204" pitchFamily="18" charset="0"/>
+                          </a:rPr>
+                          <m:t>𝑡</m:t>
+                        </m:r>
+                      </m:sub>
+                    </m:sSub>
+                  </m:oMath>
+                </a14:m>
+                <a:r>
+                  <a:rPr lang="de-DE" sz="2400" dirty="0"/>
+                  <a:t> (</a:t>
+                </a:r>
+                <a:r>
+                  <a:rPr lang="de-DE" sz="2400" dirty="0" err="1"/>
+                  <a:t>context</a:t>
+                </a:r>
+                <a:r>
+                  <a:rPr lang="de-DE" sz="2400" dirty="0"/>
+                  <a:t>) and </a:t>
+                </a:r>
+                <a:r>
+                  <a:rPr lang="de-DE" sz="2400" dirty="0" err="1"/>
+                  <a:t>predict</a:t>
+                </a:r>
+                <a:r>
+                  <a:rPr lang="de-DE" sz="2400" dirty="0"/>
+                  <a:t> a </a:t>
+                </a:r>
+                <a:r>
+                  <a:rPr lang="de-DE" sz="2400" dirty="0" err="1"/>
+                  <a:t>conditional</a:t>
+                </a:r>
+                <a:r>
+                  <a:rPr lang="de-DE" sz="2400" dirty="0"/>
+                  <a:t> </a:t>
+                </a:r>
+                <a:r>
+                  <a:rPr lang="de-DE" sz="2400" dirty="0" err="1"/>
+                  <a:t>probability</a:t>
+                </a:r>
+                <a:r>
+                  <a:rPr lang="de-DE" sz="2400" dirty="0"/>
+                  <a:t> </a:t>
+                </a:r>
+                <a:r>
+                  <a:rPr lang="de-DE" sz="2400" dirty="0" err="1"/>
+                  <a:t>distribution</a:t>
+                </a:r>
+                <a:r>
+                  <a:rPr lang="de-DE" sz="2400" dirty="0"/>
+                  <a:t> </a:t>
+                </a:r>
+                <a:r>
+                  <a:rPr lang="de-DE" sz="2400" dirty="0" err="1"/>
+                  <a:t>over</a:t>
+                </a:r>
+                <a:r>
+                  <a:rPr lang="de-DE" sz="2400" dirty="0"/>
+                  <a:t> </a:t>
+                </a:r>
+                <a:r>
+                  <a:rPr lang="de-DE" sz="2400" dirty="0" err="1"/>
+                  <a:t>the</a:t>
+                </a:r>
+                <a:r>
+                  <a:rPr lang="de-DE" sz="2400" dirty="0"/>
+                  <a:t> </a:t>
+                </a:r>
+                <a:r>
+                  <a:rPr lang="de-DE" sz="2400" dirty="0" err="1"/>
+                  <a:t>next</a:t>
+                </a:r>
+                <a:r>
+                  <a:rPr lang="de-DE" sz="2400" dirty="0"/>
+                  <a:t> </a:t>
+                </a:r>
+                <a:r>
+                  <a:rPr lang="de-DE" sz="2400" dirty="0" err="1"/>
+                  <a:t>token</a:t>
+                </a:r>
+                <a:r>
+                  <a:rPr lang="de-DE" sz="2400" dirty="0"/>
+                  <a:t> </a:t>
+                </a:r>
+                <a14:m>
+                  <m:oMath xmlns:m="http://schemas.openxmlformats.org/officeDocument/2006/math">
+                    <m:sSub>
+                      <m:sSubPr>
+                        <m:ctrlPr>
+                          <a:rPr lang="de-DE" sz="2400" i="1">
+                            <a:latin typeface="Cambria Math" panose="02040503050406030204" pitchFamily="18" charset="0"/>
+                          </a:rPr>
+                        </m:ctrlPr>
+                      </m:sSubPr>
+                      <m:e>
+                        <m:r>
+                          <a:rPr lang="de-DE" sz="2400" i="1">
+                            <a:latin typeface="Cambria Math" panose="02040503050406030204" pitchFamily="18" charset="0"/>
+                          </a:rPr>
+                          <m:t>𝑥</m:t>
+                        </m:r>
+                      </m:e>
+                      <m:sub>
+                        <m:r>
+                          <a:rPr lang="de-DE" sz="2400" i="1">
+                            <a:latin typeface="Cambria Math" panose="02040503050406030204" pitchFamily="18" charset="0"/>
+                          </a:rPr>
+                          <m:t>𝑡</m:t>
+                        </m:r>
+                      </m:sub>
+                    </m:sSub>
+                  </m:oMath>
+                </a14:m>
+                <a:r>
+                  <a:rPr lang="de-DE" sz="2400" dirty="0"/>
+                  <a:t>:</a:t>
+                </a:r>
+              </a:p>
+              <a:p>
+                <a:pPr marL="0" indent="0">
+                  <a:buNone/>
+                </a:pPr>
+                <a14:m>
+                  <m:oMathPara xmlns:m="http://schemas.openxmlformats.org/officeDocument/2006/math">
+                    <m:oMathParaPr>
+                      <m:jc m:val="centerGroup"/>
+                    </m:oMathParaPr>
+                    <m:oMath xmlns:m="http://schemas.openxmlformats.org/officeDocument/2006/math">
+                      <m:r>
+                        <a:rPr lang="de-DE" sz="2400" b="0" i="1" smtClean="0">
+                          <a:latin typeface="Cambria Math" panose="02040503050406030204" pitchFamily="18" charset="0"/>
+                        </a:rPr>
+                        <m:t>𝑃</m:t>
+                      </m:r>
+                      <m:d>
+                        <m:dPr>
+                          <m:ctrlPr>
+                            <a:rPr lang="de-DE" sz="2400" b="0" i="1" smtClean="0">
+                              <a:latin typeface="Cambria Math" panose="02040503050406030204" pitchFamily="18" charset="0"/>
+                            </a:rPr>
+                          </m:ctrlPr>
+                        </m:dPr>
+                        <m:e>
+                          <m:sSub>
+                            <m:sSubPr>
+                              <m:ctrlPr>
+                                <a:rPr lang="de-DE" sz="2400" b="0" i="1" smtClean="0">
+                                  <a:latin typeface="Cambria Math" panose="02040503050406030204" pitchFamily="18" charset="0"/>
+                                </a:rPr>
+                              </m:ctrlPr>
+                            </m:sSubPr>
+                            <m:e>
+                              <m:r>
+                                <a:rPr lang="de-DE" sz="2400" b="0" i="1" smtClean="0">
+                                  <a:latin typeface="Cambria Math" panose="02040503050406030204" pitchFamily="18" charset="0"/>
+                                </a:rPr>
+                                <m:t>𝑥</m:t>
+                              </m:r>
+                            </m:e>
+                            <m:sub>
+                              <m:r>
+                                <a:rPr lang="de-DE" sz="2400" b="0" i="1" smtClean="0">
+                                  <a:latin typeface="Cambria Math" panose="02040503050406030204" pitchFamily="18" charset="0"/>
+                                </a:rPr>
+                                <m:t>𝑡</m:t>
+                              </m:r>
+                            </m:sub>
+                          </m:sSub>
+                          <m:sSub>
+                            <m:sSubPr>
+                              <m:ctrlPr>
+                                <a:rPr lang="de-DE" sz="2400" b="0" i="1" smtClean="0">
+                                  <a:latin typeface="Cambria Math" panose="02040503050406030204" pitchFamily="18" charset="0"/>
+                                </a:rPr>
+                              </m:ctrlPr>
+                            </m:sSubPr>
+                            <m:e>
+                              <m:r>
+                                <a:rPr lang="de-DE" sz="2400" b="0" i="1" smtClean="0">
+                                  <a:latin typeface="Cambria Math" panose="02040503050406030204" pitchFamily="18" charset="0"/>
+                                </a:rPr>
+                                <m:t>|</m:t>
+                              </m:r>
+                              <m:r>
+                                <a:rPr lang="de-DE" sz="2400" b="0" i="1" smtClean="0">
+                                  <a:latin typeface="Cambria Math" panose="02040503050406030204" pitchFamily="18" charset="0"/>
+                                </a:rPr>
+                                <m:t>𝑥</m:t>
+                              </m:r>
+                            </m:e>
+                            <m:sub>
+                              <m:r>
+                                <a:rPr lang="de-DE" sz="2400" b="0" i="1" smtClean="0">
+                                  <a:latin typeface="Cambria Math" panose="02040503050406030204" pitchFamily="18" charset="0"/>
+                                </a:rPr>
+                                <m:t>&lt;</m:t>
+                              </m:r>
+                              <m:r>
+                                <a:rPr lang="de-DE" sz="2400" b="0" i="1" smtClean="0">
+                                  <a:latin typeface="Cambria Math" panose="02040503050406030204" pitchFamily="18" charset="0"/>
+                                </a:rPr>
+                                <m:t>𝑡</m:t>
+                              </m:r>
+                            </m:sub>
+                          </m:sSub>
+                        </m:e>
+                      </m:d>
+                    </m:oMath>
+                  </m:oMathPara>
+                </a14:m>
+                <a:endParaRPr lang="de-DE" sz="2400" dirty="0"/>
+              </a:p>
+              <a:p>
+                <a:pPr marL="0" indent="0">
+                  <a:buNone/>
+                </a:pPr>
+                <a:endParaRPr lang="de-DE" sz="2400" dirty="0"/>
+              </a:p>
+              <a:p>
+                <a:pPr marL="0" indent="0">
+                  <a:buNone/>
+                </a:pPr>
+                <a:r>
+                  <a:rPr lang="de-DE" sz="2400" dirty="0" err="1"/>
+                  <a:t>joint</a:t>
+                </a:r>
+                <a:r>
+                  <a:rPr lang="de-DE" sz="2400" dirty="0"/>
+                  <a:t> </a:t>
+                </a:r>
+                <a:r>
+                  <a:rPr lang="de-DE" sz="2400" dirty="0" err="1"/>
+                  <a:t>probability</a:t>
+                </a:r>
+                <a:r>
+                  <a:rPr lang="de-DE" sz="2400" dirty="0"/>
+                  <a:t> </a:t>
+                </a:r>
+                <a:r>
+                  <a:rPr lang="de-DE" sz="2400" dirty="0" err="1"/>
+                  <a:t>distribution</a:t>
+                </a:r>
+                <a:r>
+                  <a:rPr lang="de-DE" sz="2400" dirty="0"/>
+                  <a:t> </a:t>
+                </a:r>
+                <a:r>
+                  <a:rPr lang="de-DE" sz="2400" dirty="0" err="1"/>
+                  <a:t>over</a:t>
+                </a:r>
+                <a:r>
+                  <a:rPr lang="de-DE" sz="2400" dirty="0"/>
+                  <a:t> </a:t>
+                </a:r>
+                <a:r>
+                  <a:rPr lang="de-DE" sz="2400" dirty="0" err="1"/>
+                  <a:t>text</a:t>
+                </a:r>
+                <a:r>
+                  <a:rPr lang="de-DE" sz="2400" dirty="0"/>
+                  <a:t> </a:t>
+                </a:r>
+                <a:r>
+                  <a:rPr lang="de-DE" sz="2400" dirty="0" err="1"/>
+                  <a:t>sequences</a:t>
+                </a:r>
+                <a:r>
+                  <a:rPr lang="de-DE" sz="2400" dirty="0"/>
+                  <a:t> via </a:t>
+                </a:r>
+                <a:r>
+                  <a:rPr lang="de-DE" sz="2400" dirty="0" err="1"/>
+                  <a:t>chain</a:t>
+                </a:r>
+                <a:r>
+                  <a:rPr lang="de-DE" sz="2400" dirty="0"/>
+                  <a:t> </a:t>
+                </a:r>
+                <a:r>
+                  <a:rPr lang="de-DE" sz="2400" dirty="0" err="1"/>
+                  <a:t>rule</a:t>
+                </a:r>
+                <a:r>
+                  <a:rPr lang="de-DE" sz="2400" dirty="0"/>
+                  <a:t> </a:t>
+                </a:r>
+                <a:r>
+                  <a:rPr lang="de-DE" sz="2400" dirty="0" err="1"/>
+                  <a:t>of</a:t>
+                </a:r>
+                <a:r>
+                  <a:rPr lang="de-DE" sz="2400" dirty="0"/>
+                  <a:t> </a:t>
+                </a:r>
+                <a:r>
+                  <a:rPr lang="de-DE" sz="2400" dirty="0" err="1"/>
+                  <a:t>probability</a:t>
+                </a:r>
+                <a:r>
+                  <a:rPr lang="de-DE" sz="2400" dirty="0"/>
+                  <a:t>:</a:t>
+                </a:r>
+              </a:p>
+              <a:p>
+                <a:pPr marL="0" indent="0">
+                  <a:buNone/>
+                </a:pPr>
+                <a14:m>
+                  <m:oMathPara xmlns:m="http://schemas.openxmlformats.org/officeDocument/2006/math">
+                    <m:oMathParaPr>
+                      <m:jc m:val="centerGroup"/>
+                    </m:oMathParaPr>
+                    <m:oMath xmlns:m="http://schemas.openxmlformats.org/officeDocument/2006/math">
+                      <m:r>
+                        <a:rPr lang="de-DE" sz="2400" b="0" i="1" smtClean="0">
+                          <a:latin typeface="Cambria Math" panose="02040503050406030204" pitchFamily="18" charset="0"/>
+                        </a:rPr>
+                        <m:t>𝑃</m:t>
+                      </m:r>
+                      <m:d>
+                        <m:dPr>
+                          <m:ctrlPr>
+                            <a:rPr lang="de-DE" sz="2400" b="0" i="1" smtClean="0">
+                              <a:latin typeface="Cambria Math" panose="02040503050406030204" pitchFamily="18" charset="0"/>
+                            </a:rPr>
+                          </m:ctrlPr>
+                        </m:dPr>
+                        <m:e>
+                          <m:sSub>
+                            <m:sSubPr>
+                              <m:ctrlPr>
+                                <a:rPr lang="de-DE" sz="2400" b="0" i="1" smtClean="0">
+                                  <a:latin typeface="Cambria Math" panose="02040503050406030204" pitchFamily="18" charset="0"/>
+                                </a:rPr>
+                              </m:ctrlPr>
+                            </m:sSubPr>
+                            <m:e>
+                              <m:r>
+                                <a:rPr lang="de-DE" sz="2400" b="0" i="1" smtClean="0">
+                                  <a:latin typeface="Cambria Math" panose="02040503050406030204" pitchFamily="18" charset="0"/>
+                                </a:rPr>
+                                <m:t>𝑥</m:t>
+                              </m:r>
+                            </m:e>
+                            <m:sub>
+                              <m:r>
+                                <a:rPr lang="de-DE" sz="2400" b="0" i="1" smtClean="0">
+                                  <a:latin typeface="Cambria Math" panose="02040503050406030204" pitchFamily="18" charset="0"/>
+                                </a:rPr>
+                                <m:t>1</m:t>
+                              </m:r>
+                            </m:sub>
+                          </m:sSub>
+                          <m:r>
+                            <a:rPr lang="de-DE" sz="2400" b="0" i="1" smtClean="0">
+                              <a:latin typeface="Cambria Math" panose="02040503050406030204" pitchFamily="18" charset="0"/>
+                            </a:rPr>
+                            <m:t>, </m:t>
+                          </m:r>
+                          <m:sSub>
+                            <m:sSubPr>
+                              <m:ctrlPr>
+                                <a:rPr lang="de-DE" sz="2400" b="0" i="1" smtClean="0">
+                                  <a:latin typeface="Cambria Math" panose="02040503050406030204" pitchFamily="18" charset="0"/>
+                                </a:rPr>
+                              </m:ctrlPr>
+                            </m:sSubPr>
+                            <m:e>
+                              <m:r>
+                                <a:rPr lang="de-DE" sz="2400" b="0" i="1" smtClean="0">
+                                  <a:latin typeface="Cambria Math" panose="02040503050406030204" pitchFamily="18" charset="0"/>
+                                </a:rPr>
+                                <m:t>𝑥</m:t>
+                              </m:r>
+                            </m:e>
+                            <m:sub>
+                              <m:r>
+                                <a:rPr lang="de-DE" sz="2400" b="0" i="1" smtClean="0">
+                                  <a:latin typeface="Cambria Math" panose="02040503050406030204" pitchFamily="18" charset="0"/>
+                                </a:rPr>
+                                <m:t>2</m:t>
+                              </m:r>
+                            </m:sub>
+                          </m:sSub>
+                          <m:r>
+                            <a:rPr lang="de-DE" sz="2400" b="0" i="1" smtClean="0">
+                              <a:latin typeface="Cambria Math" panose="02040503050406030204" pitchFamily="18" charset="0"/>
+                            </a:rPr>
+                            <m:t>, </m:t>
+                          </m:r>
+                          <m:r>
+                            <a:rPr lang="de-DE" sz="2400" b="0" i="1" smtClean="0">
+                              <a:latin typeface="Cambria Math" panose="02040503050406030204" pitchFamily="18" charset="0"/>
+                              <a:ea typeface="Cambria Math" panose="02040503050406030204" pitchFamily="18" charset="0"/>
+                            </a:rPr>
+                            <m:t>⋯, </m:t>
+                          </m:r>
+                          <m:sSub>
+                            <m:sSubPr>
+                              <m:ctrlPr>
+                                <a:rPr lang="de-DE" sz="2400" b="0" i="1" smtClean="0">
+                                  <a:latin typeface="Cambria Math" panose="02040503050406030204" pitchFamily="18" charset="0"/>
+                                  <a:ea typeface="Cambria Math" panose="02040503050406030204" pitchFamily="18" charset="0"/>
+                                </a:rPr>
+                              </m:ctrlPr>
+                            </m:sSubPr>
+                            <m:e>
+                              <m:r>
+                                <a:rPr lang="de-DE" sz="2400" b="0" i="1" smtClean="0">
+                                  <a:latin typeface="Cambria Math" panose="02040503050406030204" pitchFamily="18" charset="0"/>
+                                  <a:ea typeface="Cambria Math" panose="02040503050406030204" pitchFamily="18" charset="0"/>
+                                </a:rPr>
+                                <m:t>𝑥</m:t>
+                              </m:r>
+                            </m:e>
+                            <m:sub>
+                              <m:r>
+                                <a:rPr lang="de-DE" sz="2400" b="0" i="1" smtClean="0">
+                                  <a:latin typeface="Cambria Math" panose="02040503050406030204" pitchFamily="18" charset="0"/>
+                                  <a:ea typeface="Cambria Math" panose="02040503050406030204" pitchFamily="18" charset="0"/>
+                                </a:rPr>
+                                <m:t>𝑇</m:t>
+                              </m:r>
+                            </m:sub>
+                          </m:sSub>
+                        </m:e>
+                      </m:d>
+                      <m:r>
+                        <a:rPr lang="de-DE" sz="2400" b="0" i="1" smtClean="0">
+                          <a:latin typeface="Cambria Math" panose="02040503050406030204" pitchFamily="18" charset="0"/>
+                        </a:rPr>
+                        <m:t>=</m:t>
+                      </m:r>
+                      <m:nary>
+                        <m:naryPr>
+                          <m:chr m:val="∏"/>
+                          <m:ctrlPr>
+                            <a:rPr lang="de-DE" sz="2400" b="0" i="1" smtClean="0">
+                              <a:latin typeface="Cambria Math" panose="02040503050406030204" pitchFamily="18" charset="0"/>
+                            </a:rPr>
+                          </m:ctrlPr>
+                        </m:naryPr>
+                        <m:sub>
+                          <m:r>
+                            <m:rPr>
+                              <m:brk m:alnAt="23"/>
+                            </m:rPr>
+                            <a:rPr lang="de-DE" sz="2400" b="0" i="1" smtClean="0">
+                              <a:latin typeface="Cambria Math" panose="02040503050406030204" pitchFamily="18" charset="0"/>
+                            </a:rPr>
+                            <m:t>𝑡</m:t>
+                          </m:r>
+                          <m:r>
+                            <a:rPr lang="de-DE" sz="2400" b="0" i="1" smtClean="0">
+                              <a:latin typeface="Cambria Math" panose="02040503050406030204" pitchFamily="18" charset="0"/>
+                            </a:rPr>
+                            <m:t>=1</m:t>
+                          </m:r>
+                        </m:sub>
+                        <m:sup>
+                          <m:r>
+                            <a:rPr lang="de-DE" sz="2400" b="0" i="1" smtClean="0">
+                              <a:latin typeface="Cambria Math" panose="02040503050406030204" pitchFamily="18" charset="0"/>
+                            </a:rPr>
+                            <m:t>𝑇</m:t>
+                          </m:r>
+                        </m:sup>
+                        <m:e>
+                          <m:r>
+                            <a:rPr lang="de-DE" sz="2400" i="1">
+                              <a:latin typeface="Cambria Math" panose="02040503050406030204" pitchFamily="18" charset="0"/>
+                            </a:rPr>
+                            <m:t>𝑃</m:t>
+                          </m:r>
+                          <m:d>
+                            <m:dPr>
+                              <m:ctrlPr>
+                                <a:rPr lang="de-DE" sz="2400" i="1">
+                                  <a:latin typeface="Cambria Math" panose="02040503050406030204" pitchFamily="18" charset="0"/>
+                                </a:rPr>
+                              </m:ctrlPr>
+                            </m:dPr>
+                            <m:e>
+                              <m:sSub>
+                                <m:sSubPr>
+                                  <m:ctrlPr>
+                                    <a:rPr lang="de-DE" sz="2400" i="1">
+                                      <a:latin typeface="Cambria Math" panose="02040503050406030204" pitchFamily="18" charset="0"/>
+                                    </a:rPr>
+                                  </m:ctrlPr>
+                                </m:sSubPr>
+                                <m:e>
+                                  <m:r>
+                                    <a:rPr lang="de-DE" sz="2400" i="1">
+                                      <a:latin typeface="Cambria Math" panose="02040503050406030204" pitchFamily="18" charset="0"/>
+                                    </a:rPr>
+                                    <m:t>𝑥</m:t>
+                                  </m:r>
+                                </m:e>
+                                <m:sub>
+                                  <m:r>
+                                    <a:rPr lang="de-DE" sz="2400" i="1">
+                                      <a:latin typeface="Cambria Math" panose="02040503050406030204" pitchFamily="18" charset="0"/>
+                                    </a:rPr>
+                                    <m:t>𝑡</m:t>
+                                  </m:r>
+                                </m:sub>
+                              </m:sSub>
+                              <m:sSub>
+                                <m:sSubPr>
+                                  <m:ctrlPr>
+                                    <a:rPr lang="de-DE" sz="2400" i="1">
+                                      <a:latin typeface="Cambria Math" panose="02040503050406030204" pitchFamily="18" charset="0"/>
+                                    </a:rPr>
+                                  </m:ctrlPr>
+                                </m:sSubPr>
+                                <m:e>
+                                  <m:r>
+                                    <a:rPr lang="de-DE" sz="2400" i="1">
+                                      <a:latin typeface="Cambria Math" panose="02040503050406030204" pitchFamily="18" charset="0"/>
+                                    </a:rPr>
+                                    <m:t>|</m:t>
+                                  </m:r>
+                                  <m:r>
+                                    <a:rPr lang="de-DE" sz="2400" i="1">
+                                      <a:latin typeface="Cambria Math" panose="02040503050406030204" pitchFamily="18" charset="0"/>
+                                    </a:rPr>
+                                    <m:t>𝑥</m:t>
+                                  </m:r>
+                                </m:e>
+                                <m:sub>
+                                  <m:r>
+                                    <a:rPr lang="de-DE" sz="2400" i="1">
+                                      <a:latin typeface="Cambria Math" panose="02040503050406030204" pitchFamily="18" charset="0"/>
+                                    </a:rPr>
+                                    <m:t>&lt;</m:t>
+                                  </m:r>
+                                  <m:r>
+                                    <a:rPr lang="de-DE" sz="2400" i="1">
+                                      <a:latin typeface="Cambria Math" panose="02040503050406030204" pitchFamily="18" charset="0"/>
+                                    </a:rPr>
+                                    <m:t>𝑡</m:t>
+                                  </m:r>
+                                </m:sub>
+                              </m:sSub>
+                            </m:e>
+                          </m:d>
+                        </m:e>
+                      </m:nary>
+                    </m:oMath>
+                  </m:oMathPara>
+                </a14:m>
+                <a:endParaRPr lang="de-DE" sz="2400" dirty="0"/>
+              </a:p>
+              <a:p>
+                <a:pPr marL="0" indent="0">
+                  <a:buNone/>
+                </a:pPr>
+                <a:endParaRPr lang="de-DE" sz="2400" dirty="0"/>
+              </a:p>
+              <a:p>
+                <a:pPr marL="0" indent="0">
+                  <a:buNone/>
+                </a:pPr>
+                <a:r>
+                  <a:rPr lang="de-DE" sz="2400" dirty="0">
+                    <a:sym typeface="Wingdings" pitchFamily="2" charset="2"/>
+                  </a:rPr>
+                  <a:t></a:t>
+                </a:r>
+                <a:r>
+                  <a:rPr lang="de-DE" sz="2400" dirty="0"/>
+                  <a:t> </a:t>
+                </a:r>
+                <a:r>
+                  <a:rPr lang="de-DE" sz="2400" dirty="0" err="1"/>
+                  <a:t>no</a:t>
+                </a:r>
+                <a:r>
+                  <a:rPr lang="de-DE" sz="2400" dirty="0"/>
+                  <a:t> </a:t>
+                </a:r>
+                <a:r>
+                  <a:rPr lang="de-DE" sz="2400" dirty="0" err="1"/>
+                  <a:t>direct</a:t>
+                </a:r>
+                <a:r>
+                  <a:rPr lang="de-DE" sz="2400" dirty="0"/>
+                  <a:t> </a:t>
+                </a:r>
+                <a:r>
+                  <a:rPr lang="de-DE" sz="2400" dirty="0" err="1"/>
+                  <a:t>prediction</a:t>
+                </a:r>
+                <a:r>
+                  <a:rPr lang="de-DE" sz="2400" dirty="0"/>
+                  <a:t> </a:t>
+                </a:r>
+                <a:r>
+                  <a:rPr lang="de-DE" sz="2400" dirty="0" err="1"/>
+                  <a:t>of</a:t>
+                </a:r>
+                <a:r>
+                  <a:rPr lang="de-DE" sz="2400" dirty="0"/>
+                  <a:t> </a:t>
+                </a:r>
+                <a:r>
+                  <a:rPr lang="de-DE" sz="2400" dirty="0" err="1"/>
+                  <a:t>joint</a:t>
+                </a:r>
+                <a:r>
+                  <a:rPr lang="de-DE" sz="2400" dirty="0"/>
+                  <a:t> </a:t>
+                </a:r>
+                <a:r>
+                  <a:rPr lang="de-DE" sz="2400" dirty="0" err="1"/>
+                  <a:t>probability</a:t>
+                </a:r>
+                <a:r>
+                  <a:rPr lang="de-DE" sz="2400" dirty="0"/>
+                  <a:t> in </a:t>
+                </a:r>
+                <a:r>
+                  <a:rPr lang="de-DE" sz="2400" dirty="0" err="1"/>
+                  <a:t>one</a:t>
+                </a:r>
+                <a:r>
+                  <a:rPr lang="de-DE" sz="2400" dirty="0"/>
+                  <a:t> </a:t>
+                </a:r>
+                <a:r>
+                  <a:rPr lang="de-DE" sz="2400" dirty="0" err="1"/>
+                  <a:t>shot</a:t>
+                </a:r>
+                <a:r>
+                  <a:rPr lang="de-DE" sz="2400" dirty="0"/>
+                  <a:t>, but </a:t>
+                </a:r>
+                <a:r>
+                  <a:rPr lang="de-DE" sz="2400" dirty="0" err="1"/>
+                  <a:t>implicit</a:t>
+                </a:r>
+                <a:r>
+                  <a:rPr lang="de-DE" sz="2400" dirty="0"/>
+                  <a:t> </a:t>
+                </a:r>
+                <a:r>
+                  <a:rPr lang="de-DE" sz="2400" dirty="0" err="1"/>
+                  <a:t>calculation</a:t>
+                </a:r>
+                <a:r>
+                  <a:rPr lang="de-DE" sz="2400" dirty="0"/>
+                  <a:t> </a:t>
+                </a:r>
+                <a:r>
+                  <a:rPr lang="de-DE" sz="2400" dirty="0" err="1"/>
+                  <a:t>through</a:t>
+                </a:r>
+                <a:r>
+                  <a:rPr lang="de-DE" sz="2400" dirty="0"/>
+                  <a:t> </a:t>
+                </a:r>
+                <a:r>
+                  <a:rPr lang="de-DE" sz="2400" dirty="0" err="1"/>
+                  <a:t>product</a:t>
+                </a:r>
+                <a:r>
+                  <a:rPr lang="de-DE" sz="2400" dirty="0"/>
+                  <a:t> </a:t>
+                </a:r>
+                <a:r>
+                  <a:rPr lang="de-DE" sz="2400" dirty="0" err="1"/>
+                  <a:t>of</a:t>
+                </a:r>
+                <a:r>
+                  <a:rPr lang="de-DE" sz="2400" dirty="0"/>
+                  <a:t> </a:t>
+                </a:r>
+                <a:r>
+                  <a:rPr lang="de-DE" sz="2400" dirty="0" err="1"/>
+                  <a:t>conditionals</a:t>
+                </a:r>
+                <a:endParaRPr lang="de-DE" sz="2400" dirty="0"/>
+              </a:p>
+            </p:txBody>
+          </p:sp>
+        </mc:Choice>
+        <mc:Fallback xmlns="">
+          <p:sp>
+            <p:nvSpPr>
+              <p:cNvPr id="3" name="Inhaltsplatzhalter 2">
+                <a:extLst>
+                  <a:ext uri="{FF2B5EF4-FFF2-40B4-BE49-F238E27FC236}">
+                    <a16:creationId xmlns:a16="http://schemas.microsoft.com/office/drawing/2014/main" id="{ECD50DE5-65E1-5BF4-D606-8B8555BA99A3}"/>
+                  </a:ext>
+                </a:extLst>
+              </p:cNvPr>
+              <p:cNvSpPr>
+                <a:spLocks noGrp="1" noRot="1" noChangeAspect="1" noMove="1" noResize="1" noEditPoints="1" noAdjustHandles="1" noChangeArrowheads="1" noChangeShapeType="1" noTextEdit="1"/>
+              </p:cNvSpPr>
+              <p:nvPr>
+                <p:ph idx="1"/>
+              </p:nvPr>
+            </p:nvSpPr>
+            <p:spPr>
+              <a:blipFill>
+                <a:blip r:embed="rId2"/>
+                <a:stretch>
+                  <a:fillRect l="-965" t="-2035" b="-9302"/>
+                </a:stretch>
+              </a:blipFill>
+            </p:spPr>
+            <p:txBody>
+              <a:bodyPr/>
+              <a:lstStyle/>
+              <a:p>
+                <a:r>
+                  <a:rPr lang="de-DE">
+                    <a:noFill/>
+                  </a:rPr>
+                  <a:t> </a:t>
+                </a:r>
+              </a:p>
+            </p:txBody>
+          </p:sp>
+        </mc:Fallback>
+      </mc:AlternateContent>
       <p:sp>
         <p:nvSpPr>
-          <p:cNvPr id="3" name="Content Placeholder 2">
+          <p:cNvPr id="4" name="Foliennummernplatzhalter 3">
             <a:extLst>
               <a:ext uri="{FF2B5EF4-FFF2-40B4-BE49-F238E27FC236}">
-                <a16:creationId xmlns:a16="http://schemas.microsoft.com/office/drawing/2014/main" id="{29873BB1-039F-295B-E954-FC59DCCEB72A}"/>
-              </a:ext>
-            </a:extLst>
-          </p:cNvPr>
-          <p:cNvSpPr>
-            <a:spLocks noGrp="1"/>
-          </p:cNvSpPr>
-          <p:nvPr>
-            <p:ph idx="1"/>
-          </p:nvPr>
-        </p:nvSpPr>
-        <p:spPr>
-          <a:xfrm>
-            <a:off x="838200" y="1825625"/>
-            <a:ext cx="7506141" cy="4667250"/>
-          </a:xfrm>
-        </p:spPr>
-        <p:txBody>
-          <a:bodyPr>
-            <a:noAutofit/>
-          </a:bodyPr>
-          <a:lstStyle/>
-          <a:p>
-            <a:pPr marL="0" indent="0">
-              <a:buNone/>
-            </a:pPr>
-            <a:r>
-              <a:rPr lang="en-DE" sz="2400" dirty="0">
-                <a:hlinkClick r:id="rId2"/>
-              </a:rPr>
-              <a:t>BERT</a:t>
-            </a:r>
-            <a:r>
-              <a:rPr lang="en-DE" sz="2400" dirty="0"/>
-              <a:t> (Bidirectional Encoder Representations from Transformers</a:t>
-            </a:r>
-            <a:r>
-              <a:rPr lang="en-DE" sz="2400"/>
-              <a:t>, Google):</a:t>
-            </a:r>
-            <a:endParaRPr lang="en-DE" sz="2400" dirty="0"/>
-          </a:p>
-          <a:p>
-            <a:r>
-              <a:rPr lang="en-GB" sz="2400" dirty="0"/>
-              <a:t>stack of transformer e</a:t>
-            </a:r>
-            <a:r>
-              <a:rPr lang="en-DE" sz="2400" dirty="0"/>
-              <a:t>ncoders</a:t>
-            </a:r>
-          </a:p>
-          <a:p>
-            <a:r>
-              <a:rPr lang="en-GB" sz="2400" dirty="0"/>
-              <a:t>o</a:t>
-            </a:r>
-            <a:r>
-              <a:rPr lang="en-DE" sz="2400" dirty="0"/>
-              <a:t>utputting representation</a:t>
-            </a:r>
-            <a:r>
-              <a:rPr lang="en-GB" sz="2400" dirty="0"/>
-              <a:t> (contextual embeddings)</a:t>
-            </a:r>
-            <a:r>
-              <a:rPr lang="en-DE" sz="2400" dirty="0"/>
-              <a:t> to be used</a:t>
-            </a:r>
-            <a:r>
-              <a:rPr lang="en-DE" sz="2400"/>
-              <a:t>/finetuned </a:t>
-            </a:r>
-            <a:r>
-              <a:rPr lang="en-DE" sz="2400" dirty="0"/>
-              <a:t>in specific tasks and data sets</a:t>
-            </a:r>
-            <a:r>
-              <a:rPr lang="en-GB" sz="2400" dirty="0"/>
-              <a:t> (e.g., text classification)</a:t>
-            </a:r>
-            <a:endParaRPr lang="en-DE" sz="2400" dirty="0"/>
-          </a:p>
-          <a:p>
-            <a:r>
-              <a:rPr lang="en-GB" sz="2400" dirty="0"/>
-              <a:t>b</a:t>
-            </a:r>
-            <a:r>
-              <a:rPr lang="en-DE" sz="2400" dirty="0"/>
-              <a:t>idirectional: </a:t>
-            </a:r>
-            <a:r>
-              <a:rPr lang="en-GB" sz="2400" dirty="0"/>
-              <a:t>jointly conditioning on both left and right context</a:t>
-            </a:r>
-            <a:endParaRPr lang="en-DE" sz="2400" dirty="0"/>
-          </a:p>
-          <a:p>
-            <a:r>
-              <a:rPr lang="en-GB" sz="2400" dirty="0"/>
-              <a:t>pre-trained in self-supervised manner on massive data sets</a:t>
-            </a:r>
-          </a:p>
-          <a:p>
-            <a:pPr lvl="1"/>
-            <a:r>
-              <a:rPr lang="en-GB" dirty="0"/>
-              <a:t>masked tokens to be predicted from context</a:t>
-            </a:r>
-          </a:p>
-          <a:p>
-            <a:pPr lvl="1"/>
-            <a:r>
-              <a:rPr lang="en-GB" dirty="0"/>
-              <a:t>next sentence prediction</a:t>
-            </a:r>
-          </a:p>
-        </p:txBody>
-      </p:sp>
-      <p:sp>
-        <p:nvSpPr>
-          <p:cNvPr id="4" name="Slide Number Placeholder 3">
-            <a:extLst>
-              <a:ext uri="{FF2B5EF4-FFF2-40B4-BE49-F238E27FC236}">
-                <a16:creationId xmlns:a16="http://schemas.microsoft.com/office/drawing/2014/main" id="{1834DC41-7C26-D581-9A80-C62A60BFD3E2}"/>
+                <a16:creationId xmlns:a16="http://schemas.microsoft.com/office/drawing/2014/main" id="{1034B76C-4C90-7EEE-3784-1A1B3489FED3}"/>
               </a:ext>
             </a:extLst>
           </p:cNvPr>
@@ -15003,162 +15645,18 @@
           <a:bodyPr/>
           <a:lstStyle/>
           <a:p>
-            <a:fld id="{849D05A8-43E9-1C49-8606-50AB68220DEC}" type="slidenum">
-              <a:rPr lang="en-DE" smtClean="0"/>
+            <a:fld id="{4055531C-5681-6B44-B2CA-926D7A74B06D}" type="slidenum">
+              <a:rPr lang="de-DE" smtClean="0"/>
               <a:t>6</a:t>
             </a:fld>
-            <a:endParaRPr lang="en-DE"/>
+            <a:endParaRPr lang="de-DE"/>
           </a:p>
         </p:txBody>
       </p:sp>
-      <p:sp>
-        <p:nvSpPr>
-          <p:cNvPr id="5" name="TextBox 4">
-            <a:extLst>
-              <a:ext uri="{FF2B5EF4-FFF2-40B4-BE49-F238E27FC236}">
-                <a16:creationId xmlns:a16="http://schemas.microsoft.com/office/drawing/2014/main" id="{35233163-2EF1-7FE1-E697-7AB2C8677939}"/>
-              </a:ext>
-            </a:extLst>
-          </p:cNvPr>
-          <p:cNvSpPr txBox="1"/>
-          <p:nvPr/>
-        </p:nvSpPr>
-        <p:spPr>
-          <a:xfrm>
-            <a:off x="11529848" y="4800045"/>
-            <a:ext cx="572811" cy="246221"/>
-          </a:xfrm>
-          <a:prstGeom prst="rect">
-            <a:avLst/>
-          </a:prstGeom>
-          <a:noFill/>
-        </p:spPr>
-        <p:txBody>
-          <a:bodyPr wrap="square" rtlCol="0">
-            <a:spAutoFit/>
-          </a:bodyPr>
-          <a:lstStyle/>
-          <a:p>
-            <a:r>
-              <a:rPr lang="de-DE" sz="1000" dirty="0">
-                <a:hlinkClick r:id="rId3"/>
-              </a:rPr>
-              <a:t>source</a:t>
-            </a:r>
-            <a:endParaRPr lang="de-DE" sz="1000" dirty="0"/>
-          </a:p>
-        </p:txBody>
-      </p:sp>
-      <p:pic>
-        <p:nvPicPr>
-          <p:cNvPr id="8" name="Picture 7" descr="A screen shot of a computer&#10;&#10;Description automatically generated">
-            <a:extLst>
-              <a:ext uri="{FF2B5EF4-FFF2-40B4-BE49-F238E27FC236}">
-                <a16:creationId xmlns:a16="http://schemas.microsoft.com/office/drawing/2014/main" id="{AFC9E341-EA1C-F051-9371-1BA2FEBA2883}"/>
-              </a:ext>
-            </a:extLst>
-          </p:cNvPr>
-          <p:cNvPicPr>
-            <a:picLocks noChangeAspect="1"/>
-          </p:cNvPicPr>
-          <p:nvPr/>
-        </p:nvPicPr>
-        <p:blipFill>
-          <a:blip r:embed="rId4"/>
-          <a:stretch>
-            <a:fillRect/>
-          </a:stretch>
-        </p:blipFill>
-        <p:spPr>
-          <a:xfrm>
-            <a:off x="8610600" y="1933274"/>
-            <a:ext cx="3581400" cy="2866770"/>
-          </a:xfrm>
-          <a:prstGeom prst="rect">
-            <a:avLst/>
-          </a:prstGeom>
-        </p:spPr>
-      </p:pic>
-      <p:sp>
-        <p:nvSpPr>
-          <p:cNvPr id="9" name="TextBox 8">
-            <a:extLst>
-              <a:ext uri="{FF2B5EF4-FFF2-40B4-BE49-F238E27FC236}">
-                <a16:creationId xmlns:a16="http://schemas.microsoft.com/office/drawing/2014/main" id="{8D8F2A0D-16ED-38C8-6946-9993A4C44068}"/>
-              </a:ext>
-            </a:extLst>
-          </p:cNvPr>
-          <p:cNvSpPr txBox="1"/>
-          <p:nvPr/>
-        </p:nvSpPr>
-        <p:spPr>
-          <a:xfrm>
-            <a:off x="8958029" y="5042630"/>
-            <a:ext cx="2878371" cy="646331"/>
-          </a:xfrm>
-          <a:prstGeom prst="rect">
-            <a:avLst/>
-          </a:prstGeom>
-          <a:noFill/>
-        </p:spPr>
-        <p:txBody>
-          <a:bodyPr wrap="square" rtlCol="0">
-            <a:spAutoFit/>
-          </a:bodyPr>
-          <a:lstStyle/>
-          <a:p>
-            <a:r>
-              <a:rPr lang="en-GB" dirty="0"/>
-              <a:t>sentence classification via [CLS] token</a:t>
-            </a:r>
-          </a:p>
-        </p:txBody>
-      </p:sp>
-      <p:cxnSp>
-        <p:nvCxnSpPr>
-          <p:cNvPr id="11" name="Straight Arrow Connector 10">
-            <a:extLst>
-              <a:ext uri="{FF2B5EF4-FFF2-40B4-BE49-F238E27FC236}">
-                <a16:creationId xmlns:a16="http://schemas.microsoft.com/office/drawing/2014/main" id="{F88859D2-C2BC-2FBF-1B8D-C04C66C53D73}"/>
-              </a:ext>
-            </a:extLst>
-          </p:cNvPr>
-          <p:cNvCxnSpPr>
-            <a:cxnSpLocks/>
-          </p:cNvCxnSpPr>
-          <p:nvPr/>
-        </p:nvCxnSpPr>
-        <p:spPr>
-          <a:xfrm flipH="1" flipV="1">
-            <a:off x="8958029" y="4478867"/>
-            <a:ext cx="228304" cy="651933"/>
-          </a:xfrm>
-          <a:prstGeom prst="straightConnector1">
-            <a:avLst/>
-          </a:prstGeom>
-          <a:ln>
-            <a:tailEnd type="triangle"/>
-          </a:ln>
-        </p:spPr>
-        <p:style>
-          <a:lnRef idx="1">
-            <a:schemeClr val="accent1"/>
-          </a:lnRef>
-          <a:fillRef idx="0">
-            <a:schemeClr val="accent1"/>
-          </a:fillRef>
-          <a:effectRef idx="0">
-            <a:schemeClr val="accent1"/>
-          </a:effectRef>
-          <a:fontRef idx="minor">
-            <a:schemeClr val="tx1"/>
-          </a:fontRef>
-        </p:style>
-      </p:cxnSp>
     </p:spTree>
     <p:extLst>
       <p:ext uri="{BB962C8B-B14F-4D97-AF65-F5344CB8AC3E}">
-        <p14:creationId xmlns:p14="http://schemas.microsoft.com/office/powerpoint/2010/main" val="477888618"/>
+        <p14:creationId xmlns:p14="http://schemas.microsoft.com/office/powerpoint/2010/main" val="2791857712"/>
       </p:ext>
     </p:extLst>
   </p:cSld>
@@ -15169,1048 +15667,6 @@
 </file>
 
 <file path=ppt/slides/slide7.xml><?xml version="1.0" encoding="utf-8"?>
-<p:sld xmlns:a="http://schemas.openxmlformats.org/drawingml/2006/main" xmlns:r="http://schemas.openxmlformats.org/officeDocument/2006/relationships" xmlns:p="http://schemas.openxmlformats.org/presentationml/2006/main">
-  <p:cSld>
-    <p:spTree>
-      <p:nvGrpSpPr>
-        <p:cNvPr id="1" name=""/>
-        <p:cNvGrpSpPr/>
-        <p:nvPr/>
-      </p:nvGrpSpPr>
-      <p:grpSpPr>
-        <a:xfrm>
-          <a:off x="0" y="0"/>
-          <a:ext cx="0" cy="0"/>
-          <a:chOff x="0" y="0"/>
-          <a:chExt cx="0" cy="0"/>
-        </a:xfrm>
-      </p:grpSpPr>
-      <p:sp>
-        <p:nvSpPr>
-          <p:cNvPr id="2" name="Titel 1">
-            <a:extLst>
-              <a:ext uri="{FF2B5EF4-FFF2-40B4-BE49-F238E27FC236}">
-                <a16:creationId xmlns:a16="http://schemas.microsoft.com/office/drawing/2014/main" id="{47377014-5C9A-61F9-AEB0-5422FFC74E48}"/>
-              </a:ext>
-            </a:extLst>
-          </p:cNvPr>
-          <p:cNvSpPr>
-            <a:spLocks noGrp="1"/>
-          </p:cNvSpPr>
-          <p:nvPr>
-            <p:ph type="title"/>
-          </p:nvPr>
-        </p:nvSpPr>
-        <p:spPr/>
-        <p:txBody>
-          <a:bodyPr/>
-          <a:lstStyle/>
-          <a:p>
-            <a:r>
-              <a:rPr lang="de-DE" dirty="0"/>
-              <a:t>BERT </a:t>
-            </a:r>
-            <a:r>
-              <a:rPr lang="de-DE" dirty="0" err="1"/>
-              <a:t>Variants</a:t>
-            </a:r>
-            <a:endParaRPr lang="de-DE" dirty="0"/>
-          </a:p>
-        </p:txBody>
-      </p:sp>
-      <p:sp>
-        <p:nvSpPr>
-          <p:cNvPr id="3" name="Inhaltsplatzhalter 2">
-            <a:extLst>
-              <a:ext uri="{FF2B5EF4-FFF2-40B4-BE49-F238E27FC236}">
-                <a16:creationId xmlns:a16="http://schemas.microsoft.com/office/drawing/2014/main" id="{E32E57AC-9AEC-A942-0A0F-644BB5F978B9}"/>
-              </a:ext>
-            </a:extLst>
-          </p:cNvPr>
-          <p:cNvSpPr>
-            <a:spLocks noGrp="1"/>
-          </p:cNvSpPr>
-          <p:nvPr>
-            <p:ph idx="1"/>
-          </p:nvPr>
-        </p:nvSpPr>
-        <p:spPr/>
-        <p:txBody>
-          <a:bodyPr>
-            <a:normAutofit lnSpcReduction="10000"/>
-          </a:bodyPr>
-          <a:lstStyle/>
-          <a:p>
-            <a:pPr marL="0" indent="0">
-              <a:buNone/>
-            </a:pPr>
-            <a:r>
-              <a:rPr lang="de-DE" sz="2400" b="1" dirty="0"/>
-              <a:t>BERT</a:t>
-            </a:r>
-            <a:r>
-              <a:rPr lang="de-DE" sz="2400" dirty="0"/>
-              <a:t>: </a:t>
-            </a:r>
-            <a:r>
-              <a:rPr lang="de-DE" sz="2400" dirty="0" err="1"/>
-              <a:t>effective</a:t>
-            </a:r>
-            <a:r>
-              <a:rPr lang="de-DE" sz="2400" dirty="0"/>
-              <a:t> but </a:t>
-            </a:r>
-            <a:r>
-              <a:rPr lang="de-DE" sz="2400" dirty="0" err="1"/>
-              <a:t>computationally</a:t>
-            </a:r>
-            <a:r>
-              <a:rPr lang="de-DE" sz="2400" dirty="0"/>
-              <a:t> heavy (large </a:t>
-            </a:r>
-            <a:r>
-              <a:rPr lang="de-DE" sz="2400" dirty="0" err="1"/>
-              <a:t>models</a:t>
-            </a:r>
-            <a:r>
-              <a:rPr lang="de-DE" sz="2400" dirty="0"/>
-              <a:t>, slow </a:t>
-            </a:r>
-            <a:r>
-              <a:rPr lang="de-DE" sz="2400" dirty="0" err="1"/>
-              <a:t>inference</a:t>
-            </a:r>
-            <a:r>
-              <a:rPr lang="de-DE" sz="2400" dirty="0"/>
-              <a:t>)</a:t>
-            </a:r>
-          </a:p>
-          <a:p>
-            <a:pPr marL="0" indent="0">
-              <a:buNone/>
-            </a:pPr>
-            <a:endParaRPr lang="de-DE" sz="2400" dirty="0"/>
-          </a:p>
-          <a:p>
-            <a:pPr marL="0" indent="0">
-              <a:buNone/>
-            </a:pPr>
-            <a:r>
-              <a:rPr lang="de-DE" sz="2400" b="1" dirty="0">
-                <a:hlinkClick r:id="rId2"/>
-              </a:rPr>
-              <a:t>RoBERTa</a:t>
-            </a:r>
-            <a:r>
-              <a:rPr lang="de-DE" sz="2400" b="1" dirty="0"/>
-              <a:t>: </a:t>
-            </a:r>
-            <a:r>
-              <a:rPr lang="de-DE" sz="2400" dirty="0" err="1"/>
-              <a:t>even</a:t>
-            </a:r>
-            <a:r>
-              <a:rPr lang="de-DE" sz="2400" dirty="0"/>
-              <a:t> </a:t>
-            </a:r>
-            <a:r>
-              <a:rPr lang="de-DE" sz="2400" dirty="0" err="1"/>
-              <a:t>better</a:t>
-            </a:r>
-            <a:r>
-              <a:rPr lang="de-DE" sz="2400" dirty="0"/>
-              <a:t> </a:t>
-            </a:r>
-            <a:r>
-              <a:rPr lang="de-DE" sz="2400" dirty="0" err="1"/>
-              <a:t>than</a:t>
-            </a:r>
-            <a:r>
-              <a:rPr lang="de-DE" sz="2400" dirty="0"/>
-              <a:t> BERT but still heavy</a:t>
-            </a:r>
-          </a:p>
-          <a:p>
-            <a:r>
-              <a:rPr lang="de-DE" sz="1800" dirty="0" err="1"/>
-              <a:t>removed</a:t>
-            </a:r>
-            <a:r>
-              <a:rPr lang="de-DE" sz="1800" dirty="0"/>
-              <a:t> </a:t>
-            </a:r>
-            <a:r>
-              <a:rPr lang="de-DE" sz="1800" dirty="0" err="1"/>
-              <a:t>next</a:t>
-            </a:r>
-            <a:r>
-              <a:rPr lang="de-DE" sz="1800" dirty="0"/>
-              <a:t> </a:t>
-            </a:r>
-            <a:r>
-              <a:rPr lang="de-DE" sz="1800" dirty="0" err="1"/>
-              <a:t>sentence</a:t>
-            </a:r>
-            <a:r>
-              <a:rPr lang="de-DE" sz="1800" dirty="0"/>
-              <a:t> </a:t>
-            </a:r>
-            <a:r>
-              <a:rPr lang="de-DE" sz="1800" dirty="0" err="1"/>
-              <a:t>prediction</a:t>
-            </a:r>
-            <a:r>
-              <a:rPr lang="de-DE" sz="1800" dirty="0"/>
-              <a:t> </a:t>
-            </a:r>
-            <a:r>
-              <a:rPr lang="de-DE" sz="1800" dirty="0" err="1"/>
-              <a:t>as</a:t>
-            </a:r>
-            <a:r>
-              <a:rPr lang="de-DE" sz="1800" dirty="0"/>
-              <a:t> </a:t>
-            </a:r>
-            <a:r>
-              <a:rPr lang="de-DE" sz="1800" dirty="0" err="1"/>
-              <a:t>pretraining</a:t>
-            </a:r>
-            <a:r>
-              <a:rPr lang="de-DE" sz="1800" dirty="0"/>
-              <a:t> </a:t>
-            </a:r>
-            <a:r>
-              <a:rPr lang="de-DE" sz="1800" dirty="0" err="1"/>
-              <a:t>objective</a:t>
-            </a:r>
-            <a:endParaRPr lang="de-DE" sz="1800" dirty="0"/>
-          </a:p>
-          <a:p>
-            <a:r>
-              <a:rPr lang="de-DE" sz="1800" dirty="0"/>
-              <a:t>~</a:t>
-            </a:r>
-            <a:r>
-              <a:rPr lang="de-DE" sz="1800" dirty="0" err="1"/>
-              <a:t>ten</a:t>
-            </a:r>
-            <a:r>
-              <a:rPr lang="de-DE" sz="1800" dirty="0"/>
-              <a:t> </a:t>
-            </a:r>
-            <a:r>
-              <a:rPr lang="de-DE" sz="1800" dirty="0" err="1"/>
-              <a:t>times</a:t>
-            </a:r>
-            <a:r>
-              <a:rPr lang="de-DE" sz="1800" dirty="0"/>
-              <a:t> </a:t>
-            </a:r>
-            <a:r>
-              <a:rPr lang="de-DE" sz="1800" dirty="0" err="1"/>
-              <a:t>more</a:t>
-            </a:r>
-            <a:r>
-              <a:rPr lang="de-DE" sz="1800" dirty="0"/>
-              <a:t> </a:t>
-            </a:r>
-            <a:r>
-              <a:rPr lang="de-DE" sz="1800" dirty="0" err="1"/>
-              <a:t>training</a:t>
-            </a:r>
-            <a:r>
-              <a:rPr lang="de-DE" sz="1800" dirty="0"/>
-              <a:t> </a:t>
-            </a:r>
-            <a:r>
-              <a:rPr lang="de-DE" sz="1800" dirty="0" err="1"/>
-              <a:t>data</a:t>
-            </a:r>
-            <a:r>
-              <a:rPr lang="de-DE" sz="1800" dirty="0"/>
-              <a:t>, </a:t>
-            </a:r>
-            <a:r>
-              <a:rPr lang="de-DE" sz="1800" dirty="0" err="1"/>
-              <a:t>longer</a:t>
-            </a:r>
-            <a:r>
-              <a:rPr lang="de-DE" sz="1800" dirty="0"/>
-              <a:t> </a:t>
-            </a:r>
-            <a:r>
-              <a:rPr lang="de-DE" sz="1800" dirty="0" err="1"/>
-              <a:t>training</a:t>
-            </a:r>
-            <a:r>
-              <a:rPr lang="de-DE" sz="1800" dirty="0"/>
-              <a:t>, larger </a:t>
-            </a:r>
-            <a:r>
-              <a:rPr lang="de-DE" sz="1800" dirty="0" err="1"/>
-              <a:t>batches</a:t>
-            </a:r>
-            <a:r>
-              <a:rPr lang="de-DE" sz="1800" dirty="0"/>
-              <a:t>, </a:t>
-            </a:r>
-            <a:r>
-              <a:rPr lang="de-DE" sz="1800" dirty="0" err="1"/>
-              <a:t>longer</a:t>
-            </a:r>
-            <a:r>
-              <a:rPr lang="de-DE" sz="1800" dirty="0"/>
-              <a:t> </a:t>
-            </a:r>
-            <a:r>
-              <a:rPr lang="de-DE" sz="1800" dirty="0" err="1"/>
-              <a:t>sequences</a:t>
-            </a:r>
-            <a:endParaRPr lang="de-DE" sz="1800" dirty="0"/>
-          </a:p>
-          <a:p>
-            <a:r>
-              <a:rPr lang="de-DE" sz="1800" dirty="0" err="1"/>
-              <a:t>dynamic</a:t>
-            </a:r>
-            <a:r>
-              <a:rPr lang="de-DE" sz="1800" dirty="0"/>
-              <a:t> </a:t>
-            </a:r>
-            <a:r>
-              <a:rPr lang="de-DE" sz="1800" dirty="0" err="1"/>
-              <a:t>masking</a:t>
-            </a:r>
-            <a:r>
-              <a:rPr lang="de-DE" sz="1800" dirty="0"/>
-              <a:t>: </a:t>
-            </a:r>
-            <a:r>
-              <a:rPr lang="de-DE" sz="1800" dirty="0" err="1"/>
-              <a:t>instead</a:t>
-            </a:r>
-            <a:r>
-              <a:rPr lang="de-DE" sz="1800" dirty="0"/>
-              <a:t> </a:t>
-            </a:r>
-            <a:r>
-              <a:rPr lang="de-DE" sz="1800" dirty="0" err="1"/>
-              <a:t>of</a:t>
-            </a:r>
-            <a:r>
-              <a:rPr lang="de-DE" sz="1800" dirty="0"/>
-              <a:t> </a:t>
-            </a:r>
-            <a:r>
-              <a:rPr lang="de-DE" sz="1800" dirty="0" err="1"/>
-              <a:t>fixed</a:t>
-            </a:r>
-            <a:r>
-              <a:rPr lang="de-DE" sz="1800" dirty="0"/>
-              <a:t> </a:t>
-            </a:r>
-            <a:r>
-              <a:rPr lang="de-DE" sz="1800" dirty="0" err="1"/>
-              <a:t>masked</a:t>
-            </a:r>
-            <a:r>
-              <a:rPr lang="de-DE" sz="1800" dirty="0"/>
-              <a:t> </a:t>
-            </a:r>
-            <a:r>
-              <a:rPr lang="de-DE" sz="1800" dirty="0" err="1"/>
-              <a:t>tokens</a:t>
-            </a:r>
-            <a:r>
-              <a:rPr lang="de-DE" sz="1800" dirty="0"/>
-              <a:t> </a:t>
-            </a:r>
-            <a:r>
-              <a:rPr lang="de-DE" sz="1800" dirty="0" err="1"/>
-              <a:t>for</a:t>
-            </a:r>
-            <a:r>
-              <a:rPr lang="de-DE" sz="1800" dirty="0"/>
-              <a:t> </a:t>
-            </a:r>
-            <a:r>
-              <a:rPr lang="de-DE" sz="1800" dirty="0" err="1"/>
-              <a:t>each</a:t>
-            </a:r>
-            <a:r>
-              <a:rPr lang="de-DE" sz="1800" dirty="0"/>
-              <a:t> </a:t>
-            </a:r>
-            <a:r>
-              <a:rPr lang="de-DE" sz="1800" dirty="0" err="1"/>
-              <a:t>sequence</a:t>
-            </a:r>
-            <a:r>
-              <a:rPr lang="de-DE" sz="1800" dirty="0"/>
-              <a:t>, </a:t>
-            </a:r>
-            <a:r>
-              <a:rPr lang="de-DE" sz="1800" dirty="0" err="1"/>
-              <a:t>masks</a:t>
-            </a:r>
-            <a:r>
-              <a:rPr lang="de-DE" sz="1800" dirty="0"/>
-              <a:t> </a:t>
-            </a:r>
-            <a:r>
-              <a:rPr lang="de-DE" sz="1800" dirty="0" err="1"/>
-              <a:t>change</a:t>
-            </a:r>
-            <a:r>
-              <a:rPr lang="de-DE" sz="1800" dirty="0"/>
-              <a:t> </a:t>
-            </a:r>
-            <a:r>
-              <a:rPr lang="de-DE" sz="1800" dirty="0" err="1"/>
-              <a:t>each</a:t>
-            </a:r>
-            <a:r>
-              <a:rPr lang="de-DE" sz="1800" dirty="0"/>
-              <a:t> </a:t>
-            </a:r>
-            <a:r>
-              <a:rPr lang="de-DE" sz="1800" dirty="0" err="1"/>
-              <a:t>epoch</a:t>
-            </a:r>
-            <a:endParaRPr lang="de-DE" sz="1800" dirty="0"/>
-          </a:p>
-          <a:p>
-            <a:pPr marL="0" indent="0">
-              <a:buNone/>
-            </a:pPr>
-            <a:endParaRPr lang="de-DE" sz="2400" dirty="0"/>
-          </a:p>
-          <a:p>
-            <a:pPr marL="0" indent="0">
-              <a:buNone/>
-            </a:pPr>
-            <a:r>
-              <a:rPr lang="de-DE" sz="2400" b="1" dirty="0" err="1">
-                <a:hlinkClick r:id="rId3"/>
-              </a:rPr>
-              <a:t>DistilBERT</a:t>
-            </a:r>
-            <a:r>
-              <a:rPr lang="de-DE" sz="2400" dirty="0"/>
-              <a:t>: </a:t>
-            </a:r>
-            <a:r>
-              <a:rPr lang="de-DE" sz="2400" dirty="0" err="1"/>
-              <a:t>much</a:t>
-            </a:r>
-            <a:r>
-              <a:rPr lang="de-DE" sz="2400" dirty="0"/>
-              <a:t> </a:t>
-            </a:r>
-            <a:r>
-              <a:rPr lang="de-DE" sz="2400" dirty="0" err="1"/>
-              <a:t>lighter</a:t>
-            </a:r>
-            <a:r>
-              <a:rPr lang="de-DE" sz="2400" dirty="0"/>
-              <a:t> and </a:t>
-            </a:r>
-            <a:r>
-              <a:rPr lang="de-DE" sz="2400" dirty="0" err="1"/>
-              <a:t>faster</a:t>
-            </a:r>
-            <a:r>
-              <a:rPr lang="de-DE" sz="2400" dirty="0"/>
-              <a:t>, </a:t>
-            </a:r>
-            <a:r>
-              <a:rPr lang="de-DE" sz="2400" dirty="0" err="1"/>
-              <a:t>retaining</a:t>
-            </a:r>
-            <a:r>
-              <a:rPr lang="de-DE" sz="2400" dirty="0"/>
-              <a:t> ~95% </a:t>
-            </a:r>
-            <a:r>
-              <a:rPr lang="de-DE" sz="2400" dirty="0" err="1"/>
-              <a:t>of</a:t>
-            </a:r>
-            <a:r>
-              <a:rPr lang="de-DE" sz="2400" dirty="0"/>
-              <a:t> </a:t>
-            </a:r>
-            <a:r>
-              <a:rPr lang="de-DE" sz="2400" dirty="0" err="1"/>
-              <a:t>BERT’s</a:t>
-            </a:r>
-            <a:r>
-              <a:rPr lang="de-DE" sz="2400" dirty="0"/>
-              <a:t> </a:t>
-            </a:r>
-            <a:r>
-              <a:rPr lang="de-DE" sz="2400" dirty="0" err="1"/>
-              <a:t>performance</a:t>
-            </a:r>
-            <a:endParaRPr lang="de-DE" sz="2400" dirty="0"/>
-          </a:p>
-          <a:p>
-            <a:r>
-              <a:rPr lang="de-DE" sz="1800" dirty="0"/>
-              <a:t>a </a:t>
-            </a:r>
-            <a:r>
-              <a:rPr lang="de-DE" sz="1800" dirty="0" err="1"/>
-              <a:t>smaller</a:t>
-            </a:r>
-            <a:r>
-              <a:rPr lang="de-DE" sz="1800" dirty="0"/>
-              <a:t> “</a:t>
-            </a:r>
-            <a:r>
-              <a:rPr lang="de-DE" sz="1800" dirty="0" err="1"/>
-              <a:t>student</a:t>
-            </a:r>
-            <a:r>
-              <a:rPr lang="de-DE" sz="1800" dirty="0"/>
-              <a:t>” </a:t>
-            </a:r>
-            <a:r>
-              <a:rPr lang="de-DE" sz="1800" dirty="0" err="1"/>
-              <a:t>model</a:t>
-            </a:r>
-            <a:r>
-              <a:rPr lang="de-DE" sz="1800" dirty="0"/>
-              <a:t> </a:t>
-            </a:r>
-            <a:r>
-              <a:rPr lang="de-DE" sz="1800" dirty="0" err="1"/>
-              <a:t>is</a:t>
-            </a:r>
-            <a:r>
-              <a:rPr lang="de-DE" sz="1800" dirty="0"/>
-              <a:t> </a:t>
-            </a:r>
-            <a:r>
-              <a:rPr lang="de-DE" sz="1800" dirty="0" err="1"/>
-              <a:t>trained</a:t>
-            </a:r>
-            <a:r>
-              <a:rPr lang="de-DE" sz="1800" dirty="0"/>
-              <a:t> </a:t>
-            </a:r>
-            <a:r>
-              <a:rPr lang="de-DE" sz="1800" dirty="0" err="1"/>
-              <a:t>to</a:t>
-            </a:r>
-            <a:r>
-              <a:rPr lang="de-DE" sz="1800" dirty="0"/>
-              <a:t> </a:t>
-            </a:r>
-            <a:r>
-              <a:rPr lang="de-DE" sz="1800" dirty="0" err="1"/>
-              <a:t>mimic</a:t>
-            </a:r>
-            <a:r>
-              <a:rPr lang="de-DE" sz="1800" dirty="0"/>
-              <a:t> </a:t>
-            </a:r>
-            <a:r>
-              <a:rPr lang="de-DE" sz="1800" dirty="0" err="1"/>
-              <a:t>BERT’s</a:t>
-            </a:r>
-            <a:r>
-              <a:rPr lang="de-DE" sz="1800" dirty="0"/>
-              <a:t> </a:t>
-            </a:r>
-            <a:r>
-              <a:rPr lang="de-DE" sz="1800" dirty="0" err="1"/>
-              <a:t>predictions</a:t>
-            </a:r>
-            <a:endParaRPr lang="de-DE" sz="1800" dirty="0"/>
-          </a:p>
-          <a:p>
-            <a:r>
-              <a:rPr lang="de-DE" sz="1800" dirty="0"/>
-              <a:t>40% </a:t>
-            </a:r>
-            <a:r>
-              <a:rPr lang="de-DE" sz="1800" dirty="0" err="1"/>
-              <a:t>fewer</a:t>
-            </a:r>
-            <a:r>
-              <a:rPr lang="de-DE" sz="1800" dirty="0"/>
-              <a:t> </a:t>
-            </a:r>
-            <a:r>
-              <a:rPr lang="de-DE" sz="1800" dirty="0" err="1"/>
-              <a:t>parameters</a:t>
-            </a:r>
-            <a:r>
-              <a:rPr lang="de-DE" sz="1800" dirty="0"/>
-              <a:t> </a:t>
-            </a:r>
-            <a:r>
-              <a:rPr lang="de-DE" sz="1800" dirty="0" err="1"/>
-              <a:t>than</a:t>
-            </a:r>
-            <a:r>
-              <a:rPr lang="de-DE" sz="1800" dirty="0"/>
-              <a:t> BERT, 60% </a:t>
-            </a:r>
-            <a:r>
-              <a:rPr lang="de-DE" sz="1800" dirty="0" err="1"/>
-              <a:t>faster</a:t>
-            </a:r>
-            <a:r>
-              <a:rPr lang="de-DE" sz="1800" dirty="0"/>
-              <a:t> </a:t>
-            </a:r>
-            <a:r>
-              <a:rPr lang="de-DE" sz="1800" dirty="0" err="1"/>
-              <a:t>inference</a:t>
-            </a:r>
-            <a:r>
-              <a:rPr lang="de-DE" sz="1800" dirty="0"/>
-              <a:t>, </a:t>
-            </a:r>
-            <a:r>
-              <a:rPr lang="de-DE" sz="1800" dirty="0" err="1"/>
-              <a:t>using</a:t>
-            </a:r>
-            <a:r>
-              <a:rPr lang="de-DE" sz="1800" dirty="0"/>
-              <a:t> half </a:t>
-            </a:r>
-            <a:r>
-              <a:rPr lang="de-DE" sz="1800" dirty="0" err="1"/>
-              <a:t>the</a:t>
-            </a:r>
-            <a:r>
-              <a:rPr lang="de-DE" sz="1800" dirty="0"/>
-              <a:t> </a:t>
-            </a:r>
-            <a:r>
-              <a:rPr lang="de-DE" sz="1800" dirty="0" err="1"/>
-              <a:t>memory</a:t>
-            </a:r>
-            <a:endParaRPr lang="de-DE" sz="1800" dirty="0"/>
-          </a:p>
-          <a:p>
-            <a:r>
-              <a:rPr lang="de-DE" sz="1800" dirty="0"/>
-              <a:t>also </a:t>
-            </a:r>
-            <a:r>
-              <a:rPr lang="de-DE" sz="1800" dirty="0" err="1"/>
-              <a:t>removed</a:t>
-            </a:r>
-            <a:r>
-              <a:rPr lang="de-DE" sz="1800" dirty="0"/>
-              <a:t> </a:t>
-            </a:r>
-            <a:r>
-              <a:rPr lang="de-DE" sz="1800" dirty="0" err="1"/>
-              <a:t>next</a:t>
-            </a:r>
-            <a:r>
-              <a:rPr lang="de-DE" sz="1800" dirty="0"/>
-              <a:t> </a:t>
-            </a:r>
-            <a:r>
-              <a:rPr lang="de-DE" sz="1800" dirty="0" err="1"/>
-              <a:t>sentence</a:t>
-            </a:r>
-            <a:r>
-              <a:rPr lang="de-DE" sz="1800" dirty="0"/>
-              <a:t> </a:t>
-            </a:r>
-            <a:r>
-              <a:rPr lang="de-DE" sz="1800" dirty="0" err="1"/>
-              <a:t>prediction</a:t>
-            </a:r>
-            <a:r>
-              <a:rPr lang="de-DE" sz="1800" dirty="0"/>
-              <a:t> </a:t>
-            </a:r>
-            <a:r>
-              <a:rPr lang="de-DE" sz="1800" dirty="0" err="1"/>
-              <a:t>as</a:t>
-            </a:r>
-            <a:r>
-              <a:rPr lang="de-DE" sz="1800" dirty="0"/>
-              <a:t> </a:t>
-            </a:r>
-            <a:r>
-              <a:rPr lang="de-DE" sz="1800" dirty="0" err="1"/>
-              <a:t>pretraining</a:t>
-            </a:r>
-            <a:r>
-              <a:rPr lang="de-DE" sz="1800" dirty="0"/>
-              <a:t> </a:t>
-            </a:r>
-            <a:r>
-              <a:rPr lang="de-DE" sz="1800" dirty="0" err="1"/>
-              <a:t>objective</a:t>
-            </a:r>
-            <a:endParaRPr lang="de-DE" sz="1800" dirty="0"/>
-          </a:p>
-        </p:txBody>
-      </p:sp>
-      <p:sp>
-        <p:nvSpPr>
-          <p:cNvPr id="4" name="Foliennummernplatzhalter 3">
-            <a:extLst>
-              <a:ext uri="{FF2B5EF4-FFF2-40B4-BE49-F238E27FC236}">
-                <a16:creationId xmlns:a16="http://schemas.microsoft.com/office/drawing/2014/main" id="{6C9E7DDC-F9E4-F124-BF7B-7A2E77B7C25C}"/>
-              </a:ext>
-            </a:extLst>
-          </p:cNvPr>
-          <p:cNvSpPr>
-            <a:spLocks noGrp="1"/>
-          </p:cNvSpPr>
-          <p:nvPr>
-            <p:ph type="sldNum" sz="quarter" idx="12"/>
-          </p:nvPr>
-        </p:nvSpPr>
-        <p:spPr/>
-        <p:txBody>
-          <a:bodyPr/>
-          <a:lstStyle/>
-          <a:p>
-            <a:fld id="{3D4C94FE-FF23-4504-88E9-14D481113291}" type="slidenum">
-              <a:rPr lang="en-GB" smtClean="0"/>
-              <a:t>7</a:t>
-            </a:fld>
-            <a:endParaRPr lang="en-GB"/>
-          </a:p>
-        </p:txBody>
-      </p:sp>
-    </p:spTree>
-    <p:extLst>
-      <p:ext uri="{BB962C8B-B14F-4D97-AF65-F5344CB8AC3E}">
-        <p14:creationId xmlns:p14="http://schemas.microsoft.com/office/powerpoint/2010/main" val="3675046636"/>
-      </p:ext>
-    </p:extLst>
-  </p:cSld>
-  <p:clrMapOvr>
-    <a:masterClrMapping/>
-  </p:clrMapOvr>
-</p:sld>
-</file>
-
-<file path=ppt/slides/slide8.xml><?xml version="1.0" encoding="utf-8"?>
-<p:sld xmlns:a="http://schemas.openxmlformats.org/drawingml/2006/main" xmlns:r="http://schemas.openxmlformats.org/officeDocument/2006/relationships" xmlns:p="http://schemas.openxmlformats.org/presentationml/2006/main">
-  <p:cSld>
-    <p:spTree>
-      <p:nvGrpSpPr>
-        <p:cNvPr id="1" name="">
-          <a:extLst>
-            <a:ext uri="{FF2B5EF4-FFF2-40B4-BE49-F238E27FC236}">
-              <a16:creationId xmlns:a16="http://schemas.microsoft.com/office/drawing/2014/main" id="{B6D48B82-E4A2-950C-59DA-A22864528AAC}"/>
-            </a:ext>
-          </a:extLst>
-        </p:cNvPr>
-        <p:cNvGrpSpPr/>
-        <p:nvPr/>
-      </p:nvGrpSpPr>
-      <p:grpSpPr>
-        <a:xfrm>
-          <a:off x="0" y="0"/>
-          <a:ext cx="0" cy="0"/>
-          <a:chOff x="0" y="0"/>
-          <a:chExt cx="0" cy="0"/>
-        </a:xfrm>
-      </p:grpSpPr>
-      <p:sp>
-        <p:nvSpPr>
-          <p:cNvPr id="2" name="Title 1">
-            <a:extLst>
-              <a:ext uri="{FF2B5EF4-FFF2-40B4-BE49-F238E27FC236}">
-                <a16:creationId xmlns:a16="http://schemas.microsoft.com/office/drawing/2014/main" id="{F6CE1425-D0DC-6B96-3E26-103D86136E21}"/>
-              </a:ext>
-            </a:extLst>
-          </p:cNvPr>
-          <p:cNvSpPr>
-            <a:spLocks noGrp="1"/>
-          </p:cNvSpPr>
-          <p:nvPr>
-            <p:ph type="title"/>
-          </p:nvPr>
-        </p:nvSpPr>
-        <p:spPr/>
-        <p:txBody>
-          <a:bodyPr/>
-          <a:lstStyle/>
-          <a:p>
-            <a:r>
-              <a:rPr lang="en-GB" dirty="0"/>
-              <a:t>Example for D</a:t>
-            </a:r>
-            <a:r>
-              <a:rPr lang="en-DE" dirty="0"/>
-              <a:t>ecoder-Only </a:t>
-            </a:r>
-            <a:r>
-              <a:rPr lang="en-GB" dirty="0"/>
-              <a:t>LLM</a:t>
-            </a:r>
-            <a:endParaRPr lang="en-DE" dirty="0"/>
-          </a:p>
-        </p:txBody>
-      </p:sp>
-      <p:sp>
-        <p:nvSpPr>
-          <p:cNvPr id="3" name="Content Placeholder 2">
-            <a:extLst>
-              <a:ext uri="{FF2B5EF4-FFF2-40B4-BE49-F238E27FC236}">
-                <a16:creationId xmlns:a16="http://schemas.microsoft.com/office/drawing/2014/main" id="{296BBA48-49EF-1DAD-E7A1-54442EC134C4}"/>
-              </a:ext>
-            </a:extLst>
-          </p:cNvPr>
-          <p:cNvSpPr>
-            <a:spLocks noGrp="1"/>
-          </p:cNvSpPr>
-          <p:nvPr>
-            <p:ph idx="1"/>
-          </p:nvPr>
-        </p:nvSpPr>
-        <p:spPr>
-          <a:xfrm>
-            <a:off x="838201" y="1817159"/>
-            <a:ext cx="5005552" cy="4675716"/>
-          </a:xfrm>
-        </p:spPr>
-        <p:txBody>
-          <a:bodyPr>
-            <a:normAutofit lnSpcReduction="10000"/>
-          </a:bodyPr>
-          <a:lstStyle/>
-          <a:p>
-            <a:pPr marL="0" indent="0">
-              <a:buNone/>
-            </a:pPr>
-            <a:r>
-              <a:rPr lang="en-DE" sz="2600" dirty="0"/>
-              <a:t>GPT (Generative Pre-trained Transformer, by O</a:t>
-            </a:r>
-            <a:r>
-              <a:rPr lang="en-GB" sz="2600" dirty="0"/>
-              <a:t>p</a:t>
-            </a:r>
-            <a:r>
-              <a:rPr lang="en-DE" sz="2600" dirty="0"/>
-              <a:t>enAI) series:</a:t>
-            </a:r>
-          </a:p>
-          <a:p>
-            <a:r>
-              <a:rPr lang="en-GB" sz="2600" dirty="0"/>
-              <a:t>stack of transformer d</a:t>
-            </a:r>
-            <a:r>
-              <a:rPr lang="en-DE" sz="2600" dirty="0"/>
-              <a:t>ecoders</a:t>
-            </a:r>
-            <a:r>
-              <a:rPr lang="en-GB" sz="2600" dirty="0"/>
-              <a:t> </a:t>
-            </a:r>
-            <a:r>
-              <a:rPr lang="en-GB" sz="2600" dirty="0">
-                <a:sym typeface="Wingdings" pitchFamily="2" charset="2"/>
-              </a:rPr>
-              <a:t> </a:t>
-            </a:r>
-            <a:r>
-              <a:rPr lang="en-GB" sz="2600" dirty="0"/>
-              <a:t>a</a:t>
-            </a:r>
-            <a:r>
-              <a:rPr lang="en-DE" sz="2600" dirty="0"/>
-              <a:t>uto-regressive language model</a:t>
-            </a:r>
-          </a:p>
-          <a:p>
-            <a:r>
-              <a:rPr lang="en-GB" sz="2600" dirty="0"/>
-              <a:t>generative pre-training: self-supervised generation of text (i.e., next-word predictions) on massive web scrape data sets</a:t>
-            </a:r>
-          </a:p>
-          <a:p>
-            <a:pPr marL="0" indent="0">
-              <a:buNone/>
-            </a:pPr>
-            <a:endParaRPr lang="en-GB" sz="2600" dirty="0"/>
-          </a:p>
-          <a:p>
-            <a:pPr marL="0" indent="0">
-              <a:buNone/>
-            </a:pPr>
-            <a:r>
-              <a:rPr lang="en-GB" sz="1800" dirty="0"/>
-              <a:t>lightweight </a:t>
-            </a:r>
-            <a:r>
-              <a:rPr lang="en-GB" sz="1800" dirty="0" err="1"/>
-              <a:t>PyTorch</a:t>
-            </a:r>
-            <a:r>
-              <a:rPr lang="en-GB" sz="1800" dirty="0"/>
-              <a:t> re-implementation of GPT: </a:t>
-            </a:r>
-            <a:r>
-              <a:rPr lang="en-GB" sz="1800" dirty="0">
-                <a:hlinkClick r:id="rId2"/>
-              </a:rPr>
-              <a:t>minGPT</a:t>
-            </a:r>
-            <a:endParaRPr lang="en-GB" sz="1800" dirty="0"/>
-          </a:p>
-          <a:p>
-            <a:pPr marL="0" indent="0">
-              <a:buNone/>
-            </a:pPr>
-            <a:r>
-              <a:rPr lang="en-GB" sz="1800" dirty="0"/>
-              <a:t>more powerful: </a:t>
-            </a:r>
-            <a:r>
-              <a:rPr lang="en-GB" sz="1800" dirty="0">
-                <a:hlinkClick r:id="rId3"/>
-              </a:rPr>
-              <a:t>nanoGPT</a:t>
-            </a:r>
-            <a:r>
-              <a:rPr lang="en-GB" sz="1800" dirty="0"/>
-              <a:t>, </a:t>
-            </a:r>
-            <a:r>
-              <a:rPr lang="en-GB" sz="1800" dirty="0">
-                <a:hlinkClick r:id="rId4"/>
-              </a:rPr>
-              <a:t>LitGPT</a:t>
-            </a:r>
-            <a:endParaRPr lang="en-GB" sz="1800" dirty="0"/>
-          </a:p>
-        </p:txBody>
-      </p:sp>
-      <p:sp>
-        <p:nvSpPr>
-          <p:cNvPr id="4" name="Slide Number Placeholder 3">
-            <a:extLst>
-              <a:ext uri="{FF2B5EF4-FFF2-40B4-BE49-F238E27FC236}">
-                <a16:creationId xmlns:a16="http://schemas.microsoft.com/office/drawing/2014/main" id="{DACC20FA-D45E-4110-993D-3F368904201F}"/>
-              </a:ext>
-            </a:extLst>
-          </p:cNvPr>
-          <p:cNvSpPr>
-            <a:spLocks noGrp="1"/>
-          </p:cNvSpPr>
-          <p:nvPr>
-            <p:ph type="sldNum" sz="quarter" idx="12"/>
-          </p:nvPr>
-        </p:nvSpPr>
-        <p:spPr/>
-        <p:txBody>
-          <a:bodyPr/>
-          <a:lstStyle/>
-          <a:p>
-            <a:fld id="{849D05A8-43E9-1C49-8606-50AB68220DEC}" type="slidenum">
-              <a:rPr lang="en-DE" smtClean="0"/>
-              <a:t>8</a:t>
-            </a:fld>
-            <a:endParaRPr lang="en-DE"/>
-          </a:p>
-        </p:txBody>
-      </p:sp>
-      <p:pic>
-        <p:nvPicPr>
-          <p:cNvPr id="6" name="Grafik 5" descr="Ein Bild, das Text, Screenshot, Schrift, Diagramm enthält.&#10;&#10;KI-generierte Inhalte können fehlerhaft sein.">
-            <a:extLst>
-              <a:ext uri="{FF2B5EF4-FFF2-40B4-BE49-F238E27FC236}">
-                <a16:creationId xmlns:a16="http://schemas.microsoft.com/office/drawing/2014/main" id="{B664DCB9-712F-8152-0297-AA40EDACF099}"/>
-              </a:ext>
-            </a:extLst>
-          </p:cNvPr>
-          <p:cNvPicPr>
-            <a:picLocks noChangeAspect="1"/>
-          </p:cNvPicPr>
-          <p:nvPr/>
-        </p:nvPicPr>
-        <p:blipFill>
-          <a:blip r:embed="rId5">
-            <a:extLst>
-              <a:ext uri="{28A0092B-C50C-407E-A947-70E740481C1C}">
-                <a14:useLocalDpi xmlns:a14="http://schemas.microsoft.com/office/drawing/2010/main" val="0"/>
-              </a:ext>
-            </a:extLst>
-          </a:blip>
-          <a:stretch>
-            <a:fillRect/>
-          </a:stretch>
-        </p:blipFill>
-        <p:spPr>
-          <a:xfrm>
-            <a:off x="5838602" y="1817159"/>
-            <a:ext cx="6353398" cy="3942510"/>
-          </a:xfrm>
-          <a:prstGeom prst="rect">
-            <a:avLst/>
-          </a:prstGeom>
-        </p:spPr>
-      </p:pic>
-      <p:sp>
-        <p:nvSpPr>
-          <p:cNvPr id="7" name="TextBox 10">
-            <a:extLst>
-              <a:ext uri="{FF2B5EF4-FFF2-40B4-BE49-F238E27FC236}">
-                <a16:creationId xmlns:a16="http://schemas.microsoft.com/office/drawing/2014/main" id="{4D878841-CF0D-20D5-E2D6-3DB7762D39EA}"/>
-              </a:ext>
-            </a:extLst>
-          </p:cNvPr>
-          <p:cNvSpPr txBox="1"/>
-          <p:nvPr/>
-        </p:nvSpPr>
-        <p:spPr>
-          <a:xfrm>
-            <a:off x="10786015" y="5513448"/>
-            <a:ext cx="567784" cy="246221"/>
-          </a:xfrm>
-          <a:prstGeom prst="rect">
-            <a:avLst/>
-          </a:prstGeom>
-          <a:noFill/>
-        </p:spPr>
-        <p:txBody>
-          <a:bodyPr wrap="none" rtlCol="0">
-            <a:spAutoFit/>
-          </a:bodyPr>
-          <a:lstStyle/>
-          <a:p>
-            <a:r>
-              <a:rPr lang="de-DE" sz="1000" dirty="0">
-                <a:hlinkClick r:id="rId6"/>
-              </a:rPr>
-              <a:t>source</a:t>
-            </a:r>
-            <a:endParaRPr lang="de-DE" sz="1000" dirty="0"/>
-          </a:p>
-        </p:txBody>
-      </p:sp>
-    </p:spTree>
-    <p:extLst>
-      <p:ext uri="{BB962C8B-B14F-4D97-AF65-F5344CB8AC3E}">
-        <p14:creationId xmlns:p14="http://schemas.microsoft.com/office/powerpoint/2010/main" val="1286678673"/>
-      </p:ext>
-    </p:extLst>
-  </p:cSld>
-  <p:clrMapOvr>
-    <a:masterClrMapping/>
-  </p:clrMapOvr>
-</p:sld>
-</file>
-
-<file path=ppt/slides/slide9.xml><?xml version="1.0" encoding="utf-8"?>
 <p:sld xmlns:a="http://schemas.openxmlformats.org/drawingml/2006/main" xmlns:r="http://schemas.openxmlformats.org/officeDocument/2006/relationships" xmlns:p="http://schemas.openxmlformats.org/presentationml/2006/main">
   <p:cSld>
     <p:spTree>
@@ -16249,8 +15705,12 @@
           <a:lstStyle/>
           <a:p>
             <a:r>
+              <a:rPr lang="de-DE" dirty="0" err="1"/>
+              <a:t>OpenAI’s</a:t>
+            </a:r>
+            <a:r>
               <a:rPr lang="de-DE" dirty="0"/>
-              <a:t>GPT Evolution</a:t>
+              <a:t> GPT Series</a:t>
             </a:r>
             <a:endParaRPr lang="en-DE" dirty="0"/>
           </a:p>
@@ -16280,97 +15740,273 @@
         </p:spPr>
         <p:txBody>
           <a:bodyPr>
-            <a:normAutofit/>
+            <a:noAutofit/>
           </a:bodyPr>
           <a:lstStyle/>
           <a:p>
-            <a:pPr marL="0" indent="0">
-              <a:buNone/>
-            </a:pPr>
-            <a:r>
-              <a:rPr lang="en-DE" sz="2600">
+            <a:r>
+              <a:rPr lang="de-DE" sz="2400" dirty="0">
                 <a:hlinkClick r:id="rId2"/>
               </a:rPr>
-              <a:t>GPT</a:t>
-            </a:r>
-            <a:r>
-              <a:rPr lang="en-DE" sz="2600" dirty="0"/>
-              <a:t>: discriminative fine-tuning on specific tasks (e.g., summarization, translation, question-answering) with much smaller </a:t>
-            </a:r>
-            <a:r>
-              <a:rPr lang="en-DE" sz="2600"/>
-              <a:t>data sets</a:t>
-            </a:r>
-            <a:endParaRPr lang="de-DE" sz="2600" dirty="0"/>
-          </a:p>
-          <a:p>
-            <a:pPr marL="0" indent="0">
-              <a:buNone/>
-            </a:pPr>
-            <a:endParaRPr lang="en-DE" sz="2600" dirty="0"/>
-          </a:p>
-          <a:p>
-            <a:pPr marL="0" indent="0">
-              <a:buNone/>
-            </a:pPr>
-            <a:r>
-              <a:rPr lang="en-GB" sz="2600" dirty="0">
+              <a:t>GPT-1</a:t>
+            </a:r>
+            <a:r>
+              <a:rPr lang="en-DE" sz="2400"/>
+              <a:t>: </a:t>
+            </a:r>
+            <a:r>
+              <a:rPr lang="de-DE" sz="2400" dirty="0" err="1"/>
+              <a:t>used</a:t>
+            </a:r>
+            <a:r>
+              <a:rPr lang="de-DE" sz="2400" dirty="0"/>
+              <a:t> </a:t>
+            </a:r>
+            <a:r>
+              <a:rPr lang="de-DE" sz="2400" dirty="0" err="1"/>
+              <a:t>for</a:t>
+            </a:r>
+            <a:r>
+              <a:rPr lang="de-DE" sz="2400" dirty="0"/>
+              <a:t> </a:t>
+            </a:r>
+            <a:r>
+              <a:rPr lang="en-DE" sz="2400"/>
+              <a:t>discriminative finetuning </a:t>
+            </a:r>
+            <a:r>
+              <a:rPr lang="en-DE" sz="2400" dirty="0"/>
+              <a:t>on specific </a:t>
+            </a:r>
+            <a:r>
+              <a:rPr lang="en-DE" sz="2400"/>
+              <a:t>tasks (summarization</a:t>
+            </a:r>
+            <a:r>
+              <a:rPr lang="en-DE" sz="2400" dirty="0"/>
+              <a:t>, translation</a:t>
+            </a:r>
+            <a:r>
+              <a:rPr lang="en-DE" sz="2400"/>
+              <a:t>, question-answering</a:t>
+            </a:r>
+            <a:r>
+              <a:rPr lang="de-DE" sz="2400" dirty="0"/>
+              <a:t>, …</a:t>
+            </a:r>
+            <a:r>
+              <a:rPr lang="en-DE" sz="2400"/>
+              <a:t>)</a:t>
+            </a:r>
+            <a:r>
+              <a:rPr lang="de-DE" sz="2400" dirty="0"/>
+              <a:t> </a:t>
+            </a:r>
+            <a:r>
+              <a:rPr lang="de-DE" sz="2400" dirty="0">
+                <a:sym typeface="Wingdings" pitchFamily="2" charset="2"/>
+              </a:rPr>
+              <a:t> BERT</a:t>
+            </a:r>
+            <a:endParaRPr lang="en-DE" sz="2400" dirty="0"/>
+          </a:p>
+          <a:p>
+            <a:r>
+              <a:rPr lang="en-GB" sz="2400" dirty="0">
                 <a:hlinkClick r:id="rId3"/>
               </a:rPr>
               <a:t>GPT-2</a:t>
             </a:r>
             <a:r>
-              <a:rPr lang="en-GB" sz="2600" dirty="0"/>
-              <a:t>, </a:t>
-            </a:r>
-            <a:r>
-              <a:rPr lang="en-GB" sz="2600" dirty="0">
+              <a:rPr lang="en-DE" sz="2400"/>
+              <a:t>: zero- </a:t>
+            </a:r>
+            <a:r>
+              <a:rPr lang="en-DE" sz="2400" dirty="0"/>
+              <a:t>or </a:t>
+            </a:r>
+            <a:r>
+              <a:rPr lang="en-DE" sz="2400"/>
+              <a:t>few-shot learning</a:t>
+            </a:r>
+            <a:r>
+              <a:rPr lang="de-DE" sz="2400" dirty="0"/>
+              <a:t> </a:t>
+            </a:r>
+            <a:r>
+              <a:rPr lang="de-DE" sz="2400" dirty="0">
+                <a:sym typeface="Wingdings" pitchFamily="2" charset="2"/>
+              </a:rPr>
+              <a:t> </a:t>
+            </a:r>
+            <a:r>
+              <a:rPr lang="de-DE" sz="2400" dirty="0" err="1">
+                <a:sym typeface="Wingdings" pitchFamily="2" charset="2"/>
+              </a:rPr>
+              <a:t>prompting</a:t>
+            </a:r>
+            <a:endParaRPr lang="de-DE" sz="2400" dirty="0"/>
+          </a:p>
+          <a:p>
+            <a:r>
+              <a:rPr lang="en-GB" sz="2400" dirty="0">
                 <a:hlinkClick r:id="rId4"/>
               </a:rPr>
               <a:t>GPT-3</a:t>
             </a:r>
             <a:r>
-              <a:rPr lang="en-GB" sz="2600" dirty="0"/>
-              <a:t> (</a:t>
-            </a:r>
-            <a:r>
-              <a:rPr lang="en-DE" sz="2600" dirty="0"/>
+              <a:rPr lang="en-GB" sz="2400" dirty="0"/>
+              <a:t>: scaling (</a:t>
+            </a:r>
+            <a:r>
+              <a:rPr lang="en-DE" sz="2400"/>
               <a:t>175 billion parameters</a:t>
             </a:r>
             <a:r>
-              <a:rPr lang="en-GB" sz="2600" dirty="0"/>
-              <a:t>)</a:t>
-            </a:r>
-            <a:r>
-              <a:rPr lang="en-DE" sz="2600" dirty="0"/>
-              <a:t>: also zero- or </a:t>
-            </a:r>
-            <a:r>
-              <a:rPr lang="en-DE" sz="2600"/>
-              <a:t>few-shot learning</a:t>
-            </a:r>
-            <a:endParaRPr lang="de-DE" sz="2600" dirty="0"/>
-          </a:p>
-          <a:p>
-            <a:pPr marL="0" indent="0">
-              <a:buNone/>
-            </a:pPr>
-            <a:endParaRPr lang="en-DE" sz="2600" dirty="0"/>
-          </a:p>
-          <a:p>
-            <a:pPr marL="0" indent="0">
-              <a:buNone/>
-            </a:pPr>
-            <a:r>
-              <a:rPr lang="en-GB" sz="2600" dirty="0">
+              <a:rPr lang="de-DE" sz="2400" dirty="0"/>
+              <a:t>) </a:t>
+            </a:r>
+            <a:r>
+              <a:rPr lang="de-DE" sz="2400" dirty="0">
+                <a:sym typeface="Wingdings" pitchFamily="2" charset="2"/>
+              </a:rPr>
+              <a:t> </a:t>
+            </a:r>
+            <a:r>
+              <a:rPr lang="en-GB" sz="2400" dirty="0"/>
+              <a:t>much increased capabilities</a:t>
+            </a:r>
+            <a:endParaRPr lang="en-DE" sz="2400" dirty="0"/>
+          </a:p>
+          <a:p>
+            <a:r>
+              <a:rPr lang="en-GB" sz="2400" dirty="0">
                 <a:hlinkClick r:id="rId5"/>
               </a:rPr>
               <a:t>GPT-4</a:t>
             </a:r>
             <a:r>
-              <a:rPr lang="en-DE" sz="2600" dirty="0"/>
-              <a:t>: extend to multimodal model (image and text inputs, text outputs)</a:t>
-            </a:r>
+              <a:rPr lang="en-GB" sz="2400" dirty="0"/>
+              <a:t>: more scaling </a:t>
+            </a:r>
+            <a:r>
+              <a:rPr lang="de-DE" sz="2400" dirty="0"/>
+              <a:t>(</a:t>
+            </a:r>
+            <a:r>
+              <a:rPr lang="en-DE" sz="2400">
+                <a:hlinkClick r:id="rId6"/>
+              </a:rPr>
+              <a:t>capabilities</a:t>
+            </a:r>
+            <a:r>
+              <a:rPr lang="de-DE" sz="2400" dirty="0"/>
+              <a:t>)</a:t>
+            </a:r>
+            <a:endParaRPr lang="en-GB" sz="2400" dirty="0"/>
+          </a:p>
+          <a:p>
+            <a:r>
+              <a:rPr lang="en-GB" sz="2400" dirty="0"/>
+              <a:t>GPT-4o</a:t>
+            </a:r>
+            <a:r>
+              <a:rPr lang="en-DE" sz="2400"/>
+              <a:t>: multimodal model</a:t>
+            </a:r>
+            <a:endParaRPr lang="de-DE" sz="2400" dirty="0"/>
+          </a:p>
+          <a:p>
+            <a:r>
+              <a:rPr lang="de-DE" sz="2400" dirty="0">
+                <a:hlinkClick r:id="rId7"/>
+              </a:rPr>
+              <a:t>o1</a:t>
+            </a:r>
+            <a:r>
+              <a:rPr lang="de-DE" sz="2400" dirty="0"/>
+              <a:t>: </a:t>
+            </a:r>
+            <a:r>
+              <a:rPr lang="de-DE" sz="2400" dirty="0" err="1"/>
+              <a:t>reasoning</a:t>
+            </a:r>
+            <a:r>
+              <a:rPr lang="de-DE" sz="2400" dirty="0"/>
+              <a:t> </a:t>
+            </a:r>
+            <a:r>
+              <a:rPr lang="de-DE" sz="2400" dirty="0" err="1"/>
+              <a:t>model</a:t>
+            </a:r>
+            <a:endParaRPr lang="de-DE" sz="2400" dirty="0"/>
+          </a:p>
+          <a:p>
+            <a:r>
+              <a:rPr lang="de-DE" sz="2400" dirty="0"/>
+              <a:t>GPT-5: </a:t>
+            </a:r>
+            <a:r>
+              <a:rPr lang="de-DE" sz="2400" dirty="0" err="1"/>
+              <a:t>automatic</a:t>
+            </a:r>
+            <a:r>
+              <a:rPr lang="de-DE" sz="2400" dirty="0"/>
+              <a:t> </a:t>
+            </a:r>
+            <a:r>
+              <a:rPr lang="de-DE" sz="2400" dirty="0" err="1"/>
+              <a:t>activation</a:t>
+            </a:r>
+            <a:r>
+              <a:rPr lang="de-DE" sz="2400" dirty="0"/>
+              <a:t> </a:t>
+            </a:r>
+            <a:r>
+              <a:rPr lang="de-DE" sz="2400" dirty="0" err="1"/>
+              <a:t>of</a:t>
+            </a:r>
+            <a:r>
+              <a:rPr lang="de-DE" sz="2400" dirty="0"/>
+              <a:t> </a:t>
+            </a:r>
+            <a:r>
+              <a:rPr lang="de-DE" sz="2400" dirty="0" err="1"/>
+              <a:t>reasoning</a:t>
+            </a:r>
+            <a:r>
+              <a:rPr lang="de-DE" sz="2400" dirty="0"/>
+              <a:t> </a:t>
+            </a:r>
+            <a:r>
+              <a:rPr lang="de-DE" sz="2400" dirty="0" err="1"/>
+              <a:t>model</a:t>
+            </a:r>
+            <a:r>
+              <a:rPr lang="de-DE" sz="2400" dirty="0"/>
+              <a:t> </a:t>
+            </a:r>
+            <a:r>
+              <a:rPr lang="de-DE" sz="2400" dirty="0" err="1"/>
+              <a:t>depending</a:t>
+            </a:r>
+            <a:r>
+              <a:rPr lang="de-DE" sz="2400" dirty="0"/>
+              <a:t> on </a:t>
+            </a:r>
+            <a:r>
+              <a:rPr lang="de-DE" sz="2400" dirty="0" err="1"/>
+              <a:t>the</a:t>
+            </a:r>
+            <a:r>
+              <a:rPr lang="de-DE" sz="2400" dirty="0"/>
+              <a:t> </a:t>
+            </a:r>
+            <a:r>
+              <a:rPr lang="de-DE" sz="2400" dirty="0" err="1"/>
+              <a:t>task</a:t>
+            </a:r>
+            <a:endParaRPr lang="en-DE" sz="2400" dirty="0"/>
           </a:p>
         </p:txBody>
       </p:sp>
@@ -16397,18 +16033,438 @@
           <a:p>
             <a:fld id="{849D05A8-43E9-1C49-8606-50AB68220DEC}" type="slidenum">
               <a:rPr lang="en-DE" smtClean="0"/>
-              <a:t>9</a:t>
+              <a:t>7</a:t>
             </a:fld>
             <a:endParaRPr lang="en-DE"/>
+          </a:p>
+        </p:txBody>
+      </p:sp>
+    </p:spTree>
+    <p:extLst>
+      <p:ext uri="{BB962C8B-B14F-4D97-AF65-F5344CB8AC3E}">
+        <p14:creationId xmlns:p14="http://schemas.microsoft.com/office/powerpoint/2010/main" val="2356046642"/>
+      </p:ext>
+    </p:extLst>
+  </p:cSld>
+  <p:clrMapOvr>
+    <a:masterClrMapping/>
+  </p:clrMapOvr>
+</p:sld>
+</file>
+
+<file path=ppt/slides/slide8.xml><?xml version="1.0" encoding="utf-8"?>
+<p:sld xmlns:a="http://schemas.openxmlformats.org/drawingml/2006/main" xmlns:r="http://schemas.openxmlformats.org/officeDocument/2006/relationships" xmlns:p="http://schemas.openxmlformats.org/presentationml/2006/main">
+  <p:cSld>
+    <p:spTree>
+      <p:nvGrpSpPr>
+        <p:cNvPr id="1" name=""/>
+        <p:cNvGrpSpPr/>
+        <p:nvPr/>
+      </p:nvGrpSpPr>
+      <p:grpSpPr>
+        <a:xfrm>
+          <a:off x="0" y="0"/>
+          <a:ext cx="0" cy="0"/>
+          <a:chOff x="0" y="0"/>
+          <a:chExt cx="0" cy="0"/>
+        </a:xfrm>
+      </p:grpSpPr>
+      <p:sp>
+        <p:nvSpPr>
+          <p:cNvPr id="2" name="Titel 1">
+            <a:extLst>
+              <a:ext uri="{FF2B5EF4-FFF2-40B4-BE49-F238E27FC236}">
+                <a16:creationId xmlns:a16="http://schemas.microsoft.com/office/drawing/2014/main" id="{52AB2A7F-D706-126A-8733-B64202ABB3E3}"/>
+              </a:ext>
+            </a:extLst>
+          </p:cNvPr>
+          <p:cNvSpPr>
+            <a:spLocks noGrp="1"/>
+          </p:cNvSpPr>
+          <p:nvPr>
+            <p:ph type="title"/>
+          </p:nvPr>
+        </p:nvSpPr>
+        <p:spPr/>
+        <p:txBody>
+          <a:bodyPr/>
+          <a:lstStyle/>
+          <a:p>
+            <a:r>
+              <a:rPr lang="de-DE" dirty="0" err="1"/>
+              <a:t>Prompting</a:t>
+            </a:r>
+            <a:endParaRPr lang="de-DE" dirty="0"/>
           </a:p>
         </p:txBody>
       </p:sp>
       <p:sp>
         <p:nvSpPr>
-          <p:cNvPr id="5" name="TextBox 4">
+          <p:cNvPr id="3" name="Inhaltsplatzhalter 2">
             <a:extLst>
               <a:ext uri="{FF2B5EF4-FFF2-40B4-BE49-F238E27FC236}">
-                <a16:creationId xmlns:a16="http://schemas.microsoft.com/office/drawing/2014/main" id="{C37A9C10-65EB-EB41-C373-8724DC38C102}"/>
+                <a16:creationId xmlns:a16="http://schemas.microsoft.com/office/drawing/2014/main" id="{4A2ABA11-6D27-64D9-CFC3-94B012C10C50}"/>
+              </a:ext>
+            </a:extLst>
+          </p:cNvPr>
+          <p:cNvSpPr>
+            <a:spLocks noGrp="1"/>
+          </p:cNvSpPr>
+          <p:nvPr>
+            <p:ph idx="1"/>
+          </p:nvPr>
+        </p:nvSpPr>
+        <p:spPr/>
+        <p:txBody>
+          <a:bodyPr/>
+          <a:lstStyle/>
+          <a:p>
+            <a:pPr marL="0" indent="0">
+              <a:buNone/>
+            </a:pPr>
+            <a:r>
+              <a:rPr lang="en-GB" dirty="0"/>
+              <a:t>feed information into decoder LLM via input prompt</a:t>
+            </a:r>
+          </a:p>
+          <a:p>
+            <a:pPr marL="0" indent="0">
+              <a:buNone/>
+            </a:pPr>
+            <a:r>
+              <a:rPr lang="en-GB" dirty="0">
+                <a:sym typeface="Wingdings" panose="05000000000000000000" pitchFamily="2" charset="2"/>
+              </a:rPr>
+              <a:t> </a:t>
+            </a:r>
+            <a:r>
+              <a:rPr lang="en-GB" dirty="0"/>
+              <a:t>attention to context</a:t>
+            </a:r>
+          </a:p>
+          <a:p>
+            <a:pPr marL="0" indent="0">
+              <a:buNone/>
+            </a:pPr>
+            <a:endParaRPr lang="en-GB" dirty="0"/>
+          </a:p>
+          <a:p>
+            <a:pPr marL="0" indent="0">
+              <a:buNone/>
+            </a:pPr>
+            <a:r>
+              <a:rPr lang="en-GB" dirty="0"/>
+              <a:t>typical prompt:</a:t>
+            </a:r>
+          </a:p>
+          <a:p>
+            <a:pPr marL="0" indent="0">
+              <a:buNone/>
+            </a:pPr>
+            <a:r>
+              <a:rPr lang="en-GB" dirty="0"/>
+              <a:t>instructions, context, query, output indicator</a:t>
+            </a:r>
+          </a:p>
+          <a:p>
+            <a:pPr marL="0" indent="0">
+              <a:buNone/>
+            </a:pPr>
+            <a:endParaRPr lang="en-GB" dirty="0"/>
+          </a:p>
+          <a:p>
+            <a:pPr marL="0" indent="0">
+              <a:buNone/>
+            </a:pPr>
+            <a:r>
+              <a:rPr lang="en-GB" dirty="0">
+                <a:sym typeface="Wingdings" pitchFamily="2" charset="2"/>
+              </a:rPr>
+              <a:t> a new paradigm: </a:t>
+            </a:r>
+            <a:r>
+              <a:rPr lang="en-GB" b="1" dirty="0"/>
+              <a:t>one model for many tasks</a:t>
+            </a:r>
+          </a:p>
+        </p:txBody>
+      </p:sp>
+      <p:sp>
+        <p:nvSpPr>
+          <p:cNvPr id="4" name="Foliennummernplatzhalter 3">
+            <a:extLst>
+              <a:ext uri="{FF2B5EF4-FFF2-40B4-BE49-F238E27FC236}">
+                <a16:creationId xmlns:a16="http://schemas.microsoft.com/office/drawing/2014/main" id="{BF2EB15C-8815-C83D-8F45-1E72CC597ECB}"/>
+              </a:ext>
+            </a:extLst>
+          </p:cNvPr>
+          <p:cNvSpPr>
+            <a:spLocks noGrp="1"/>
+          </p:cNvSpPr>
+          <p:nvPr>
+            <p:ph type="sldNum" sz="quarter" idx="12"/>
+          </p:nvPr>
+        </p:nvSpPr>
+        <p:spPr/>
+        <p:txBody>
+          <a:bodyPr/>
+          <a:lstStyle/>
+          <a:p>
+            <a:fld id="{4055531C-5681-6B44-B2CA-926D7A74B06D}" type="slidenum">
+              <a:rPr lang="de-DE" smtClean="0"/>
+              <a:t>8</a:t>
+            </a:fld>
+            <a:endParaRPr lang="de-DE"/>
+          </a:p>
+        </p:txBody>
+      </p:sp>
+    </p:spTree>
+    <p:extLst>
+      <p:ext uri="{BB962C8B-B14F-4D97-AF65-F5344CB8AC3E}">
+        <p14:creationId xmlns:p14="http://schemas.microsoft.com/office/powerpoint/2010/main" val="2879064290"/>
+      </p:ext>
+    </p:extLst>
+  </p:cSld>
+  <p:clrMapOvr>
+    <a:masterClrMapping/>
+  </p:clrMapOvr>
+</p:sld>
+</file>
+
+<file path=ppt/slides/slide9.xml><?xml version="1.0" encoding="utf-8"?>
+<p:sld xmlns:a="http://schemas.openxmlformats.org/drawingml/2006/main" xmlns:r="http://schemas.openxmlformats.org/officeDocument/2006/relationships" xmlns:p="http://schemas.openxmlformats.org/presentationml/2006/main">
+  <p:cSld>
+    <p:spTree>
+      <p:nvGrpSpPr>
+        <p:cNvPr id="1" name=""/>
+        <p:cNvGrpSpPr/>
+        <p:nvPr/>
+      </p:nvGrpSpPr>
+      <p:grpSpPr>
+        <a:xfrm>
+          <a:off x="0" y="0"/>
+          <a:ext cx="0" cy="0"/>
+          <a:chOff x="0" y="0"/>
+          <a:chExt cx="0" cy="0"/>
+        </a:xfrm>
+      </p:grpSpPr>
+      <p:sp>
+        <p:nvSpPr>
+          <p:cNvPr id="2" name="Title 1">
+            <a:extLst>
+              <a:ext uri="{FF2B5EF4-FFF2-40B4-BE49-F238E27FC236}">
+                <a16:creationId xmlns:a16="http://schemas.microsoft.com/office/drawing/2014/main" id="{F89B18D8-662F-8E62-9266-15406EC258A0}"/>
+              </a:ext>
+            </a:extLst>
+          </p:cNvPr>
+          <p:cNvSpPr>
+            <a:spLocks noGrp="1"/>
+          </p:cNvSpPr>
+          <p:nvPr>
+            <p:ph type="title"/>
+          </p:nvPr>
+        </p:nvSpPr>
+        <p:spPr/>
+        <p:txBody>
+          <a:bodyPr/>
+          <a:lstStyle/>
+          <a:p>
+            <a:r>
+              <a:rPr lang="en-DE" dirty="0"/>
+              <a:t>Size Matters</a:t>
+            </a:r>
+            <a:r>
+              <a:rPr lang="en-GB" dirty="0"/>
+              <a:t>: </a:t>
+            </a:r>
+            <a:r>
+              <a:rPr lang="en-GB" b="1" dirty="0"/>
+              <a:t>LARGE</a:t>
+            </a:r>
+            <a:r>
+              <a:rPr lang="en-GB" dirty="0"/>
+              <a:t> Language Models</a:t>
+            </a:r>
+            <a:endParaRPr lang="en-DE" dirty="0"/>
+          </a:p>
+        </p:txBody>
+      </p:sp>
+      <p:sp>
+        <p:nvSpPr>
+          <p:cNvPr id="3" name="Content Placeholder 2">
+            <a:extLst>
+              <a:ext uri="{FF2B5EF4-FFF2-40B4-BE49-F238E27FC236}">
+                <a16:creationId xmlns:a16="http://schemas.microsoft.com/office/drawing/2014/main" id="{8E0F4078-2FDF-FC34-76CD-ACB22B47969E}"/>
+              </a:ext>
+            </a:extLst>
+          </p:cNvPr>
+          <p:cNvSpPr>
+            <a:spLocks noGrp="1"/>
+          </p:cNvSpPr>
+          <p:nvPr>
+            <p:ph idx="1"/>
+          </p:nvPr>
+        </p:nvSpPr>
+        <p:spPr>
+          <a:xfrm>
+            <a:off x="838198" y="1825625"/>
+            <a:ext cx="8936197" cy="4351338"/>
+          </a:xfrm>
+        </p:spPr>
+        <p:txBody>
+          <a:bodyPr>
+            <a:normAutofit/>
+          </a:bodyPr>
+          <a:lstStyle/>
+          <a:p>
+            <a:pPr marL="0" indent="0">
+              <a:buNone/>
+            </a:pPr>
+            <a:r>
+              <a:rPr lang="en-GB" sz="2600" dirty="0">
+                <a:hlinkClick r:id="rId2"/>
+              </a:rPr>
+              <a:t>scaling laws</a:t>
+            </a:r>
+            <a:r>
+              <a:rPr lang="en-GB" sz="2600" dirty="0"/>
+              <a:t>, </a:t>
+            </a:r>
+            <a:r>
+              <a:rPr lang="en-GB" sz="2600" dirty="0">
+                <a:hlinkClick r:id="rId3"/>
+              </a:rPr>
+              <a:t>Chinchilla</a:t>
+            </a:r>
+            <a:r>
+              <a:rPr lang="en-GB" sz="2600" dirty="0"/>
+              <a:t>: coupled performance power laws with model size, amount of training data, and compute</a:t>
+            </a:r>
+          </a:p>
+          <a:p>
+            <a:pPr marL="0" indent="0">
+              <a:buNone/>
+            </a:pPr>
+            <a:r>
+              <a:rPr lang="en-GB" sz="2600" dirty="0">
+                <a:sym typeface="Wingdings" panose="05000000000000000000" pitchFamily="2" charset="2"/>
+              </a:rPr>
+              <a:t> </a:t>
+            </a:r>
+            <a:r>
+              <a:rPr lang="en-GB" sz="2600" dirty="0"/>
+              <a:t>era of large-scale models</a:t>
+            </a:r>
+          </a:p>
+          <a:p>
+            <a:pPr marL="0" indent="0">
+              <a:buNone/>
+            </a:pPr>
+            <a:endParaRPr lang="en-GB" sz="2600" dirty="0"/>
+          </a:p>
+          <a:p>
+            <a:pPr marL="0" indent="0">
+              <a:buNone/>
+            </a:pPr>
+            <a:r>
+              <a:rPr lang="en-GB" sz="2600" dirty="0"/>
+              <a:t>emergent abilities of LLMs:</a:t>
+            </a:r>
+          </a:p>
+          <a:p>
+            <a:r>
+              <a:rPr lang="en-GB" sz="2600" dirty="0"/>
+              <a:t>multi-task learning: perform new tasks at test time without task-specific training (via </a:t>
+            </a:r>
+            <a:r>
+              <a:rPr lang="en-GB" sz="2600" dirty="0">
+                <a:sym typeface="Wingdings" pitchFamily="2" charset="2"/>
+              </a:rPr>
+              <a:t>p</a:t>
+            </a:r>
+            <a:r>
+              <a:rPr lang="en-GB" sz="2600" dirty="0"/>
+              <a:t>rompting)</a:t>
+            </a:r>
+          </a:p>
+          <a:p>
+            <a:r>
+              <a:rPr lang="en-GB" sz="2600" dirty="0">
+                <a:solidFill>
+                  <a:srgbClr val="212529"/>
+                </a:solidFill>
+              </a:rPr>
+              <a:t>reasoning capabilities</a:t>
+            </a:r>
+            <a:endParaRPr lang="en-GB" sz="2600" dirty="0"/>
+          </a:p>
+        </p:txBody>
+      </p:sp>
+      <p:sp>
+        <p:nvSpPr>
+          <p:cNvPr id="4" name="Slide Number Placeholder 3">
+            <a:extLst>
+              <a:ext uri="{FF2B5EF4-FFF2-40B4-BE49-F238E27FC236}">
+                <a16:creationId xmlns:a16="http://schemas.microsoft.com/office/drawing/2014/main" id="{649F0045-E4C4-0C38-5A9B-7A5BA0214CE7}"/>
+              </a:ext>
+            </a:extLst>
+          </p:cNvPr>
+          <p:cNvSpPr>
+            <a:spLocks noGrp="1"/>
+          </p:cNvSpPr>
+          <p:nvPr>
+            <p:ph type="sldNum" sz="quarter" idx="12"/>
+          </p:nvPr>
+        </p:nvSpPr>
+        <p:spPr/>
+        <p:txBody>
+          <a:bodyPr/>
+          <a:lstStyle/>
+          <a:p>
+            <a:fld id="{849D05A8-43E9-1C49-8606-50AB68220DEC}" type="slidenum">
+              <a:rPr lang="en-DE" smtClean="0"/>
+              <a:t>9</a:t>
+            </a:fld>
+            <a:endParaRPr lang="en-DE"/>
+          </a:p>
+        </p:txBody>
+      </p:sp>
+      <p:pic>
+        <p:nvPicPr>
+          <p:cNvPr id="6" name="Picture 5">
+            <a:extLst>
+              <a:ext uri="{FF2B5EF4-FFF2-40B4-BE49-F238E27FC236}">
+                <a16:creationId xmlns:a16="http://schemas.microsoft.com/office/drawing/2014/main" id="{B671ACDA-58DE-C671-C490-9A25C570A67D}"/>
+              </a:ext>
+            </a:extLst>
+          </p:cNvPr>
+          <p:cNvPicPr>
+            <a:picLocks noChangeAspect="1"/>
+          </p:cNvPicPr>
+          <p:nvPr/>
+        </p:nvPicPr>
+        <p:blipFill>
+          <a:blip r:embed="rId4"/>
+          <a:stretch>
+            <a:fillRect/>
+          </a:stretch>
+        </p:blipFill>
+        <p:spPr>
+          <a:xfrm>
+            <a:off x="9774395" y="1005021"/>
+            <a:ext cx="2390243" cy="5344539"/>
+          </a:xfrm>
+          <a:prstGeom prst="rect">
+            <a:avLst/>
+          </a:prstGeom>
+        </p:spPr>
+      </p:pic>
+      <p:sp>
+        <p:nvSpPr>
+          <p:cNvPr id="7" name="TextBox 6">
+            <a:extLst>
+              <a:ext uri="{FF2B5EF4-FFF2-40B4-BE49-F238E27FC236}">
+                <a16:creationId xmlns:a16="http://schemas.microsoft.com/office/drawing/2014/main" id="{0467208A-C2CD-8126-638D-2517BFC96589}"/>
               </a:ext>
             </a:extLst>
           </p:cNvPr>
@@ -16417,8 +16473,8 @@
         </p:nvSpPr>
         <p:spPr>
           <a:xfrm>
-            <a:off x="838200" y="4581843"/>
-            <a:ext cx="1239122" cy="369332"/>
+            <a:off x="11632120" y="6349560"/>
+            <a:ext cx="532518" cy="246221"/>
           </a:xfrm>
           <a:prstGeom prst="rect">
             <a:avLst/>
@@ -16432,19 +16488,19 @@
           <a:lstStyle/>
           <a:p>
             <a:r>
-              <a:rPr lang="en-DE" dirty="0">
-                <a:hlinkClick r:id="rId6"/>
+              <a:rPr lang="de-DE" sz="1000" dirty="0">
+                <a:hlinkClick r:id="rId5"/>
               </a:rPr>
-              <a:t>capabilities</a:t>
-            </a:r>
-            <a:endParaRPr lang="en-DE" dirty="0"/>
+              <a:t>source</a:t>
+            </a:r>
+            <a:endParaRPr lang="de-DE" sz="1000" dirty="0"/>
           </a:p>
         </p:txBody>
       </p:sp>
     </p:spTree>
     <p:extLst>
       <p:ext uri="{BB962C8B-B14F-4D97-AF65-F5344CB8AC3E}">
-        <p14:creationId xmlns:p14="http://schemas.microsoft.com/office/powerpoint/2010/main" val="2356046642"/>
+        <p14:creationId xmlns:p14="http://schemas.microsoft.com/office/powerpoint/2010/main" val="839114839"/>
       </p:ext>
     </p:extLst>
   </p:cSld>

--- a/slides/3_LLMs.pptx
+++ b/slides/3_LLMs.pptx
@@ -5,7 +5,7 @@
     <p:sldMasterId id="2147483648" r:id="rId1"/>
   </p:sldMasterIdLst>
   <p:notesMasterIdLst>
-    <p:notesMasterId r:id="rId21"/>
+    <p:notesMasterId r:id="rId18"/>
   </p:notesMasterIdLst>
   <p:sldIdLst>
     <p:sldId id="256" r:id="rId2"/>
@@ -14,19 +14,16 @@
     <p:sldId id="343" r:id="rId5"/>
     <p:sldId id="814" r:id="rId6"/>
     <p:sldId id="827" r:id="rId7"/>
-    <p:sldId id="285" r:id="rId8"/>
-    <p:sldId id="828" r:id="rId9"/>
-    <p:sldId id="803" r:id="rId10"/>
-    <p:sldId id="799" r:id="rId11"/>
-    <p:sldId id="807" r:id="rId12"/>
-    <p:sldId id="806" r:id="rId13"/>
-    <p:sldId id="810" r:id="rId14"/>
-    <p:sldId id="797" r:id="rId15"/>
+    <p:sldId id="828" r:id="rId8"/>
+    <p:sldId id="803" r:id="rId9"/>
+    <p:sldId id="799" r:id="rId10"/>
+    <p:sldId id="807" r:id="rId11"/>
+    <p:sldId id="806" r:id="rId12"/>
+    <p:sldId id="831" r:id="rId13"/>
+    <p:sldId id="830" r:id="rId14"/>
+    <p:sldId id="285" r:id="rId15"/>
     <p:sldId id="809" r:id="rId16"/>
-    <p:sldId id="808" r:id="rId17"/>
-    <p:sldId id="804" r:id="rId18"/>
-    <p:sldId id="829" r:id="rId19"/>
-    <p:sldId id="811" r:id="rId20"/>
+    <p:sldId id="804" r:id="rId17"/>
   </p:sldIdLst>
   <p:sldSz cx="12192000" cy="6858000"/>
   <p:notesSz cx="6858000" cy="9144000"/>
@@ -7039,7 +7036,7 @@
           <a:p>
             <a:fld id="{B854A0A5-3125-4A93-A463-B2CA0DCE058B}" type="datetimeFigureOut">
               <a:rPr lang="en-GB" smtClean="0"/>
-              <a:t>12/09/2025</a:t>
+              <a:t>15/09/2025</a:t>
             </a:fld>
             <a:endParaRPr lang="en-GB"/>
           </a:p>
@@ -7456,7 +7453,7 @@
           <a:p>
             <a:fld id="{7128456D-5ACD-4673-BCE9-52505EC32CEF}" type="datetime1">
               <a:rPr lang="en-GB" smtClean="0"/>
-              <a:t>12/09/2025</a:t>
+              <a:t>15/09/2025</a:t>
             </a:fld>
             <a:endParaRPr lang="en-GB"/>
           </a:p>
@@ -7656,7 +7653,7 @@
           <a:p>
             <a:fld id="{D99A2639-5270-4811-807B-89D4AE95E7ED}" type="datetime1">
               <a:rPr lang="en-GB" smtClean="0"/>
-              <a:t>12/09/2025</a:t>
+              <a:t>15/09/2025</a:t>
             </a:fld>
             <a:endParaRPr lang="en-GB"/>
           </a:p>
@@ -7866,7 +7863,7 @@
           <a:p>
             <a:fld id="{B552976C-D408-4E27-8D02-D7795F6D8A01}" type="datetime1">
               <a:rPr lang="en-GB" smtClean="0"/>
-              <a:t>12/09/2025</a:t>
+              <a:t>15/09/2025</a:t>
             </a:fld>
             <a:endParaRPr lang="en-GB"/>
           </a:p>
@@ -8066,7 +8063,7 @@
           <a:p>
             <a:fld id="{0B763083-041D-491F-A9FE-D51D99E0B41E}" type="datetime1">
               <a:rPr lang="en-GB" smtClean="0"/>
-              <a:t>12/09/2025</a:t>
+              <a:t>15/09/2025</a:t>
             </a:fld>
             <a:endParaRPr lang="en-GB"/>
           </a:p>
@@ -8342,7 +8339,7 @@
           <a:p>
             <a:fld id="{409455E6-A1CA-4CB6-9964-88D5086DA5CA}" type="datetime1">
               <a:rPr lang="en-GB" smtClean="0"/>
-              <a:t>12/09/2025</a:t>
+              <a:t>15/09/2025</a:t>
             </a:fld>
             <a:endParaRPr lang="en-GB"/>
           </a:p>
@@ -8610,7 +8607,7 @@
           <a:p>
             <a:fld id="{FAD82E38-24C1-4A8F-B916-1E714FC129DD}" type="datetime1">
               <a:rPr lang="en-GB" smtClean="0"/>
-              <a:t>12/09/2025</a:t>
+              <a:t>15/09/2025</a:t>
             </a:fld>
             <a:endParaRPr lang="en-GB"/>
           </a:p>
@@ -9025,7 +9022,7 @@
           <a:p>
             <a:fld id="{BC17BCDC-BAA6-44B5-B642-6F28D623ABB1}" type="datetime1">
               <a:rPr lang="en-GB" smtClean="0"/>
-              <a:t>12/09/2025</a:t>
+              <a:t>15/09/2025</a:t>
             </a:fld>
             <a:endParaRPr lang="en-GB"/>
           </a:p>
@@ -9167,7 +9164,7 @@
           <a:p>
             <a:fld id="{01D4BEC3-2CF9-4B19-A0A5-E70A0675B677}" type="datetime1">
               <a:rPr lang="en-GB" smtClean="0"/>
-              <a:t>12/09/2025</a:t>
+              <a:t>15/09/2025</a:t>
             </a:fld>
             <a:endParaRPr lang="en-GB"/>
           </a:p>
@@ -9280,7 +9277,7 @@
           <a:p>
             <a:fld id="{98E28BFD-B06D-4A45-8453-724AC7BA29C5}" type="datetime1">
               <a:rPr lang="en-GB" smtClean="0"/>
-              <a:t>12/09/2025</a:t>
+              <a:t>15/09/2025</a:t>
             </a:fld>
             <a:endParaRPr lang="en-GB"/>
           </a:p>
@@ -9593,7 +9590,7 @@
           <a:p>
             <a:fld id="{A14D99B0-2926-4194-B668-6A0D6123824C}" type="datetime1">
               <a:rPr lang="en-GB" smtClean="0"/>
-              <a:t>12/09/2025</a:t>
+              <a:t>15/09/2025</a:t>
             </a:fld>
             <a:endParaRPr lang="en-GB"/>
           </a:p>
@@ -9882,7 +9879,7 @@
           <a:p>
             <a:fld id="{29F03426-21FD-40F4-9F0B-AD19F2317DCA}" type="datetime1">
               <a:rPr lang="en-GB" smtClean="0"/>
-              <a:t>12/09/2025</a:t>
+              <a:t>15/09/2025</a:t>
             </a:fld>
             <a:endParaRPr lang="en-GB"/>
           </a:p>
@@ -10125,7 +10122,7 @@
           <a:p>
             <a:fld id="{0369896D-5D36-4D31-A0CE-0C2BFB17B225}" type="datetime1">
               <a:rPr lang="en-GB" smtClean="0"/>
-              <a:t>12/09/2025</a:t>
+              <a:t>15/09/2025</a:t>
             </a:fld>
             <a:endParaRPr lang="en-GB"/>
           </a:p>
@@ -10633,147 +10630,10 @@
       </p:grpSpPr>
       <p:sp>
         <p:nvSpPr>
-          <p:cNvPr id="2" name="Title 1">
+          <p:cNvPr id="2" name="Foliennummernplatzhalter 1">
             <a:extLst>
               <a:ext uri="{FF2B5EF4-FFF2-40B4-BE49-F238E27FC236}">
-                <a16:creationId xmlns:a16="http://schemas.microsoft.com/office/drawing/2014/main" id="{6485C368-8592-0C01-7155-B0402DBC5A37}"/>
-              </a:ext>
-            </a:extLst>
-          </p:cNvPr>
-          <p:cNvSpPr>
-            <a:spLocks noGrp="1"/>
-          </p:cNvSpPr>
-          <p:nvPr>
-            <p:ph type="title"/>
-          </p:nvPr>
-        </p:nvSpPr>
-        <p:spPr/>
-        <p:txBody>
-          <a:bodyPr/>
-          <a:lstStyle/>
-          <a:p>
-            <a:r>
-              <a:rPr lang="en-GB" dirty="0"/>
-              <a:t>Some LLM Numbers</a:t>
-            </a:r>
-          </a:p>
-        </p:txBody>
-      </p:sp>
-      <p:sp>
-        <p:nvSpPr>
-          <p:cNvPr id="3" name="Content Placeholder 2">
-            <a:extLst>
-              <a:ext uri="{FF2B5EF4-FFF2-40B4-BE49-F238E27FC236}">
-                <a16:creationId xmlns:a16="http://schemas.microsoft.com/office/drawing/2014/main" id="{D6C96AE7-65B2-BDAA-9CB1-106D3E0C6289}"/>
-              </a:ext>
-            </a:extLst>
-          </p:cNvPr>
-          <p:cNvSpPr>
-            <a:spLocks noGrp="1"/>
-          </p:cNvSpPr>
-          <p:nvPr>
-            <p:ph idx="1"/>
-          </p:nvPr>
-        </p:nvSpPr>
-        <p:spPr/>
-        <p:txBody>
-          <a:bodyPr>
-            <a:normAutofit fontScale="77500" lnSpcReduction="20000"/>
-          </a:bodyPr>
-          <a:lstStyle/>
-          <a:p>
-            <a:pPr marL="0" indent="0">
-              <a:buNone/>
-            </a:pPr>
-            <a:r>
-              <a:rPr lang="en-GB" dirty="0"/>
-              <a:t>example </a:t>
-            </a:r>
-            <a:r>
-              <a:rPr lang="en-GB" dirty="0">
-                <a:hlinkClick r:id="rId2"/>
-              </a:rPr>
-              <a:t>Kimi K2</a:t>
-            </a:r>
-            <a:r>
-              <a:rPr lang="en-GB" dirty="0"/>
-              <a:t> (Mixture-of-Experts model):</a:t>
-            </a:r>
-          </a:p>
-          <a:p>
-            <a:pPr marL="0" indent="0">
-              <a:buNone/>
-            </a:pPr>
-            <a:endParaRPr lang="en-GB" dirty="0"/>
-          </a:p>
-          <a:p>
-            <a:r>
-              <a:rPr lang="en-GB" dirty="0"/>
-              <a:t>vocabulary size (tokens):		160K</a:t>
-            </a:r>
-          </a:p>
-          <a:p>
-            <a:r>
-              <a:rPr lang="en-GB" dirty="0"/>
-              <a:t>embedding dimension:		7,168</a:t>
-            </a:r>
-          </a:p>
-          <a:p>
-            <a:r>
-              <a:rPr lang="en-GB" dirty="0"/>
-              <a:t>context length (tokens):		128K</a:t>
-            </a:r>
-          </a:p>
-          <a:p>
-            <a:pPr marL="0" indent="0">
-              <a:buNone/>
-            </a:pPr>
-            <a:endParaRPr lang="en-GB" dirty="0"/>
-          </a:p>
-          <a:p>
-            <a:r>
-              <a:rPr lang="en-GB" dirty="0"/>
-              <a:t>total parameters:			1T</a:t>
-            </a:r>
-          </a:p>
-          <a:p>
-            <a:r>
-              <a:rPr lang="en-GB" dirty="0"/>
-              <a:t>training tokens:			15.5T</a:t>
-            </a:r>
-          </a:p>
-          <a:p>
-            <a:pPr marL="0" indent="0">
-              <a:buNone/>
-            </a:pPr>
-            <a:endParaRPr lang="en-GB" dirty="0"/>
-          </a:p>
-          <a:p>
-            <a:r>
-              <a:rPr lang="en-GB" dirty="0"/>
-              <a:t>number of layers:			61</a:t>
-            </a:r>
-          </a:p>
-          <a:p>
-            <a:r>
-              <a:rPr lang="en-GB" dirty="0"/>
-              <a:t>number of attention heads:		64</a:t>
-            </a:r>
-          </a:p>
-          <a:p>
-            <a:r>
-              <a:rPr lang="en-GB" dirty="0"/>
-              <a:t>number of experts:			384</a:t>
-            </a:r>
-          </a:p>
-        </p:txBody>
-      </p:sp>
-      <p:sp>
-        <p:nvSpPr>
-          <p:cNvPr id="4" name="Slide Number Placeholder 3">
-            <a:extLst>
-              <a:ext uri="{FF2B5EF4-FFF2-40B4-BE49-F238E27FC236}">
-                <a16:creationId xmlns:a16="http://schemas.microsoft.com/office/drawing/2014/main" id="{159F7305-36A6-E37E-39C3-03F1C64BB003}"/>
+                <a16:creationId xmlns:a16="http://schemas.microsoft.com/office/drawing/2014/main" id="{5C49767A-2E15-165D-D997-E5D752EC1E0E}"/>
               </a:ext>
             </a:extLst>
           </p:cNvPr>
@@ -10789,267 +10649,9 @@
           <a:bodyPr/>
           <a:lstStyle/>
           <a:p>
-            <a:fld id="{849D05A8-43E9-1C49-8606-50AB68220DEC}" type="slidenum">
-              <a:rPr lang="en-DE" smtClean="0"/>
-              <a:t>10</a:t>
-            </a:fld>
-            <a:endParaRPr lang="en-DE"/>
-          </a:p>
-        </p:txBody>
-      </p:sp>
-      <p:sp>
-        <p:nvSpPr>
-          <p:cNvPr id="5" name="TextBox 4">
-            <a:extLst>
-              <a:ext uri="{FF2B5EF4-FFF2-40B4-BE49-F238E27FC236}">
-                <a16:creationId xmlns:a16="http://schemas.microsoft.com/office/drawing/2014/main" id="{3A47AE09-0CE7-F2EF-E282-E7D203CB2794}"/>
-              </a:ext>
-            </a:extLst>
-          </p:cNvPr>
-          <p:cNvSpPr txBox="1"/>
-          <p:nvPr/>
-        </p:nvSpPr>
-        <p:spPr>
-          <a:xfrm flipH="1">
-            <a:off x="7780863" y="4061832"/>
-            <a:ext cx="3055302" cy="461665"/>
-          </a:xfrm>
-          <a:prstGeom prst="rect">
-            <a:avLst/>
-          </a:prstGeom>
-          <a:noFill/>
-        </p:spPr>
-        <p:txBody>
-          <a:bodyPr wrap="square" rtlCol="0">
-            <a:spAutoFit/>
-          </a:bodyPr>
-          <a:lstStyle/>
-          <a:p>
-            <a:r>
-              <a:rPr lang="en-GB" sz="2400" dirty="0">
-                <a:sym typeface="Wingdings" panose="05000000000000000000" pitchFamily="2" charset="2"/>
-              </a:rPr>
-              <a:t> </a:t>
-            </a:r>
-            <a:r>
-              <a:rPr lang="en-GB" sz="2400" dirty="0"/>
-              <a:t>a lot of memorizing</a:t>
-            </a:r>
-          </a:p>
-        </p:txBody>
-      </p:sp>
-      <p:cxnSp>
-        <p:nvCxnSpPr>
-          <p:cNvPr id="7" name="Straight Arrow Connector 6">
-            <a:extLst>
-              <a:ext uri="{FF2B5EF4-FFF2-40B4-BE49-F238E27FC236}">
-                <a16:creationId xmlns:a16="http://schemas.microsoft.com/office/drawing/2014/main" id="{8298ABD0-40ED-3A92-2AD6-EEEFFF673542}"/>
-              </a:ext>
-            </a:extLst>
-          </p:cNvPr>
-          <p:cNvCxnSpPr>
-            <a:cxnSpLocks/>
-            <a:stCxn id="5" idx="3"/>
-          </p:cNvCxnSpPr>
-          <p:nvPr/>
-        </p:nvCxnSpPr>
-        <p:spPr>
-          <a:xfrm flipH="1">
-            <a:off x="6411310" y="4292665"/>
-            <a:ext cx="1369553" cy="0"/>
-          </a:xfrm>
-          <a:prstGeom prst="straightConnector1">
-            <a:avLst/>
-          </a:prstGeom>
-          <a:ln>
-            <a:tailEnd type="triangle"/>
-          </a:ln>
-        </p:spPr>
-        <p:style>
-          <a:lnRef idx="1">
-            <a:schemeClr val="accent1"/>
-          </a:lnRef>
-          <a:fillRef idx="0">
-            <a:schemeClr val="accent1"/>
-          </a:fillRef>
-          <a:effectRef idx="0">
-            <a:schemeClr val="accent1"/>
-          </a:effectRef>
-          <a:fontRef idx="minor">
-            <a:schemeClr val="tx1"/>
-          </a:fontRef>
-        </p:style>
-      </p:cxnSp>
-      <p:sp>
-        <p:nvSpPr>
-          <p:cNvPr id="8" name="Textfeld 7">
-            <a:extLst>
-              <a:ext uri="{FF2B5EF4-FFF2-40B4-BE49-F238E27FC236}">
-                <a16:creationId xmlns:a16="http://schemas.microsoft.com/office/drawing/2014/main" id="{B3AA4BA7-5487-6DD2-189C-F68C512D6F35}"/>
-              </a:ext>
-            </a:extLst>
-          </p:cNvPr>
-          <p:cNvSpPr txBox="1"/>
-          <p:nvPr/>
-        </p:nvSpPr>
-        <p:spPr>
-          <a:xfrm>
-            <a:off x="7797362" y="4672114"/>
-            <a:ext cx="3815255" cy="461665"/>
-          </a:xfrm>
-          <a:prstGeom prst="rect">
-            <a:avLst/>
-          </a:prstGeom>
-          <a:noFill/>
-          <a:ln>
-            <a:solidFill>
-              <a:schemeClr val="tx1"/>
-            </a:solidFill>
-          </a:ln>
-        </p:spPr>
-        <p:txBody>
-          <a:bodyPr wrap="square">
-            <a:spAutoFit/>
-          </a:bodyPr>
-          <a:lstStyle/>
-          <a:p>
-            <a:r>
-              <a:rPr lang="en-GB" sz="2400" dirty="0"/>
-              <a:t>compression of the internet</a:t>
-            </a:r>
-          </a:p>
-        </p:txBody>
-      </p:sp>
-      <p:sp>
-        <p:nvSpPr>
-          <p:cNvPr id="15" name="Textfeld 14">
-            <a:extLst>
-              <a:ext uri="{FF2B5EF4-FFF2-40B4-BE49-F238E27FC236}">
-                <a16:creationId xmlns:a16="http://schemas.microsoft.com/office/drawing/2014/main" id="{61AAA22A-780F-765B-ED5D-8C5F6DBB657A}"/>
-              </a:ext>
-            </a:extLst>
-          </p:cNvPr>
-          <p:cNvSpPr txBox="1"/>
-          <p:nvPr/>
-        </p:nvSpPr>
-        <p:spPr>
-          <a:xfrm>
-            <a:off x="8008735" y="1690688"/>
-            <a:ext cx="3345065" cy="830997"/>
-          </a:xfrm>
-          <a:prstGeom prst="rect">
-            <a:avLst/>
-          </a:prstGeom>
-          <a:noFill/>
-        </p:spPr>
-        <p:txBody>
-          <a:bodyPr wrap="square" rtlCol="0">
-            <a:spAutoFit/>
-          </a:bodyPr>
-          <a:lstStyle/>
-          <a:p>
-            <a:r>
-              <a:rPr lang="de-DE" sz="2400" dirty="0" err="1"/>
-              <a:t>as</a:t>
-            </a:r>
-            <a:r>
-              <a:rPr lang="de-DE" sz="2400" dirty="0"/>
-              <a:t> </a:t>
-            </a:r>
-            <a:r>
-              <a:rPr lang="de-DE" sz="2400" dirty="0" err="1"/>
-              <a:t>usual</a:t>
-            </a:r>
-            <a:r>
-              <a:rPr lang="de-DE" sz="2400" dirty="0"/>
-              <a:t>, </a:t>
-            </a:r>
-            <a:r>
-              <a:rPr lang="de-DE" sz="2400" dirty="0" err="1"/>
-              <a:t>comes</a:t>
-            </a:r>
-            <a:r>
-              <a:rPr lang="de-DE" sz="2400" dirty="0"/>
-              <a:t> in </a:t>
-            </a:r>
-            <a:r>
-              <a:rPr lang="de-DE" sz="2400" dirty="0" err="1"/>
-              <a:t>base</a:t>
-            </a:r>
-            <a:r>
-              <a:rPr lang="de-DE" sz="2400" dirty="0"/>
-              <a:t> and </a:t>
-            </a:r>
-            <a:r>
-              <a:rPr lang="de-DE" sz="2400" dirty="0" err="1"/>
-              <a:t>instruct</a:t>
-            </a:r>
-            <a:r>
-              <a:rPr lang="de-DE" sz="2400" dirty="0"/>
-              <a:t> </a:t>
-            </a:r>
-            <a:r>
-              <a:rPr lang="de-DE" sz="2400" dirty="0" err="1"/>
-              <a:t>variants</a:t>
-            </a:r>
-            <a:endParaRPr lang="de-DE" sz="2400" dirty="0"/>
-          </a:p>
-        </p:txBody>
-      </p:sp>
-    </p:spTree>
-    <p:extLst>
-      <p:ext uri="{BB962C8B-B14F-4D97-AF65-F5344CB8AC3E}">
-        <p14:creationId xmlns:p14="http://schemas.microsoft.com/office/powerpoint/2010/main" val="3135530987"/>
-      </p:ext>
-    </p:extLst>
-  </p:cSld>
-  <p:clrMapOvr>
-    <a:masterClrMapping/>
-  </p:clrMapOvr>
-</p:sld>
-</file>
-
-<file path=ppt/slides/slide11.xml><?xml version="1.0" encoding="utf-8"?>
-<p:sld xmlns:a="http://schemas.openxmlformats.org/drawingml/2006/main" xmlns:r="http://schemas.openxmlformats.org/officeDocument/2006/relationships" xmlns:p="http://schemas.openxmlformats.org/presentationml/2006/main">
-  <p:cSld>
-    <p:spTree>
-      <p:nvGrpSpPr>
-        <p:cNvPr id="1" name=""/>
-        <p:cNvGrpSpPr/>
-        <p:nvPr/>
-      </p:nvGrpSpPr>
-      <p:grpSpPr>
-        <a:xfrm>
-          <a:off x="0" y="0"/>
-          <a:ext cx="0" cy="0"/>
-          <a:chOff x="0" y="0"/>
-          <a:chExt cx="0" cy="0"/>
-        </a:xfrm>
-      </p:grpSpPr>
-      <p:sp>
-        <p:nvSpPr>
-          <p:cNvPr id="2" name="Foliennummernplatzhalter 1">
-            <a:extLst>
-              <a:ext uri="{FF2B5EF4-FFF2-40B4-BE49-F238E27FC236}">
-                <a16:creationId xmlns:a16="http://schemas.microsoft.com/office/drawing/2014/main" id="{5C49767A-2E15-165D-D997-E5D752EC1E0E}"/>
-              </a:ext>
-            </a:extLst>
-          </p:cNvPr>
-          <p:cNvSpPr>
-            <a:spLocks noGrp="1"/>
-          </p:cNvSpPr>
-          <p:nvPr>
-            <p:ph type="sldNum" sz="quarter" idx="12"/>
-          </p:nvPr>
-        </p:nvSpPr>
-        <p:spPr/>
-        <p:txBody>
-          <a:bodyPr/>
-          <a:lstStyle/>
-          <a:p>
             <a:fld id="{3D4C94FE-FF23-4504-88E9-14D481113291}" type="slidenum">
               <a:rPr lang="en-GB" smtClean="0"/>
-              <a:t>11</a:t>
+              <a:t>10</a:t>
             </a:fld>
             <a:endParaRPr lang="en-GB"/>
           </a:p>
@@ -11153,7 +10755,7 @@
 </p:sld>
 </file>
 
-<file path=ppt/slides/slide12.xml><?xml version="1.0" encoding="utf-8"?>
+<file path=ppt/slides/slide11.xml><?xml version="1.0" encoding="utf-8"?>
 <p:sld xmlns:a="http://schemas.openxmlformats.org/drawingml/2006/main" xmlns:r="http://schemas.openxmlformats.org/officeDocument/2006/relationships" xmlns:p="http://schemas.openxmlformats.org/presentationml/2006/main">
   <p:cSld>
     <p:spTree>
@@ -11230,7 +10832,7 @@
           <a:p>
             <a:fld id="{3D4C94FE-FF23-4504-88E9-14D481113291}" type="slidenum">
               <a:rPr lang="en-GB" smtClean="0"/>
-              <a:t>12</a:t>
+              <a:t>11</a:t>
             </a:fld>
             <a:endParaRPr lang="en-GB"/>
           </a:p>
@@ -11752,7 +11354,7 @@
 </p:sld>
 </file>
 
-<file path=ppt/slides/slide13.xml><?xml version="1.0" encoding="utf-8"?>
+<file path=ppt/slides/slide12.xml><?xml version="1.0" encoding="utf-8"?>
 <p:sld xmlns:a="http://schemas.openxmlformats.org/drawingml/2006/main" xmlns:r="http://schemas.openxmlformats.org/officeDocument/2006/relationships" xmlns:p="http://schemas.openxmlformats.org/presentationml/2006/main">
   <p:cSld>
     <p:spTree>
@@ -11771,10 +11373,10 @@
       </p:grpSpPr>
       <p:sp>
         <p:nvSpPr>
-          <p:cNvPr id="4" name="Foliennummernplatzhalter 3">
+          <p:cNvPr id="2" name="Foliennummernplatzhalter 1">
             <a:extLst>
               <a:ext uri="{FF2B5EF4-FFF2-40B4-BE49-F238E27FC236}">
-                <a16:creationId xmlns:a16="http://schemas.microsoft.com/office/drawing/2014/main" id="{A1DC3600-F4C8-ACC4-6113-E44964F2164A}"/>
+                <a16:creationId xmlns:a16="http://schemas.microsoft.com/office/drawing/2014/main" id="{AD6321F3-DC05-6B7F-9E51-4ECD9C5A6574}"/>
               </a:ext>
             </a:extLst>
           </p:cNvPr>
@@ -11792,18 +11394,2360 @@
           <a:p>
             <a:fld id="{3D4C94FE-FF23-4504-88E9-14D481113291}" type="slidenum">
               <a:rPr lang="en-GB" smtClean="0"/>
-              <a:t>13</a:t>
+              <a:t>12</a:t>
             </a:fld>
             <a:endParaRPr lang="en-GB"/>
           </a:p>
         </p:txBody>
       </p:sp>
+      <p:cxnSp>
+        <p:nvCxnSpPr>
+          <p:cNvPr id="4" name="Gerade Verbindung mit Pfeil 3">
+            <a:extLst>
+              <a:ext uri="{FF2B5EF4-FFF2-40B4-BE49-F238E27FC236}">
+                <a16:creationId xmlns:a16="http://schemas.microsoft.com/office/drawing/2014/main" id="{51C4E7D4-BC9A-C42E-CF08-D3814073013F}"/>
+              </a:ext>
+            </a:extLst>
+          </p:cNvPr>
+          <p:cNvCxnSpPr>
+            <a:cxnSpLocks/>
+            <a:stCxn id="5" idx="0"/>
+            <a:endCxn id="12" idx="0"/>
+          </p:cNvCxnSpPr>
+          <p:nvPr/>
+        </p:nvCxnSpPr>
+        <p:spPr>
+          <a:xfrm flipV="1">
+            <a:off x="572220" y="4175665"/>
+            <a:ext cx="11047560" cy="4522"/>
+          </a:xfrm>
+          <a:prstGeom prst="straightConnector1">
+            <a:avLst/>
+          </a:prstGeom>
+          <a:ln>
+            <a:tailEnd type="triangle"/>
+          </a:ln>
+        </p:spPr>
+        <p:style>
+          <a:lnRef idx="2">
+            <a:schemeClr val="accent1"/>
+          </a:lnRef>
+          <a:fillRef idx="0">
+            <a:schemeClr val="accent1"/>
+          </a:fillRef>
+          <a:effectRef idx="1">
+            <a:schemeClr val="accent1"/>
+          </a:effectRef>
+          <a:fontRef idx="minor">
+            <a:schemeClr val="tx1"/>
+          </a:fontRef>
+        </p:style>
+      </p:cxnSp>
+      <p:sp>
+        <p:nvSpPr>
+          <p:cNvPr id="5" name="Textfeld 4">
+            <a:extLst>
+              <a:ext uri="{FF2B5EF4-FFF2-40B4-BE49-F238E27FC236}">
+                <a16:creationId xmlns:a16="http://schemas.microsoft.com/office/drawing/2014/main" id="{48E20F93-502D-86D5-695F-4EC5CB765914}"/>
+              </a:ext>
+            </a:extLst>
+          </p:cNvPr>
+          <p:cNvSpPr txBox="1"/>
+          <p:nvPr/>
+        </p:nvSpPr>
+        <p:spPr>
+          <a:xfrm>
+            <a:off x="274702" y="4180187"/>
+            <a:ext cx="595035" cy="323165"/>
+          </a:xfrm>
+          <a:prstGeom prst="rect">
+            <a:avLst/>
+          </a:prstGeom>
+          <a:noFill/>
+        </p:spPr>
+        <p:txBody>
+          <a:bodyPr wrap="none" rtlCol="0">
+            <a:spAutoFit/>
+          </a:bodyPr>
+          <a:lstStyle/>
+          <a:p>
+            <a:r>
+              <a:rPr lang="de-DE" sz="1500" dirty="0"/>
+              <a:t>2017</a:t>
+            </a:r>
+          </a:p>
+        </p:txBody>
+      </p:sp>
+      <p:sp>
+        <p:nvSpPr>
+          <p:cNvPr id="7" name="Textfeld 6">
+            <a:extLst>
+              <a:ext uri="{FF2B5EF4-FFF2-40B4-BE49-F238E27FC236}">
+                <a16:creationId xmlns:a16="http://schemas.microsoft.com/office/drawing/2014/main" id="{1CFD01B5-3CAE-F82B-8CBC-3DEA93D9313E}"/>
+              </a:ext>
+            </a:extLst>
+          </p:cNvPr>
+          <p:cNvSpPr txBox="1"/>
+          <p:nvPr/>
+        </p:nvSpPr>
+        <p:spPr>
+          <a:xfrm>
+            <a:off x="2115962" y="4180187"/>
+            <a:ext cx="595035" cy="323165"/>
+          </a:xfrm>
+          <a:prstGeom prst="rect">
+            <a:avLst/>
+          </a:prstGeom>
+          <a:noFill/>
+        </p:spPr>
+        <p:txBody>
+          <a:bodyPr wrap="none" rtlCol="0">
+            <a:spAutoFit/>
+          </a:bodyPr>
+          <a:lstStyle/>
+          <a:p>
+            <a:r>
+              <a:rPr lang="de-DE" sz="1500" dirty="0"/>
+              <a:t>2018</a:t>
+            </a:r>
+          </a:p>
+        </p:txBody>
+      </p:sp>
+      <p:sp>
+        <p:nvSpPr>
+          <p:cNvPr id="10" name="Textfeld 9">
+            <a:extLst>
+              <a:ext uri="{FF2B5EF4-FFF2-40B4-BE49-F238E27FC236}">
+                <a16:creationId xmlns:a16="http://schemas.microsoft.com/office/drawing/2014/main" id="{B3C0AE14-E90E-1BB4-DEC4-AE2AE8C7F8B2}"/>
+              </a:ext>
+            </a:extLst>
+          </p:cNvPr>
+          <p:cNvSpPr txBox="1"/>
+          <p:nvPr/>
+        </p:nvSpPr>
+        <p:spPr>
+          <a:xfrm>
+            <a:off x="7639742" y="4175664"/>
+            <a:ext cx="595035" cy="323165"/>
+          </a:xfrm>
+          <a:prstGeom prst="rect">
+            <a:avLst/>
+          </a:prstGeom>
+          <a:noFill/>
+        </p:spPr>
+        <p:txBody>
+          <a:bodyPr wrap="none" rtlCol="0">
+            <a:spAutoFit/>
+          </a:bodyPr>
+          <a:lstStyle/>
+          <a:p>
+            <a:r>
+              <a:rPr lang="de-DE" sz="1500" dirty="0"/>
+              <a:t>2021</a:t>
+            </a:r>
+          </a:p>
+        </p:txBody>
+      </p:sp>
+      <p:sp>
+        <p:nvSpPr>
+          <p:cNvPr id="11" name="Textfeld 10">
+            <a:extLst>
+              <a:ext uri="{FF2B5EF4-FFF2-40B4-BE49-F238E27FC236}">
+                <a16:creationId xmlns:a16="http://schemas.microsoft.com/office/drawing/2014/main" id="{7E178230-E2E0-E0F3-2EC1-24BF60661F8A}"/>
+              </a:ext>
+            </a:extLst>
+          </p:cNvPr>
+          <p:cNvSpPr txBox="1"/>
+          <p:nvPr/>
+        </p:nvSpPr>
+        <p:spPr>
+          <a:xfrm>
+            <a:off x="9481002" y="4172868"/>
+            <a:ext cx="595035" cy="323165"/>
+          </a:xfrm>
+          <a:prstGeom prst="rect">
+            <a:avLst/>
+          </a:prstGeom>
+          <a:noFill/>
+        </p:spPr>
+        <p:txBody>
+          <a:bodyPr wrap="none" rtlCol="0">
+            <a:spAutoFit/>
+          </a:bodyPr>
+          <a:lstStyle/>
+          <a:p>
+            <a:r>
+              <a:rPr lang="de-DE" sz="1500" dirty="0"/>
+              <a:t>2022</a:t>
+            </a:r>
+          </a:p>
+        </p:txBody>
+      </p:sp>
+      <p:sp>
+        <p:nvSpPr>
+          <p:cNvPr id="12" name="Textfeld 11">
+            <a:extLst>
+              <a:ext uri="{FF2B5EF4-FFF2-40B4-BE49-F238E27FC236}">
+                <a16:creationId xmlns:a16="http://schemas.microsoft.com/office/drawing/2014/main" id="{49E93289-3009-CBA0-D947-2F7D2494B07B}"/>
+              </a:ext>
+            </a:extLst>
+          </p:cNvPr>
+          <p:cNvSpPr txBox="1"/>
+          <p:nvPr/>
+        </p:nvSpPr>
+        <p:spPr>
+          <a:xfrm>
+            <a:off x="11322262" y="4175665"/>
+            <a:ext cx="595035" cy="323165"/>
+          </a:xfrm>
+          <a:prstGeom prst="rect">
+            <a:avLst/>
+          </a:prstGeom>
+          <a:noFill/>
+        </p:spPr>
+        <p:txBody>
+          <a:bodyPr wrap="none" rtlCol="0">
+            <a:spAutoFit/>
+          </a:bodyPr>
+          <a:lstStyle/>
+          <a:p>
+            <a:r>
+              <a:rPr lang="de-DE" sz="1500" dirty="0"/>
+              <a:t>2023</a:t>
+            </a:r>
+          </a:p>
+        </p:txBody>
+      </p:sp>
+      <p:sp>
+        <p:nvSpPr>
+          <p:cNvPr id="14" name="Textfeld 13">
+            <a:extLst>
+              <a:ext uri="{FF2B5EF4-FFF2-40B4-BE49-F238E27FC236}">
+                <a16:creationId xmlns:a16="http://schemas.microsoft.com/office/drawing/2014/main" id="{B140E18C-C3F7-F0A2-B53F-199A6812B133}"/>
+              </a:ext>
+            </a:extLst>
+          </p:cNvPr>
+          <p:cNvSpPr txBox="1"/>
+          <p:nvPr/>
+        </p:nvSpPr>
+        <p:spPr>
+          <a:xfrm>
+            <a:off x="1032956" y="2917117"/>
+            <a:ext cx="1247649" cy="507831"/>
+          </a:xfrm>
+          <a:prstGeom prst="rect">
+            <a:avLst/>
+          </a:prstGeom>
+          <a:noFill/>
+          <a:ln>
+            <a:solidFill>
+              <a:schemeClr val="tx1"/>
+            </a:solidFill>
+          </a:ln>
+        </p:spPr>
+        <p:txBody>
+          <a:bodyPr wrap="none" rtlCol="0">
+            <a:spAutoFit/>
+          </a:bodyPr>
+          <a:lstStyle/>
+          <a:p>
+            <a:r>
+              <a:rPr lang="de-DE" sz="1500" b="1" dirty="0"/>
+              <a:t>Transformer</a:t>
+            </a:r>
+          </a:p>
+          <a:p>
+            <a:r>
+              <a:rPr lang="de-DE" sz="1200" dirty="0"/>
+              <a:t>Google</a:t>
+            </a:r>
+          </a:p>
+        </p:txBody>
+      </p:sp>
+      <p:sp>
+        <p:nvSpPr>
+          <p:cNvPr id="15" name="Textfeld 14">
+            <a:extLst>
+              <a:ext uri="{FF2B5EF4-FFF2-40B4-BE49-F238E27FC236}">
+                <a16:creationId xmlns:a16="http://schemas.microsoft.com/office/drawing/2014/main" id="{A797B9C7-8AEE-CF01-0255-B7EB76B1BF9C}"/>
+              </a:ext>
+            </a:extLst>
+          </p:cNvPr>
+          <p:cNvSpPr txBox="1"/>
+          <p:nvPr/>
+        </p:nvSpPr>
+        <p:spPr>
+          <a:xfrm>
+            <a:off x="2640658" y="4930904"/>
+            <a:ext cx="1181093" cy="507831"/>
+          </a:xfrm>
+          <a:prstGeom prst="rect">
+            <a:avLst/>
+          </a:prstGeom>
+          <a:noFill/>
+          <a:ln>
+            <a:solidFill>
+              <a:schemeClr val="tx1"/>
+            </a:solidFill>
+          </a:ln>
+        </p:spPr>
+        <p:txBody>
+          <a:bodyPr wrap="none" rtlCol="0">
+            <a:spAutoFit/>
+          </a:bodyPr>
+          <a:lstStyle/>
+          <a:p>
+            <a:r>
+              <a:rPr lang="de-DE" sz="1500" b="1" dirty="0"/>
+              <a:t>GPT-1</a:t>
+            </a:r>
+            <a:r>
+              <a:rPr lang="de-DE" sz="1500" dirty="0"/>
+              <a:t> 117M</a:t>
+            </a:r>
+          </a:p>
+          <a:p>
+            <a:r>
+              <a:rPr lang="de-DE" sz="1200" dirty="0"/>
+              <a:t>OpenAI</a:t>
+            </a:r>
+          </a:p>
+        </p:txBody>
+      </p:sp>
+      <p:sp>
+        <p:nvSpPr>
+          <p:cNvPr id="16" name="Textfeld 15">
+            <a:extLst>
+              <a:ext uri="{FF2B5EF4-FFF2-40B4-BE49-F238E27FC236}">
+                <a16:creationId xmlns:a16="http://schemas.microsoft.com/office/drawing/2014/main" id="{385A2A19-3F30-D5E7-58B7-3E3D25C73E61}"/>
+              </a:ext>
+            </a:extLst>
+          </p:cNvPr>
+          <p:cNvSpPr txBox="1"/>
+          <p:nvPr/>
+        </p:nvSpPr>
+        <p:spPr>
+          <a:xfrm>
+            <a:off x="3163214" y="2917117"/>
+            <a:ext cx="1128835" cy="507831"/>
+          </a:xfrm>
+          <a:prstGeom prst="rect">
+            <a:avLst/>
+          </a:prstGeom>
+          <a:noFill/>
+          <a:ln>
+            <a:solidFill>
+              <a:schemeClr val="tx1"/>
+            </a:solidFill>
+          </a:ln>
+        </p:spPr>
+        <p:txBody>
+          <a:bodyPr wrap="none" rtlCol="0">
+            <a:spAutoFit/>
+          </a:bodyPr>
+          <a:lstStyle/>
+          <a:p>
+            <a:r>
+              <a:rPr lang="de-DE" sz="1500" b="1" dirty="0"/>
+              <a:t>BERT</a:t>
+            </a:r>
+            <a:r>
+              <a:rPr lang="de-DE" sz="1500" dirty="0"/>
+              <a:t> 340M</a:t>
+            </a:r>
+          </a:p>
+          <a:p>
+            <a:r>
+              <a:rPr lang="de-DE" sz="1200" dirty="0"/>
+              <a:t>Google</a:t>
+            </a:r>
+          </a:p>
+        </p:txBody>
+      </p:sp>
+      <p:sp>
+        <p:nvSpPr>
+          <p:cNvPr id="17" name="Textfeld 16">
+            <a:extLst>
+              <a:ext uri="{FF2B5EF4-FFF2-40B4-BE49-F238E27FC236}">
+                <a16:creationId xmlns:a16="http://schemas.microsoft.com/office/drawing/2014/main" id="{33B7A298-BD28-B716-1B5A-58D625B313FF}"/>
+              </a:ext>
+            </a:extLst>
+          </p:cNvPr>
+          <p:cNvSpPr txBox="1"/>
+          <p:nvPr/>
+        </p:nvSpPr>
+        <p:spPr>
+          <a:xfrm>
+            <a:off x="3957222" y="4180187"/>
+            <a:ext cx="595035" cy="323165"/>
+          </a:xfrm>
+          <a:prstGeom prst="rect">
+            <a:avLst/>
+          </a:prstGeom>
+          <a:noFill/>
+        </p:spPr>
+        <p:txBody>
+          <a:bodyPr wrap="none" rtlCol="0">
+            <a:spAutoFit/>
+          </a:bodyPr>
+          <a:lstStyle/>
+          <a:p>
+            <a:r>
+              <a:rPr lang="de-DE" sz="1500" dirty="0"/>
+              <a:t>2019</a:t>
+            </a:r>
+          </a:p>
+        </p:txBody>
+      </p:sp>
+      <p:sp>
+        <p:nvSpPr>
+          <p:cNvPr id="18" name="Textfeld 17">
+            <a:extLst>
+              <a:ext uri="{FF2B5EF4-FFF2-40B4-BE49-F238E27FC236}">
+                <a16:creationId xmlns:a16="http://schemas.microsoft.com/office/drawing/2014/main" id="{16BA4051-49A7-85BD-7B7A-8C1725F1E068}"/>
+              </a:ext>
+            </a:extLst>
+          </p:cNvPr>
+          <p:cNvSpPr txBox="1"/>
+          <p:nvPr/>
+        </p:nvSpPr>
+        <p:spPr>
+          <a:xfrm>
+            <a:off x="4034177" y="4930904"/>
+            <a:ext cx="1108701" cy="507831"/>
+          </a:xfrm>
+          <a:prstGeom prst="rect">
+            <a:avLst/>
+          </a:prstGeom>
+          <a:noFill/>
+          <a:ln>
+            <a:solidFill>
+              <a:schemeClr val="tx1"/>
+            </a:solidFill>
+          </a:ln>
+        </p:spPr>
+        <p:txBody>
+          <a:bodyPr wrap="none" rtlCol="0">
+            <a:spAutoFit/>
+          </a:bodyPr>
+          <a:lstStyle/>
+          <a:p>
+            <a:r>
+              <a:rPr lang="de-DE" sz="1500" b="1" dirty="0"/>
+              <a:t>GPT-2</a:t>
+            </a:r>
+            <a:r>
+              <a:rPr lang="de-DE" sz="1500" dirty="0"/>
+              <a:t> 1.5B</a:t>
+            </a:r>
+          </a:p>
+          <a:p>
+            <a:r>
+              <a:rPr lang="de-DE" sz="1200" dirty="0"/>
+              <a:t>OpenAI</a:t>
+            </a:r>
+          </a:p>
+        </p:txBody>
+      </p:sp>
+      <p:sp>
+        <p:nvSpPr>
+          <p:cNvPr id="19" name="Textfeld 18">
+            <a:extLst>
+              <a:ext uri="{FF2B5EF4-FFF2-40B4-BE49-F238E27FC236}">
+                <a16:creationId xmlns:a16="http://schemas.microsoft.com/office/drawing/2014/main" id="{044AEC4D-81D4-CD3F-4E7B-001F1A7DDF5B}"/>
+              </a:ext>
+            </a:extLst>
+          </p:cNvPr>
+          <p:cNvSpPr txBox="1"/>
+          <p:nvPr/>
+        </p:nvSpPr>
+        <p:spPr>
+          <a:xfrm>
+            <a:off x="5798482" y="4172868"/>
+            <a:ext cx="595035" cy="323165"/>
+          </a:xfrm>
+          <a:prstGeom prst="rect">
+            <a:avLst/>
+          </a:prstGeom>
+          <a:noFill/>
+        </p:spPr>
+        <p:txBody>
+          <a:bodyPr wrap="none" rtlCol="0">
+            <a:spAutoFit/>
+          </a:bodyPr>
+          <a:lstStyle/>
+          <a:p>
+            <a:r>
+              <a:rPr lang="de-DE" sz="1500" dirty="0"/>
+              <a:t>2020</a:t>
+            </a:r>
+          </a:p>
+        </p:txBody>
+      </p:sp>
+      <p:sp>
+        <p:nvSpPr>
+          <p:cNvPr id="20" name="Textfeld 19">
+            <a:extLst>
+              <a:ext uri="{FF2B5EF4-FFF2-40B4-BE49-F238E27FC236}">
+                <a16:creationId xmlns:a16="http://schemas.microsoft.com/office/drawing/2014/main" id="{B4FC7F55-2311-81C0-92D2-5F55D24F41DC}"/>
+              </a:ext>
+            </a:extLst>
+          </p:cNvPr>
+          <p:cNvSpPr txBox="1"/>
+          <p:nvPr/>
+        </p:nvSpPr>
+        <p:spPr>
+          <a:xfrm>
+            <a:off x="4286632" y="3645613"/>
+            <a:ext cx="1182000" cy="461665"/>
+          </a:xfrm>
+          <a:prstGeom prst="rect">
+            <a:avLst/>
+          </a:prstGeom>
+          <a:noFill/>
+          <a:ln>
+            <a:noFill/>
+          </a:ln>
+        </p:spPr>
+        <p:txBody>
+          <a:bodyPr wrap="square" rtlCol="0">
+            <a:spAutoFit/>
+          </a:bodyPr>
+          <a:lstStyle/>
+          <a:p>
+            <a:r>
+              <a:rPr lang="de-DE" sz="1200" dirty="0" err="1"/>
+              <a:t>used</a:t>
+            </a:r>
+            <a:r>
+              <a:rPr lang="de-DE" sz="1200" dirty="0"/>
+              <a:t> </a:t>
+            </a:r>
+            <a:r>
+              <a:rPr lang="de-DE" sz="1200" dirty="0" err="1"/>
+              <a:t>for</a:t>
+            </a:r>
+            <a:r>
+              <a:rPr lang="de-DE" sz="1200" dirty="0"/>
+              <a:t> Google </a:t>
+            </a:r>
+            <a:r>
+              <a:rPr lang="de-DE" sz="1200" dirty="0" err="1"/>
+              <a:t>search</a:t>
+            </a:r>
+            <a:r>
+              <a:rPr lang="de-DE" sz="1200" dirty="0"/>
+              <a:t> </a:t>
+            </a:r>
+          </a:p>
+        </p:txBody>
+      </p:sp>
+      <p:sp>
+        <p:nvSpPr>
+          <p:cNvPr id="25" name="Textfeld 24">
+            <a:extLst>
+              <a:ext uri="{FF2B5EF4-FFF2-40B4-BE49-F238E27FC236}">
+                <a16:creationId xmlns:a16="http://schemas.microsoft.com/office/drawing/2014/main" id="{2DA44139-7181-CA1B-C56F-18A940D986C6}"/>
+              </a:ext>
+            </a:extLst>
+          </p:cNvPr>
+          <p:cNvSpPr txBox="1"/>
+          <p:nvPr/>
+        </p:nvSpPr>
+        <p:spPr>
+          <a:xfrm>
+            <a:off x="6322123" y="4930904"/>
+            <a:ext cx="1156792" cy="507831"/>
+          </a:xfrm>
+          <a:prstGeom prst="rect">
+            <a:avLst/>
+          </a:prstGeom>
+          <a:noFill/>
+          <a:ln>
+            <a:solidFill>
+              <a:schemeClr val="tx1"/>
+            </a:solidFill>
+          </a:ln>
+        </p:spPr>
+        <p:txBody>
+          <a:bodyPr wrap="none" rtlCol="0">
+            <a:spAutoFit/>
+          </a:bodyPr>
+          <a:lstStyle/>
+          <a:p>
+            <a:r>
+              <a:rPr lang="de-DE" sz="1500" b="1" dirty="0"/>
+              <a:t>GPT-3</a:t>
+            </a:r>
+            <a:r>
+              <a:rPr lang="de-DE" sz="1500" dirty="0"/>
+              <a:t> 175B</a:t>
+            </a:r>
+          </a:p>
+          <a:p>
+            <a:r>
+              <a:rPr lang="de-DE" sz="1200" dirty="0"/>
+              <a:t>OpenAI</a:t>
+            </a:r>
+          </a:p>
+        </p:txBody>
+      </p:sp>
+      <p:sp>
+        <p:nvSpPr>
+          <p:cNvPr id="32" name="Textfeld 31">
+            <a:extLst>
+              <a:ext uri="{FF2B5EF4-FFF2-40B4-BE49-F238E27FC236}">
+                <a16:creationId xmlns:a16="http://schemas.microsoft.com/office/drawing/2014/main" id="{D0657232-07AA-DC00-2DFD-16084FD9BB46}"/>
+              </a:ext>
+            </a:extLst>
+          </p:cNvPr>
+          <p:cNvSpPr txBox="1"/>
+          <p:nvPr/>
+        </p:nvSpPr>
+        <p:spPr>
+          <a:xfrm>
+            <a:off x="5362908" y="2914320"/>
+            <a:ext cx="660758" cy="507831"/>
+          </a:xfrm>
+          <a:prstGeom prst="rect">
+            <a:avLst/>
+          </a:prstGeom>
+          <a:noFill/>
+          <a:ln>
+            <a:solidFill>
+              <a:schemeClr val="tx1"/>
+            </a:solidFill>
+          </a:ln>
+        </p:spPr>
+        <p:txBody>
+          <a:bodyPr wrap="square" rtlCol="0">
+            <a:spAutoFit/>
+          </a:bodyPr>
+          <a:lstStyle/>
+          <a:p>
+            <a:r>
+              <a:rPr lang="de-DE" sz="1500" b="1" dirty="0"/>
+              <a:t>T5</a:t>
+            </a:r>
+          </a:p>
+          <a:p>
+            <a:r>
+              <a:rPr lang="de-DE" sz="1200" dirty="0"/>
+              <a:t>Google</a:t>
+            </a:r>
+          </a:p>
+        </p:txBody>
+      </p:sp>
+      <p:cxnSp>
+        <p:nvCxnSpPr>
+          <p:cNvPr id="39" name="Gerade Verbindung 38">
+            <a:extLst>
+              <a:ext uri="{FF2B5EF4-FFF2-40B4-BE49-F238E27FC236}">
+                <a16:creationId xmlns:a16="http://schemas.microsoft.com/office/drawing/2014/main" id="{48567E9D-C6B1-D5B7-3044-9A74F52C3241}"/>
+              </a:ext>
+            </a:extLst>
+          </p:cNvPr>
+          <p:cNvCxnSpPr>
+            <a:cxnSpLocks/>
+            <a:stCxn id="14" idx="2"/>
+          </p:cNvCxnSpPr>
+          <p:nvPr/>
+        </p:nvCxnSpPr>
+        <p:spPr>
+          <a:xfrm>
+            <a:off x="1656781" y="3424948"/>
+            <a:ext cx="0" cy="755239"/>
+          </a:xfrm>
+          <a:prstGeom prst="line">
+            <a:avLst/>
+          </a:prstGeom>
+        </p:spPr>
+        <p:style>
+          <a:lnRef idx="2">
+            <a:schemeClr val="accent1"/>
+          </a:lnRef>
+          <a:fillRef idx="0">
+            <a:schemeClr val="accent1"/>
+          </a:fillRef>
+          <a:effectRef idx="1">
+            <a:schemeClr val="accent1"/>
+          </a:effectRef>
+          <a:fontRef idx="minor">
+            <a:schemeClr val="tx1"/>
+          </a:fontRef>
+        </p:style>
+      </p:cxnSp>
+      <p:cxnSp>
+        <p:nvCxnSpPr>
+          <p:cNvPr id="41" name="Gerade Verbindung 40">
+            <a:extLst>
+              <a:ext uri="{FF2B5EF4-FFF2-40B4-BE49-F238E27FC236}">
+                <a16:creationId xmlns:a16="http://schemas.microsoft.com/office/drawing/2014/main" id="{BE2C1AF3-F033-8E18-E284-C59FF86649D8}"/>
+              </a:ext>
+            </a:extLst>
+          </p:cNvPr>
+          <p:cNvCxnSpPr>
+            <a:cxnSpLocks/>
+            <a:stCxn id="16" idx="2"/>
+          </p:cNvCxnSpPr>
+          <p:nvPr/>
+        </p:nvCxnSpPr>
+        <p:spPr>
+          <a:xfrm>
+            <a:off x="3727632" y="3424948"/>
+            <a:ext cx="0" cy="755239"/>
+          </a:xfrm>
+          <a:prstGeom prst="line">
+            <a:avLst/>
+          </a:prstGeom>
+        </p:spPr>
+        <p:style>
+          <a:lnRef idx="2">
+            <a:schemeClr val="accent1"/>
+          </a:lnRef>
+          <a:fillRef idx="0">
+            <a:schemeClr val="accent1"/>
+          </a:fillRef>
+          <a:effectRef idx="1">
+            <a:schemeClr val="accent1"/>
+          </a:effectRef>
+          <a:fontRef idx="minor">
+            <a:schemeClr val="tx1"/>
+          </a:fontRef>
+        </p:style>
+      </p:cxnSp>
+      <p:cxnSp>
+        <p:nvCxnSpPr>
+          <p:cNvPr id="43" name="Gerade Verbindung 42">
+            <a:extLst>
+              <a:ext uri="{FF2B5EF4-FFF2-40B4-BE49-F238E27FC236}">
+                <a16:creationId xmlns:a16="http://schemas.microsoft.com/office/drawing/2014/main" id="{08F8CDAF-F838-5F92-BB26-28F768A36E75}"/>
+              </a:ext>
+            </a:extLst>
+          </p:cNvPr>
+          <p:cNvCxnSpPr>
+            <a:cxnSpLocks/>
+            <a:stCxn id="15" idx="0"/>
+          </p:cNvCxnSpPr>
+          <p:nvPr/>
+        </p:nvCxnSpPr>
+        <p:spPr>
+          <a:xfrm flipV="1">
+            <a:off x="3231205" y="4180187"/>
+            <a:ext cx="0" cy="750717"/>
+          </a:xfrm>
+          <a:prstGeom prst="line">
+            <a:avLst/>
+          </a:prstGeom>
+        </p:spPr>
+        <p:style>
+          <a:lnRef idx="2">
+            <a:schemeClr val="accent1"/>
+          </a:lnRef>
+          <a:fillRef idx="0">
+            <a:schemeClr val="accent1"/>
+          </a:fillRef>
+          <a:effectRef idx="1">
+            <a:schemeClr val="accent1"/>
+          </a:effectRef>
+          <a:fontRef idx="minor">
+            <a:schemeClr val="tx1"/>
+          </a:fontRef>
+        </p:style>
+      </p:cxnSp>
+      <p:cxnSp>
+        <p:nvCxnSpPr>
+          <p:cNvPr id="48" name="Gerade Verbindung 47">
+            <a:extLst>
+              <a:ext uri="{FF2B5EF4-FFF2-40B4-BE49-F238E27FC236}">
+                <a16:creationId xmlns:a16="http://schemas.microsoft.com/office/drawing/2014/main" id="{3D121997-E584-A491-75EB-E39D62750ED6}"/>
+              </a:ext>
+            </a:extLst>
+          </p:cNvPr>
+          <p:cNvCxnSpPr>
+            <a:cxnSpLocks/>
+            <a:stCxn id="18" idx="0"/>
+          </p:cNvCxnSpPr>
+          <p:nvPr/>
+        </p:nvCxnSpPr>
+        <p:spPr>
+          <a:xfrm flipV="1">
+            <a:off x="4588528" y="4180187"/>
+            <a:ext cx="0" cy="750717"/>
+          </a:xfrm>
+          <a:prstGeom prst="line">
+            <a:avLst/>
+          </a:prstGeom>
+        </p:spPr>
+        <p:style>
+          <a:lnRef idx="2">
+            <a:schemeClr val="accent1"/>
+          </a:lnRef>
+          <a:fillRef idx="0">
+            <a:schemeClr val="accent1"/>
+          </a:fillRef>
+          <a:effectRef idx="1">
+            <a:schemeClr val="accent1"/>
+          </a:effectRef>
+          <a:fontRef idx="minor">
+            <a:schemeClr val="tx1"/>
+          </a:fontRef>
+        </p:style>
+      </p:cxnSp>
+      <p:cxnSp>
+        <p:nvCxnSpPr>
+          <p:cNvPr id="51" name="Gerade Verbindung 50">
+            <a:extLst>
+              <a:ext uri="{FF2B5EF4-FFF2-40B4-BE49-F238E27FC236}">
+                <a16:creationId xmlns:a16="http://schemas.microsoft.com/office/drawing/2014/main" id="{63CA038E-343E-6BBB-6907-A4FFC910B5F2}"/>
+              </a:ext>
+            </a:extLst>
+          </p:cNvPr>
+          <p:cNvCxnSpPr>
+            <a:cxnSpLocks/>
+            <a:stCxn id="32" idx="2"/>
+          </p:cNvCxnSpPr>
+          <p:nvPr/>
+        </p:nvCxnSpPr>
+        <p:spPr>
+          <a:xfrm>
+            <a:off x="5693287" y="3422151"/>
+            <a:ext cx="0" cy="750717"/>
+          </a:xfrm>
+          <a:prstGeom prst="line">
+            <a:avLst/>
+          </a:prstGeom>
+        </p:spPr>
+        <p:style>
+          <a:lnRef idx="2">
+            <a:schemeClr val="accent1"/>
+          </a:lnRef>
+          <a:fillRef idx="0">
+            <a:schemeClr val="accent1"/>
+          </a:fillRef>
+          <a:effectRef idx="1">
+            <a:schemeClr val="accent1"/>
+          </a:effectRef>
+          <a:fontRef idx="minor">
+            <a:schemeClr val="tx1"/>
+          </a:fontRef>
+        </p:style>
+      </p:cxnSp>
+      <p:cxnSp>
+        <p:nvCxnSpPr>
+          <p:cNvPr id="53" name="Gerade Verbindung 52">
+            <a:extLst>
+              <a:ext uri="{FF2B5EF4-FFF2-40B4-BE49-F238E27FC236}">
+                <a16:creationId xmlns:a16="http://schemas.microsoft.com/office/drawing/2014/main" id="{53C2B3BE-E07A-48FD-2CE7-F46F8C4F1889}"/>
+              </a:ext>
+            </a:extLst>
+          </p:cNvPr>
+          <p:cNvCxnSpPr>
+            <a:cxnSpLocks/>
+            <a:stCxn id="25" idx="0"/>
+          </p:cNvCxnSpPr>
+          <p:nvPr/>
+        </p:nvCxnSpPr>
+        <p:spPr>
+          <a:xfrm flipV="1">
+            <a:off x="6900519" y="4180187"/>
+            <a:ext cx="0" cy="750717"/>
+          </a:xfrm>
+          <a:prstGeom prst="line">
+            <a:avLst/>
+          </a:prstGeom>
+        </p:spPr>
+        <p:style>
+          <a:lnRef idx="2">
+            <a:schemeClr val="accent1"/>
+          </a:lnRef>
+          <a:fillRef idx="0">
+            <a:schemeClr val="accent1"/>
+          </a:fillRef>
+          <a:effectRef idx="1">
+            <a:schemeClr val="accent1"/>
+          </a:effectRef>
+          <a:fontRef idx="minor">
+            <a:schemeClr val="tx1"/>
+          </a:fontRef>
+        </p:style>
+      </p:cxnSp>
+      <p:sp>
+        <p:nvSpPr>
+          <p:cNvPr id="56" name="Textfeld 55">
+            <a:extLst>
+              <a:ext uri="{FF2B5EF4-FFF2-40B4-BE49-F238E27FC236}">
+                <a16:creationId xmlns:a16="http://schemas.microsoft.com/office/drawing/2014/main" id="{78695298-F9DA-8B93-C5FD-933EF564A76F}"/>
+              </a:ext>
+            </a:extLst>
+          </p:cNvPr>
+          <p:cNvSpPr txBox="1"/>
+          <p:nvPr/>
+        </p:nvSpPr>
+        <p:spPr>
+          <a:xfrm>
+            <a:off x="8444267" y="2914319"/>
+            <a:ext cx="799642" cy="507831"/>
+          </a:xfrm>
+          <a:prstGeom prst="rect">
+            <a:avLst/>
+          </a:prstGeom>
+          <a:noFill/>
+          <a:ln>
+            <a:solidFill>
+              <a:schemeClr val="tx1"/>
+            </a:solidFill>
+          </a:ln>
+        </p:spPr>
+        <p:txBody>
+          <a:bodyPr wrap="none" rtlCol="0">
+            <a:spAutoFit/>
+          </a:bodyPr>
+          <a:lstStyle/>
+          <a:p>
+            <a:r>
+              <a:rPr lang="de-DE" sz="1500" b="1" dirty="0" err="1"/>
+              <a:t>LaMDA</a:t>
+            </a:r>
+            <a:endParaRPr lang="de-DE" sz="1500" dirty="0"/>
+          </a:p>
+          <a:p>
+            <a:r>
+              <a:rPr lang="de-DE" sz="1200" dirty="0"/>
+              <a:t>Google</a:t>
+            </a:r>
+          </a:p>
+        </p:txBody>
+      </p:sp>
+      <p:sp>
+        <p:nvSpPr>
+          <p:cNvPr id="57" name="Textfeld 56">
+            <a:extLst>
+              <a:ext uri="{FF2B5EF4-FFF2-40B4-BE49-F238E27FC236}">
+                <a16:creationId xmlns:a16="http://schemas.microsoft.com/office/drawing/2014/main" id="{0F6BAA0B-793B-BDAE-FB20-7A1DF12938B4}"/>
+              </a:ext>
+            </a:extLst>
+          </p:cNvPr>
+          <p:cNvSpPr txBox="1"/>
+          <p:nvPr/>
+        </p:nvSpPr>
+        <p:spPr>
+          <a:xfrm>
+            <a:off x="10754309" y="4930904"/>
+            <a:ext cx="955903" cy="507831"/>
+          </a:xfrm>
+          <a:prstGeom prst="rect">
+            <a:avLst/>
+          </a:prstGeom>
+          <a:noFill/>
+          <a:ln>
+            <a:solidFill>
+              <a:schemeClr val="tx1"/>
+            </a:solidFill>
+          </a:ln>
+        </p:spPr>
+        <p:txBody>
+          <a:bodyPr wrap="none" rtlCol="0">
+            <a:spAutoFit/>
+          </a:bodyPr>
+          <a:lstStyle/>
+          <a:p>
+            <a:r>
+              <a:rPr lang="de-DE" sz="1500" b="1" dirty="0"/>
+              <a:t>ChatGPT</a:t>
+            </a:r>
+            <a:endParaRPr lang="de-DE" sz="1500" dirty="0"/>
+          </a:p>
+          <a:p>
+            <a:r>
+              <a:rPr lang="de-DE" sz="1200" dirty="0"/>
+              <a:t>OpenAI</a:t>
+            </a:r>
+          </a:p>
+        </p:txBody>
+      </p:sp>
+      <p:sp>
+        <p:nvSpPr>
+          <p:cNvPr id="58" name="Textfeld 57">
+            <a:extLst>
+              <a:ext uri="{FF2B5EF4-FFF2-40B4-BE49-F238E27FC236}">
+                <a16:creationId xmlns:a16="http://schemas.microsoft.com/office/drawing/2014/main" id="{0B3BA1C9-2BAB-69E6-6683-B141AB1A194C}"/>
+              </a:ext>
+            </a:extLst>
+          </p:cNvPr>
+          <p:cNvSpPr txBox="1"/>
+          <p:nvPr/>
+        </p:nvSpPr>
+        <p:spPr>
+          <a:xfrm>
+            <a:off x="9387247" y="4930904"/>
+            <a:ext cx="1226426" cy="507831"/>
+          </a:xfrm>
+          <a:prstGeom prst="rect">
+            <a:avLst/>
+          </a:prstGeom>
+          <a:noFill/>
+          <a:ln>
+            <a:solidFill>
+              <a:schemeClr val="tx1"/>
+            </a:solidFill>
+          </a:ln>
+        </p:spPr>
+        <p:txBody>
+          <a:bodyPr wrap="none" rtlCol="0">
+            <a:spAutoFit/>
+          </a:bodyPr>
+          <a:lstStyle/>
+          <a:p>
+            <a:r>
+              <a:rPr lang="de-DE" sz="1500" b="1" dirty="0" err="1"/>
+              <a:t>InstructGPT</a:t>
+            </a:r>
+            <a:endParaRPr lang="de-DE" sz="1500" dirty="0"/>
+          </a:p>
+          <a:p>
+            <a:r>
+              <a:rPr lang="de-DE" sz="1200" dirty="0"/>
+              <a:t>OpenAI</a:t>
+            </a:r>
+          </a:p>
+        </p:txBody>
+      </p:sp>
+      <p:sp>
+        <p:nvSpPr>
+          <p:cNvPr id="63" name="Textfeld 62">
+            <a:extLst>
+              <a:ext uri="{FF2B5EF4-FFF2-40B4-BE49-F238E27FC236}">
+                <a16:creationId xmlns:a16="http://schemas.microsoft.com/office/drawing/2014/main" id="{E3146616-71FB-D1D4-4C49-8B2E4D7A444E}"/>
+              </a:ext>
+            </a:extLst>
+          </p:cNvPr>
+          <p:cNvSpPr txBox="1"/>
+          <p:nvPr/>
+        </p:nvSpPr>
+        <p:spPr>
+          <a:xfrm>
+            <a:off x="9753319" y="2914319"/>
+            <a:ext cx="1117998" cy="507831"/>
+          </a:xfrm>
+          <a:prstGeom prst="rect">
+            <a:avLst/>
+          </a:prstGeom>
+          <a:noFill/>
+          <a:ln>
+            <a:solidFill>
+              <a:schemeClr val="tx1"/>
+            </a:solidFill>
+          </a:ln>
+        </p:spPr>
+        <p:txBody>
+          <a:bodyPr wrap="none" rtlCol="0">
+            <a:spAutoFit/>
+          </a:bodyPr>
+          <a:lstStyle/>
+          <a:p>
+            <a:r>
+              <a:rPr lang="de-DE" sz="1500" b="1" dirty="0" err="1"/>
+              <a:t>PaLM</a:t>
+            </a:r>
+            <a:r>
+              <a:rPr lang="de-DE" sz="1500" dirty="0"/>
+              <a:t> 540B</a:t>
+            </a:r>
+          </a:p>
+          <a:p>
+            <a:r>
+              <a:rPr lang="de-DE" sz="1200" dirty="0"/>
+              <a:t>Google</a:t>
+            </a:r>
+          </a:p>
+        </p:txBody>
+      </p:sp>
+      <p:cxnSp>
+        <p:nvCxnSpPr>
+          <p:cNvPr id="65" name="Gerade Verbindung 64">
+            <a:extLst>
+              <a:ext uri="{FF2B5EF4-FFF2-40B4-BE49-F238E27FC236}">
+                <a16:creationId xmlns:a16="http://schemas.microsoft.com/office/drawing/2014/main" id="{FA4234F1-A1C0-50DD-3C19-BF38D1012D59}"/>
+              </a:ext>
+            </a:extLst>
+          </p:cNvPr>
+          <p:cNvCxnSpPr>
+            <a:cxnSpLocks/>
+            <a:stCxn id="63" idx="2"/>
+          </p:cNvCxnSpPr>
+          <p:nvPr/>
+        </p:nvCxnSpPr>
+        <p:spPr>
+          <a:xfrm>
+            <a:off x="10312318" y="3422150"/>
+            <a:ext cx="0" cy="750717"/>
+          </a:xfrm>
+          <a:prstGeom prst="line">
+            <a:avLst/>
+          </a:prstGeom>
+        </p:spPr>
+        <p:style>
+          <a:lnRef idx="2">
+            <a:schemeClr val="accent1"/>
+          </a:lnRef>
+          <a:fillRef idx="0">
+            <a:schemeClr val="accent1"/>
+          </a:fillRef>
+          <a:effectRef idx="1">
+            <a:schemeClr val="accent1"/>
+          </a:effectRef>
+          <a:fontRef idx="minor">
+            <a:schemeClr val="tx1"/>
+          </a:fontRef>
+        </p:style>
+      </p:cxnSp>
+      <p:cxnSp>
+        <p:nvCxnSpPr>
+          <p:cNvPr id="96" name="Gerade Verbindung 95">
+            <a:extLst>
+              <a:ext uri="{FF2B5EF4-FFF2-40B4-BE49-F238E27FC236}">
+                <a16:creationId xmlns:a16="http://schemas.microsoft.com/office/drawing/2014/main" id="{82D474FD-4880-1661-AF73-3609669688D6}"/>
+              </a:ext>
+            </a:extLst>
+          </p:cNvPr>
+          <p:cNvCxnSpPr>
+            <a:stCxn id="57" idx="0"/>
+          </p:cNvCxnSpPr>
+          <p:nvPr/>
+        </p:nvCxnSpPr>
+        <p:spPr>
+          <a:xfrm flipH="1" flipV="1">
+            <a:off x="11232260" y="4180187"/>
+            <a:ext cx="1" cy="750717"/>
+          </a:xfrm>
+          <a:prstGeom prst="line">
+            <a:avLst/>
+          </a:prstGeom>
+        </p:spPr>
+        <p:style>
+          <a:lnRef idx="2">
+            <a:schemeClr val="accent1"/>
+          </a:lnRef>
+          <a:fillRef idx="0">
+            <a:schemeClr val="accent1"/>
+          </a:fillRef>
+          <a:effectRef idx="1">
+            <a:schemeClr val="accent1"/>
+          </a:effectRef>
+          <a:fontRef idx="minor">
+            <a:schemeClr val="tx1"/>
+          </a:fontRef>
+        </p:style>
+      </p:cxnSp>
+      <p:cxnSp>
+        <p:nvCxnSpPr>
+          <p:cNvPr id="98" name="Gerade Verbindung 97">
+            <a:extLst>
+              <a:ext uri="{FF2B5EF4-FFF2-40B4-BE49-F238E27FC236}">
+                <a16:creationId xmlns:a16="http://schemas.microsoft.com/office/drawing/2014/main" id="{C864265A-6F16-0BA8-F420-10FC9F47A5AD}"/>
+              </a:ext>
+            </a:extLst>
+          </p:cNvPr>
+          <p:cNvCxnSpPr>
+            <a:cxnSpLocks/>
+            <a:stCxn id="56" idx="2"/>
+          </p:cNvCxnSpPr>
+          <p:nvPr/>
+        </p:nvCxnSpPr>
+        <p:spPr>
+          <a:xfrm>
+            <a:off x="8844088" y="3422150"/>
+            <a:ext cx="0" cy="750717"/>
+          </a:xfrm>
+          <a:prstGeom prst="line">
+            <a:avLst/>
+          </a:prstGeom>
+        </p:spPr>
+        <p:style>
+          <a:lnRef idx="2">
+            <a:schemeClr val="accent1"/>
+          </a:lnRef>
+          <a:fillRef idx="0">
+            <a:schemeClr val="accent1"/>
+          </a:fillRef>
+          <a:effectRef idx="1">
+            <a:schemeClr val="accent1"/>
+          </a:effectRef>
+          <a:fontRef idx="minor">
+            <a:schemeClr val="tx1"/>
+          </a:fontRef>
+        </p:style>
+      </p:cxnSp>
+      <p:cxnSp>
+        <p:nvCxnSpPr>
+          <p:cNvPr id="104" name="Gerade Verbindung mit Pfeil 103">
+            <a:extLst>
+              <a:ext uri="{FF2B5EF4-FFF2-40B4-BE49-F238E27FC236}">
+                <a16:creationId xmlns:a16="http://schemas.microsoft.com/office/drawing/2014/main" id="{0F5EA683-7FFF-3C62-E192-2B76C7D3CE6F}"/>
+              </a:ext>
+            </a:extLst>
+          </p:cNvPr>
+          <p:cNvCxnSpPr>
+            <a:cxnSpLocks/>
+            <a:stCxn id="16" idx="2"/>
+            <a:endCxn id="20" idx="1"/>
+          </p:cNvCxnSpPr>
+          <p:nvPr/>
+        </p:nvCxnSpPr>
+        <p:spPr>
+          <a:xfrm>
+            <a:off x="3727632" y="3424948"/>
+            <a:ext cx="559000" cy="451498"/>
+          </a:xfrm>
+          <a:prstGeom prst="straightConnector1">
+            <a:avLst/>
+          </a:prstGeom>
+          <a:ln>
+            <a:tailEnd type="triangle"/>
+          </a:ln>
+        </p:spPr>
+        <p:style>
+          <a:lnRef idx="2">
+            <a:schemeClr val="accent1"/>
+          </a:lnRef>
+          <a:fillRef idx="0">
+            <a:schemeClr val="accent1"/>
+          </a:fillRef>
+          <a:effectRef idx="1">
+            <a:schemeClr val="accent1"/>
+          </a:effectRef>
+          <a:fontRef idx="minor">
+            <a:schemeClr val="tx1"/>
+          </a:fontRef>
+        </p:style>
+      </p:cxnSp>
+      <p:cxnSp>
+        <p:nvCxnSpPr>
+          <p:cNvPr id="108" name="Gerade Verbindung 107">
+            <a:extLst>
+              <a:ext uri="{FF2B5EF4-FFF2-40B4-BE49-F238E27FC236}">
+                <a16:creationId xmlns:a16="http://schemas.microsoft.com/office/drawing/2014/main" id="{661E45CE-254E-03FD-56F6-D4DD0537BFF7}"/>
+              </a:ext>
+            </a:extLst>
+          </p:cNvPr>
+          <p:cNvCxnSpPr>
+            <a:cxnSpLocks/>
+            <a:stCxn id="58" idx="0"/>
+          </p:cNvCxnSpPr>
+          <p:nvPr/>
+        </p:nvCxnSpPr>
+        <p:spPr>
+          <a:xfrm flipV="1">
+            <a:off x="10000460" y="4180187"/>
+            <a:ext cx="0" cy="750717"/>
+          </a:xfrm>
+          <a:prstGeom prst="line">
+            <a:avLst/>
+          </a:prstGeom>
+        </p:spPr>
+        <p:style>
+          <a:lnRef idx="2">
+            <a:schemeClr val="accent1"/>
+          </a:lnRef>
+          <a:fillRef idx="0">
+            <a:schemeClr val="accent1"/>
+          </a:fillRef>
+          <a:effectRef idx="1">
+            <a:schemeClr val="accent1"/>
+          </a:effectRef>
+          <a:fontRef idx="minor">
+            <a:schemeClr val="tx1"/>
+          </a:fontRef>
+        </p:style>
+      </p:cxnSp>
+      <p:sp>
+        <p:nvSpPr>
+          <p:cNvPr id="112" name="Textfeld 111">
+            <a:extLst>
+              <a:ext uri="{FF2B5EF4-FFF2-40B4-BE49-F238E27FC236}">
+                <a16:creationId xmlns:a16="http://schemas.microsoft.com/office/drawing/2014/main" id="{34E7E7A8-81A3-FD64-014E-471C8A2049E7}"/>
+              </a:ext>
+            </a:extLst>
+          </p:cNvPr>
+          <p:cNvSpPr txBox="1"/>
+          <p:nvPr/>
+        </p:nvSpPr>
+        <p:spPr>
+          <a:xfrm>
+            <a:off x="319763" y="2116918"/>
+            <a:ext cx="2674033" cy="276999"/>
+          </a:xfrm>
+          <a:prstGeom prst="rect">
+            <a:avLst/>
+          </a:prstGeom>
+          <a:noFill/>
+        </p:spPr>
+        <p:txBody>
+          <a:bodyPr wrap="square">
+            <a:spAutoFit/>
+          </a:bodyPr>
+          <a:lstStyle/>
+          <a:p>
+            <a:r>
+              <a:rPr lang="de-DE" sz="1200" dirty="0" err="1"/>
+              <a:t>the</a:t>
+            </a:r>
+            <a:r>
+              <a:rPr lang="de-DE" sz="1200" dirty="0"/>
+              <a:t> </a:t>
+            </a:r>
+            <a:r>
+              <a:rPr lang="de-DE" sz="1200" dirty="0" err="1"/>
+              <a:t>architecture</a:t>
+            </a:r>
+            <a:r>
+              <a:rPr lang="de-DE" sz="1200" dirty="0"/>
+              <a:t> </a:t>
+            </a:r>
+            <a:r>
+              <a:rPr lang="de-DE" sz="1200" dirty="0" err="1"/>
+              <a:t>everything</a:t>
+            </a:r>
+            <a:r>
+              <a:rPr lang="de-DE" sz="1200" dirty="0"/>
+              <a:t> </a:t>
+            </a:r>
+            <a:r>
+              <a:rPr lang="de-DE" sz="1200" dirty="0" err="1"/>
+              <a:t>is</a:t>
+            </a:r>
+            <a:r>
+              <a:rPr lang="de-DE" sz="1200" dirty="0"/>
+              <a:t> </a:t>
+            </a:r>
+            <a:r>
+              <a:rPr lang="de-DE" sz="1200" dirty="0" err="1"/>
+              <a:t>built</a:t>
+            </a:r>
+            <a:r>
+              <a:rPr lang="de-DE" sz="1200" dirty="0"/>
+              <a:t> on</a:t>
+            </a:r>
+          </a:p>
+        </p:txBody>
+      </p:sp>
+      <p:cxnSp>
+        <p:nvCxnSpPr>
+          <p:cNvPr id="118" name="Gerade Verbindung 117">
+            <a:extLst>
+              <a:ext uri="{FF2B5EF4-FFF2-40B4-BE49-F238E27FC236}">
+                <a16:creationId xmlns:a16="http://schemas.microsoft.com/office/drawing/2014/main" id="{ED628A0D-F8E1-2A93-6BC2-4E66C267FD2B}"/>
+              </a:ext>
+            </a:extLst>
+          </p:cNvPr>
+          <p:cNvCxnSpPr>
+            <a:cxnSpLocks/>
+            <a:stCxn id="14" idx="0"/>
+            <a:endCxn id="112" idx="2"/>
+          </p:cNvCxnSpPr>
+          <p:nvPr/>
+        </p:nvCxnSpPr>
+        <p:spPr>
+          <a:xfrm flipH="1" flipV="1">
+            <a:off x="1656780" y="2393917"/>
+            <a:ext cx="1" cy="523200"/>
+          </a:xfrm>
+          <a:prstGeom prst="line">
+            <a:avLst/>
+          </a:prstGeom>
+        </p:spPr>
+        <p:style>
+          <a:lnRef idx="2">
+            <a:schemeClr val="accent1"/>
+          </a:lnRef>
+          <a:fillRef idx="0">
+            <a:schemeClr val="accent1"/>
+          </a:fillRef>
+          <a:effectRef idx="1">
+            <a:schemeClr val="accent1"/>
+          </a:effectRef>
+          <a:fontRef idx="minor">
+            <a:schemeClr val="tx1"/>
+          </a:fontRef>
+        </p:style>
+      </p:cxnSp>
+      <p:sp>
+        <p:nvSpPr>
+          <p:cNvPr id="122" name="Textfeld 121">
+            <a:extLst>
+              <a:ext uri="{FF2B5EF4-FFF2-40B4-BE49-F238E27FC236}">
+                <a16:creationId xmlns:a16="http://schemas.microsoft.com/office/drawing/2014/main" id="{16F6B474-2C3A-6F85-F70D-40EB038D802B}"/>
+              </a:ext>
+            </a:extLst>
+          </p:cNvPr>
+          <p:cNvSpPr txBox="1"/>
+          <p:nvPr/>
+        </p:nvSpPr>
+        <p:spPr>
+          <a:xfrm>
+            <a:off x="4503553" y="2116918"/>
+            <a:ext cx="2379468" cy="276999"/>
+          </a:xfrm>
+          <a:prstGeom prst="rect">
+            <a:avLst/>
+          </a:prstGeom>
+          <a:noFill/>
+        </p:spPr>
+        <p:txBody>
+          <a:bodyPr wrap="square">
+            <a:spAutoFit/>
+          </a:bodyPr>
+          <a:lstStyle/>
+          <a:p>
+            <a:r>
+              <a:rPr lang="de-DE" sz="1200" dirty="0" err="1"/>
+              <a:t>pioneered</a:t>
+            </a:r>
+            <a:r>
+              <a:rPr lang="de-DE" sz="1200" dirty="0"/>
+              <a:t> </a:t>
+            </a:r>
+            <a:r>
+              <a:rPr lang="de-DE" sz="1200" dirty="0" err="1"/>
+              <a:t>instruction</a:t>
+            </a:r>
+            <a:r>
+              <a:rPr lang="de-DE" sz="1200" dirty="0"/>
+              <a:t>-style </a:t>
+            </a:r>
+            <a:r>
+              <a:rPr lang="de-DE" sz="1200" dirty="0" err="1"/>
+              <a:t>tasks</a:t>
+            </a:r>
+            <a:endParaRPr lang="de-DE" sz="1200" dirty="0"/>
+          </a:p>
+        </p:txBody>
+      </p:sp>
+      <p:cxnSp>
+        <p:nvCxnSpPr>
+          <p:cNvPr id="124" name="Gerade Verbindung 123">
+            <a:extLst>
+              <a:ext uri="{FF2B5EF4-FFF2-40B4-BE49-F238E27FC236}">
+                <a16:creationId xmlns:a16="http://schemas.microsoft.com/office/drawing/2014/main" id="{60DBCCE4-1737-1B58-0258-FE00598F30C2}"/>
+              </a:ext>
+            </a:extLst>
+          </p:cNvPr>
+          <p:cNvCxnSpPr>
+            <a:cxnSpLocks/>
+            <a:stCxn id="122" idx="2"/>
+            <a:endCxn id="32" idx="0"/>
+          </p:cNvCxnSpPr>
+          <p:nvPr/>
+        </p:nvCxnSpPr>
+        <p:spPr>
+          <a:xfrm>
+            <a:off x="5693287" y="2393917"/>
+            <a:ext cx="0" cy="520403"/>
+          </a:xfrm>
+          <a:prstGeom prst="line">
+            <a:avLst/>
+          </a:prstGeom>
+        </p:spPr>
+        <p:style>
+          <a:lnRef idx="2">
+            <a:schemeClr val="accent1"/>
+          </a:lnRef>
+          <a:fillRef idx="0">
+            <a:schemeClr val="accent1"/>
+          </a:fillRef>
+          <a:effectRef idx="1">
+            <a:schemeClr val="accent1"/>
+          </a:effectRef>
+          <a:fontRef idx="minor">
+            <a:schemeClr val="tx1"/>
+          </a:fontRef>
+        </p:style>
+      </p:cxnSp>
+      <p:sp>
+        <p:nvSpPr>
+          <p:cNvPr id="127" name="Textfeld 126">
+            <a:extLst>
+              <a:ext uri="{FF2B5EF4-FFF2-40B4-BE49-F238E27FC236}">
+                <a16:creationId xmlns:a16="http://schemas.microsoft.com/office/drawing/2014/main" id="{DB6DF839-D0EE-2942-1FF5-5C9434818069}"/>
+              </a:ext>
+            </a:extLst>
+          </p:cNvPr>
+          <p:cNvSpPr txBox="1"/>
+          <p:nvPr/>
+        </p:nvSpPr>
+        <p:spPr>
+          <a:xfrm>
+            <a:off x="3733388" y="5866287"/>
+            <a:ext cx="1710278" cy="461665"/>
+          </a:xfrm>
+          <a:prstGeom prst="rect">
+            <a:avLst/>
+          </a:prstGeom>
+          <a:noFill/>
+        </p:spPr>
+        <p:txBody>
+          <a:bodyPr wrap="square">
+            <a:spAutoFit/>
+          </a:bodyPr>
+          <a:lstStyle/>
+          <a:p>
+            <a:r>
+              <a:rPr lang="de-DE" sz="1200" dirty="0" err="1"/>
+              <a:t>showed</a:t>
+            </a:r>
+            <a:r>
+              <a:rPr lang="de-DE" sz="1200" dirty="0"/>
+              <a:t> </a:t>
+            </a:r>
+            <a:r>
+              <a:rPr lang="de-DE" sz="1200" dirty="0" err="1"/>
+              <a:t>coherent</a:t>
+            </a:r>
+            <a:r>
+              <a:rPr lang="de-DE" sz="1200" dirty="0"/>
+              <a:t> </a:t>
+            </a:r>
+            <a:r>
+              <a:rPr lang="de-DE" sz="1200" dirty="0" err="1"/>
+              <a:t>long</a:t>
+            </a:r>
+            <a:r>
+              <a:rPr lang="de-DE" sz="1200" dirty="0"/>
+              <a:t>-form </a:t>
+            </a:r>
+            <a:r>
+              <a:rPr lang="de-DE" sz="1200" dirty="0" err="1"/>
+              <a:t>text</a:t>
+            </a:r>
+            <a:r>
+              <a:rPr lang="de-DE" sz="1200" dirty="0"/>
+              <a:t> </a:t>
+            </a:r>
+            <a:r>
+              <a:rPr lang="de-DE" sz="1200" dirty="0" err="1"/>
+              <a:t>generation</a:t>
+            </a:r>
+            <a:endParaRPr lang="de-DE" sz="1200" dirty="0"/>
+          </a:p>
+        </p:txBody>
+      </p:sp>
+      <p:cxnSp>
+        <p:nvCxnSpPr>
+          <p:cNvPr id="131" name="Gerade Verbindung 130">
+            <a:extLst>
+              <a:ext uri="{FF2B5EF4-FFF2-40B4-BE49-F238E27FC236}">
+                <a16:creationId xmlns:a16="http://schemas.microsoft.com/office/drawing/2014/main" id="{A3ED7754-9E7E-CE11-2E25-83990520CD5F}"/>
+              </a:ext>
+            </a:extLst>
+          </p:cNvPr>
+          <p:cNvCxnSpPr>
+            <a:stCxn id="18" idx="2"/>
+            <a:endCxn id="127" idx="0"/>
+          </p:cNvCxnSpPr>
+          <p:nvPr/>
+        </p:nvCxnSpPr>
+        <p:spPr>
+          <a:xfrm flipH="1">
+            <a:off x="4588527" y="5438735"/>
+            <a:ext cx="1" cy="427552"/>
+          </a:xfrm>
+          <a:prstGeom prst="line">
+            <a:avLst/>
+          </a:prstGeom>
+        </p:spPr>
+        <p:style>
+          <a:lnRef idx="2">
+            <a:schemeClr val="accent1"/>
+          </a:lnRef>
+          <a:fillRef idx="0">
+            <a:schemeClr val="accent1"/>
+          </a:fillRef>
+          <a:effectRef idx="1">
+            <a:schemeClr val="accent1"/>
+          </a:effectRef>
+          <a:fontRef idx="minor">
+            <a:schemeClr val="tx1"/>
+          </a:fontRef>
+        </p:style>
+      </p:cxnSp>
+      <p:sp>
+        <p:nvSpPr>
+          <p:cNvPr id="139" name="Textfeld 138">
+            <a:extLst>
+              <a:ext uri="{FF2B5EF4-FFF2-40B4-BE49-F238E27FC236}">
+                <a16:creationId xmlns:a16="http://schemas.microsoft.com/office/drawing/2014/main" id="{FDE22367-DFA9-FF09-309B-B11C166AE83B}"/>
+              </a:ext>
+            </a:extLst>
+          </p:cNvPr>
+          <p:cNvSpPr txBox="1"/>
+          <p:nvPr/>
+        </p:nvSpPr>
+        <p:spPr>
+          <a:xfrm>
+            <a:off x="6002880" y="5866286"/>
+            <a:ext cx="1795278" cy="461665"/>
+          </a:xfrm>
+          <a:prstGeom prst="rect">
+            <a:avLst/>
+          </a:prstGeom>
+          <a:noFill/>
+        </p:spPr>
+        <p:txBody>
+          <a:bodyPr wrap="square">
+            <a:spAutoFit/>
+          </a:bodyPr>
+          <a:lstStyle/>
+          <a:p>
+            <a:r>
+              <a:rPr lang="de-DE" sz="1200" dirty="0" err="1"/>
+              <a:t>proved</a:t>
+            </a:r>
+            <a:r>
+              <a:rPr lang="de-DE" sz="1200" dirty="0"/>
+              <a:t> general-</a:t>
+            </a:r>
+            <a:r>
+              <a:rPr lang="de-DE" sz="1200" dirty="0" err="1"/>
+              <a:t>purpose</a:t>
+            </a:r>
+            <a:r>
+              <a:rPr lang="de-DE" sz="1200" dirty="0"/>
+              <a:t> </a:t>
+            </a:r>
+            <a:r>
+              <a:rPr lang="de-DE" sz="1200" dirty="0" err="1"/>
+              <a:t>language</a:t>
+            </a:r>
+            <a:r>
+              <a:rPr lang="de-DE" sz="1200" dirty="0"/>
+              <a:t> </a:t>
+            </a:r>
+            <a:r>
+              <a:rPr lang="de-DE" sz="1200" dirty="0" err="1"/>
+              <a:t>generation</a:t>
+            </a:r>
+            <a:endParaRPr lang="de-DE" sz="1200" dirty="0"/>
+          </a:p>
+        </p:txBody>
+      </p:sp>
+      <p:cxnSp>
+        <p:nvCxnSpPr>
+          <p:cNvPr id="141" name="Gerade Verbindung 140">
+            <a:extLst>
+              <a:ext uri="{FF2B5EF4-FFF2-40B4-BE49-F238E27FC236}">
+                <a16:creationId xmlns:a16="http://schemas.microsoft.com/office/drawing/2014/main" id="{09ACFD4C-35C6-5813-822C-947026DFC369}"/>
+              </a:ext>
+            </a:extLst>
+          </p:cNvPr>
+          <p:cNvCxnSpPr>
+            <a:stCxn id="25" idx="2"/>
+            <a:endCxn id="139" idx="0"/>
+          </p:cNvCxnSpPr>
+          <p:nvPr/>
+        </p:nvCxnSpPr>
+        <p:spPr>
+          <a:xfrm>
+            <a:off x="6900519" y="5438735"/>
+            <a:ext cx="0" cy="427551"/>
+          </a:xfrm>
+          <a:prstGeom prst="line">
+            <a:avLst/>
+          </a:prstGeom>
+        </p:spPr>
+        <p:style>
+          <a:lnRef idx="2">
+            <a:schemeClr val="accent1"/>
+          </a:lnRef>
+          <a:fillRef idx="0">
+            <a:schemeClr val="accent1"/>
+          </a:fillRef>
+          <a:effectRef idx="1">
+            <a:schemeClr val="accent1"/>
+          </a:effectRef>
+          <a:fontRef idx="minor">
+            <a:schemeClr val="tx1"/>
+          </a:fontRef>
+        </p:style>
+      </p:cxnSp>
+      <p:sp>
+        <p:nvSpPr>
+          <p:cNvPr id="143" name="Geschweifte Klammer links 142">
+            <a:extLst>
+              <a:ext uri="{FF2B5EF4-FFF2-40B4-BE49-F238E27FC236}">
+                <a16:creationId xmlns:a16="http://schemas.microsoft.com/office/drawing/2014/main" id="{B4E4A90A-7C90-AF95-240F-E3A2887ADF22}"/>
+              </a:ext>
+            </a:extLst>
+          </p:cNvPr>
+          <p:cNvSpPr/>
+          <p:nvPr/>
+        </p:nvSpPr>
+        <p:spPr>
+          <a:xfrm rot="5400000">
+            <a:off x="3962790" y="-2275202"/>
+            <a:ext cx="584836" cy="7365979"/>
+          </a:xfrm>
+          <a:prstGeom prst="leftBrace">
+            <a:avLst/>
+          </a:prstGeom>
+          <a:ln>
+            <a:solidFill>
+              <a:schemeClr val="bg2">
+                <a:lumMod val="50000"/>
+              </a:schemeClr>
+            </a:solidFill>
+          </a:ln>
+        </p:spPr>
+        <p:style>
+          <a:lnRef idx="2">
+            <a:schemeClr val="accent1"/>
+          </a:lnRef>
+          <a:fillRef idx="0">
+            <a:schemeClr val="accent1"/>
+          </a:fillRef>
+          <a:effectRef idx="1">
+            <a:schemeClr val="accent1"/>
+          </a:effectRef>
+          <a:fontRef idx="minor">
+            <a:schemeClr val="tx1"/>
+          </a:fontRef>
+        </p:style>
+        <p:txBody>
+          <a:bodyPr rtlCol="0" anchor="ctr"/>
+          <a:lstStyle/>
+          <a:p>
+            <a:pPr algn="ctr"/>
+            <a:endParaRPr lang="de-DE">
+              <a:solidFill>
+                <a:schemeClr val="bg2">
+                  <a:lumMod val="50000"/>
+                </a:schemeClr>
+              </a:solidFill>
+            </a:endParaRPr>
+          </a:p>
+        </p:txBody>
+      </p:sp>
+      <p:sp>
+        <p:nvSpPr>
+          <p:cNvPr id="144" name="Textfeld 143">
+            <a:extLst>
+              <a:ext uri="{FF2B5EF4-FFF2-40B4-BE49-F238E27FC236}">
+                <a16:creationId xmlns:a16="http://schemas.microsoft.com/office/drawing/2014/main" id="{54430635-226F-A2A0-A18D-57C587383950}"/>
+              </a:ext>
+            </a:extLst>
+          </p:cNvPr>
+          <p:cNvSpPr txBox="1"/>
+          <p:nvPr/>
+        </p:nvSpPr>
+        <p:spPr>
+          <a:xfrm>
+            <a:off x="3257671" y="646872"/>
+            <a:ext cx="1994136" cy="400110"/>
+          </a:xfrm>
+          <a:prstGeom prst="rect">
+            <a:avLst/>
+          </a:prstGeom>
+          <a:noFill/>
+        </p:spPr>
+        <p:txBody>
+          <a:bodyPr wrap="none" rtlCol="0">
+            <a:spAutoFit/>
+          </a:bodyPr>
+          <a:lstStyle/>
+          <a:p>
+            <a:r>
+              <a:rPr lang="de-DE" sz="2000" dirty="0" err="1">
+                <a:solidFill>
+                  <a:schemeClr val="bg2">
+                    <a:lumMod val="50000"/>
+                  </a:schemeClr>
+                </a:solidFill>
+              </a:rPr>
+              <a:t>foundational</a:t>
+            </a:r>
+            <a:r>
+              <a:rPr lang="de-DE" sz="2000" dirty="0">
+                <a:solidFill>
+                  <a:schemeClr val="bg2">
+                    <a:lumMod val="50000"/>
+                  </a:schemeClr>
+                </a:solidFill>
+              </a:rPr>
+              <a:t> </a:t>
+            </a:r>
+            <a:r>
+              <a:rPr lang="de-DE" sz="2000" dirty="0" err="1">
+                <a:solidFill>
+                  <a:schemeClr val="bg2">
+                    <a:lumMod val="50000"/>
+                  </a:schemeClr>
+                </a:solidFill>
+              </a:rPr>
+              <a:t>era</a:t>
+            </a:r>
+            <a:endParaRPr lang="de-DE" sz="2000" dirty="0">
+              <a:solidFill>
+                <a:schemeClr val="bg2">
+                  <a:lumMod val="50000"/>
+                </a:schemeClr>
+              </a:solidFill>
+            </a:endParaRPr>
+          </a:p>
+        </p:txBody>
+      </p:sp>
+      <p:sp>
+        <p:nvSpPr>
+          <p:cNvPr id="146" name="Textfeld 145">
+            <a:extLst>
+              <a:ext uri="{FF2B5EF4-FFF2-40B4-BE49-F238E27FC236}">
+                <a16:creationId xmlns:a16="http://schemas.microsoft.com/office/drawing/2014/main" id="{003BD321-60DB-460B-2CCE-C3A88854EC4E}"/>
+              </a:ext>
+            </a:extLst>
+          </p:cNvPr>
+          <p:cNvSpPr txBox="1"/>
+          <p:nvPr/>
+        </p:nvSpPr>
+        <p:spPr>
+          <a:xfrm>
+            <a:off x="8527675" y="339096"/>
+            <a:ext cx="2532645" cy="707886"/>
+          </a:xfrm>
+          <a:prstGeom prst="rect">
+            <a:avLst/>
+          </a:prstGeom>
+          <a:noFill/>
+        </p:spPr>
+        <p:txBody>
+          <a:bodyPr wrap="square" rtlCol="0">
+            <a:spAutoFit/>
+          </a:bodyPr>
+          <a:lstStyle/>
+          <a:p>
+            <a:r>
+              <a:rPr lang="de-DE" sz="2000" dirty="0" err="1">
+                <a:solidFill>
+                  <a:schemeClr val="bg2">
+                    <a:lumMod val="50000"/>
+                  </a:schemeClr>
+                </a:solidFill>
+              </a:rPr>
+              <a:t>dialogue</a:t>
+            </a:r>
+            <a:r>
+              <a:rPr lang="de-DE" sz="2000" dirty="0">
+                <a:solidFill>
+                  <a:schemeClr val="bg2">
+                    <a:lumMod val="50000"/>
+                  </a:schemeClr>
+                </a:solidFill>
+              </a:rPr>
+              <a:t> &amp; </a:t>
+            </a:r>
+            <a:r>
+              <a:rPr lang="de-DE" sz="2000" dirty="0" err="1">
+                <a:solidFill>
+                  <a:schemeClr val="bg2">
+                    <a:lumMod val="50000"/>
+                  </a:schemeClr>
+                </a:solidFill>
+              </a:rPr>
+              <a:t>alignment</a:t>
+            </a:r>
+            <a:r>
+              <a:rPr lang="de-DE" sz="2000" dirty="0">
+                <a:solidFill>
+                  <a:schemeClr val="bg2">
+                    <a:lumMod val="50000"/>
+                  </a:schemeClr>
+                </a:solidFill>
+              </a:rPr>
+              <a:t> </a:t>
+            </a:r>
+            <a:r>
+              <a:rPr lang="de-DE" sz="2000" dirty="0" err="1">
+                <a:solidFill>
+                  <a:schemeClr val="bg2">
+                    <a:lumMod val="50000"/>
+                  </a:schemeClr>
+                </a:solidFill>
+              </a:rPr>
+              <a:t>breakthroughs</a:t>
+            </a:r>
+            <a:endParaRPr lang="de-DE" sz="2000" dirty="0">
+              <a:solidFill>
+                <a:schemeClr val="bg2">
+                  <a:lumMod val="50000"/>
+                </a:schemeClr>
+              </a:solidFill>
+            </a:endParaRPr>
+          </a:p>
+        </p:txBody>
+      </p:sp>
+      <p:sp>
+        <p:nvSpPr>
+          <p:cNvPr id="147" name="Geschweifte Klammer links 146">
+            <a:extLst>
+              <a:ext uri="{FF2B5EF4-FFF2-40B4-BE49-F238E27FC236}">
+                <a16:creationId xmlns:a16="http://schemas.microsoft.com/office/drawing/2014/main" id="{059F32D6-BF49-B594-29A1-B4AEAA25896F}"/>
+              </a:ext>
+            </a:extLst>
+          </p:cNvPr>
+          <p:cNvSpPr/>
+          <p:nvPr/>
+        </p:nvSpPr>
+        <p:spPr>
+          <a:xfrm rot="5400000">
+            <a:off x="9486572" y="-433005"/>
+            <a:ext cx="584836" cy="3681583"/>
+          </a:xfrm>
+          <a:prstGeom prst="leftBrace">
+            <a:avLst/>
+          </a:prstGeom>
+          <a:ln>
+            <a:solidFill>
+              <a:schemeClr val="bg2">
+                <a:lumMod val="50000"/>
+              </a:schemeClr>
+            </a:solidFill>
+          </a:ln>
+        </p:spPr>
+        <p:style>
+          <a:lnRef idx="2">
+            <a:schemeClr val="accent1"/>
+          </a:lnRef>
+          <a:fillRef idx="0">
+            <a:schemeClr val="accent1"/>
+          </a:fillRef>
+          <a:effectRef idx="1">
+            <a:schemeClr val="accent1"/>
+          </a:effectRef>
+          <a:fontRef idx="minor">
+            <a:schemeClr val="tx1"/>
+          </a:fontRef>
+        </p:style>
+        <p:txBody>
+          <a:bodyPr rtlCol="0" anchor="ctr"/>
+          <a:lstStyle/>
+          <a:p>
+            <a:pPr algn="ctr"/>
+            <a:endParaRPr lang="de-DE"/>
+          </a:p>
+        </p:txBody>
+      </p:sp>
+      <p:sp>
+        <p:nvSpPr>
+          <p:cNvPr id="149" name="Textfeld 148">
+            <a:extLst>
+              <a:ext uri="{FF2B5EF4-FFF2-40B4-BE49-F238E27FC236}">
+                <a16:creationId xmlns:a16="http://schemas.microsoft.com/office/drawing/2014/main" id="{E33AE0C6-26B1-1A7E-F556-E0B3737CD4C1}"/>
+              </a:ext>
+            </a:extLst>
+          </p:cNvPr>
+          <p:cNvSpPr txBox="1"/>
+          <p:nvPr/>
+        </p:nvSpPr>
+        <p:spPr>
+          <a:xfrm>
+            <a:off x="8229563" y="2027452"/>
+            <a:ext cx="1233108" cy="461665"/>
+          </a:xfrm>
+          <a:prstGeom prst="rect">
+            <a:avLst/>
+          </a:prstGeom>
+          <a:noFill/>
+        </p:spPr>
+        <p:txBody>
+          <a:bodyPr wrap="square">
+            <a:spAutoFit/>
+          </a:bodyPr>
+          <a:lstStyle/>
+          <a:p>
+            <a:r>
+              <a:rPr lang="de-DE" sz="1200" dirty="0" err="1"/>
+              <a:t>dialogue</a:t>
+            </a:r>
+            <a:r>
+              <a:rPr lang="de-DE" sz="1200" dirty="0"/>
+              <a:t> </a:t>
+            </a:r>
+            <a:r>
+              <a:rPr lang="de-DE" sz="1200" dirty="0" err="1"/>
+              <a:t>model</a:t>
+            </a:r>
+            <a:r>
+              <a:rPr lang="de-DE" sz="1200" dirty="0"/>
+              <a:t> (</a:t>
+            </a:r>
+            <a:r>
+              <a:rPr lang="de-DE" sz="1200" dirty="0" err="1"/>
+              <a:t>powered</a:t>
+            </a:r>
+            <a:r>
+              <a:rPr lang="de-DE" sz="1200" dirty="0"/>
+              <a:t> Bard)</a:t>
+            </a:r>
+          </a:p>
+        </p:txBody>
+      </p:sp>
+      <p:cxnSp>
+        <p:nvCxnSpPr>
+          <p:cNvPr id="151" name="Gerade Verbindung 150">
+            <a:extLst>
+              <a:ext uri="{FF2B5EF4-FFF2-40B4-BE49-F238E27FC236}">
+                <a16:creationId xmlns:a16="http://schemas.microsoft.com/office/drawing/2014/main" id="{512B832A-1E95-8D55-AEB5-2C1D07CE4501}"/>
+              </a:ext>
+            </a:extLst>
+          </p:cNvPr>
+          <p:cNvCxnSpPr>
+            <a:cxnSpLocks/>
+            <a:stCxn id="149" idx="2"/>
+            <a:endCxn id="56" idx="0"/>
+          </p:cNvCxnSpPr>
+          <p:nvPr/>
+        </p:nvCxnSpPr>
+        <p:spPr>
+          <a:xfrm flipH="1">
+            <a:off x="8844088" y="2489117"/>
+            <a:ext cx="2029" cy="425202"/>
+          </a:xfrm>
+          <a:prstGeom prst="line">
+            <a:avLst/>
+          </a:prstGeom>
+        </p:spPr>
+        <p:style>
+          <a:lnRef idx="2">
+            <a:schemeClr val="accent1"/>
+          </a:lnRef>
+          <a:fillRef idx="0">
+            <a:schemeClr val="accent1"/>
+          </a:fillRef>
+          <a:effectRef idx="1">
+            <a:schemeClr val="accent1"/>
+          </a:effectRef>
+          <a:fontRef idx="minor">
+            <a:schemeClr val="tx1"/>
+          </a:fontRef>
+        </p:style>
+      </p:cxnSp>
+      <p:sp>
+        <p:nvSpPr>
+          <p:cNvPr id="155" name="Textfeld 154">
+            <a:extLst>
+              <a:ext uri="{FF2B5EF4-FFF2-40B4-BE49-F238E27FC236}">
+                <a16:creationId xmlns:a16="http://schemas.microsoft.com/office/drawing/2014/main" id="{F407F7FB-308F-E953-1DF3-4B9977082ECF}"/>
+              </a:ext>
+            </a:extLst>
+          </p:cNvPr>
+          <p:cNvSpPr txBox="1"/>
+          <p:nvPr/>
+        </p:nvSpPr>
+        <p:spPr>
+          <a:xfrm>
+            <a:off x="9619480" y="1932253"/>
+            <a:ext cx="1377085" cy="646331"/>
+          </a:xfrm>
+          <a:prstGeom prst="rect">
+            <a:avLst/>
+          </a:prstGeom>
+          <a:noFill/>
+        </p:spPr>
+        <p:txBody>
+          <a:bodyPr wrap="square">
+            <a:spAutoFit/>
+          </a:bodyPr>
+          <a:lstStyle/>
+          <a:p>
+            <a:r>
+              <a:rPr lang="de-DE" sz="1200" dirty="0" err="1"/>
+              <a:t>reasoning</a:t>
+            </a:r>
+            <a:r>
+              <a:rPr lang="de-DE" sz="1200" dirty="0"/>
+              <a:t> + </a:t>
+            </a:r>
+            <a:r>
+              <a:rPr lang="de-DE" sz="1200" dirty="0" err="1"/>
+              <a:t>chain-of-thought</a:t>
+            </a:r>
+            <a:r>
+              <a:rPr lang="de-DE" sz="1200" dirty="0"/>
+              <a:t> </a:t>
+            </a:r>
+            <a:r>
+              <a:rPr lang="de-DE" sz="1200" dirty="0" err="1"/>
+              <a:t>prompting</a:t>
+            </a:r>
+            <a:endParaRPr lang="de-DE" sz="1200" dirty="0"/>
+          </a:p>
+        </p:txBody>
+      </p:sp>
+      <p:cxnSp>
+        <p:nvCxnSpPr>
+          <p:cNvPr id="157" name="Gerade Verbindung 156">
+            <a:extLst>
+              <a:ext uri="{FF2B5EF4-FFF2-40B4-BE49-F238E27FC236}">
+                <a16:creationId xmlns:a16="http://schemas.microsoft.com/office/drawing/2014/main" id="{38B03CF6-C55F-3182-61B9-CB0D515149D1}"/>
+              </a:ext>
+            </a:extLst>
+          </p:cNvPr>
+          <p:cNvCxnSpPr>
+            <a:cxnSpLocks/>
+            <a:stCxn id="155" idx="2"/>
+            <a:endCxn id="63" idx="0"/>
+          </p:cNvCxnSpPr>
+          <p:nvPr/>
+        </p:nvCxnSpPr>
+        <p:spPr>
+          <a:xfrm>
+            <a:off x="10308023" y="2578584"/>
+            <a:ext cx="4295" cy="335735"/>
+          </a:xfrm>
+          <a:prstGeom prst="line">
+            <a:avLst/>
+          </a:prstGeom>
+        </p:spPr>
+        <p:style>
+          <a:lnRef idx="2">
+            <a:schemeClr val="accent1"/>
+          </a:lnRef>
+          <a:fillRef idx="0">
+            <a:schemeClr val="accent1"/>
+          </a:fillRef>
+          <a:effectRef idx="1">
+            <a:schemeClr val="accent1"/>
+          </a:effectRef>
+          <a:fontRef idx="minor">
+            <a:schemeClr val="tx1"/>
+          </a:fontRef>
+        </p:style>
+      </p:cxnSp>
+      <p:sp>
+        <p:nvSpPr>
+          <p:cNvPr id="160" name="Textfeld 159">
+            <a:extLst>
+              <a:ext uri="{FF2B5EF4-FFF2-40B4-BE49-F238E27FC236}">
+                <a16:creationId xmlns:a16="http://schemas.microsoft.com/office/drawing/2014/main" id="{1AAA2001-1C35-EA9D-9B75-F0C286CA463C}"/>
+              </a:ext>
+            </a:extLst>
+          </p:cNvPr>
+          <p:cNvSpPr txBox="1"/>
+          <p:nvPr/>
+        </p:nvSpPr>
+        <p:spPr>
+          <a:xfrm>
+            <a:off x="9263474" y="5866286"/>
+            <a:ext cx="1479721" cy="830997"/>
+          </a:xfrm>
+          <a:prstGeom prst="rect">
+            <a:avLst/>
+          </a:prstGeom>
+          <a:noFill/>
+        </p:spPr>
+        <p:txBody>
+          <a:bodyPr wrap="square">
+            <a:spAutoFit/>
+          </a:bodyPr>
+          <a:lstStyle/>
+          <a:p>
+            <a:r>
+              <a:rPr lang="de-DE" sz="1200" dirty="0" err="1"/>
+              <a:t>introduced</a:t>
+            </a:r>
+            <a:r>
+              <a:rPr lang="de-DE" sz="1200" dirty="0"/>
+              <a:t> RLHF </a:t>
+            </a:r>
+            <a:r>
+              <a:rPr lang="de-DE" sz="1200" dirty="0" err="1"/>
+              <a:t>to</a:t>
+            </a:r>
+            <a:r>
+              <a:rPr lang="de-DE" sz="1200" dirty="0"/>
+              <a:t> </a:t>
+            </a:r>
+            <a:r>
+              <a:rPr lang="de-DE" sz="1200" dirty="0" err="1"/>
+              <a:t>align</a:t>
+            </a:r>
+            <a:r>
+              <a:rPr lang="de-DE" sz="1200" dirty="0"/>
+              <a:t> </a:t>
+            </a:r>
+            <a:r>
+              <a:rPr lang="de-DE" sz="1200" dirty="0" err="1"/>
+              <a:t>models</a:t>
+            </a:r>
+            <a:r>
+              <a:rPr lang="de-DE" sz="1200" dirty="0"/>
+              <a:t> </a:t>
+            </a:r>
+            <a:r>
+              <a:rPr lang="de-DE" sz="1200" dirty="0" err="1"/>
+              <a:t>with</a:t>
+            </a:r>
+            <a:r>
+              <a:rPr lang="de-DE" sz="1200" dirty="0"/>
+              <a:t> human </a:t>
+            </a:r>
+            <a:r>
+              <a:rPr lang="de-DE" sz="1200" dirty="0" err="1"/>
+              <a:t>intent</a:t>
+            </a:r>
+            <a:r>
+              <a:rPr lang="de-DE" sz="1200" dirty="0"/>
+              <a:t> (</a:t>
+            </a:r>
+            <a:r>
+              <a:rPr lang="de-DE" sz="1200" dirty="0" err="1"/>
+              <a:t>basis</a:t>
+            </a:r>
+            <a:r>
+              <a:rPr lang="de-DE" sz="1200" dirty="0"/>
+              <a:t> </a:t>
+            </a:r>
+            <a:r>
+              <a:rPr lang="de-DE" sz="1200" dirty="0" err="1"/>
+              <a:t>for</a:t>
+            </a:r>
+            <a:r>
+              <a:rPr lang="de-DE" sz="1200" dirty="0"/>
+              <a:t> ChatGPT)</a:t>
+            </a:r>
+          </a:p>
+        </p:txBody>
+      </p:sp>
+      <p:cxnSp>
+        <p:nvCxnSpPr>
+          <p:cNvPr id="162" name="Gerade Verbindung 161">
+            <a:extLst>
+              <a:ext uri="{FF2B5EF4-FFF2-40B4-BE49-F238E27FC236}">
+                <a16:creationId xmlns:a16="http://schemas.microsoft.com/office/drawing/2014/main" id="{99DA6A61-ECEE-75E6-F951-69A00BB37AEB}"/>
+              </a:ext>
+            </a:extLst>
+          </p:cNvPr>
+          <p:cNvCxnSpPr>
+            <a:cxnSpLocks/>
+            <a:stCxn id="160" idx="0"/>
+            <a:endCxn id="58" idx="2"/>
+          </p:cNvCxnSpPr>
+          <p:nvPr/>
+        </p:nvCxnSpPr>
+        <p:spPr>
+          <a:xfrm flipH="1" flipV="1">
+            <a:off x="10000460" y="5438735"/>
+            <a:ext cx="2875" cy="427551"/>
+          </a:xfrm>
+          <a:prstGeom prst="line">
+            <a:avLst/>
+          </a:prstGeom>
+        </p:spPr>
+        <p:style>
+          <a:lnRef idx="2">
+            <a:schemeClr val="accent1"/>
+          </a:lnRef>
+          <a:fillRef idx="0">
+            <a:schemeClr val="accent1"/>
+          </a:fillRef>
+          <a:effectRef idx="1">
+            <a:schemeClr val="accent1"/>
+          </a:effectRef>
+          <a:fontRef idx="minor">
+            <a:schemeClr val="tx1"/>
+          </a:fontRef>
+        </p:style>
+      </p:cxnSp>
+      <p:sp>
+        <p:nvSpPr>
+          <p:cNvPr id="179" name="Textfeld 178">
+            <a:extLst>
+              <a:ext uri="{FF2B5EF4-FFF2-40B4-BE49-F238E27FC236}">
+                <a16:creationId xmlns:a16="http://schemas.microsoft.com/office/drawing/2014/main" id="{CCE28247-7215-1CCD-5D40-108191F7A5FC}"/>
+              </a:ext>
+            </a:extLst>
+          </p:cNvPr>
+          <p:cNvSpPr txBox="1"/>
+          <p:nvPr/>
+        </p:nvSpPr>
+        <p:spPr>
+          <a:xfrm>
+            <a:off x="10875150" y="5866286"/>
+            <a:ext cx="1176925" cy="276999"/>
+          </a:xfrm>
+          <a:prstGeom prst="rect">
+            <a:avLst/>
+          </a:prstGeom>
+          <a:noFill/>
+        </p:spPr>
+        <p:txBody>
+          <a:bodyPr wrap="none" rtlCol="0">
+            <a:spAutoFit/>
+          </a:bodyPr>
+          <a:lstStyle/>
+          <a:p>
+            <a:r>
+              <a:rPr lang="de-DE" sz="1200" dirty="0" err="1"/>
+              <a:t>mass</a:t>
+            </a:r>
+            <a:r>
+              <a:rPr lang="de-DE" sz="1200" dirty="0"/>
+              <a:t> </a:t>
+            </a:r>
+            <a:r>
+              <a:rPr lang="de-DE" sz="1200" dirty="0" err="1"/>
+              <a:t>adoption</a:t>
+            </a:r>
+            <a:endParaRPr lang="de-DE" sz="1200" dirty="0"/>
+          </a:p>
+        </p:txBody>
+      </p:sp>
+      <p:cxnSp>
+        <p:nvCxnSpPr>
+          <p:cNvPr id="181" name="Gerade Verbindung mit Pfeil 180">
+            <a:extLst>
+              <a:ext uri="{FF2B5EF4-FFF2-40B4-BE49-F238E27FC236}">
+                <a16:creationId xmlns:a16="http://schemas.microsoft.com/office/drawing/2014/main" id="{F13D89EB-214A-CF87-EC50-B5E45C55DA93}"/>
+              </a:ext>
+            </a:extLst>
+          </p:cNvPr>
+          <p:cNvCxnSpPr>
+            <a:stCxn id="57" idx="2"/>
+            <a:endCxn id="179" idx="0"/>
+          </p:cNvCxnSpPr>
+          <p:nvPr/>
+        </p:nvCxnSpPr>
+        <p:spPr>
+          <a:xfrm>
+            <a:off x="11232261" y="5438735"/>
+            <a:ext cx="231352" cy="427551"/>
+          </a:xfrm>
+          <a:prstGeom prst="straightConnector1">
+            <a:avLst/>
+          </a:prstGeom>
+          <a:ln>
+            <a:tailEnd type="triangle"/>
+          </a:ln>
+        </p:spPr>
+        <p:style>
+          <a:lnRef idx="2">
+            <a:schemeClr val="accent1"/>
+          </a:lnRef>
+          <a:fillRef idx="0">
+            <a:schemeClr val="accent1"/>
+          </a:fillRef>
+          <a:effectRef idx="1">
+            <a:schemeClr val="accent1"/>
+          </a:effectRef>
+          <a:fontRef idx="minor">
+            <a:schemeClr val="tx1"/>
+          </a:fontRef>
+        </p:style>
+      </p:cxnSp>
       <p:pic>
         <p:nvPicPr>
-          <p:cNvPr id="5" name="Picture 2" descr="Logo">
+          <p:cNvPr id="182" name="Picture 2" descr="Logo">
             <a:extLst>
               <a:ext uri="{FF2B5EF4-FFF2-40B4-BE49-F238E27FC236}">
-                <a16:creationId xmlns:a16="http://schemas.microsoft.com/office/drawing/2014/main" id="{A2D6124E-633B-838E-B2D5-6192C2426DB3}"/>
+                <a16:creationId xmlns:a16="http://schemas.microsoft.com/office/drawing/2014/main" id="{D9AA4957-0F37-91D8-C876-4DE55406E39B}"/>
               </a:ext>
             </a:extLst>
           </p:cNvPr>
@@ -11827,8 +13771,8 @@
         </p:blipFill>
         <p:spPr bwMode="auto">
           <a:xfrm>
-            <a:off x="1095540" y="1483125"/>
-            <a:ext cx="1580391" cy="1580391"/>
+            <a:off x="204448" y="4930904"/>
+            <a:ext cx="511623" cy="511623"/>
           </a:xfrm>
           <a:prstGeom prst="rect">
             <a:avLst/>
@@ -11847,10 +13791,282 @@
       </p:pic>
       <p:pic>
         <p:nvPicPr>
-          <p:cNvPr id="6" name="Picture 4" descr="undefined">
+          <p:cNvPr id="184" name="Grafik 183">
             <a:extLst>
               <a:ext uri="{FF2B5EF4-FFF2-40B4-BE49-F238E27FC236}">
-                <a16:creationId xmlns:a16="http://schemas.microsoft.com/office/drawing/2014/main" id="{B1A37638-D40C-91AB-AFB0-5FF45793AF36}"/>
+                <a16:creationId xmlns:a16="http://schemas.microsoft.com/office/drawing/2014/main" id="{DC5FDFC1-961A-43AC-5753-CD38171ED6F0}"/>
+              </a:ext>
+            </a:extLst>
+          </p:cNvPr>
+          <p:cNvPicPr>
+            <a:picLocks noChangeAspect="1"/>
+          </p:cNvPicPr>
+          <p:nvPr/>
+        </p:nvPicPr>
+        <p:blipFill>
+          <a:blip r:embed="rId3">
+            <a:extLst>
+              <a:ext uri="{96DAC541-7B7A-43D3-8B79-37D633B846F1}">
+                <asvg:svgBlip xmlns:asvg="http://schemas.microsoft.com/office/drawing/2016/SVG/main" r:embed="rId4"/>
+              </a:ext>
+            </a:extLst>
+          </a:blip>
+          <a:stretch>
+            <a:fillRect/>
+          </a:stretch>
+        </p:blipFill>
+        <p:spPr>
+          <a:xfrm>
+            <a:off x="50783" y="3029734"/>
+            <a:ext cx="818954" cy="276999"/>
+          </a:xfrm>
+          <a:prstGeom prst="rect">
+            <a:avLst/>
+          </a:prstGeom>
+        </p:spPr>
+      </p:pic>
+    </p:spTree>
+    <p:extLst>
+      <p:ext uri="{BB962C8B-B14F-4D97-AF65-F5344CB8AC3E}">
+        <p14:creationId xmlns:p14="http://schemas.microsoft.com/office/powerpoint/2010/main" val="3890442165"/>
+      </p:ext>
+    </p:extLst>
+  </p:cSld>
+  <p:clrMapOvr>
+    <a:masterClrMapping/>
+  </p:clrMapOvr>
+</p:sld>
+</file>
+
+<file path=ppt/slides/slide13.xml><?xml version="1.0" encoding="utf-8"?>
+<p:sld xmlns:a="http://schemas.openxmlformats.org/drawingml/2006/main" xmlns:r="http://schemas.openxmlformats.org/officeDocument/2006/relationships" xmlns:p="http://schemas.openxmlformats.org/presentationml/2006/main">
+  <p:cSld>
+    <p:spTree>
+      <p:nvGrpSpPr>
+        <p:cNvPr id="1" name=""/>
+        <p:cNvGrpSpPr/>
+        <p:nvPr/>
+      </p:nvGrpSpPr>
+      <p:grpSpPr>
+        <a:xfrm>
+          <a:off x="0" y="0"/>
+          <a:ext cx="0" cy="0"/>
+          <a:chOff x="0" y="0"/>
+          <a:chExt cx="0" cy="0"/>
+        </a:xfrm>
+      </p:grpSpPr>
+      <p:cxnSp>
+        <p:nvCxnSpPr>
+          <p:cNvPr id="6" name="Gerade Verbindung mit Pfeil 5">
+            <a:extLst>
+              <a:ext uri="{FF2B5EF4-FFF2-40B4-BE49-F238E27FC236}">
+                <a16:creationId xmlns:a16="http://schemas.microsoft.com/office/drawing/2014/main" id="{6D1BFCA3-4D5B-CAB6-12DC-91C0E69140DC}"/>
+              </a:ext>
+            </a:extLst>
+          </p:cNvPr>
+          <p:cNvCxnSpPr>
+            <a:stCxn id="4" idx="2"/>
+            <a:endCxn id="7" idx="0"/>
+          </p:cNvCxnSpPr>
+          <p:nvPr/>
+        </p:nvCxnSpPr>
+        <p:spPr>
+          <a:xfrm flipH="1">
+            <a:off x="8738135" y="545563"/>
+            <a:ext cx="1818291" cy="1085289"/>
+          </a:xfrm>
+          <a:prstGeom prst="straightConnector1">
+            <a:avLst/>
+          </a:prstGeom>
+          <a:ln>
+            <a:solidFill>
+              <a:schemeClr val="bg2">
+                <a:lumMod val="90000"/>
+              </a:schemeClr>
+            </a:solidFill>
+            <a:tailEnd type="triangle"/>
+          </a:ln>
+        </p:spPr>
+        <p:style>
+          <a:lnRef idx="2">
+            <a:schemeClr val="accent1"/>
+          </a:lnRef>
+          <a:fillRef idx="0">
+            <a:schemeClr val="accent1"/>
+          </a:fillRef>
+          <a:effectRef idx="1">
+            <a:schemeClr val="accent1"/>
+          </a:effectRef>
+          <a:fontRef idx="minor">
+            <a:schemeClr val="tx1"/>
+          </a:fontRef>
+        </p:style>
+      </p:cxnSp>
+      <p:cxnSp>
+        <p:nvCxnSpPr>
+          <p:cNvPr id="14" name="Gerade Verbindung mit Pfeil 13">
+            <a:extLst>
+              <a:ext uri="{FF2B5EF4-FFF2-40B4-BE49-F238E27FC236}">
+                <a16:creationId xmlns:a16="http://schemas.microsoft.com/office/drawing/2014/main" id="{B3799323-1E7F-2898-4ABB-FD71CBFDA6D6}"/>
+              </a:ext>
+            </a:extLst>
+          </p:cNvPr>
+          <p:cNvCxnSpPr>
+            <a:stCxn id="4" idx="2"/>
+            <a:endCxn id="9" idx="0"/>
+          </p:cNvCxnSpPr>
+          <p:nvPr/>
+        </p:nvCxnSpPr>
+        <p:spPr>
+          <a:xfrm flipH="1">
+            <a:off x="8713664" y="545563"/>
+            <a:ext cx="1842762" cy="5393117"/>
+          </a:xfrm>
+          <a:prstGeom prst="straightConnector1">
+            <a:avLst/>
+          </a:prstGeom>
+          <a:ln>
+            <a:solidFill>
+              <a:schemeClr val="bg2">
+                <a:lumMod val="90000"/>
+              </a:schemeClr>
+            </a:solidFill>
+            <a:tailEnd type="triangle"/>
+          </a:ln>
+        </p:spPr>
+        <p:style>
+          <a:lnRef idx="2">
+            <a:schemeClr val="accent1"/>
+          </a:lnRef>
+          <a:fillRef idx="0">
+            <a:schemeClr val="accent1"/>
+          </a:fillRef>
+          <a:effectRef idx="1">
+            <a:schemeClr val="accent1"/>
+          </a:effectRef>
+          <a:fontRef idx="minor">
+            <a:schemeClr val="tx1"/>
+          </a:fontRef>
+        </p:style>
+      </p:cxnSp>
+      <p:cxnSp>
+        <p:nvCxnSpPr>
+          <p:cNvPr id="19" name="Gerade Verbindung mit Pfeil 18">
+            <a:extLst>
+              <a:ext uri="{FF2B5EF4-FFF2-40B4-BE49-F238E27FC236}">
+                <a16:creationId xmlns:a16="http://schemas.microsoft.com/office/drawing/2014/main" id="{463486D2-05EC-8924-7361-2719D6E03BED}"/>
+              </a:ext>
+            </a:extLst>
+          </p:cNvPr>
+          <p:cNvCxnSpPr>
+            <a:stCxn id="4" idx="2"/>
+            <a:endCxn id="18" idx="0"/>
+          </p:cNvCxnSpPr>
+          <p:nvPr/>
+        </p:nvCxnSpPr>
+        <p:spPr>
+          <a:xfrm flipH="1">
+            <a:off x="9595869" y="545563"/>
+            <a:ext cx="960557" cy="4496244"/>
+          </a:xfrm>
+          <a:prstGeom prst="straightConnector1">
+            <a:avLst/>
+          </a:prstGeom>
+          <a:ln>
+            <a:solidFill>
+              <a:schemeClr val="bg2">
+                <a:lumMod val="90000"/>
+              </a:schemeClr>
+            </a:solidFill>
+            <a:tailEnd type="triangle"/>
+          </a:ln>
+        </p:spPr>
+        <p:style>
+          <a:lnRef idx="2">
+            <a:schemeClr val="accent1"/>
+          </a:lnRef>
+          <a:fillRef idx="0">
+            <a:schemeClr val="accent1"/>
+          </a:fillRef>
+          <a:effectRef idx="1">
+            <a:schemeClr val="accent1"/>
+          </a:effectRef>
+          <a:fontRef idx="minor">
+            <a:schemeClr val="tx1"/>
+          </a:fontRef>
+        </p:style>
+      </p:cxnSp>
+      <p:sp>
+        <p:nvSpPr>
+          <p:cNvPr id="2" name="Foliennummernplatzhalter 1">
+            <a:extLst>
+              <a:ext uri="{FF2B5EF4-FFF2-40B4-BE49-F238E27FC236}">
+                <a16:creationId xmlns:a16="http://schemas.microsoft.com/office/drawing/2014/main" id="{19139DBF-D8F4-87E8-3E78-4326B3F0C4BC}"/>
+              </a:ext>
+            </a:extLst>
+          </p:cNvPr>
+          <p:cNvSpPr>
+            <a:spLocks noGrp="1"/>
+          </p:cNvSpPr>
+          <p:nvPr>
+            <p:ph type="sldNum" sz="quarter" idx="12"/>
+          </p:nvPr>
+        </p:nvSpPr>
+        <p:spPr/>
+        <p:txBody>
+          <a:bodyPr/>
+          <a:lstStyle/>
+          <a:p>
+            <a:fld id="{3D4C94FE-FF23-4504-88E9-14D481113291}" type="slidenum">
+              <a:rPr lang="en-GB" smtClean="0"/>
+              <a:t>13</a:t>
+            </a:fld>
+            <a:endParaRPr lang="en-GB"/>
+          </a:p>
+        </p:txBody>
+      </p:sp>
+      <p:pic>
+        <p:nvPicPr>
+          <p:cNvPr id="3" name="Grafik 2" descr="Ein Bild, das Text, Screenshot, Zahl, Diagramm enthält.&#10;&#10;KI-generierte Inhalte können fehlerhaft sein.">
+            <a:extLst>
+              <a:ext uri="{FF2B5EF4-FFF2-40B4-BE49-F238E27FC236}">
+                <a16:creationId xmlns:a16="http://schemas.microsoft.com/office/drawing/2014/main" id="{0C94742E-2061-688F-477E-A7B11B23668A}"/>
+              </a:ext>
+            </a:extLst>
+          </p:cNvPr>
+          <p:cNvPicPr>
+            <a:picLocks noChangeAspect="1"/>
+          </p:cNvPicPr>
+          <p:nvPr/>
+        </p:nvPicPr>
+        <p:blipFill>
+          <a:blip r:embed="rId2">
+            <a:extLst>
+              <a:ext uri="{28A0092B-C50C-407E-A947-70E740481C1C}">
+                <a14:useLocalDpi xmlns:a14="http://schemas.microsoft.com/office/drawing/2010/main" val="0"/>
+              </a:ext>
+            </a:extLst>
+          </a:blip>
+          <a:stretch>
+            <a:fillRect/>
+          </a:stretch>
+        </p:blipFill>
+        <p:spPr>
+          <a:xfrm>
+            <a:off x="130498" y="550940"/>
+            <a:ext cx="8079009" cy="5987972"/>
+          </a:xfrm>
+          <a:prstGeom prst="rect">
+            <a:avLst/>
+          </a:prstGeom>
+        </p:spPr>
+      </p:pic>
+      <p:pic>
+        <p:nvPicPr>
+          <p:cNvPr id="7" name="Picture 4" descr="undefined">
+            <a:extLst>
+              <a:ext uri="{FF2B5EF4-FFF2-40B4-BE49-F238E27FC236}">
+                <a16:creationId xmlns:a16="http://schemas.microsoft.com/office/drawing/2014/main" id="{AD175A73-1B04-6CFF-950E-2B455B99F5AE}"/>
               </a:ext>
             </a:extLst>
           </p:cNvPr>
@@ -11874,8 +14090,8 @@
         </p:blipFill>
         <p:spPr bwMode="auto">
           <a:xfrm>
-            <a:off x="3754156" y="2715514"/>
-            <a:ext cx="2977801" cy="1099616"/>
+            <a:off x="8243749" y="1630852"/>
+            <a:ext cx="988771" cy="365125"/>
           </a:xfrm>
           <a:prstGeom prst="rect">
             <a:avLst/>
@@ -11894,10 +14110,10 @@
       </p:pic>
       <p:pic>
         <p:nvPicPr>
-          <p:cNvPr id="7" name="Picture 6" descr="undefined">
+          <p:cNvPr id="9" name="Picture 6" descr="undefined">
             <a:extLst>
               <a:ext uri="{FF2B5EF4-FFF2-40B4-BE49-F238E27FC236}">
-                <a16:creationId xmlns:a16="http://schemas.microsoft.com/office/drawing/2014/main" id="{45ADD39D-185E-C348-0B53-4320711FC7D7}"/>
+                <a16:creationId xmlns:a16="http://schemas.microsoft.com/office/drawing/2014/main" id="{BE4204A6-07B9-1D82-F6B4-A44FC7EED57D}"/>
               </a:ext>
             </a:extLst>
           </p:cNvPr>
@@ -11921,8 +14137,8 @@
         </p:blipFill>
         <p:spPr bwMode="auto">
           <a:xfrm>
-            <a:off x="7581280" y="1500614"/>
-            <a:ext cx="3579424" cy="769949"/>
+            <a:off x="8263845" y="5938680"/>
+            <a:ext cx="899638" cy="193516"/>
           </a:xfrm>
           <a:prstGeom prst="rect">
             <a:avLst/>
@@ -11941,10 +14157,10 @@
       </p:pic>
       <p:pic>
         <p:nvPicPr>
-          <p:cNvPr id="8" name="Picture 8" descr="undefined">
+          <p:cNvPr id="10" name="Picture 8" descr="undefined">
             <a:extLst>
               <a:ext uri="{FF2B5EF4-FFF2-40B4-BE49-F238E27FC236}">
-                <a16:creationId xmlns:a16="http://schemas.microsoft.com/office/drawing/2014/main" id="{29944F1A-2964-AB8F-CACC-9FD8125CFEEA}"/>
+                <a16:creationId xmlns:a16="http://schemas.microsoft.com/office/drawing/2014/main" id="{521DA02E-9AA8-D536-CAD4-C83A18212F8F}"/>
               </a:ext>
             </a:extLst>
           </p:cNvPr>
@@ -11968,8 +14184,8 @@
         </p:blipFill>
         <p:spPr bwMode="auto">
           <a:xfrm>
-            <a:off x="6731957" y="4890013"/>
-            <a:ext cx="3390602" cy="769949"/>
+            <a:off x="8282285" y="3827838"/>
+            <a:ext cx="963238" cy="218735"/>
           </a:xfrm>
           <a:prstGeom prst="rect">
             <a:avLst/>
@@ -11986,10 +14202,433 @@
           </a:extLst>
         </p:spPr>
       </p:pic>
+      <p:sp>
+        <p:nvSpPr>
+          <p:cNvPr id="11" name="Textfeld 10">
+            <a:extLst>
+              <a:ext uri="{FF2B5EF4-FFF2-40B4-BE49-F238E27FC236}">
+                <a16:creationId xmlns:a16="http://schemas.microsoft.com/office/drawing/2014/main" id="{B1115F0B-ED47-186B-7892-27463A66AF2E}"/>
+              </a:ext>
+            </a:extLst>
+          </p:cNvPr>
+          <p:cNvSpPr txBox="1"/>
+          <p:nvPr/>
+        </p:nvSpPr>
+        <p:spPr>
+          <a:xfrm>
+            <a:off x="9645134" y="3752539"/>
+            <a:ext cx="2232018" cy="369332"/>
+          </a:xfrm>
+          <a:prstGeom prst="rect">
+            <a:avLst/>
+          </a:prstGeom>
+          <a:noFill/>
+          <a:ln>
+            <a:solidFill>
+              <a:schemeClr val="tx1"/>
+            </a:solidFill>
+          </a:ln>
+        </p:spPr>
+        <p:txBody>
+          <a:bodyPr wrap="square" rtlCol="0">
+            <a:spAutoFit/>
+          </a:bodyPr>
+          <a:lstStyle/>
+          <a:p>
+            <a:r>
+              <a:rPr lang="de-DE" dirty="0"/>
+              <a:t>open-source </a:t>
+            </a:r>
+            <a:r>
+              <a:rPr lang="de-DE" dirty="0" err="1"/>
+              <a:t>models</a:t>
+            </a:r>
+            <a:endParaRPr lang="de-DE" dirty="0"/>
+          </a:p>
+        </p:txBody>
+      </p:sp>
+      <p:sp>
+        <p:nvSpPr>
+          <p:cNvPr id="12" name="Textfeld 11">
+            <a:extLst>
+              <a:ext uri="{FF2B5EF4-FFF2-40B4-BE49-F238E27FC236}">
+                <a16:creationId xmlns:a16="http://schemas.microsoft.com/office/drawing/2014/main" id="{67721EC8-553E-0665-9829-4238F329E3AB}"/>
+              </a:ext>
+            </a:extLst>
+          </p:cNvPr>
+          <p:cNvSpPr txBox="1"/>
+          <p:nvPr/>
+        </p:nvSpPr>
+        <p:spPr>
+          <a:xfrm>
+            <a:off x="7852745" y="4949474"/>
+            <a:ext cx="803618" cy="553998"/>
+          </a:xfrm>
+          <a:prstGeom prst="rect">
+            <a:avLst/>
+          </a:prstGeom>
+          <a:noFill/>
+        </p:spPr>
+        <p:txBody>
+          <a:bodyPr wrap="none" rtlCol="0">
+            <a:spAutoFit/>
+          </a:bodyPr>
+          <a:lstStyle/>
+          <a:p>
+            <a:r>
+              <a:rPr lang="de-DE" sz="1500" dirty="0"/>
+              <a:t>GPT-5</a:t>
+            </a:r>
+          </a:p>
+          <a:p>
+            <a:r>
+              <a:rPr lang="de-DE" sz="1500" dirty="0" err="1"/>
+              <a:t>gpt-oss</a:t>
+            </a:r>
+            <a:endParaRPr lang="de-DE" sz="1500" dirty="0"/>
+          </a:p>
+        </p:txBody>
+      </p:sp>
+      <p:sp>
+        <p:nvSpPr>
+          <p:cNvPr id="13" name="Textfeld 12">
+            <a:extLst>
+              <a:ext uri="{FF2B5EF4-FFF2-40B4-BE49-F238E27FC236}">
+                <a16:creationId xmlns:a16="http://schemas.microsoft.com/office/drawing/2014/main" id="{ACAA80F0-12DB-9CEA-C1B7-92C23D722825}"/>
+              </a:ext>
+            </a:extLst>
+          </p:cNvPr>
+          <p:cNvSpPr txBox="1"/>
+          <p:nvPr/>
+        </p:nvSpPr>
+        <p:spPr>
+          <a:xfrm>
+            <a:off x="7942654" y="2803490"/>
+            <a:ext cx="654282" cy="323165"/>
+          </a:xfrm>
+          <a:prstGeom prst="rect">
+            <a:avLst/>
+          </a:prstGeom>
+          <a:noFill/>
+        </p:spPr>
+        <p:txBody>
+          <a:bodyPr wrap="none" rtlCol="0">
+            <a:spAutoFit/>
+          </a:bodyPr>
+          <a:lstStyle/>
+          <a:p>
+            <a:r>
+              <a:rPr lang="de-DE" sz="1500" dirty="0"/>
+              <a:t>MAI-1</a:t>
+            </a:r>
+          </a:p>
+        </p:txBody>
+      </p:sp>
+      <p:sp>
+        <p:nvSpPr>
+          <p:cNvPr id="15" name="Textfeld 14">
+            <a:extLst>
+              <a:ext uri="{FF2B5EF4-FFF2-40B4-BE49-F238E27FC236}">
+                <a16:creationId xmlns:a16="http://schemas.microsoft.com/office/drawing/2014/main" id="{9EE47A6C-787C-E84E-7057-003590A9FAC0}"/>
+              </a:ext>
+            </a:extLst>
+          </p:cNvPr>
+          <p:cNvSpPr txBox="1"/>
+          <p:nvPr/>
+        </p:nvSpPr>
+        <p:spPr>
+          <a:xfrm>
+            <a:off x="9318302" y="5758439"/>
+            <a:ext cx="2743200" cy="553998"/>
+          </a:xfrm>
+          <a:prstGeom prst="rect">
+            <a:avLst/>
+          </a:prstGeom>
+          <a:noFill/>
+          <a:ln>
+            <a:noFill/>
+          </a:ln>
+        </p:spPr>
+        <p:txBody>
+          <a:bodyPr wrap="square">
+            <a:spAutoFit/>
+          </a:bodyPr>
+          <a:lstStyle/>
+          <a:p>
+            <a:pPr marL="285750" indent="-285750">
+              <a:buFont typeface="Arial" panose="020B0604020202020204" pitchFamily="34" charset="0"/>
+              <a:buChar char="•"/>
+            </a:pPr>
+            <a:r>
+              <a:rPr lang="de-DE" sz="1500" dirty="0"/>
+              <a:t>different </a:t>
+            </a:r>
+            <a:r>
+              <a:rPr lang="de-DE" sz="1500" dirty="0" err="1"/>
+              <a:t>alignment</a:t>
+            </a:r>
+            <a:r>
+              <a:rPr lang="de-DE" sz="1500" dirty="0"/>
+              <a:t> </a:t>
+            </a:r>
+            <a:r>
+              <a:rPr lang="de-DE" sz="1500" dirty="0" err="1"/>
+              <a:t>strategy</a:t>
+            </a:r>
+            <a:endParaRPr lang="de-DE" sz="1500" dirty="0"/>
+          </a:p>
+          <a:p>
+            <a:pPr marL="285750" indent="-285750">
+              <a:buFont typeface="Arial" panose="020B0604020202020204" pitchFamily="34" charset="0"/>
+              <a:buChar char="•"/>
+            </a:pPr>
+            <a:r>
+              <a:rPr lang="de-DE" sz="1500" dirty="0" err="1"/>
+              <a:t>tailored</a:t>
+            </a:r>
+            <a:r>
+              <a:rPr lang="de-DE" sz="1500" dirty="0"/>
+              <a:t> </a:t>
+            </a:r>
+            <a:r>
+              <a:rPr lang="de-DE" sz="1500" dirty="0" err="1"/>
+              <a:t>for</a:t>
+            </a:r>
+            <a:r>
+              <a:rPr lang="de-DE" sz="1500" dirty="0"/>
+              <a:t> </a:t>
+            </a:r>
+            <a:r>
+              <a:rPr lang="de-DE" sz="1500" dirty="0" err="1"/>
+              <a:t>business</a:t>
+            </a:r>
+            <a:r>
+              <a:rPr lang="de-DE" sz="1500" dirty="0"/>
+              <a:t> </a:t>
+            </a:r>
+            <a:r>
+              <a:rPr lang="de-DE" sz="1500" dirty="0" err="1"/>
+              <a:t>users</a:t>
+            </a:r>
+            <a:endParaRPr lang="de-DE" sz="1500" dirty="0"/>
+          </a:p>
+        </p:txBody>
+      </p:sp>
+      <p:sp>
+        <p:nvSpPr>
+          <p:cNvPr id="17" name="Textfeld 16">
+            <a:extLst>
+              <a:ext uri="{FF2B5EF4-FFF2-40B4-BE49-F238E27FC236}">
+                <a16:creationId xmlns:a16="http://schemas.microsoft.com/office/drawing/2014/main" id="{3E8C932C-A41A-8941-560A-AA637E8E8006}"/>
+              </a:ext>
+            </a:extLst>
+          </p:cNvPr>
+          <p:cNvSpPr txBox="1"/>
+          <p:nvPr/>
+        </p:nvSpPr>
+        <p:spPr>
+          <a:xfrm>
+            <a:off x="9318302" y="1605185"/>
+            <a:ext cx="2873697" cy="553998"/>
+          </a:xfrm>
+          <a:prstGeom prst="rect">
+            <a:avLst/>
+          </a:prstGeom>
+          <a:noFill/>
+          <a:ln>
+            <a:noFill/>
+          </a:ln>
+        </p:spPr>
+        <p:txBody>
+          <a:bodyPr wrap="square" rtlCol="0">
+            <a:spAutoFit/>
+          </a:bodyPr>
+          <a:lstStyle/>
+          <a:p>
+            <a:pPr marL="285750" indent="-285750">
+              <a:buFont typeface="Arial" panose="020B0604020202020204" pitchFamily="34" charset="0"/>
+              <a:buChar char="•"/>
+            </a:pPr>
+            <a:r>
+              <a:rPr lang="de-DE" sz="1500" dirty="0" err="1"/>
+              <a:t>evolved</a:t>
+            </a:r>
+            <a:r>
+              <a:rPr lang="de-DE" sz="1500" dirty="0"/>
+              <a:t> </a:t>
+            </a:r>
+            <a:r>
+              <a:rPr lang="de-DE" sz="1500" dirty="0" err="1"/>
+              <a:t>from</a:t>
+            </a:r>
+            <a:r>
+              <a:rPr lang="de-DE" sz="1500" dirty="0"/>
+              <a:t> </a:t>
+            </a:r>
+            <a:r>
+              <a:rPr lang="de-DE" sz="1500" dirty="0" err="1"/>
+              <a:t>LaMDA</a:t>
+            </a:r>
+            <a:r>
+              <a:rPr lang="de-DE" sz="1500" dirty="0"/>
+              <a:t> &amp; </a:t>
+            </a:r>
+            <a:r>
+              <a:rPr lang="de-DE" sz="1500" dirty="0" err="1"/>
+              <a:t>PaLM</a:t>
+            </a:r>
+            <a:endParaRPr lang="de-DE" sz="1500" dirty="0"/>
+          </a:p>
+          <a:p>
+            <a:pPr marL="285750" indent="-285750">
+              <a:buFont typeface="Arial" panose="020B0604020202020204" pitchFamily="34" charset="0"/>
+              <a:buChar char="•"/>
+            </a:pPr>
+            <a:r>
+              <a:rPr lang="de-DE" sz="1500" dirty="0" err="1"/>
+              <a:t>integrated</a:t>
+            </a:r>
+            <a:r>
+              <a:rPr lang="de-DE" sz="1500" dirty="0"/>
+              <a:t> Google </a:t>
+            </a:r>
+            <a:r>
+              <a:rPr lang="de-DE" sz="1500" dirty="0" err="1"/>
+              <a:t>ecosystem</a:t>
+            </a:r>
+            <a:endParaRPr lang="de-DE" sz="1500" dirty="0"/>
+          </a:p>
+        </p:txBody>
+      </p:sp>
+      <p:sp>
+        <p:nvSpPr>
+          <p:cNvPr id="18" name="Textfeld 17">
+            <a:extLst>
+              <a:ext uri="{FF2B5EF4-FFF2-40B4-BE49-F238E27FC236}">
+                <a16:creationId xmlns:a16="http://schemas.microsoft.com/office/drawing/2014/main" id="{2F00942C-2688-C72B-582D-FC2D017DDDA6}"/>
+              </a:ext>
+            </a:extLst>
+          </p:cNvPr>
+          <p:cNvSpPr txBox="1"/>
+          <p:nvPr/>
+        </p:nvSpPr>
+        <p:spPr>
+          <a:xfrm>
+            <a:off x="9062999" y="5041807"/>
+            <a:ext cx="1065739" cy="369332"/>
+          </a:xfrm>
+          <a:prstGeom prst="rect">
+            <a:avLst/>
+          </a:prstGeom>
+          <a:noFill/>
+          <a:ln>
+            <a:noFill/>
+          </a:ln>
+        </p:spPr>
+        <p:txBody>
+          <a:bodyPr wrap="square" rtlCol="0">
+            <a:spAutoFit/>
+          </a:bodyPr>
+          <a:lstStyle/>
+          <a:p>
+            <a:r>
+              <a:rPr lang="de-DE" dirty="0"/>
+              <a:t>ChatGPT</a:t>
+            </a:r>
+          </a:p>
+        </p:txBody>
+      </p:sp>
+      <p:cxnSp>
+        <p:nvCxnSpPr>
+          <p:cNvPr id="20" name="Gerade Verbindung mit Pfeil 19">
+            <a:extLst>
+              <a:ext uri="{FF2B5EF4-FFF2-40B4-BE49-F238E27FC236}">
+                <a16:creationId xmlns:a16="http://schemas.microsoft.com/office/drawing/2014/main" id="{3CBDA52C-D99A-E52B-7632-9D8D36E44EAA}"/>
+              </a:ext>
+            </a:extLst>
+          </p:cNvPr>
+          <p:cNvCxnSpPr>
+            <a:cxnSpLocks/>
+            <a:endCxn id="18" idx="1"/>
+          </p:cNvCxnSpPr>
+          <p:nvPr/>
+        </p:nvCxnSpPr>
+        <p:spPr>
+          <a:xfrm>
+            <a:off x="8450664" y="5094514"/>
+            <a:ext cx="612335" cy="131959"/>
+          </a:xfrm>
+          <a:prstGeom prst="straightConnector1">
+            <a:avLst/>
+          </a:prstGeom>
+          <a:ln>
+            <a:tailEnd type="triangle"/>
+          </a:ln>
+        </p:spPr>
+        <p:style>
+          <a:lnRef idx="2">
+            <a:schemeClr val="accent1"/>
+          </a:lnRef>
+          <a:fillRef idx="0">
+            <a:schemeClr val="accent1"/>
+          </a:fillRef>
+          <a:effectRef idx="1">
+            <a:schemeClr val="accent1"/>
+          </a:effectRef>
+          <a:fontRef idx="minor">
+            <a:schemeClr val="tx1"/>
+          </a:fontRef>
+        </p:style>
+      </p:cxnSp>
+      <p:sp>
+        <p:nvSpPr>
+          <p:cNvPr id="4" name="Textfeld 3">
+            <a:extLst>
+              <a:ext uri="{FF2B5EF4-FFF2-40B4-BE49-F238E27FC236}">
+                <a16:creationId xmlns:a16="http://schemas.microsoft.com/office/drawing/2014/main" id="{05AC45EE-E4C9-2925-8577-DA3897F1499F}"/>
+              </a:ext>
+            </a:extLst>
+          </p:cNvPr>
+          <p:cNvSpPr txBox="1"/>
+          <p:nvPr/>
+        </p:nvSpPr>
+        <p:spPr>
+          <a:xfrm>
+            <a:off x="9483728" y="176231"/>
+            <a:ext cx="2145396" cy="369332"/>
+          </a:xfrm>
+          <a:prstGeom prst="rect">
+            <a:avLst/>
+          </a:prstGeom>
+          <a:noFill/>
+          <a:ln>
+            <a:solidFill>
+              <a:schemeClr val="accent1"/>
+            </a:solidFill>
+          </a:ln>
+        </p:spPr>
+        <p:txBody>
+          <a:bodyPr wrap="none" rtlCol="0">
+            <a:spAutoFit/>
+          </a:bodyPr>
+          <a:lstStyle/>
+          <a:p>
+            <a:r>
+              <a:rPr lang="de-DE" dirty="0"/>
+              <a:t>generative </a:t>
+            </a:r>
+            <a:r>
+              <a:rPr lang="de-DE" dirty="0" err="1"/>
+              <a:t>chatbots</a:t>
+            </a:r>
+            <a:endParaRPr lang="de-DE" dirty="0"/>
+          </a:p>
+        </p:txBody>
+      </p:sp>
     </p:spTree>
     <p:extLst>
       <p:ext uri="{BB962C8B-B14F-4D97-AF65-F5344CB8AC3E}">
-        <p14:creationId xmlns:p14="http://schemas.microsoft.com/office/powerpoint/2010/main" val="858132424"/>
+        <p14:creationId xmlns:p14="http://schemas.microsoft.com/office/powerpoint/2010/main" val="3493337546"/>
       </p:ext>
     </p:extLst>
   </p:cSld>
@@ -12018,10 +14657,337 @@
       </p:grpSpPr>
       <p:sp>
         <p:nvSpPr>
+          <p:cNvPr id="2" name="Title 1">
+            <a:extLst>
+              <a:ext uri="{FF2B5EF4-FFF2-40B4-BE49-F238E27FC236}">
+                <a16:creationId xmlns:a16="http://schemas.microsoft.com/office/drawing/2014/main" id="{F4B34BCA-6F2E-E1E0-5E78-C602E733CA5E}"/>
+              </a:ext>
+            </a:extLst>
+          </p:cNvPr>
+          <p:cNvSpPr>
+            <a:spLocks noGrp="1"/>
+          </p:cNvSpPr>
+          <p:nvPr>
+            <p:ph type="title"/>
+          </p:nvPr>
+        </p:nvSpPr>
+        <p:spPr/>
+        <p:txBody>
+          <a:bodyPr/>
+          <a:lstStyle/>
+          <a:p>
+            <a:r>
+              <a:rPr lang="de-DE" dirty="0" err="1"/>
+              <a:t>OpenAI’s</a:t>
+            </a:r>
+            <a:r>
+              <a:rPr lang="de-DE" dirty="0"/>
+              <a:t> GPT Series</a:t>
+            </a:r>
+            <a:endParaRPr lang="en-DE" dirty="0"/>
+          </a:p>
+        </p:txBody>
+      </p:sp>
+      <p:sp>
+        <p:nvSpPr>
+          <p:cNvPr id="3" name="Content Placeholder 2">
+            <a:extLst>
+              <a:ext uri="{FF2B5EF4-FFF2-40B4-BE49-F238E27FC236}">
+                <a16:creationId xmlns:a16="http://schemas.microsoft.com/office/drawing/2014/main" id="{D878DA15-F9B0-18B3-B458-752CD40FD84B}"/>
+              </a:ext>
+            </a:extLst>
+          </p:cNvPr>
+          <p:cNvSpPr>
+            <a:spLocks noGrp="1"/>
+          </p:cNvSpPr>
+          <p:nvPr>
+            <p:ph idx="1"/>
+          </p:nvPr>
+        </p:nvSpPr>
+        <p:spPr>
+          <a:xfrm>
+            <a:off x="838200" y="1817159"/>
+            <a:ext cx="10515600" cy="4351338"/>
+          </a:xfrm>
+        </p:spPr>
+        <p:txBody>
+          <a:bodyPr>
+            <a:noAutofit/>
+          </a:bodyPr>
+          <a:lstStyle/>
+          <a:p>
+            <a:r>
+              <a:rPr lang="de-DE" sz="2400" dirty="0">
+                <a:hlinkClick r:id="rId2"/>
+              </a:rPr>
+              <a:t>GPT-1</a:t>
+            </a:r>
+            <a:r>
+              <a:rPr lang="en-DE" sz="2400"/>
+              <a:t>: </a:t>
+            </a:r>
+            <a:r>
+              <a:rPr lang="de-DE" sz="2400" dirty="0" err="1"/>
+              <a:t>used</a:t>
+            </a:r>
+            <a:r>
+              <a:rPr lang="de-DE" sz="2400" dirty="0"/>
+              <a:t> </a:t>
+            </a:r>
+            <a:r>
+              <a:rPr lang="de-DE" sz="2400" dirty="0" err="1"/>
+              <a:t>for</a:t>
+            </a:r>
+            <a:r>
+              <a:rPr lang="de-DE" sz="2400" dirty="0"/>
+              <a:t> </a:t>
+            </a:r>
+            <a:r>
+              <a:rPr lang="en-DE" sz="2400"/>
+              <a:t>discriminative finetuning </a:t>
+            </a:r>
+            <a:r>
+              <a:rPr lang="en-DE" sz="2400" dirty="0"/>
+              <a:t>on specific </a:t>
+            </a:r>
+            <a:r>
+              <a:rPr lang="en-DE" sz="2400"/>
+              <a:t>tasks (summarization</a:t>
+            </a:r>
+            <a:r>
+              <a:rPr lang="en-DE" sz="2400" dirty="0"/>
+              <a:t>, translation</a:t>
+            </a:r>
+            <a:r>
+              <a:rPr lang="en-DE" sz="2400"/>
+              <a:t>, question-answering</a:t>
+            </a:r>
+            <a:r>
+              <a:rPr lang="de-DE" sz="2400" dirty="0"/>
+              <a:t>, …</a:t>
+            </a:r>
+            <a:r>
+              <a:rPr lang="en-DE" sz="2400"/>
+              <a:t>)</a:t>
+            </a:r>
+            <a:r>
+              <a:rPr lang="de-DE" sz="2400" dirty="0"/>
+              <a:t> </a:t>
+            </a:r>
+            <a:r>
+              <a:rPr lang="de-DE" sz="2400" dirty="0">
+                <a:sym typeface="Wingdings" pitchFamily="2" charset="2"/>
+              </a:rPr>
+              <a:t> BERT</a:t>
+            </a:r>
+            <a:endParaRPr lang="en-DE" sz="2400" dirty="0"/>
+          </a:p>
+          <a:p>
+            <a:r>
+              <a:rPr lang="en-GB" sz="2400" dirty="0">
+                <a:hlinkClick r:id="rId3"/>
+              </a:rPr>
+              <a:t>GPT-2</a:t>
+            </a:r>
+            <a:r>
+              <a:rPr lang="en-DE" sz="2400"/>
+              <a:t>: zero- </a:t>
+            </a:r>
+            <a:r>
+              <a:rPr lang="en-DE" sz="2400" dirty="0"/>
+              <a:t>or </a:t>
+            </a:r>
+            <a:r>
+              <a:rPr lang="en-DE" sz="2400"/>
+              <a:t>few-shot learning</a:t>
+            </a:r>
+            <a:r>
+              <a:rPr lang="de-DE" sz="2400" dirty="0"/>
+              <a:t> </a:t>
+            </a:r>
+            <a:r>
+              <a:rPr lang="de-DE" sz="2400" dirty="0">
+                <a:sym typeface="Wingdings" pitchFamily="2" charset="2"/>
+              </a:rPr>
+              <a:t> </a:t>
+            </a:r>
+            <a:r>
+              <a:rPr lang="de-DE" sz="2400" dirty="0" err="1">
+                <a:sym typeface="Wingdings" pitchFamily="2" charset="2"/>
+              </a:rPr>
+              <a:t>prompting</a:t>
+            </a:r>
+            <a:endParaRPr lang="de-DE" sz="2400" dirty="0"/>
+          </a:p>
+          <a:p>
+            <a:r>
+              <a:rPr lang="en-GB" sz="2400" dirty="0">
+                <a:hlinkClick r:id="rId4"/>
+              </a:rPr>
+              <a:t>GPT-3</a:t>
+            </a:r>
+            <a:r>
+              <a:rPr lang="en-GB" sz="2400" dirty="0"/>
+              <a:t>: scaling (</a:t>
+            </a:r>
+            <a:r>
+              <a:rPr lang="en-DE" sz="2400"/>
+              <a:t>175 billion parameters</a:t>
+            </a:r>
+            <a:r>
+              <a:rPr lang="de-DE" sz="2400" dirty="0"/>
+              <a:t>) </a:t>
+            </a:r>
+            <a:r>
+              <a:rPr lang="de-DE" sz="2400" dirty="0">
+                <a:sym typeface="Wingdings" pitchFamily="2" charset="2"/>
+              </a:rPr>
+              <a:t> </a:t>
+            </a:r>
+            <a:r>
+              <a:rPr lang="en-GB" sz="2400" dirty="0"/>
+              <a:t>much increased capabilities</a:t>
+            </a:r>
+            <a:endParaRPr lang="en-DE" sz="2400" dirty="0"/>
+          </a:p>
+          <a:p>
+            <a:r>
+              <a:rPr lang="en-GB" sz="2400" dirty="0">
+                <a:hlinkClick r:id="rId5"/>
+              </a:rPr>
+              <a:t>GPT-4</a:t>
+            </a:r>
+            <a:r>
+              <a:rPr lang="en-GB" sz="2400" dirty="0"/>
+              <a:t>: more scaling </a:t>
+            </a:r>
+            <a:r>
+              <a:rPr lang="de-DE" sz="2400" dirty="0"/>
+              <a:t>(</a:t>
+            </a:r>
+            <a:r>
+              <a:rPr lang="en-DE" sz="2400">
+                <a:hlinkClick r:id="rId6"/>
+              </a:rPr>
+              <a:t>capabilities</a:t>
+            </a:r>
+            <a:r>
+              <a:rPr lang="de-DE" sz="2400" dirty="0"/>
+              <a:t>)</a:t>
+            </a:r>
+            <a:endParaRPr lang="en-GB" sz="2400" dirty="0"/>
+          </a:p>
+          <a:p>
+            <a:r>
+              <a:rPr lang="en-GB" sz="2400" dirty="0"/>
+              <a:t>GPT-4o</a:t>
+            </a:r>
+            <a:r>
+              <a:rPr lang="en-DE" sz="2400"/>
+              <a:t>: multimodal model</a:t>
+            </a:r>
+            <a:endParaRPr lang="de-DE" sz="2400" dirty="0"/>
+          </a:p>
+          <a:p>
+            <a:r>
+              <a:rPr lang="de-DE" sz="2400" dirty="0">
+                <a:hlinkClick r:id="rId7"/>
+              </a:rPr>
+              <a:t>o1</a:t>
+            </a:r>
+            <a:r>
+              <a:rPr lang="de-DE" sz="2400" dirty="0"/>
+              <a:t>: </a:t>
+            </a:r>
+            <a:r>
+              <a:rPr lang="de-DE" sz="2400" dirty="0" err="1"/>
+              <a:t>reasoning</a:t>
+            </a:r>
+            <a:r>
+              <a:rPr lang="de-DE" sz="2400" dirty="0"/>
+              <a:t> </a:t>
+            </a:r>
+            <a:r>
+              <a:rPr lang="de-DE" sz="2400" dirty="0" err="1"/>
+              <a:t>model</a:t>
+            </a:r>
+            <a:endParaRPr lang="de-DE" sz="2400" dirty="0"/>
+          </a:p>
+          <a:p>
+            <a:r>
+              <a:rPr lang="de-DE" sz="2400" dirty="0"/>
+              <a:t>GPT-5: </a:t>
+            </a:r>
+            <a:r>
+              <a:rPr lang="de-DE" sz="2400" dirty="0" err="1"/>
+              <a:t>automatic</a:t>
+            </a:r>
+            <a:r>
+              <a:rPr lang="de-DE" sz="2400" dirty="0"/>
+              <a:t> </a:t>
+            </a:r>
+            <a:r>
+              <a:rPr lang="de-DE" sz="2400" dirty="0" err="1"/>
+              <a:t>activation</a:t>
+            </a:r>
+            <a:r>
+              <a:rPr lang="de-DE" sz="2400" dirty="0"/>
+              <a:t> </a:t>
+            </a:r>
+            <a:r>
+              <a:rPr lang="de-DE" sz="2400" dirty="0" err="1"/>
+              <a:t>of</a:t>
+            </a:r>
+            <a:r>
+              <a:rPr lang="de-DE" sz="2400" dirty="0"/>
+              <a:t> </a:t>
+            </a:r>
+            <a:r>
+              <a:rPr lang="de-DE" sz="2400" dirty="0" err="1"/>
+              <a:t>reasoning</a:t>
+            </a:r>
+            <a:r>
+              <a:rPr lang="de-DE" sz="2400" dirty="0"/>
+              <a:t> </a:t>
+            </a:r>
+            <a:r>
+              <a:rPr lang="de-DE" sz="2400" dirty="0" err="1"/>
+              <a:t>model</a:t>
+            </a:r>
+            <a:r>
+              <a:rPr lang="de-DE" sz="2400" dirty="0"/>
+              <a:t> </a:t>
+            </a:r>
+            <a:r>
+              <a:rPr lang="de-DE" sz="2400" dirty="0" err="1"/>
+              <a:t>depending</a:t>
+            </a:r>
+            <a:r>
+              <a:rPr lang="de-DE" sz="2400" dirty="0"/>
+              <a:t> on </a:t>
+            </a:r>
+            <a:r>
+              <a:rPr lang="de-DE" sz="2400" dirty="0" err="1"/>
+              <a:t>the</a:t>
+            </a:r>
+            <a:r>
+              <a:rPr lang="de-DE" sz="2400" dirty="0"/>
+              <a:t> </a:t>
+            </a:r>
+            <a:r>
+              <a:rPr lang="de-DE" sz="2400" dirty="0" err="1"/>
+              <a:t>task</a:t>
+            </a:r>
+            <a:endParaRPr lang="en-DE" sz="2400" dirty="0"/>
+          </a:p>
+        </p:txBody>
+      </p:sp>
+      <p:sp>
+        <p:nvSpPr>
           <p:cNvPr id="4" name="Slide Number Placeholder 3">
             <a:extLst>
               <a:ext uri="{FF2B5EF4-FFF2-40B4-BE49-F238E27FC236}">
-                <a16:creationId xmlns:a16="http://schemas.microsoft.com/office/drawing/2014/main" id="{352E76F0-7C55-B3F1-5699-637A993D90D4}"/>
+                <a16:creationId xmlns:a16="http://schemas.microsoft.com/office/drawing/2014/main" id="{1C62DF1F-CE76-8FAE-EDB4-4B22AB609EFE}"/>
               </a:ext>
             </a:extLst>
           </p:cNvPr>
@@ -12041,46 +15007,16 @@
               <a:rPr lang="en-DE" smtClean="0"/>
               <a:t>14</a:t>
             </a:fld>
-            <a:endParaRPr lang="en-DE" dirty="0"/>
+            <a:endParaRPr lang="en-DE"/>
           </a:p>
         </p:txBody>
       </p:sp>
-      <p:pic>
-        <p:nvPicPr>
-          <p:cNvPr id="6" name="Picture 5">
-            <a:extLst>
-              <a:ext uri="{FF2B5EF4-FFF2-40B4-BE49-F238E27FC236}">
-                <a16:creationId xmlns:a16="http://schemas.microsoft.com/office/drawing/2014/main" id="{04710C09-6F15-99CA-8C5A-7A02262CD1B9}"/>
-              </a:ext>
-            </a:extLst>
-          </p:cNvPr>
-          <p:cNvPicPr>
-            <a:picLocks noChangeAspect="1"/>
-          </p:cNvPicPr>
-          <p:nvPr/>
-        </p:nvPicPr>
-        <p:blipFill>
-          <a:blip r:embed="rId2"/>
-          <a:stretch>
-            <a:fillRect/>
-          </a:stretch>
-        </p:blipFill>
-        <p:spPr>
-          <a:xfrm>
-            <a:off x="97160" y="0"/>
-            <a:ext cx="5901671" cy="6858000"/>
-          </a:xfrm>
-          <a:prstGeom prst="rect">
-            <a:avLst/>
-          </a:prstGeom>
-        </p:spPr>
-      </p:pic>
       <p:sp>
         <p:nvSpPr>
-          <p:cNvPr id="7" name="TextBox 6">
+          <p:cNvPr id="6" name="Textfeld 5">
             <a:extLst>
               <a:ext uri="{FF2B5EF4-FFF2-40B4-BE49-F238E27FC236}">
-                <a16:creationId xmlns:a16="http://schemas.microsoft.com/office/drawing/2014/main" id="{75200411-FF70-25C1-C2F2-206D286BE771}"/>
+                <a16:creationId xmlns:a16="http://schemas.microsoft.com/office/drawing/2014/main" id="{7BC30593-1ED7-77C6-7F4A-A0F827C03CFE}"/>
               </a:ext>
             </a:extLst>
           </p:cNvPr>
@@ -12089,76 +15025,8 @@
         </p:nvSpPr>
         <p:spPr>
           <a:xfrm>
-            <a:off x="5371359" y="6538912"/>
-            <a:ext cx="532518" cy="246221"/>
-          </a:xfrm>
-          <a:prstGeom prst="rect">
-            <a:avLst/>
-          </a:prstGeom>
-          <a:noFill/>
-        </p:spPr>
-        <p:txBody>
-          <a:bodyPr wrap="none" rtlCol="0">
-            <a:spAutoFit/>
-          </a:bodyPr>
-          <a:lstStyle/>
-          <a:p>
-            <a:r>
-              <a:rPr lang="de-DE" sz="1000" dirty="0">
-                <a:hlinkClick r:id="rId3"/>
-              </a:rPr>
-              <a:t>source</a:t>
-            </a:r>
-            <a:endParaRPr lang="de-DE" sz="1000" dirty="0"/>
-          </a:p>
-        </p:txBody>
-      </p:sp>
-      <p:pic>
-        <p:nvPicPr>
-          <p:cNvPr id="5" name="Picture 4" descr="A graph showing the difference between open-weight models&#10;&#10;Description automatically generated">
-            <a:extLst>
-              <a:ext uri="{FF2B5EF4-FFF2-40B4-BE49-F238E27FC236}">
-                <a16:creationId xmlns:a16="http://schemas.microsoft.com/office/drawing/2014/main" id="{00A7A0FB-EFC4-6194-813D-3FC56159AB26}"/>
-              </a:ext>
-            </a:extLst>
-          </p:cNvPr>
-          <p:cNvPicPr>
-            <a:picLocks noChangeAspect="1"/>
-          </p:cNvPicPr>
-          <p:nvPr/>
-        </p:nvPicPr>
-        <p:blipFill>
-          <a:blip r:embed="rId4"/>
-          <a:stretch>
-            <a:fillRect/>
-          </a:stretch>
-        </p:blipFill>
-        <p:spPr>
-          <a:xfrm>
-            <a:off x="6096000" y="1549401"/>
-            <a:ext cx="5959353" cy="4055533"/>
-          </a:xfrm>
-          <a:prstGeom prst="rect">
-            <a:avLst/>
-          </a:prstGeom>
-        </p:spPr>
-      </p:pic>
-      <p:sp>
-        <p:nvSpPr>
-          <p:cNvPr id="9" name="Textfeld 8">
-            <a:extLst>
-              <a:ext uri="{FF2B5EF4-FFF2-40B4-BE49-F238E27FC236}">
-                <a16:creationId xmlns:a16="http://schemas.microsoft.com/office/drawing/2014/main" id="{13C88423-F1A1-B07B-B03E-8C5994BA6A55}"/>
-              </a:ext>
-            </a:extLst>
-          </p:cNvPr>
-          <p:cNvSpPr txBox="1"/>
-          <p:nvPr/>
-        </p:nvSpPr>
-        <p:spPr>
-          <a:xfrm>
-            <a:off x="9982200" y="797985"/>
-            <a:ext cx="987972" cy="369332"/>
+            <a:off x="838200" y="5799165"/>
+            <a:ext cx="952080" cy="369332"/>
           </a:xfrm>
           <a:prstGeom prst="rect">
             <a:avLst/>
@@ -12171,15 +15039,14 @@
           </a:bodyPr>
           <a:lstStyle/>
           <a:p>
-            <a:r>
-              <a:rPr lang="en-GB" dirty="0">
-                <a:hlinkClick r:id="rId5"/>
+            <a:pPr marL="0" indent="0">
+              <a:buNone/>
+            </a:pPr>
+            <a:r>
+              <a:rPr lang="de-DE" dirty="0">
+                <a:hlinkClick r:id="rId8"/>
               </a:rPr>
-              <a:t>Llama 3</a:t>
-            </a:r>
-            <a:r>
-              <a:rPr lang="en-GB" dirty="0"/>
-              <a:t> </a:t>
+              <a:t>gpt-oss</a:t>
             </a:r>
             <a:endParaRPr lang="de-DE" dirty="0"/>
           </a:p>
@@ -12188,7 +15055,7 @@
     </p:spTree>
     <p:extLst>
       <p:ext uri="{BB962C8B-B14F-4D97-AF65-F5344CB8AC3E}">
-        <p14:creationId xmlns:p14="http://schemas.microsoft.com/office/powerpoint/2010/main" val="1984626277"/>
+        <p14:creationId xmlns:p14="http://schemas.microsoft.com/office/powerpoint/2010/main" val="2356046642"/>
       </p:ext>
     </p:extLst>
   </p:cSld>
@@ -12350,10 +15217,163 @@
       </p:grpSpPr>
       <p:sp>
         <p:nvSpPr>
-          <p:cNvPr id="2" name="Foliennummernplatzhalter 1">
+          <p:cNvPr id="2" name="Title 1">
             <a:extLst>
               <a:ext uri="{FF2B5EF4-FFF2-40B4-BE49-F238E27FC236}">
-                <a16:creationId xmlns:a16="http://schemas.microsoft.com/office/drawing/2014/main" id="{506262BA-AE93-BBE6-3A2D-660FFBAB356F}"/>
+                <a16:creationId xmlns:a16="http://schemas.microsoft.com/office/drawing/2014/main" id="{AB943561-528E-5056-1EE8-977C6F127A9A}"/>
+              </a:ext>
+            </a:extLst>
+          </p:cNvPr>
+          <p:cNvSpPr>
+            <a:spLocks noGrp="1"/>
+          </p:cNvSpPr>
+          <p:nvPr>
+            <p:ph type="title"/>
+          </p:nvPr>
+        </p:nvSpPr>
+        <p:spPr/>
+        <p:txBody>
+          <a:bodyPr/>
+          <a:lstStyle/>
+          <a:p>
+            <a:r>
+              <a:rPr lang="en-GB" dirty="0"/>
+              <a:t>Another Trend: Small Language Models (SLM)</a:t>
+            </a:r>
+          </a:p>
+        </p:txBody>
+      </p:sp>
+      <p:sp>
+        <p:nvSpPr>
+          <p:cNvPr id="3" name="Content Placeholder 2">
+            <a:extLst>
+              <a:ext uri="{FF2B5EF4-FFF2-40B4-BE49-F238E27FC236}">
+                <a16:creationId xmlns:a16="http://schemas.microsoft.com/office/drawing/2014/main" id="{009BA4CD-1995-5EAA-EEA3-F6FDCF1DC74D}"/>
+              </a:ext>
+            </a:extLst>
+          </p:cNvPr>
+          <p:cNvSpPr>
+            <a:spLocks noGrp="1"/>
+          </p:cNvSpPr>
+          <p:nvPr>
+            <p:ph idx="1"/>
+          </p:nvPr>
+        </p:nvSpPr>
+        <p:spPr/>
+        <p:txBody>
+          <a:bodyPr/>
+          <a:lstStyle/>
+          <a:p>
+            <a:pPr marL="0" indent="0">
+              <a:buNone/>
+            </a:pPr>
+            <a:r>
+              <a:rPr lang="en-GB" dirty="0"/>
+              <a:t>most powerful LLMs keep getting bigger (&gt; 1 trillion parameters)</a:t>
+            </a:r>
+          </a:p>
+          <a:p>
+            <a:pPr marL="0" indent="0">
+              <a:buNone/>
+            </a:pPr>
+            <a:r>
+              <a:rPr lang="en-GB" dirty="0"/>
+              <a:t>GPT, Claude, Gemini, …</a:t>
+            </a:r>
+          </a:p>
+          <a:p>
+            <a:pPr marL="0" indent="0">
+              <a:buNone/>
+            </a:pPr>
+            <a:endParaRPr lang="en-GB" dirty="0"/>
+          </a:p>
+          <a:p>
+            <a:pPr marL="0" indent="0">
+              <a:buNone/>
+            </a:pPr>
+            <a:r>
+              <a:rPr lang="en-GB" dirty="0"/>
+              <a:t>but slimmed-down (yet still strong) versions get smaller</a:t>
+            </a:r>
+          </a:p>
+          <a:p>
+            <a:pPr marL="0" indent="0">
+              <a:buNone/>
+            </a:pPr>
+            <a:r>
+              <a:rPr lang="en-GB" dirty="0">
+                <a:hlinkClick r:id="rId2"/>
+              </a:rPr>
+              <a:t>Gemma</a:t>
+            </a:r>
+            <a:r>
+              <a:rPr lang="en-GB" dirty="0"/>
+              <a:t> (2B), </a:t>
+            </a:r>
+            <a:r>
+              <a:rPr lang="en-GB" dirty="0">
+                <a:hlinkClick r:id="rId3"/>
+              </a:rPr>
+              <a:t>Phi-3</a:t>
+            </a:r>
+            <a:r>
+              <a:rPr lang="en-GB" dirty="0"/>
+              <a:t> (3.8B), </a:t>
+            </a:r>
+            <a:r>
+              <a:rPr lang="en-GB" dirty="0">
+                <a:hlinkClick r:id="rId4"/>
+              </a:rPr>
+              <a:t>Mistral 7B</a:t>
+            </a:r>
+            <a:r>
+              <a:rPr lang="en-GB" dirty="0"/>
+              <a:t>, </a:t>
+            </a:r>
+            <a:r>
+              <a:rPr lang="en-GB" dirty="0">
+                <a:hlinkClick r:id="rId5"/>
+              </a:rPr>
+              <a:t>Llama3</a:t>
+            </a:r>
+            <a:r>
+              <a:rPr lang="en-GB" dirty="0"/>
+              <a:t> (8B), …</a:t>
+            </a:r>
+          </a:p>
+          <a:p>
+            <a:pPr marL="0" indent="0">
+              <a:buNone/>
+            </a:pPr>
+            <a:r>
+              <a:rPr lang="en-GB" dirty="0"/>
+              <a:t>can run (inference) on laptops, smartphones, etc.</a:t>
+            </a:r>
+          </a:p>
+          <a:p>
+            <a:pPr marL="0" indent="0">
+              <a:buNone/>
+            </a:pPr>
+            <a:r>
+              <a:rPr lang="en-GB" dirty="0"/>
+              <a:t>easier finetuning </a:t>
+            </a:r>
+            <a:r>
+              <a:rPr lang="en-GB" dirty="0">
+                <a:sym typeface="Wingdings" panose="05000000000000000000" pitchFamily="2" charset="2"/>
+              </a:rPr>
+              <a:t> specific tasks</a:t>
+            </a:r>
+            <a:endParaRPr lang="en-GB" dirty="0"/>
+          </a:p>
+        </p:txBody>
+      </p:sp>
+      <p:sp>
+        <p:nvSpPr>
+          <p:cNvPr id="4" name="Slide Number Placeholder 3">
+            <a:extLst>
+              <a:ext uri="{FF2B5EF4-FFF2-40B4-BE49-F238E27FC236}">
+                <a16:creationId xmlns:a16="http://schemas.microsoft.com/office/drawing/2014/main" id="{919EE0D7-0AED-8609-28A0-820B83EE790A}"/>
               </a:ext>
             </a:extLst>
           </p:cNvPr>
@@ -12369,321 +15389,9 @@
           <a:bodyPr/>
           <a:lstStyle/>
           <a:p>
-            <a:fld id="{3D4C94FE-FF23-4504-88E9-14D481113291}" type="slidenum">
-              <a:rPr lang="en-GB" smtClean="0"/>
-              <a:t>16</a:t>
-            </a:fld>
-            <a:endParaRPr lang="en-GB"/>
-          </a:p>
-        </p:txBody>
-      </p:sp>
-      <p:pic>
-        <p:nvPicPr>
-          <p:cNvPr id="6" name="Grafik 5" descr="Ein Bild, das Screenshot, Diagramm, Text, Reihe enthält.&#10;&#10;KI-generierte Inhalte können fehlerhaft sein.">
-            <a:extLst>
-              <a:ext uri="{FF2B5EF4-FFF2-40B4-BE49-F238E27FC236}">
-                <a16:creationId xmlns:a16="http://schemas.microsoft.com/office/drawing/2014/main" id="{ACBBB43E-6D01-0E2C-4F48-8B4027BCEF00}"/>
-              </a:ext>
-            </a:extLst>
-          </p:cNvPr>
-          <p:cNvPicPr>
-            <a:picLocks noChangeAspect="1"/>
-          </p:cNvPicPr>
-          <p:nvPr/>
-        </p:nvPicPr>
-        <p:blipFill>
-          <a:blip r:embed="rId2">
-            <a:extLst>
-              <a:ext uri="{28A0092B-C50C-407E-A947-70E740481C1C}">
-                <a14:useLocalDpi xmlns:a14="http://schemas.microsoft.com/office/drawing/2010/main" val="0"/>
-              </a:ext>
-            </a:extLst>
-          </a:blip>
-          <a:stretch>
-            <a:fillRect/>
-          </a:stretch>
-        </p:blipFill>
-        <p:spPr>
-          <a:xfrm>
-            <a:off x="838200" y="136525"/>
-            <a:ext cx="10444817" cy="6260954"/>
-          </a:xfrm>
-          <a:prstGeom prst="rect">
-            <a:avLst/>
-          </a:prstGeom>
-        </p:spPr>
-      </p:pic>
-      <p:sp>
-        <p:nvSpPr>
-          <p:cNvPr id="7" name="TextBox 6">
-            <a:extLst>
-              <a:ext uri="{FF2B5EF4-FFF2-40B4-BE49-F238E27FC236}">
-                <a16:creationId xmlns:a16="http://schemas.microsoft.com/office/drawing/2014/main" id="{0664B754-3B35-012F-F973-FC3151093A90}"/>
-              </a:ext>
-            </a:extLst>
-          </p:cNvPr>
-          <p:cNvSpPr txBox="1"/>
-          <p:nvPr/>
-        </p:nvSpPr>
-        <p:spPr>
-          <a:xfrm>
-            <a:off x="11283017" y="5561450"/>
-            <a:ext cx="567784" cy="246221"/>
-          </a:xfrm>
-          <a:prstGeom prst="rect">
-            <a:avLst/>
-          </a:prstGeom>
-          <a:noFill/>
-        </p:spPr>
-        <p:txBody>
-          <a:bodyPr wrap="none" rtlCol="0">
-            <a:spAutoFit/>
-          </a:bodyPr>
-          <a:lstStyle/>
-          <a:p>
-            <a:r>
-              <a:rPr lang="de-DE" sz="1000" dirty="0">
-                <a:hlinkClick r:id="rId3"/>
-              </a:rPr>
-              <a:t>source</a:t>
-            </a:r>
-            <a:endParaRPr lang="de-DE" sz="1000" dirty="0"/>
-          </a:p>
-        </p:txBody>
-      </p:sp>
-    </p:spTree>
-    <p:extLst>
-      <p:ext uri="{BB962C8B-B14F-4D97-AF65-F5344CB8AC3E}">
-        <p14:creationId xmlns:p14="http://schemas.microsoft.com/office/powerpoint/2010/main" val="459329488"/>
-      </p:ext>
-    </p:extLst>
-  </p:cSld>
-  <p:clrMapOvr>
-    <a:masterClrMapping/>
-  </p:clrMapOvr>
-</p:sld>
-</file>
-
-<file path=ppt/slides/slide17.xml><?xml version="1.0" encoding="utf-8"?>
-<p:sld xmlns:a="http://schemas.openxmlformats.org/drawingml/2006/main" xmlns:r="http://schemas.openxmlformats.org/officeDocument/2006/relationships" xmlns:p="http://schemas.openxmlformats.org/presentationml/2006/main">
-  <p:cSld>
-    <p:spTree>
-      <p:nvGrpSpPr>
-        <p:cNvPr id="1" name=""/>
-        <p:cNvGrpSpPr/>
-        <p:nvPr/>
-      </p:nvGrpSpPr>
-      <p:grpSpPr>
-        <a:xfrm>
-          <a:off x="0" y="0"/>
-          <a:ext cx="0" cy="0"/>
-          <a:chOff x="0" y="0"/>
-          <a:chExt cx="0" cy="0"/>
-        </a:xfrm>
-      </p:grpSpPr>
-      <p:sp>
-        <p:nvSpPr>
-          <p:cNvPr id="2" name="Title 1">
-            <a:extLst>
-              <a:ext uri="{FF2B5EF4-FFF2-40B4-BE49-F238E27FC236}">
-                <a16:creationId xmlns:a16="http://schemas.microsoft.com/office/drawing/2014/main" id="{AB943561-528E-5056-1EE8-977C6F127A9A}"/>
-              </a:ext>
-            </a:extLst>
-          </p:cNvPr>
-          <p:cNvSpPr>
-            <a:spLocks noGrp="1"/>
-          </p:cNvSpPr>
-          <p:nvPr>
-            <p:ph type="title"/>
-          </p:nvPr>
-        </p:nvSpPr>
-        <p:spPr/>
-        <p:txBody>
-          <a:bodyPr/>
-          <a:lstStyle/>
-          <a:p>
-            <a:r>
-              <a:rPr lang="en-GB" dirty="0"/>
-              <a:t>Another Trend: Small Language Models (SLM)</a:t>
-            </a:r>
-          </a:p>
-        </p:txBody>
-      </p:sp>
-      <p:sp>
-        <p:nvSpPr>
-          <p:cNvPr id="3" name="Content Placeholder 2">
-            <a:extLst>
-              <a:ext uri="{FF2B5EF4-FFF2-40B4-BE49-F238E27FC236}">
-                <a16:creationId xmlns:a16="http://schemas.microsoft.com/office/drawing/2014/main" id="{009BA4CD-1995-5EAA-EEA3-F6FDCF1DC74D}"/>
-              </a:ext>
-            </a:extLst>
-          </p:cNvPr>
-          <p:cNvSpPr>
-            <a:spLocks noGrp="1"/>
-          </p:cNvSpPr>
-          <p:nvPr>
-            <p:ph idx="1"/>
-          </p:nvPr>
-        </p:nvSpPr>
-        <p:spPr/>
-        <p:txBody>
-          <a:bodyPr/>
-          <a:lstStyle/>
-          <a:p>
-            <a:pPr marL="0" indent="0">
-              <a:buNone/>
-            </a:pPr>
-            <a:r>
-              <a:rPr lang="en-GB" dirty="0"/>
-              <a:t>most powerful LLMs keep getting bigger (&gt; 1 trillion parameters)</a:t>
-            </a:r>
-          </a:p>
-          <a:p>
-            <a:pPr marL="0" indent="0">
-              <a:buNone/>
-            </a:pPr>
-            <a:r>
-              <a:rPr lang="en-GB" dirty="0">
-                <a:hlinkClick r:id="rId2"/>
-              </a:rPr>
-              <a:t>GPT-4o</a:t>
-            </a:r>
-            <a:r>
-              <a:rPr lang="en-GB" dirty="0"/>
-              <a:t>, </a:t>
-            </a:r>
-            <a:r>
-              <a:rPr lang="en-GB" dirty="0">
-                <a:hlinkClick r:id="rId3"/>
-              </a:rPr>
-              <a:t>Claude 3.5</a:t>
-            </a:r>
-            <a:r>
-              <a:rPr lang="en-GB" dirty="0"/>
-              <a:t>, </a:t>
-            </a:r>
-            <a:r>
-              <a:rPr lang="en-GB" dirty="0">
-                <a:hlinkClick r:id="rId4"/>
-              </a:rPr>
-              <a:t>Gemini 1.5</a:t>
-            </a:r>
-            <a:r>
-              <a:rPr lang="en-GB" dirty="0"/>
-              <a:t>, …</a:t>
-            </a:r>
-          </a:p>
-          <a:p>
-            <a:pPr marL="0" indent="0">
-              <a:buNone/>
-            </a:pPr>
-            <a:endParaRPr lang="en-GB" dirty="0"/>
-          </a:p>
-          <a:p>
-            <a:pPr marL="0" indent="0">
-              <a:buNone/>
-            </a:pPr>
-            <a:r>
-              <a:rPr lang="en-GB" dirty="0"/>
-              <a:t>but slimmed-down (yet still strong) versions get smaller</a:t>
-            </a:r>
-          </a:p>
-          <a:p>
-            <a:pPr marL="0" indent="0">
-              <a:buNone/>
-            </a:pPr>
-            <a:r>
-              <a:rPr lang="en-GB" dirty="0">
-                <a:hlinkClick r:id="rId5"/>
-              </a:rPr>
-              <a:t>Gemma</a:t>
-            </a:r>
-            <a:r>
-              <a:rPr lang="en-GB" dirty="0"/>
-              <a:t> (2B), </a:t>
-            </a:r>
-            <a:r>
-              <a:rPr lang="en-GB" dirty="0">
-                <a:hlinkClick r:id="rId6"/>
-              </a:rPr>
-              <a:t>Phi-3</a:t>
-            </a:r>
-            <a:r>
-              <a:rPr lang="en-GB" dirty="0"/>
-              <a:t> (3.8B), </a:t>
-            </a:r>
-            <a:r>
-              <a:rPr lang="en-GB" dirty="0">
-                <a:hlinkClick r:id="rId7"/>
-              </a:rPr>
-              <a:t>Mistral 7B</a:t>
-            </a:r>
-            <a:r>
-              <a:rPr lang="en-GB" dirty="0"/>
-              <a:t>, </a:t>
-            </a:r>
-            <a:r>
-              <a:rPr lang="en-GB" dirty="0">
-                <a:hlinkClick r:id="rId8"/>
-              </a:rPr>
-              <a:t>Llama3</a:t>
-            </a:r>
-            <a:r>
-              <a:rPr lang="en-GB" dirty="0"/>
-              <a:t> (8B), …</a:t>
-            </a:r>
-          </a:p>
-          <a:p>
-            <a:pPr marL="0" indent="0">
-              <a:buNone/>
-            </a:pPr>
-            <a:r>
-              <a:rPr lang="en-GB" dirty="0"/>
-              <a:t>can run (inference) on laptops, smartphones, etc.</a:t>
-            </a:r>
-          </a:p>
-          <a:p>
-            <a:pPr marL="0" indent="0">
-              <a:buNone/>
-            </a:pPr>
-            <a:r>
-              <a:rPr lang="en-GB" dirty="0"/>
-              <a:t>easier finetuning </a:t>
-            </a:r>
-            <a:r>
-              <a:rPr lang="en-GB" dirty="0">
-                <a:sym typeface="Wingdings" panose="05000000000000000000" pitchFamily="2" charset="2"/>
-              </a:rPr>
-              <a:t> specific tasks</a:t>
-            </a:r>
-            <a:endParaRPr lang="en-GB" dirty="0"/>
-          </a:p>
-        </p:txBody>
-      </p:sp>
-      <p:sp>
-        <p:nvSpPr>
-          <p:cNvPr id="4" name="Slide Number Placeholder 3">
-            <a:extLst>
-              <a:ext uri="{FF2B5EF4-FFF2-40B4-BE49-F238E27FC236}">
-                <a16:creationId xmlns:a16="http://schemas.microsoft.com/office/drawing/2014/main" id="{919EE0D7-0AED-8609-28A0-820B83EE790A}"/>
-              </a:ext>
-            </a:extLst>
-          </p:cNvPr>
-          <p:cNvSpPr>
-            <a:spLocks noGrp="1"/>
-          </p:cNvSpPr>
-          <p:nvPr>
-            <p:ph type="sldNum" sz="quarter" idx="12"/>
-          </p:nvPr>
-        </p:nvSpPr>
-        <p:spPr/>
-        <p:txBody>
-          <a:bodyPr/>
-          <a:lstStyle/>
-          <a:p>
             <a:fld id="{849D05A8-43E9-1C49-8606-50AB68220DEC}" type="slidenum">
               <a:rPr lang="en-DE" smtClean="0"/>
-              <a:t>17</a:t>
+              <a:t>16</a:t>
             </a:fld>
             <a:endParaRPr lang="en-DE"/>
           </a:p>
@@ -12693,674 +15401,6 @@
     <p:extLst>
       <p:ext uri="{BB962C8B-B14F-4D97-AF65-F5344CB8AC3E}">
         <p14:creationId xmlns:p14="http://schemas.microsoft.com/office/powerpoint/2010/main" val="2061575047"/>
-      </p:ext>
-    </p:extLst>
-  </p:cSld>
-  <p:clrMapOvr>
-    <a:masterClrMapping/>
-  </p:clrMapOvr>
-</p:sld>
-</file>
-
-<file path=ppt/slides/slide18.xml><?xml version="1.0" encoding="utf-8"?>
-<p:sld xmlns:a="http://schemas.openxmlformats.org/drawingml/2006/main" xmlns:r="http://schemas.openxmlformats.org/officeDocument/2006/relationships" xmlns:p="http://schemas.openxmlformats.org/presentationml/2006/main">
-  <p:cSld>
-    <p:spTree>
-      <p:nvGrpSpPr>
-        <p:cNvPr id="1" name=""/>
-        <p:cNvGrpSpPr/>
-        <p:nvPr/>
-      </p:nvGrpSpPr>
-      <p:grpSpPr>
-        <a:xfrm>
-          <a:off x="0" y="0"/>
-          <a:ext cx="0" cy="0"/>
-          <a:chOff x="0" y="0"/>
-          <a:chExt cx="0" cy="0"/>
-        </a:xfrm>
-      </p:grpSpPr>
-      <p:sp>
-        <p:nvSpPr>
-          <p:cNvPr id="2" name="Titel 1">
-            <a:extLst>
-              <a:ext uri="{FF2B5EF4-FFF2-40B4-BE49-F238E27FC236}">
-                <a16:creationId xmlns:a16="http://schemas.microsoft.com/office/drawing/2014/main" id="{E77154EE-7A8C-2773-665E-B2A05E03F867}"/>
-              </a:ext>
-            </a:extLst>
-          </p:cNvPr>
-          <p:cNvSpPr>
-            <a:spLocks noGrp="1"/>
-          </p:cNvSpPr>
-          <p:nvPr>
-            <p:ph type="title"/>
-          </p:nvPr>
-        </p:nvSpPr>
-        <p:spPr/>
-        <p:txBody>
-          <a:bodyPr/>
-          <a:lstStyle/>
-          <a:p>
-            <a:endParaRPr lang="de-DE"/>
-          </a:p>
-        </p:txBody>
-      </p:sp>
-      <p:sp>
-        <p:nvSpPr>
-          <p:cNvPr id="3" name="Inhaltsplatzhalter 2">
-            <a:extLst>
-              <a:ext uri="{FF2B5EF4-FFF2-40B4-BE49-F238E27FC236}">
-                <a16:creationId xmlns:a16="http://schemas.microsoft.com/office/drawing/2014/main" id="{FAD48910-CDD5-B74C-490B-67A9064FE212}"/>
-              </a:ext>
-            </a:extLst>
-          </p:cNvPr>
-          <p:cNvSpPr>
-            <a:spLocks noGrp="1"/>
-          </p:cNvSpPr>
-          <p:nvPr>
-            <p:ph idx="1"/>
-          </p:nvPr>
-        </p:nvSpPr>
-        <p:spPr/>
-        <p:txBody>
-          <a:bodyPr/>
-          <a:lstStyle/>
-          <a:p>
-            <a:pPr marL="0" indent="0">
-              <a:buNone/>
-            </a:pPr>
-            <a:r>
-              <a:rPr lang="de-DE" dirty="0">
-                <a:hlinkClick r:id="rId2"/>
-              </a:rPr>
-              <a:t>gpt-oss</a:t>
-            </a:r>
-            <a:endParaRPr lang="de-DE" dirty="0"/>
-          </a:p>
-          <a:p>
-            <a:pPr marL="0" indent="0">
-              <a:buNone/>
-            </a:pPr>
-            <a:r>
-              <a:rPr lang="de-DE" dirty="0"/>
-              <a:t>…</a:t>
-            </a:r>
-          </a:p>
-        </p:txBody>
-      </p:sp>
-      <p:sp>
-        <p:nvSpPr>
-          <p:cNvPr id="4" name="Foliennummernplatzhalter 3">
-            <a:extLst>
-              <a:ext uri="{FF2B5EF4-FFF2-40B4-BE49-F238E27FC236}">
-                <a16:creationId xmlns:a16="http://schemas.microsoft.com/office/drawing/2014/main" id="{726ADE04-7C97-6AE2-CEFE-595EB9E1A6A8}"/>
-              </a:ext>
-            </a:extLst>
-          </p:cNvPr>
-          <p:cNvSpPr>
-            <a:spLocks noGrp="1"/>
-          </p:cNvSpPr>
-          <p:nvPr>
-            <p:ph type="sldNum" sz="quarter" idx="12"/>
-          </p:nvPr>
-        </p:nvSpPr>
-        <p:spPr/>
-        <p:txBody>
-          <a:bodyPr/>
-          <a:lstStyle/>
-          <a:p>
-            <a:fld id="{3D4C94FE-FF23-4504-88E9-14D481113291}" type="slidenum">
-              <a:rPr lang="en-GB" smtClean="0"/>
-              <a:t>18</a:t>
-            </a:fld>
-            <a:endParaRPr lang="en-GB"/>
-          </a:p>
-        </p:txBody>
-      </p:sp>
-    </p:spTree>
-    <p:extLst>
-      <p:ext uri="{BB962C8B-B14F-4D97-AF65-F5344CB8AC3E}">
-        <p14:creationId xmlns:p14="http://schemas.microsoft.com/office/powerpoint/2010/main" val="3302101948"/>
-      </p:ext>
-    </p:extLst>
-  </p:cSld>
-  <p:clrMapOvr>
-    <a:masterClrMapping/>
-  </p:clrMapOvr>
-</p:sld>
-</file>
-
-<file path=ppt/slides/slide19.xml><?xml version="1.0" encoding="utf-8"?>
-<p:sld xmlns:a="http://schemas.openxmlformats.org/drawingml/2006/main" xmlns:r="http://schemas.openxmlformats.org/officeDocument/2006/relationships" xmlns:p="http://schemas.openxmlformats.org/presentationml/2006/main">
-  <p:cSld>
-    <p:spTree>
-      <p:nvGrpSpPr>
-        <p:cNvPr id="1" name=""/>
-        <p:cNvGrpSpPr/>
-        <p:nvPr/>
-      </p:nvGrpSpPr>
-      <p:grpSpPr>
-        <a:xfrm>
-          <a:off x="0" y="0"/>
-          <a:ext cx="0" cy="0"/>
-          <a:chOff x="0" y="0"/>
-          <a:chExt cx="0" cy="0"/>
-        </a:xfrm>
-      </p:grpSpPr>
-      <p:sp>
-        <p:nvSpPr>
-          <p:cNvPr id="8" name="Abgerundetes Rechteck 7">
-            <a:extLst>
-              <a:ext uri="{FF2B5EF4-FFF2-40B4-BE49-F238E27FC236}">
-                <a16:creationId xmlns:a16="http://schemas.microsoft.com/office/drawing/2014/main" id="{64A12374-ACEF-7777-B3C5-6F49491F5D56}"/>
-              </a:ext>
-            </a:extLst>
-          </p:cNvPr>
-          <p:cNvSpPr/>
-          <p:nvPr/>
-        </p:nvSpPr>
-        <p:spPr>
-          <a:xfrm>
-            <a:off x="745942" y="4719145"/>
-            <a:ext cx="10515601" cy="1198178"/>
-          </a:xfrm>
-          <a:prstGeom prst="roundRect">
-            <a:avLst/>
-          </a:prstGeom>
-          <a:solidFill>
-            <a:schemeClr val="bg2"/>
-          </a:solidFill>
-        </p:spPr>
-        <p:style>
-          <a:lnRef idx="2">
-            <a:schemeClr val="accent1">
-              <a:shade val="15000"/>
-            </a:schemeClr>
-          </a:lnRef>
-          <a:fillRef idx="1">
-            <a:schemeClr val="accent1"/>
-          </a:fillRef>
-          <a:effectRef idx="0">
-            <a:schemeClr val="accent1"/>
-          </a:effectRef>
-          <a:fontRef idx="minor">
-            <a:schemeClr val="lt1"/>
-          </a:fontRef>
-        </p:style>
-        <p:txBody>
-          <a:bodyPr rtlCol="0" anchor="ctr"/>
-          <a:lstStyle/>
-          <a:p>
-            <a:pPr algn="ctr"/>
-            <a:endParaRPr lang="de-DE"/>
-          </a:p>
-        </p:txBody>
-      </p:sp>
-      <p:sp>
-        <p:nvSpPr>
-          <p:cNvPr id="4" name="Abgerundetes Rechteck 3">
-            <a:extLst>
-              <a:ext uri="{FF2B5EF4-FFF2-40B4-BE49-F238E27FC236}">
-                <a16:creationId xmlns:a16="http://schemas.microsoft.com/office/drawing/2014/main" id="{9D95965F-A1BA-CDDF-A468-03E138217116}"/>
-              </a:ext>
-            </a:extLst>
-          </p:cNvPr>
-          <p:cNvSpPr/>
-          <p:nvPr/>
-        </p:nvSpPr>
-        <p:spPr>
-          <a:xfrm>
-            <a:off x="745942" y="2543504"/>
-            <a:ext cx="10515601" cy="1786758"/>
-          </a:xfrm>
-          <a:prstGeom prst="roundRect">
-            <a:avLst/>
-          </a:prstGeom>
-          <a:solidFill>
-            <a:schemeClr val="bg2"/>
-          </a:solidFill>
-        </p:spPr>
-        <p:style>
-          <a:lnRef idx="2">
-            <a:schemeClr val="accent1">
-              <a:shade val="15000"/>
-            </a:schemeClr>
-          </a:lnRef>
-          <a:fillRef idx="1">
-            <a:schemeClr val="accent1"/>
-          </a:fillRef>
-          <a:effectRef idx="0">
-            <a:schemeClr val="accent1"/>
-          </a:effectRef>
-          <a:fontRef idx="minor">
-            <a:schemeClr val="lt1"/>
-          </a:fontRef>
-        </p:style>
-        <p:txBody>
-          <a:bodyPr rtlCol="0" anchor="ctr"/>
-          <a:lstStyle/>
-          <a:p>
-            <a:pPr algn="ctr"/>
-            <a:endParaRPr lang="de-DE"/>
-          </a:p>
-        </p:txBody>
-      </p:sp>
-      <p:sp>
-        <p:nvSpPr>
-          <p:cNvPr id="2" name="Abgerundetes Rechteck 1">
-            <a:extLst>
-              <a:ext uri="{FF2B5EF4-FFF2-40B4-BE49-F238E27FC236}">
-                <a16:creationId xmlns:a16="http://schemas.microsoft.com/office/drawing/2014/main" id="{2A945196-42B4-0694-0FE2-DC64A74C1330}"/>
-              </a:ext>
-            </a:extLst>
-          </p:cNvPr>
-          <p:cNvSpPr/>
-          <p:nvPr/>
-        </p:nvSpPr>
-        <p:spPr>
-          <a:xfrm>
-            <a:off x="745943" y="1759389"/>
-            <a:ext cx="10515601" cy="395232"/>
-          </a:xfrm>
-          <a:prstGeom prst="roundRect">
-            <a:avLst/>
-          </a:prstGeom>
-          <a:solidFill>
-            <a:schemeClr val="bg2"/>
-          </a:solidFill>
-        </p:spPr>
-        <p:style>
-          <a:lnRef idx="2">
-            <a:schemeClr val="accent1">
-              <a:shade val="15000"/>
-            </a:schemeClr>
-          </a:lnRef>
-          <a:fillRef idx="1">
-            <a:schemeClr val="accent1"/>
-          </a:fillRef>
-          <a:effectRef idx="0">
-            <a:schemeClr val="accent1"/>
-          </a:effectRef>
-          <a:fontRef idx="minor">
-            <a:schemeClr val="lt1"/>
-          </a:fontRef>
-        </p:style>
-        <p:txBody>
-          <a:bodyPr rtlCol="0" anchor="ctr"/>
-          <a:lstStyle/>
-          <a:p>
-            <a:pPr algn="ctr"/>
-            <a:endParaRPr lang="de-DE"/>
-          </a:p>
-        </p:txBody>
-      </p:sp>
-      <p:sp>
-        <p:nvSpPr>
-          <p:cNvPr id="6" name="Title 5">
-            <a:extLst>
-              <a:ext uri="{FF2B5EF4-FFF2-40B4-BE49-F238E27FC236}">
-                <a16:creationId xmlns:a16="http://schemas.microsoft.com/office/drawing/2014/main" id="{A6D4E78A-896B-C79A-E2FE-5D9193754C31}"/>
-              </a:ext>
-            </a:extLst>
-          </p:cNvPr>
-          <p:cNvSpPr>
-            <a:spLocks noGrp="1"/>
-          </p:cNvSpPr>
-          <p:nvPr>
-            <p:ph type="title"/>
-          </p:nvPr>
-        </p:nvSpPr>
-        <p:spPr/>
-        <p:txBody>
-          <a:bodyPr/>
-          <a:lstStyle/>
-          <a:p>
-            <a:r>
-              <a:rPr lang="en-GB" dirty="0"/>
-              <a:t>Modern Language Models in a Nutshell</a:t>
-            </a:r>
-          </a:p>
-        </p:txBody>
-      </p:sp>
-      <p:sp>
-        <p:nvSpPr>
-          <p:cNvPr id="7" name="Content Placeholder 6">
-            <a:extLst>
-              <a:ext uri="{FF2B5EF4-FFF2-40B4-BE49-F238E27FC236}">
-                <a16:creationId xmlns:a16="http://schemas.microsoft.com/office/drawing/2014/main" id="{E908D6CC-B86F-1636-6F85-AB0B7A2A316F}"/>
-              </a:ext>
-            </a:extLst>
-          </p:cNvPr>
-          <p:cNvSpPr>
-            <a:spLocks noGrp="1"/>
-          </p:cNvSpPr>
-          <p:nvPr>
-            <p:ph idx="1"/>
-          </p:nvPr>
-        </p:nvSpPr>
-        <p:spPr/>
-        <p:txBody>
-          <a:bodyPr>
-            <a:normAutofit fontScale="85000" lnSpcReduction="20000"/>
-          </a:bodyPr>
-          <a:lstStyle/>
-          <a:p>
-            <a:pPr marL="0" indent="0">
-              <a:buNone/>
-            </a:pPr>
-            <a:r>
-              <a:rPr lang="en-GB" b="1" dirty="0"/>
-              <a:t>tokenization</a:t>
-            </a:r>
-            <a:r>
-              <a:rPr lang="en-GB" dirty="0"/>
-              <a:t> (split text into chunks)</a:t>
-            </a:r>
-          </a:p>
-          <a:p>
-            <a:pPr marL="0" indent="0">
-              <a:buNone/>
-            </a:pPr>
-            <a:endParaRPr lang="en-GB" dirty="0"/>
-          </a:p>
-          <a:p>
-            <a:pPr marL="0" indent="0">
-              <a:buNone/>
-            </a:pPr>
-            <a:r>
-              <a:rPr lang="en-GB" b="1" dirty="0"/>
-              <a:t>pretraining</a:t>
-            </a:r>
-            <a:r>
-              <a:rPr lang="en-GB" dirty="0"/>
-              <a:t> of transformer (next- or masked-token prediction, self-supervised)</a:t>
-            </a:r>
-          </a:p>
-          <a:p>
-            <a:r>
-              <a:rPr lang="en-GB" dirty="0"/>
-              <a:t>vector embeddings from tokens (semantic meaning)</a:t>
-            </a:r>
-            <a:endParaRPr lang="en-GB" dirty="0">
-              <a:sym typeface="Wingdings" pitchFamily="2" charset="2"/>
-            </a:endParaRPr>
-          </a:p>
-          <a:p>
-            <a:r>
-              <a:rPr lang="en-GB" dirty="0"/>
-              <a:t>add positional encoding to embeddings (use order of sequence, as attention is permutation-invariant)</a:t>
-            </a:r>
-          </a:p>
-          <a:p>
-            <a:r>
-              <a:rPr lang="en-GB" dirty="0"/>
-              <a:t>attention mechanism </a:t>
-            </a:r>
-            <a:r>
-              <a:rPr lang="en-GB" dirty="0">
-                <a:sym typeface="Wingdings" pitchFamily="2" charset="2"/>
-              </a:rPr>
-              <a:t></a:t>
-            </a:r>
-            <a:r>
-              <a:rPr lang="en-GB" dirty="0"/>
-              <a:t> contextual embeddings</a:t>
-            </a:r>
-          </a:p>
-          <a:p>
-            <a:pPr marL="0" indent="0">
-              <a:buNone/>
-            </a:pPr>
-            <a:endParaRPr lang="en-GB" dirty="0"/>
-          </a:p>
-          <a:p>
-            <a:pPr marL="0" indent="0">
-              <a:buNone/>
-            </a:pPr>
-            <a:r>
-              <a:rPr lang="en-GB" b="1" dirty="0"/>
-              <a:t>finetuning</a:t>
-            </a:r>
-            <a:r>
-              <a:rPr lang="en-GB" dirty="0"/>
-              <a:t> (specialization)</a:t>
-            </a:r>
-          </a:p>
-          <a:p>
-            <a:r>
-              <a:rPr lang="de-DE" dirty="0" err="1"/>
-              <a:t>for</a:t>
-            </a:r>
-            <a:r>
-              <a:rPr lang="de-DE" dirty="0"/>
-              <a:t> </a:t>
-            </a:r>
-            <a:r>
-              <a:rPr lang="de-DE" dirty="0" err="1"/>
-              <a:t>specific</a:t>
-            </a:r>
-            <a:r>
-              <a:rPr lang="de-DE" dirty="0"/>
-              <a:t> </a:t>
-            </a:r>
-            <a:r>
-              <a:rPr lang="de-DE" dirty="0" err="1"/>
-              <a:t>task</a:t>
-            </a:r>
-            <a:r>
-              <a:rPr lang="de-DE" dirty="0"/>
-              <a:t> (</a:t>
-            </a:r>
-            <a:r>
-              <a:rPr lang="de-DE" dirty="0" err="1"/>
-              <a:t>encoder-only</a:t>
-            </a:r>
-            <a:r>
-              <a:rPr lang="de-DE" dirty="0"/>
-              <a:t>)</a:t>
-            </a:r>
-          </a:p>
-          <a:p>
-            <a:r>
-              <a:rPr lang="de-DE" dirty="0" err="1"/>
-              <a:t>instruction</a:t>
-            </a:r>
-            <a:r>
-              <a:rPr lang="de-DE" dirty="0"/>
-              <a:t> </a:t>
-            </a:r>
-            <a:r>
-              <a:rPr lang="de-DE" dirty="0" err="1"/>
-              <a:t>tuning</a:t>
-            </a:r>
-            <a:r>
-              <a:rPr lang="de-DE" dirty="0"/>
-              <a:t> (</a:t>
-            </a:r>
-            <a:r>
-              <a:rPr lang="de-DE" dirty="0" err="1"/>
-              <a:t>decoder-only</a:t>
-            </a:r>
-            <a:r>
-              <a:rPr lang="de-DE" dirty="0"/>
-              <a:t>), </a:t>
-            </a:r>
-            <a:r>
-              <a:rPr lang="de-DE" dirty="0" err="1"/>
-              <a:t>potentially</a:t>
-            </a:r>
-            <a:r>
-              <a:rPr lang="de-DE" dirty="0"/>
-              <a:t> </a:t>
-            </a:r>
-            <a:r>
-              <a:rPr lang="de-DE" dirty="0" err="1"/>
-              <a:t>followed</a:t>
-            </a:r>
-            <a:r>
-              <a:rPr lang="de-DE" dirty="0"/>
-              <a:t> </a:t>
-            </a:r>
-            <a:r>
-              <a:rPr lang="de-DE" dirty="0" err="1"/>
-              <a:t>by</a:t>
-            </a:r>
-            <a:r>
-              <a:rPr lang="de-DE" dirty="0"/>
-              <a:t> </a:t>
-            </a:r>
-            <a:r>
-              <a:rPr lang="de-DE" dirty="0" err="1"/>
-              <a:t>alignment</a:t>
-            </a:r>
-            <a:endParaRPr lang="de-DE" dirty="0"/>
-          </a:p>
-        </p:txBody>
-      </p:sp>
-      <p:sp>
-        <p:nvSpPr>
-          <p:cNvPr id="5" name="Slide Number Placeholder 4">
-            <a:extLst>
-              <a:ext uri="{FF2B5EF4-FFF2-40B4-BE49-F238E27FC236}">
-                <a16:creationId xmlns:a16="http://schemas.microsoft.com/office/drawing/2014/main" id="{4E568FCF-2CF1-B3CF-F33E-FD3F880A8519}"/>
-              </a:ext>
-            </a:extLst>
-          </p:cNvPr>
-          <p:cNvSpPr>
-            <a:spLocks noGrp="1"/>
-          </p:cNvSpPr>
-          <p:nvPr>
-            <p:ph type="sldNum" sz="quarter" idx="12"/>
-          </p:nvPr>
-        </p:nvSpPr>
-        <p:spPr/>
-        <p:txBody>
-          <a:bodyPr/>
-          <a:lstStyle/>
-          <a:p>
-            <a:fld id="{849D05A8-43E9-1C49-8606-50AB68220DEC}" type="slidenum">
-              <a:rPr lang="en-DE" smtClean="0"/>
-              <a:t>19</a:t>
-            </a:fld>
-            <a:endParaRPr lang="en-DE"/>
-          </a:p>
-        </p:txBody>
-      </p:sp>
-      <p:sp>
-        <p:nvSpPr>
-          <p:cNvPr id="3" name="Textfeld 2">
-            <a:extLst>
-              <a:ext uri="{FF2B5EF4-FFF2-40B4-BE49-F238E27FC236}">
-                <a16:creationId xmlns:a16="http://schemas.microsoft.com/office/drawing/2014/main" id="{FA5C59CD-A8C5-4A51-66B1-AC6DAA4DC971}"/>
-              </a:ext>
-            </a:extLst>
-          </p:cNvPr>
-          <p:cNvSpPr txBox="1"/>
-          <p:nvPr/>
-        </p:nvSpPr>
-        <p:spPr>
-          <a:xfrm rot="5400000">
-            <a:off x="11013035" y="2825809"/>
-            <a:ext cx="1804084" cy="369332"/>
-          </a:xfrm>
-          <a:prstGeom prst="rect">
-            <a:avLst/>
-          </a:prstGeom>
-          <a:noFill/>
-        </p:spPr>
-        <p:txBody>
-          <a:bodyPr wrap="none" rtlCol="0">
-            <a:spAutoFit/>
-          </a:bodyPr>
-          <a:lstStyle/>
-          <a:p>
-            <a:r>
-              <a:rPr lang="de-DE" dirty="0" err="1">
-                <a:solidFill>
-                  <a:schemeClr val="bg2">
-                    <a:lumMod val="50000"/>
-                  </a:schemeClr>
-                </a:solidFill>
-              </a:rPr>
-              <a:t>discussed</a:t>
-            </a:r>
-            <a:r>
-              <a:rPr lang="de-DE" dirty="0">
-                <a:solidFill>
-                  <a:schemeClr val="bg2">
-                    <a:lumMod val="50000"/>
-                  </a:schemeClr>
-                </a:solidFill>
-              </a:rPr>
-              <a:t> so </a:t>
-            </a:r>
-            <a:r>
-              <a:rPr lang="de-DE" dirty="0" err="1">
-                <a:solidFill>
-                  <a:schemeClr val="bg2">
-                    <a:lumMod val="50000"/>
-                  </a:schemeClr>
-                </a:solidFill>
-              </a:rPr>
-              <a:t>far</a:t>
-            </a:r>
-            <a:endParaRPr lang="de-DE" dirty="0">
-              <a:solidFill>
-                <a:schemeClr val="bg2">
-                  <a:lumMod val="50000"/>
-                </a:schemeClr>
-              </a:solidFill>
-            </a:endParaRPr>
-          </a:p>
-        </p:txBody>
-      </p:sp>
-      <p:sp>
-        <p:nvSpPr>
-          <p:cNvPr id="9" name="Geschweifte Klammer rechts 8">
-            <a:extLst>
-              <a:ext uri="{FF2B5EF4-FFF2-40B4-BE49-F238E27FC236}">
-                <a16:creationId xmlns:a16="http://schemas.microsoft.com/office/drawing/2014/main" id="{65E0FB46-A654-898A-003A-DCE1B3AC75E7}"/>
-              </a:ext>
-            </a:extLst>
-          </p:cNvPr>
-          <p:cNvSpPr/>
-          <p:nvPr/>
-        </p:nvSpPr>
-        <p:spPr>
-          <a:xfrm>
-            <a:off x="11446057" y="1690688"/>
-            <a:ext cx="284354" cy="2639574"/>
-          </a:xfrm>
-          <a:prstGeom prst="rightBrace">
-            <a:avLst/>
-          </a:prstGeom>
-        </p:spPr>
-        <p:style>
-          <a:lnRef idx="2">
-            <a:schemeClr val="dk1"/>
-          </a:lnRef>
-          <a:fillRef idx="0">
-            <a:schemeClr val="dk1"/>
-          </a:fillRef>
-          <a:effectRef idx="1">
-            <a:schemeClr val="dk1"/>
-          </a:effectRef>
-          <a:fontRef idx="minor">
-            <a:schemeClr val="tx1"/>
-          </a:fontRef>
-        </p:style>
-        <p:txBody>
-          <a:bodyPr rtlCol="0" anchor="ctr"/>
-          <a:lstStyle/>
-          <a:p>
-            <a:pPr algn="ctr"/>
-            <a:endParaRPr lang="de-DE"/>
-          </a:p>
-        </p:txBody>
-      </p:sp>
-    </p:spTree>
-    <p:extLst>
-      <p:ext uri="{BB962C8B-B14F-4D97-AF65-F5344CB8AC3E}">
-        <p14:creationId xmlns:p14="http://schemas.microsoft.com/office/powerpoint/2010/main" val="269024656"/>
       </p:ext>
     </p:extLst>
   </p:cSld>
@@ -15685,10 +17725,10 @@
       </p:grpSpPr>
       <p:sp>
         <p:nvSpPr>
-          <p:cNvPr id="2" name="Title 1">
+          <p:cNvPr id="2" name="Titel 1">
             <a:extLst>
               <a:ext uri="{FF2B5EF4-FFF2-40B4-BE49-F238E27FC236}">
-                <a16:creationId xmlns:a16="http://schemas.microsoft.com/office/drawing/2014/main" id="{F4B34BCA-6F2E-E1E0-5E78-C602E733CA5E}"/>
+                <a16:creationId xmlns:a16="http://schemas.microsoft.com/office/drawing/2014/main" id="{52AB2A7F-D706-126A-8733-B64202ABB3E3}"/>
               </a:ext>
             </a:extLst>
           </p:cNvPr>
@@ -15706,22 +17746,18 @@
           <a:p>
             <a:r>
               <a:rPr lang="de-DE" dirty="0" err="1"/>
-              <a:t>OpenAI’s</a:t>
-            </a:r>
-            <a:r>
-              <a:rPr lang="de-DE" dirty="0"/>
-              <a:t> GPT Series</a:t>
-            </a:r>
-            <a:endParaRPr lang="en-DE" dirty="0"/>
+              <a:t>Prompting</a:t>
+            </a:r>
+            <a:endParaRPr lang="de-DE" dirty="0"/>
           </a:p>
         </p:txBody>
       </p:sp>
       <p:sp>
         <p:nvSpPr>
-          <p:cNvPr id="3" name="Content Placeholder 2">
+          <p:cNvPr id="3" name="Inhaltsplatzhalter 2">
             <a:extLst>
               <a:ext uri="{FF2B5EF4-FFF2-40B4-BE49-F238E27FC236}">
-                <a16:creationId xmlns:a16="http://schemas.microsoft.com/office/drawing/2014/main" id="{D878DA15-F9B0-18B3-B458-752CD40FD84B}"/>
+                <a16:creationId xmlns:a16="http://schemas.microsoft.com/office/drawing/2014/main" id="{4A2ABA11-6D27-64D9-CFC3-94B012C10C50}"/>
               </a:ext>
             </a:extLst>
           </p:cNvPr>
@@ -15732,290 +17768,87 @@
             <p:ph idx="1"/>
           </p:nvPr>
         </p:nvSpPr>
-        <p:spPr>
-          <a:xfrm>
-            <a:off x="838200" y="1817159"/>
-            <a:ext cx="10515600" cy="4351338"/>
-          </a:xfrm>
-        </p:spPr>
+        <p:spPr/>
         <p:txBody>
-          <a:bodyPr>
-            <a:noAutofit/>
-          </a:bodyPr>
+          <a:bodyPr/>
           <a:lstStyle/>
           <a:p>
-            <a:r>
-              <a:rPr lang="de-DE" sz="2400" dirty="0">
-                <a:hlinkClick r:id="rId2"/>
+            <a:pPr marL="0" indent="0">
+              <a:buNone/>
+            </a:pPr>
+            <a:r>
+              <a:rPr lang="en-GB" dirty="0"/>
+              <a:t>feed information into decoder-only transformer via input prompt</a:t>
+            </a:r>
+          </a:p>
+          <a:p>
+            <a:pPr marL="0" indent="0">
+              <a:buNone/>
+            </a:pPr>
+            <a:r>
+              <a:rPr lang="en-GB" dirty="0">
+                <a:sym typeface="Wingdings" panose="05000000000000000000" pitchFamily="2" charset="2"/>
               </a:rPr>
-              <a:t>GPT-1</a:t>
-            </a:r>
-            <a:r>
-              <a:rPr lang="en-DE" sz="2400"/>
-              <a:t>: </a:t>
-            </a:r>
-            <a:r>
-              <a:rPr lang="de-DE" sz="2400" dirty="0" err="1"/>
-              <a:t>used</a:t>
-            </a:r>
-            <a:r>
-              <a:rPr lang="de-DE" sz="2400" dirty="0"/>
-              <a:t> </a:t>
-            </a:r>
-            <a:r>
-              <a:rPr lang="de-DE" sz="2400" dirty="0" err="1"/>
-              <a:t>for</a:t>
-            </a:r>
-            <a:r>
-              <a:rPr lang="de-DE" sz="2400" dirty="0"/>
-              <a:t> </a:t>
-            </a:r>
-            <a:r>
-              <a:rPr lang="en-DE" sz="2400"/>
-              <a:t>discriminative finetuning </a:t>
-            </a:r>
-            <a:r>
-              <a:rPr lang="en-DE" sz="2400" dirty="0"/>
-              <a:t>on specific </a:t>
-            </a:r>
-            <a:r>
-              <a:rPr lang="en-DE" sz="2400"/>
-              <a:t>tasks (summarization</a:t>
-            </a:r>
-            <a:r>
-              <a:rPr lang="en-DE" sz="2400" dirty="0"/>
-              <a:t>, translation</a:t>
-            </a:r>
-            <a:r>
-              <a:rPr lang="en-DE" sz="2400"/>
-              <a:t>, question-answering</a:t>
-            </a:r>
-            <a:r>
-              <a:rPr lang="de-DE" sz="2400" dirty="0"/>
-              <a:t>, …</a:t>
-            </a:r>
-            <a:r>
-              <a:rPr lang="en-DE" sz="2400"/>
-              <a:t>)</a:t>
-            </a:r>
-            <a:r>
-              <a:rPr lang="de-DE" sz="2400" dirty="0"/>
-              <a:t> </a:t>
-            </a:r>
-            <a:r>
-              <a:rPr lang="de-DE" sz="2400" dirty="0">
+              <a:t> </a:t>
+            </a:r>
+            <a:r>
+              <a:rPr lang="en-GB" dirty="0"/>
+              <a:t>attention to context</a:t>
+            </a:r>
+          </a:p>
+          <a:p>
+            <a:pPr marL="0" indent="0">
+              <a:buNone/>
+            </a:pPr>
+            <a:endParaRPr lang="en-GB" dirty="0"/>
+          </a:p>
+          <a:p>
+            <a:pPr marL="0" indent="0">
+              <a:buNone/>
+            </a:pPr>
+            <a:r>
+              <a:rPr lang="en-GB" dirty="0"/>
+              <a:t>using all the knowledge acquired during internet-scale pretraining and stored in weights</a:t>
+            </a:r>
+          </a:p>
+          <a:p>
+            <a:pPr marL="0" indent="0">
+              <a:buNone/>
+            </a:pPr>
+            <a:endParaRPr lang="en-GB" dirty="0"/>
+          </a:p>
+          <a:p>
+            <a:pPr marL="0" indent="0">
+              <a:buNone/>
+            </a:pPr>
+            <a:r>
+              <a:rPr lang="en-GB" dirty="0"/>
+              <a:t>kind of programmable neural network</a:t>
+            </a:r>
+          </a:p>
+          <a:p>
+            <a:pPr marL="0" indent="0">
+              <a:buNone/>
+            </a:pPr>
+            <a:r>
+              <a:rPr lang="en-GB" dirty="0">
                 <a:sym typeface="Wingdings" pitchFamily="2" charset="2"/>
               </a:rPr>
-              <a:t> BERT</a:t>
-            </a:r>
-            <a:endParaRPr lang="en-DE" sz="2400" dirty="0"/>
-          </a:p>
-          <a:p>
-            <a:r>
-              <a:rPr lang="en-GB" sz="2400" dirty="0">
-                <a:hlinkClick r:id="rId3"/>
-              </a:rPr>
-              <a:t>GPT-2</a:t>
-            </a:r>
-            <a:r>
-              <a:rPr lang="en-DE" sz="2400"/>
-              <a:t>: zero- </a:t>
-            </a:r>
-            <a:r>
-              <a:rPr lang="en-DE" sz="2400" dirty="0"/>
-              <a:t>or </a:t>
-            </a:r>
-            <a:r>
-              <a:rPr lang="en-DE" sz="2400"/>
-              <a:t>few-shot learning</a:t>
-            </a:r>
-            <a:r>
-              <a:rPr lang="de-DE" sz="2400" dirty="0"/>
-              <a:t> </a:t>
-            </a:r>
-            <a:r>
-              <a:rPr lang="de-DE" sz="2400" dirty="0">
-                <a:sym typeface="Wingdings" pitchFamily="2" charset="2"/>
-              </a:rPr>
-              <a:t> </a:t>
-            </a:r>
-            <a:r>
-              <a:rPr lang="de-DE" sz="2400" dirty="0" err="1">
-                <a:sym typeface="Wingdings" pitchFamily="2" charset="2"/>
-              </a:rPr>
-              <a:t>prompting</a:t>
-            </a:r>
-            <a:endParaRPr lang="de-DE" sz="2400" dirty="0"/>
-          </a:p>
-          <a:p>
-            <a:r>
-              <a:rPr lang="en-GB" sz="2400" dirty="0">
-                <a:hlinkClick r:id="rId4"/>
-              </a:rPr>
-              <a:t>GPT-3</a:t>
-            </a:r>
-            <a:r>
-              <a:rPr lang="en-GB" sz="2400" dirty="0"/>
-              <a:t>: scaling (</a:t>
-            </a:r>
-            <a:r>
-              <a:rPr lang="en-DE" sz="2400"/>
-              <a:t>175 billion parameters</a:t>
-            </a:r>
-            <a:r>
-              <a:rPr lang="de-DE" sz="2400" dirty="0"/>
-              <a:t>) </a:t>
-            </a:r>
-            <a:r>
-              <a:rPr lang="de-DE" sz="2400" dirty="0">
-                <a:sym typeface="Wingdings" pitchFamily="2" charset="2"/>
-              </a:rPr>
-              <a:t> </a:t>
-            </a:r>
-            <a:r>
-              <a:rPr lang="en-GB" sz="2400" dirty="0"/>
-              <a:t>much increased capabilities</a:t>
-            </a:r>
-            <a:endParaRPr lang="en-DE" sz="2400" dirty="0"/>
-          </a:p>
-          <a:p>
-            <a:r>
-              <a:rPr lang="en-GB" sz="2400" dirty="0">
-                <a:hlinkClick r:id="rId5"/>
-              </a:rPr>
-              <a:t>GPT-4</a:t>
-            </a:r>
-            <a:r>
-              <a:rPr lang="en-GB" sz="2400" dirty="0"/>
-              <a:t>: more scaling </a:t>
-            </a:r>
-            <a:r>
-              <a:rPr lang="de-DE" sz="2400" dirty="0"/>
-              <a:t>(</a:t>
-            </a:r>
-            <a:r>
-              <a:rPr lang="en-DE" sz="2400">
-                <a:hlinkClick r:id="rId6"/>
-              </a:rPr>
-              <a:t>capabilities</a:t>
-            </a:r>
-            <a:r>
-              <a:rPr lang="de-DE" sz="2400" dirty="0"/>
-              <a:t>)</a:t>
-            </a:r>
-            <a:endParaRPr lang="en-GB" sz="2400" dirty="0"/>
-          </a:p>
-          <a:p>
-            <a:r>
-              <a:rPr lang="en-GB" sz="2400" dirty="0"/>
-              <a:t>GPT-4o</a:t>
-            </a:r>
-            <a:r>
-              <a:rPr lang="en-DE" sz="2400"/>
-              <a:t>: multimodal model</a:t>
-            </a:r>
-            <a:endParaRPr lang="de-DE" sz="2400" dirty="0"/>
-          </a:p>
-          <a:p>
-            <a:r>
-              <a:rPr lang="de-DE" sz="2400" dirty="0">
-                <a:hlinkClick r:id="rId7"/>
-              </a:rPr>
-              <a:t>o1</a:t>
-            </a:r>
-            <a:r>
-              <a:rPr lang="de-DE" sz="2400" dirty="0"/>
-              <a:t>: </a:t>
-            </a:r>
-            <a:r>
-              <a:rPr lang="de-DE" sz="2400" dirty="0" err="1"/>
-              <a:t>reasoning</a:t>
-            </a:r>
-            <a:r>
-              <a:rPr lang="de-DE" sz="2400" dirty="0"/>
-              <a:t> </a:t>
-            </a:r>
-            <a:r>
-              <a:rPr lang="de-DE" sz="2400" dirty="0" err="1"/>
-              <a:t>model</a:t>
-            </a:r>
-            <a:endParaRPr lang="de-DE" sz="2400" dirty="0"/>
-          </a:p>
-          <a:p>
-            <a:r>
-              <a:rPr lang="de-DE" sz="2400" dirty="0"/>
-              <a:t>GPT-5: </a:t>
-            </a:r>
-            <a:r>
-              <a:rPr lang="de-DE" sz="2400" dirty="0" err="1"/>
-              <a:t>automatic</a:t>
-            </a:r>
-            <a:r>
-              <a:rPr lang="de-DE" sz="2400" dirty="0"/>
-              <a:t> </a:t>
-            </a:r>
-            <a:r>
-              <a:rPr lang="de-DE" sz="2400" dirty="0" err="1"/>
-              <a:t>activation</a:t>
-            </a:r>
-            <a:r>
-              <a:rPr lang="de-DE" sz="2400" dirty="0"/>
-              <a:t> </a:t>
-            </a:r>
-            <a:r>
-              <a:rPr lang="de-DE" sz="2400" dirty="0" err="1"/>
-              <a:t>of</a:t>
-            </a:r>
-            <a:r>
-              <a:rPr lang="de-DE" sz="2400" dirty="0"/>
-              <a:t> </a:t>
-            </a:r>
-            <a:r>
-              <a:rPr lang="de-DE" sz="2400" dirty="0" err="1"/>
-              <a:t>reasoning</a:t>
-            </a:r>
-            <a:r>
-              <a:rPr lang="de-DE" sz="2400" dirty="0"/>
-              <a:t> </a:t>
-            </a:r>
-            <a:r>
-              <a:rPr lang="de-DE" sz="2400" dirty="0" err="1"/>
-              <a:t>model</a:t>
-            </a:r>
-            <a:r>
-              <a:rPr lang="de-DE" sz="2400" dirty="0"/>
-              <a:t> </a:t>
-            </a:r>
-            <a:r>
-              <a:rPr lang="de-DE" sz="2400" dirty="0" err="1"/>
-              <a:t>depending</a:t>
-            </a:r>
-            <a:r>
-              <a:rPr lang="de-DE" sz="2400" dirty="0"/>
-              <a:t> on </a:t>
-            </a:r>
-            <a:r>
-              <a:rPr lang="de-DE" sz="2400" dirty="0" err="1"/>
-              <a:t>the</a:t>
-            </a:r>
-            <a:r>
-              <a:rPr lang="de-DE" sz="2400" dirty="0"/>
-              <a:t> </a:t>
-            </a:r>
-            <a:r>
-              <a:rPr lang="de-DE" sz="2400" dirty="0" err="1"/>
-              <a:t>task</a:t>
-            </a:r>
-            <a:endParaRPr lang="en-DE" sz="2400" dirty="0"/>
+              <a:t> a new paradigm: </a:t>
+            </a:r>
+            <a:r>
+              <a:rPr lang="en-GB" b="1" dirty="0"/>
+              <a:t>one model for many tasks</a:t>
+            </a:r>
           </a:p>
         </p:txBody>
       </p:sp>
       <p:sp>
         <p:nvSpPr>
-          <p:cNvPr id="4" name="Slide Number Placeholder 3">
+          <p:cNvPr id="4" name="Foliennummernplatzhalter 3">
             <a:extLst>
               <a:ext uri="{FF2B5EF4-FFF2-40B4-BE49-F238E27FC236}">
-                <a16:creationId xmlns:a16="http://schemas.microsoft.com/office/drawing/2014/main" id="{1C62DF1F-CE76-8FAE-EDB4-4B22AB609EFE}"/>
+                <a16:creationId xmlns:a16="http://schemas.microsoft.com/office/drawing/2014/main" id="{BF2EB15C-8815-C83D-8F45-1E72CC597ECB}"/>
               </a:ext>
             </a:extLst>
           </p:cNvPr>
@@ -16031,18 +17864,18 @@
           <a:bodyPr/>
           <a:lstStyle/>
           <a:p>
-            <a:fld id="{849D05A8-43E9-1C49-8606-50AB68220DEC}" type="slidenum">
-              <a:rPr lang="en-DE" smtClean="0"/>
+            <a:fld id="{4055531C-5681-6B44-B2CA-926D7A74B06D}" type="slidenum">
+              <a:rPr lang="de-DE" smtClean="0"/>
               <a:t>7</a:t>
             </a:fld>
-            <a:endParaRPr lang="en-DE"/>
+            <a:endParaRPr lang="de-DE"/>
           </a:p>
         </p:txBody>
       </p:sp>
     </p:spTree>
     <p:extLst>
       <p:ext uri="{BB962C8B-B14F-4D97-AF65-F5344CB8AC3E}">
-        <p14:creationId xmlns:p14="http://schemas.microsoft.com/office/powerpoint/2010/main" val="2356046642"/>
+        <p14:creationId xmlns:p14="http://schemas.microsoft.com/office/powerpoint/2010/main" val="2879064290"/>
       </p:ext>
     </p:extLst>
   </p:cSld>
@@ -16071,10 +17904,10 @@
       </p:grpSpPr>
       <p:sp>
         <p:nvSpPr>
-          <p:cNvPr id="2" name="Titel 1">
+          <p:cNvPr id="2" name="Title 1">
             <a:extLst>
               <a:ext uri="{FF2B5EF4-FFF2-40B4-BE49-F238E27FC236}">
-                <a16:creationId xmlns:a16="http://schemas.microsoft.com/office/drawing/2014/main" id="{52AB2A7F-D706-126A-8733-B64202ABB3E3}"/>
+                <a16:creationId xmlns:a16="http://schemas.microsoft.com/office/drawing/2014/main" id="{F89B18D8-662F-8E62-9266-15406EC258A0}"/>
               </a:ext>
             </a:extLst>
           </p:cNvPr>
@@ -16091,19 +17924,31 @@
           <a:lstStyle/>
           <a:p>
             <a:r>
-              <a:rPr lang="de-DE" dirty="0" err="1"/>
-              <a:t>Prompting</a:t>
-            </a:r>
-            <a:endParaRPr lang="de-DE" dirty="0"/>
+              <a:rPr lang="en-DE" dirty="0"/>
+              <a:t>Size Matters</a:t>
+            </a:r>
+            <a:r>
+              <a:rPr lang="en-GB" dirty="0"/>
+              <a:t>: </a:t>
+            </a:r>
+            <a:r>
+              <a:rPr lang="en-GB" b="1" dirty="0"/>
+              <a:t>LARGE</a:t>
+            </a:r>
+            <a:r>
+              <a:rPr lang="en-GB" dirty="0"/>
+              <a:t> Language Models</a:t>
+            </a:r>
+            <a:endParaRPr lang="en-DE" dirty="0"/>
           </a:p>
         </p:txBody>
       </p:sp>
       <p:sp>
         <p:nvSpPr>
-          <p:cNvPr id="3" name="Inhaltsplatzhalter 2">
+          <p:cNvPr id="3" name="Content Placeholder 2">
             <a:extLst>
               <a:ext uri="{FF2B5EF4-FFF2-40B4-BE49-F238E27FC236}">
-                <a16:creationId xmlns:a16="http://schemas.microsoft.com/office/drawing/2014/main" id="{4A2ABA11-6D27-64D9-CFC3-94B012C10C50}"/>
+                <a16:creationId xmlns:a16="http://schemas.microsoft.com/office/drawing/2014/main" id="{8E0F4078-2FDF-FC34-76CD-ACB22B47969E}"/>
               </a:ext>
             </a:extLst>
           </p:cNvPr>
@@ -16114,17 +17959,40 @@
             <p:ph idx="1"/>
           </p:nvPr>
         </p:nvSpPr>
-        <p:spPr/>
+        <p:spPr>
+          <a:xfrm>
+            <a:off x="838198" y="1825625"/>
+            <a:ext cx="8936197" cy="4351338"/>
+          </a:xfrm>
+        </p:spPr>
         <p:txBody>
-          <a:bodyPr/>
+          <a:bodyPr>
+            <a:normAutofit/>
+          </a:bodyPr>
           <a:lstStyle/>
           <a:p>
             <a:pPr marL="0" indent="0">
               <a:buNone/>
             </a:pPr>
             <a:r>
-              <a:rPr lang="en-GB" dirty="0"/>
-              <a:t>feed information into decoder LLM via input prompt</a:t>
+              <a:rPr lang="en-GB" sz="2600" dirty="0">
+                <a:hlinkClick r:id="rId2"/>
+              </a:rPr>
+              <a:t>scaling laws</a:t>
+            </a:r>
+            <a:r>
+              <a:rPr lang="en-GB" sz="2600" dirty="0"/>
+              <a:t>, </a:t>
+            </a:r>
+            <a:r>
+              <a:rPr lang="en-GB" sz="2600" dirty="0">
+                <a:hlinkClick r:id="rId3"/>
+              </a:rPr>
+              <a:t>Chinchilla</a:t>
+            </a:r>
+            <a:r>
+              <a:rPr lang="en-GB" sz="2600" dirty="0"/>
+              <a:t>: coupled performance power laws with model size, amount of training data, and compute</a:t>
             </a:r>
           </a:p>
           <a:p>
@@ -16132,69 +18000,66 @@
               <a:buNone/>
             </a:pPr>
             <a:r>
-              <a:rPr lang="en-GB" dirty="0">
+              <a:rPr lang="en-GB" sz="2600" dirty="0">
                 <a:sym typeface="Wingdings" panose="05000000000000000000" pitchFamily="2" charset="2"/>
               </a:rPr>
               <a:t> </a:t>
             </a:r>
             <a:r>
-              <a:rPr lang="en-GB" dirty="0"/>
-              <a:t>attention to context</a:t>
+              <a:rPr lang="en-GB" sz="2600" dirty="0"/>
+              <a:t>era of large-scale models</a:t>
             </a:r>
           </a:p>
           <a:p>
             <a:pPr marL="0" indent="0">
               <a:buNone/>
             </a:pPr>
-            <a:endParaRPr lang="en-GB" dirty="0"/>
+            <a:endParaRPr lang="en-GB" sz="2600" dirty="0"/>
           </a:p>
           <a:p>
             <a:pPr marL="0" indent="0">
               <a:buNone/>
             </a:pPr>
             <a:r>
-              <a:rPr lang="en-GB" dirty="0"/>
-              <a:t>typical prompt:</a:t>
-            </a:r>
-          </a:p>
-          <a:p>
-            <a:pPr marL="0" indent="0">
-              <a:buNone/>
-            </a:pPr>
-            <a:r>
-              <a:rPr lang="en-GB" dirty="0"/>
-              <a:t>instructions, context, query, output indicator</a:t>
-            </a:r>
-          </a:p>
-          <a:p>
-            <a:pPr marL="0" indent="0">
-              <a:buNone/>
-            </a:pPr>
-            <a:endParaRPr lang="en-GB" dirty="0"/>
-          </a:p>
-          <a:p>
-            <a:pPr marL="0" indent="0">
-              <a:buNone/>
-            </a:pPr>
-            <a:r>
-              <a:rPr lang="en-GB" dirty="0">
+              <a:rPr lang="en-GB" sz="2600" dirty="0"/>
+              <a:t>emergent abilities of LLMs:</a:t>
+            </a:r>
+          </a:p>
+          <a:p>
+            <a:r>
+              <a:rPr lang="en-GB" sz="2600" dirty="0"/>
+              <a:t>multi-task learning: perform new tasks at test time without task-specific training (via </a:t>
+            </a:r>
+            <a:r>
+              <a:rPr lang="en-GB" sz="2600" dirty="0">
                 <a:sym typeface="Wingdings" pitchFamily="2" charset="2"/>
               </a:rPr>
-              <a:t> a new paradigm: </a:t>
-            </a:r>
-            <a:r>
-              <a:rPr lang="en-GB" b="1" dirty="0"/>
-              <a:t>one model for many tasks</a:t>
-            </a:r>
+              <a:t>p</a:t>
+            </a:r>
+            <a:r>
+              <a:rPr lang="en-GB" sz="2600" dirty="0"/>
+              <a:t>rompting)</a:t>
+            </a:r>
+          </a:p>
+          <a:p>
+            <a:r>
+              <a:rPr lang="en-GB" sz="2600" dirty="0">
+                <a:solidFill>
+                  <a:srgbClr val="212529"/>
+                </a:solidFill>
+              </a:rPr>
+              <a:t>reasoning capabilities</a:t>
+            </a:r>
+            <a:endParaRPr lang="en-GB" sz="2600" dirty="0"/>
           </a:p>
         </p:txBody>
       </p:sp>
       <p:sp>
         <p:nvSpPr>
-          <p:cNvPr id="4" name="Foliennummernplatzhalter 3">
+          <p:cNvPr id="4" name="Slide Number Placeholder 3">
             <a:extLst>
               <a:ext uri="{FF2B5EF4-FFF2-40B4-BE49-F238E27FC236}">
-                <a16:creationId xmlns:a16="http://schemas.microsoft.com/office/drawing/2014/main" id="{BF2EB15C-8815-C83D-8F45-1E72CC597ECB}"/>
+                <a16:creationId xmlns:a16="http://schemas.microsoft.com/office/drawing/2014/main" id="{649F0045-E4C4-0C38-5A9B-7A5BA0214CE7}"/>
               </a:ext>
             </a:extLst>
           </p:cNvPr>
@@ -16210,18 +18075,86 @@
           <a:bodyPr/>
           <a:lstStyle/>
           <a:p>
-            <a:fld id="{4055531C-5681-6B44-B2CA-926D7A74B06D}" type="slidenum">
-              <a:rPr lang="de-DE" smtClean="0"/>
+            <a:fld id="{849D05A8-43E9-1C49-8606-50AB68220DEC}" type="slidenum">
+              <a:rPr lang="en-DE" smtClean="0"/>
               <a:t>8</a:t>
             </a:fld>
-            <a:endParaRPr lang="de-DE"/>
+            <a:endParaRPr lang="en-DE"/>
+          </a:p>
+        </p:txBody>
+      </p:sp>
+      <p:pic>
+        <p:nvPicPr>
+          <p:cNvPr id="6" name="Picture 5">
+            <a:extLst>
+              <a:ext uri="{FF2B5EF4-FFF2-40B4-BE49-F238E27FC236}">
+                <a16:creationId xmlns:a16="http://schemas.microsoft.com/office/drawing/2014/main" id="{B671ACDA-58DE-C671-C490-9A25C570A67D}"/>
+              </a:ext>
+            </a:extLst>
+          </p:cNvPr>
+          <p:cNvPicPr>
+            <a:picLocks noChangeAspect="1"/>
+          </p:cNvPicPr>
+          <p:nvPr/>
+        </p:nvPicPr>
+        <p:blipFill>
+          <a:blip r:embed="rId4"/>
+          <a:stretch>
+            <a:fillRect/>
+          </a:stretch>
+        </p:blipFill>
+        <p:spPr>
+          <a:xfrm>
+            <a:off x="9774395" y="1005021"/>
+            <a:ext cx="2390243" cy="5344539"/>
+          </a:xfrm>
+          <a:prstGeom prst="rect">
+            <a:avLst/>
+          </a:prstGeom>
+        </p:spPr>
+      </p:pic>
+      <p:sp>
+        <p:nvSpPr>
+          <p:cNvPr id="7" name="TextBox 6">
+            <a:extLst>
+              <a:ext uri="{FF2B5EF4-FFF2-40B4-BE49-F238E27FC236}">
+                <a16:creationId xmlns:a16="http://schemas.microsoft.com/office/drawing/2014/main" id="{0467208A-C2CD-8126-638D-2517BFC96589}"/>
+              </a:ext>
+            </a:extLst>
+          </p:cNvPr>
+          <p:cNvSpPr txBox="1"/>
+          <p:nvPr/>
+        </p:nvSpPr>
+        <p:spPr>
+          <a:xfrm>
+            <a:off x="11632120" y="6349560"/>
+            <a:ext cx="532518" cy="246221"/>
+          </a:xfrm>
+          <a:prstGeom prst="rect">
+            <a:avLst/>
+          </a:prstGeom>
+          <a:noFill/>
+        </p:spPr>
+        <p:txBody>
+          <a:bodyPr wrap="none" rtlCol="0">
+            <a:spAutoFit/>
+          </a:bodyPr>
+          <a:lstStyle/>
+          <a:p>
+            <a:r>
+              <a:rPr lang="de-DE" sz="1000" dirty="0">
+                <a:hlinkClick r:id="rId5"/>
+              </a:rPr>
+              <a:t>source</a:t>
+            </a:r>
+            <a:endParaRPr lang="de-DE" sz="1000" dirty="0"/>
           </a:p>
         </p:txBody>
       </p:sp>
     </p:spTree>
     <p:extLst>
       <p:ext uri="{BB962C8B-B14F-4D97-AF65-F5344CB8AC3E}">
-        <p14:creationId xmlns:p14="http://schemas.microsoft.com/office/powerpoint/2010/main" val="2879064290"/>
+        <p14:creationId xmlns:p14="http://schemas.microsoft.com/office/powerpoint/2010/main" val="839114839"/>
       </p:ext>
     </p:extLst>
   </p:cSld>
@@ -16253,7 +18186,7 @@
           <p:cNvPr id="2" name="Title 1">
             <a:extLst>
               <a:ext uri="{FF2B5EF4-FFF2-40B4-BE49-F238E27FC236}">
-                <a16:creationId xmlns:a16="http://schemas.microsoft.com/office/drawing/2014/main" id="{F89B18D8-662F-8E62-9266-15406EC258A0}"/>
+                <a16:creationId xmlns:a16="http://schemas.microsoft.com/office/drawing/2014/main" id="{6485C368-8592-0C01-7155-B0402DBC5A37}"/>
               </a:ext>
             </a:extLst>
           </p:cNvPr>
@@ -16270,22 +18203,9 @@
           <a:lstStyle/>
           <a:p>
             <a:r>
-              <a:rPr lang="en-DE" dirty="0"/>
-              <a:t>Size Matters</a:t>
-            </a:r>
-            <a:r>
               <a:rPr lang="en-GB" dirty="0"/>
-              <a:t>: </a:t>
-            </a:r>
-            <a:r>
-              <a:rPr lang="en-GB" b="1" dirty="0"/>
-              <a:t>LARGE</a:t>
-            </a:r>
-            <a:r>
-              <a:rPr lang="en-GB" dirty="0"/>
-              <a:t> Language Models</a:t>
-            </a:r>
-            <a:endParaRPr lang="en-DE" dirty="0"/>
+              <a:t>Some LLM Numbers</a:t>
+            </a:r>
           </a:p>
         </p:txBody>
       </p:sp>
@@ -16294,7 +18214,7 @@
           <p:cNvPr id="3" name="Content Placeholder 2">
             <a:extLst>
               <a:ext uri="{FF2B5EF4-FFF2-40B4-BE49-F238E27FC236}">
-                <a16:creationId xmlns:a16="http://schemas.microsoft.com/office/drawing/2014/main" id="{8E0F4078-2FDF-FC34-76CD-ACB22B47969E}"/>
+                <a16:creationId xmlns:a16="http://schemas.microsoft.com/office/drawing/2014/main" id="{D6C96AE7-65B2-BDAA-9CB1-106D3E0C6289}"/>
               </a:ext>
             </a:extLst>
           </p:cNvPr>
@@ -16305,15 +18225,10 @@
             <p:ph idx="1"/>
           </p:nvPr>
         </p:nvSpPr>
-        <p:spPr>
-          <a:xfrm>
-            <a:off x="838198" y="1825625"/>
-            <a:ext cx="8936197" cy="4351338"/>
-          </a:xfrm>
-        </p:spPr>
+        <p:spPr/>
         <p:txBody>
           <a:bodyPr>
-            <a:normAutofit/>
+            <a:normAutofit fontScale="77500" lnSpcReduction="20000"/>
           </a:bodyPr>
           <a:lstStyle/>
           <a:p>
@@ -16321,82 +18236,85 @@
               <a:buNone/>
             </a:pPr>
             <a:r>
-              <a:rPr lang="en-GB" sz="2600" dirty="0">
+              <a:rPr lang="en-GB" dirty="0"/>
+              <a:t>example </a:t>
+            </a:r>
+            <a:r>
+              <a:rPr lang="en-GB" dirty="0">
                 <a:hlinkClick r:id="rId2"/>
               </a:rPr>
-              <a:t>scaling laws</a:t>
-            </a:r>
-            <a:r>
-              <a:rPr lang="en-GB" sz="2600" dirty="0"/>
-              <a:t>, </a:t>
-            </a:r>
-            <a:r>
-              <a:rPr lang="en-GB" sz="2600" dirty="0">
-                <a:hlinkClick r:id="rId3"/>
-              </a:rPr>
-              <a:t>Chinchilla</a:t>
-            </a:r>
-            <a:r>
-              <a:rPr lang="en-GB" sz="2600" dirty="0"/>
-              <a:t>: coupled performance power laws with model size, amount of training data, and compute</a:t>
+              <a:t>Kimi K2</a:t>
+            </a:r>
+            <a:r>
+              <a:rPr lang="en-GB" dirty="0"/>
+              <a:t> (Mixture-of-Experts model):</a:t>
             </a:r>
           </a:p>
           <a:p>
             <a:pPr marL="0" indent="0">
               <a:buNone/>
             </a:pPr>
-            <a:r>
-              <a:rPr lang="en-GB" sz="2600" dirty="0">
-                <a:sym typeface="Wingdings" panose="05000000000000000000" pitchFamily="2" charset="2"/>
-              </a:rPr>
-              <a:t> </a:t>
-            </a:r>
-            <a:r>
-              <a:rPr lang="en-GB" sz="2600" dirty="0"/>
-              <a:t>era of large-scale models</a:t>
+            <a:endParaRPr lang="en-GB" dirty="0"/>
+          </a:p>
+          <a:p>
+            <a:r>
+              <a:rPr lang="en-GB" dirty="0"/>
+              <a:t>vocabulary size (tokens):		160K</a:t>
+            </a:r>
+          </a:p>
+          <a:p>
+            <a:r>
+              <a:rPr lang="en-GB" dirty="0"/>
+              <a:t>embedding dimension:		7,168</a:t>
+            </a:r>
+          </a:p>
+          <a:p>
+            <a:r>
+              <a:rPr lang="en-GB" dirty="0"/>
+              <a:t>context length (tokens):		128K</a:t>
             </a:r>
           </a:p>
           <a:p>
             <a:pPr marL="0" indent="0">
               <a:buNone/>
             </a:pPr>
-            <a:endParaRPr lang="en-GB" sz="2600" dirty="0"/>
+            <a:endParaRPr lang="en-GB" dirty="0"/>
+          </a:p>
+          <a:p>
+            <a:r>
+              <a:rPr lang="en-GB" dirty="0"/>
+              <a:t>total parameters:			1T</a:t>
+            </a:r>
+          </a:p>
+          <a:p>
+            <a:r>
+              <a:rPr lang="en-GB" dirty="0"/>
+              <a:t>training tokens:			15.5T</a:t>
+            </a:r>
           </a:p>
           <a:p>
             <a:pPr marL="0" indent="0">
               <a:buNone/>
             </a:pPr>
-            <a:r>
-              <a:rPr lang="en-GB" sz="2600" dirty="0"/>
-              <a:t>emergent abilities of LLMs:</a:t>
-            </a:r>
-          </a:p>
-          <a:p>
-            <a:r>
-              <a:rPr lang="en-GB" sz="2600" dirty="0"/>
-              <a:t>multi-task learning: perform new tasks at test time without task-specific training (via </a:t>
-            </a:r>
-            <a:r>
-              <a:rPr lang="en-GB" sz="2600" dirty="0">
-                <a:sym typeface="Wingdings" pitchFamily="2" charset="2"/>
-              </a:rPr>
-              <a:t>p</a:t>
-            </a:r>
-            <a:r>
-              <a:rPr lang="en-GB" sz="2600" dirty="0"/>
-              <a:t>rompting)</a:t>
-            </a:r>
-          </a:p>
-          <a:p>
-            <a:r>
-              <a:rPr lang="en-GB" sz="2600" dirty="0">
-                <a:solidFill>
-                  <a:srgbClr val="212529"/>
-                </a:solidFill>
-              </a:rPr>
-              <a:t>reasoning capabilities</a:t>
-            </a:r>
-            <a:endParaRPr lang="en-GB" sz="2600" dirty="0"/>
+            <a:endParaRPr lang="en-GB" dirty="0"/>
+          </a:p>
+          <a:p>
+            <a:r>
+              <a:rPr lang="en-GB" dirty="0"/>
+              <a:t>number of layers:			61</a:t>
+            </a:r>
+          </a:p>
+          <a:p>
+            <a:r>
+              <a:rPr lang="en-GB" dirty="0"/>
+              <a:t>number of attention heads:		64</a:t>
+            </a:r>
+          </a:p>
+          <a:p>
+            <a:r>
+              <a:rPr lang="en-GB" dirty="0"/>
+              <a:t>number of experts:			384</a:t>
+            </a:r>
           </a:p>
         </p:txBody>
       </p:sp>
@@ -16405,7 +18323,7 @@
           <p:cNvPr id="4" name="Slide Number Placeholder 3">
             <a:extLst>
               <a:ext uri="{FF2B5EF4-FFF2-40B4-BE49-F238E27FC236}">
-                <a16:creationId xmlns:a16="http://schemas.microsoft.com/office/drawing/2014/main" id="{649F0045-E4C4-0C38-5A9B-7A5BA0214CE7}"/>
+                <a16:creationId xmlns:a16="http://schemas.microsoft.com/office/drawing/2014/main" id="{159F7305-36A6-E37E-39C3-03F1C64BB003}"/>
               </a:ext>
             </a:extLst>
           </p:cNvPr>
@@ -16429,42 +18347,12 @@
           </a:p>
         </p:txBody>
       </p:sp>
-      <p:pic>
-        <p:nvPicPr>
-          <p:cNvPr id="6" name="Picture 5">
-            <a:extLst>
-              <a:ext uri="{FF2B5EF4-FFF2-40B4-BE49-F238E27FC236}">
-                <a16:creationId xmlns:a16="http://schemas.microsoft.com/office/drawing/2014/main" id="{B671ACDA-58DE-C671-C490-9A25C570A67D}"/>
-              </a:ext>
-            </a:extLst>
-          </p:cNvPr>
-          <p:cNvPicPr>
-            <a:picLocks noChangeAspect="1"/>
-          </p:cNvPicPr>
-          <p:nvPr/>
-        </p:nvPicPr>
-        <p:blipFill>
-          <a:blip r:embed="rId4"/>
-          <a:stretch>
-            <a:fillRect/>
-          </a:stretch>
-        </p:blipFill>
-        <p:spPr>
-          <a:xfrm>
-            <a:off x="9774395" y="1005021"/>
-            <a:ext cx="2390243" cy="5344539"/>
-          </a:xfrm>
-          <a:prstGeom prst="rect">
-            <a:avLst/>
-          </a:prstGeom>
-        </p:spPr>
-      </p:pic>
       <p:sp>
         <p:nvSpPr>
-          <p:cNvPr id="7" name="TextBox 6">
+          <p:cNvPr id="5" name="TextBox 4">
             <a:extLst>
               <a:ext uri="{FF2B5EF4-FFF2-40B4-BE49-F238E27FC236}">
-                <a16:creationId xmlns:a16="http://schemas.microsoft.com/office/drawing/2014/main" id="{0467208A-C2CD-8126-638D-2517BFC96589}"/>
+                <a16:creationId xmlns:a16="http://schemas.microsoft.com/office/drawing/2014/main" id="{3A47AE09-0CE7-F2EF-E282-E7D203CB2794}"/>
               </a:ext>
             </a:extLst>
           </p:cNvPr>
@@ -16472,9 +18360,9 @@
           <p:nvPr/>
         </p:nvSpPr>
         <p:spPr>
-          <a:xfrm>
-            <a:off x="11632120" y="6349560"/>
-            <a:ext cx="532518" cy="246221"/>
+          <a:xfrm flipH="1">
+            <a:off x="7780863" y="4061832"/>
+            <a:ext cx="3055302" cy="461665"/>
           </a:xfrm>
           <a:prstGeom prst="rect">
             <a:avLst/>
@@ -16482,25 +18370,186 @@
           <a:noFill/>
         </p:spPr>
         <p:txBody>
-          <a:bodyPr wrap="none" rtlCol="0">
+          <a:bodyPr wrap="square" rtlCol="0">
             <a:spAutoFit/>
           </a:bodyPr>
           <a:lstStyle/>
           <a:p>
             <a:r>
-              <a:rPr lang="de-DE" sz="1000" dirty="0">
-                <a:hlinkClick r:id="rId5"/>
+              <a:rPr lang="en-GB" sz="2400" dirty="0">
+                <a:sym typeface="Wingdings" panose="05000000000000000000" pitchFamily="2" charset="2"/>
               </a:rPr>
-              <a:t>source</a:t>
-            </a:r>
-            <a:endParaRPr lang="de-DE" sz="1000" dirty="0"/>
+              <a:t> </a:t>
+            </a:r>
+            <a:r>
+              <a:rPr lang="en-GB" sz="2400" dirty="0"/>
+              <a:t>a lot of memorizing</a:t>
+            </a:r>
+          </a:p>
+        </p:txBody>
+      </p:sp>
+      <p:cxnSp>
+        <p:nvCxnSpPr>
+          <p:cNvPr id="7" name="Straight Arrow Connector 6">
+            <a:extLst>
+              <a:ext uri="{FF2B5EF4-FFF2-40B4-BE49-F238E27FC236}">
+                <a16:creationId xmlns:a16="http://schemas.microsoft.com/office/drawing/2014/main" id="{8298ABD0-40ED-3A92-2AD6-EEEFFF673542}"/>
+              </a:ext>
+            </a:extLst>
+          </p:cNvPr>
+          <p:cNvCxnSpPr>
+            <a:cxnSpLocks/>
+            <a:stCxn id="5" idx="3"/>
+          </p:cNvCxnSpPr>
+          <p:nvPr/>
+        </p:nvCxnSpPr>
+        <p:spPr>
+          <a:xfrm flipH="1">
+            <a:off x="6411310" y="4292665"/>
+            <a:ext cx="1369553" cy="0"/>
+          </a:xfrm>
+          <a:prstGeom prst="straightConnector1">
+            <a:avLst/>
+          </a:prstGeom>
+          <a:ln>
+            <a:tailEnd type="triangle"/>
+          </a:ln>
+        </p:spPr>
+        <p:style>
+          <a:lnRef idx="1">
+            <a:schemeClr val="accent1"/>
+          </a:lnRef>
+          <a:fillRef idx="0">
+            <a:schemeClr val="accent1"/>
+          </a:fillRef>
+          <a:effectRef idx="0">
+            <a:schemeClr val="accent1"/>
+          </a:effectRef>
+          <a:fontRef idx="minor">
+            <a:schemeClr val="tx1"/>
+          </a:fontRef>
+        </p:style>
+      </p:cxnSp>
+      <p:sp>
+        <p:nvSpPr>
+          <p:cNvPr id="8" name="Textfeld 7">
+            <a:extLst>
+              <a:ext uri="{FF2B5EF4-FFF2-40B4-BE49-F238E27FC236}">
+                <a16:creationId xmlns:a16="http://schemas.microsoft.com/office/drawing/2014/main" id="{B3AA4BA7-5487-6DD2-189C-F68C512D6F35}"/>
+              </a:ext>
+            </a:extLst>
+          </p:cNvPr>
+          <p:cNvSpPr txBox="1"/>
+          <p:nvPr/>
+        </p:nvSpPr>
+        <p:spPr>
+          <a:xfrm>
+            <a:off x="7797362" y="4672114"/>
+            <a:ext cx="3815255" cy="461665"/>
+          </a:xfrm>
+          <a:prstGeom prst="rect">
+            <a:avLst/>
+          </a:prstGeom>
+          <a:noFill/>
+          <a:ln>
+            <a:solidFill>
+              <a:schemeClr val="tx1"/>
+            </a:solidFill>
+          </a:ln>
+        </p:spPr>
+        <p:txBody>
+          <a:bodyPr wrap="square">
+            <a:spAutoFit/>
+          </a:bodyPr>
+          <a:lstStyle/>
+          <a:p>
+            <a:r>
+              <a:rPr lang="en-GB" sz="2400" dirty="0"/>
+              <a:t>compression of the internet</a:t>
+            </a:r>
+          </a:p>
+        </p:txBody>
+      </p:sp>
+      <p:sp>
+        <p:nvSpPr>
+          <p:cNvPr id="15" name="Textfeld 14">
+            <a:extLst>
+              <a:ext uri="{FF2B5EF4-FFF2-40B4-BE49-F238E27FC236}">
+                <a16:creationId xmlns:a16="http://schemas.microsoft.com/office/drawing/2014/main" id="{61AAA22A-780F-765B-ED5D-8C5F6DBB657A}"/>
+              </a:ext>
+            </a:extLst>
+          </p:cNvPr>
+          <p:cNvSpPr txBox="1"/>
+          <p:nvPr/>
+        </p:nvSpPr>
+        <p:spPr>
+          <a:xfrm>
+            <a:off x="8008735" y="1690688"/>
+            <a:ext cx="3345065" cy="830997"/>
+          </a:xfrm>
+          <a:prstGeom prst="rect">
+            <a:avLst/>
+          </a:prstGeom>
+          <a:noFill/>
+        </p:spPr>
+        <p:txBody>
+          <a:bodyPr wrap="square" rtlCol="0">
+            <a:spAutoFit/>
+          </a:bodyPr>
+          <a:lstStyle/>
+          <a:p>
+            <a:r>
+              <a:rPr lang="de-DE" sz="2400" dirty="0" err="1"/>
+              <a:t>as</a:t>
+            </a:r>
+            <a:r>
+              <a:rPr lang="de-DE" sz="2400" dirty="0"/>
+              <a:t> </a:t>
+            </a:r>
+            <a:r>
+              <a:rPr lang="de-DE" sz="2400" dirty="0" err="1"/>
+              <a:t>usual</a:t>
+            </a:r>
+            <a:r>
+              <a:rPr lang="de-DE" sz="2400" dirty="0"/>
+              <a:t>, </a:t>
+            </a:r>
+            <a:r>
+              <a:rPr lang="de-DE" sz="2400" dirty="0" err="1"/>
+              <a:t>comes</a:t>
+            </a:r>
+            <a:r>
+              <a:rPr lang="de-DE" sz="2400" dirty="0"/>
+              <a:t> in </a:t>
+            </a:r>
+            <a:r>
+              <a:rPr lang="de-DE" sz="2400" dirty="0" err="1"/>
+              <a:t>base</a:t>
+            </a:r>
+            <a:r>
+              <a:rPr lang="de-DE" sz="2400" dirty="0"/>
+              <a:t> and </a:t>
+            </a:r>
+            <a:r>
+              <a:rPr lang="de-DE" sz="2400" dirty="0" err="1"/>
+              <a:t>instruct</a:t>
+            </a:r>
+            <a:r>
+              <a:rPr lang="de-DE" sz="2400" dirty="0"/>
+              <a:t> </a:t>
+            </a:r>
+            <a:r>
+              <a:rPr lang="de-DE" sz="2400" dirty="0" err="1"/>
+              <a:t>variants</a:t>
+            </a:r>
+            <a:endParaRPr lang="de-DE" sz="2400" dirty="0"/>
           </a:p>
         </p:txBody>
       </p:sp>
     </p:spTree>
     <p:extLst>
       <p:ext uri="{BB962C8B-B14F-4D97-AF65-F5344CB8AC3E}">
-        <p14:creationId xmlns:p14="http://schemas.microsoft.com/office/powerpoint/2010/main" val="839114839"/>
+        <p14:creationId xmlns:p14="http://schemas.microsoft.com/office/powerpoint/2010/main" val="3135530987"/>
       </p:ext>
     </p:extLst>
   </p:cSld>

--- a/slides/3_LLMs.pptx
+++ b/slides/3_LLMs.pptx
@@ -5,7 +5,7 @@
     <p:sldMasterId id="2147483648" r:id="rId1"/>
   </p:sldMasterIdLst>
   <p:notesMasterIdLst>
-    <p:notesMasterId r:id="rId18"/>
+    <p:notesMasterId r:id="rId19"/>
   </p:notesMasterIdLst>
   <p:sldIdLst>
     <p:sldId id="256" r:id="rId2"/>
@@ -24,6 +24,7 @@
     <p:sldId id="285" r:id="rId15"/>
     <p:sldId id="809" r:id="rId16"/>
     <p:sldId id="804" r:id="rId17"/>
+    <p:sldId id="815" r:id="rId18"/>
   </p:sldIdLst>
   <p:sldSz cx="12192000" cy="6858000"/>
   <p:notesSz cx="6858000" cy="9144000"/>
@@ -7036,7 +7037,7 @@
           <a:p>
             <a:fld id="{B854A0A5-3125-4A93-A463-B2CA0DCE058B}" type="datetimeFigureOut">
               <a:rPr lang="en-GB" smtClean="0"/>
-              <a:t>15/09/2025</a:t>
+              <a:t>17/09/2025</a:t>
             </a:fld>
             <a:endParaRPr lang="en-GB"/>
           </a:p>
@@ -7453,7 +7454,7 @@
           <a:p>
             <a:fld id="{7128456D-5ACD-4673-BCE9-52505EC32CEF}" type="datetime1">
               <a:rPr lang="en-GB" smtClean="0"/>
-              <a:t>15/09/2025</a:t>
+              <a:t>17/09/2025</a:t>
             </a:fld>
             <a:endParaRPr lang="en-GB"/>
           </a:p>
@@ -7653,7 +7654,7 @@
           <a:p>
             <a:fld id="{D99A2639-5270-4811-807B-89D4AE95E7ED}" type="datetime1">
               <a:rPr lang="en-GB" smtClean="0"/>
-              <a:t>15/09/2025</a:t>
+              <a:t>17/09/2025</a:t>
             </a:fld>
             <a:endParaRPr lang="en-GB"/>
           </a:p>
@@ -7863,7 +7864,7 @@
           <a:p>
             <a:fld id="{B552976C-D408-4E27-8D02-D7795F6D8A01}" type="datetime1">
               <a:rPr lang="en-GB" smtClean="0"/>
-              <a:t>15/09/2025</a:t>
+              <a:t>17/09/2025</a:t>
             </a:fld>
             <a:endParaRPr lang="en-GB"/>
           </a:p>
@@ -8063,7 +8064,7 @@
           <a:p>
             <a:fld id="{0B763083-041D-491F-A9FE-D51D99E0B41E}" type="datetime1">
               <a:rPr lang="en-GB" smtClean="0"/>
-              <a:t>15/09/2025</a:t>
+              <a:t>17/09/2025</a:t>
             </a:fld>
             <a:endParaRPr lang="en-GB"/>
           </a:p>
@@ -8339,7 +8340,7 @@
           <a:p>
             <a:fld id="{409455E6-A1CA-4CB6-9964-88D5086DA5CA}" type="datetime1">
               <a:rPr lang="en-GB" smtClean="0"/>
-              <a:t>15/09/2025</a:t>
+              <a:t>17/09/2025</a:t>
             </a:fld>
             <a:endParaRPr lang="en-GB"/>
           </a:p>
@@ -8607,7 +8608,7 @@
           <a:p>
             <a:fld id="{FAD82E38-24C1-4A8F-B916-1E714FC129DD}" type="datetime1">
               <a:rPr lang="en-GB" smtClean="0"/>
-              <a:t>15/09/2025</a:t>
+              <a:t>17/09/2025</a:t>
             </a:fld>
             <a:endParaRPr lang="en-GB"/>
           </a:p>
@@ -9022,7 +9023,7 @@
           <a:p>
             <a:fld id="{BC17BCDC-BAA6-44B5-B642-6F28D623ABB1}" type="datetime1">
               <a:rPr lang="en-GB" smtClean="0"/>
-              <a:t>15/09/2025</a:t>
+              <a:t>17/09/2025</a:t>
             </a:fld>
             <a:endParaRPr lang="en-GB"/>
           </a:p>
@@ -9164,7 +9165,7 @@
           <a:p>
             <a:fld id="{01D4BEC3-2CF9-4B19-A0A5-E70A0675B677}" type="datetime1">
               <a:rPr lang="en-GB" smtClean="0"/>
-              <a:t>15/09/2025</a:t>
+              <a:t>17/09/2025</a:t>
             </a:fld>
             <a:endParaRPr lang="en-GB"/>
           </a:p>
@@ -9277,7 +9278,7 @@
           <a:p>
             <a:fld id="{98E28BFD-B06D-4A45-8453-724AC7BA29C5}" type="datetime1">
               <a:rPr lang="en-GB" smtClean="0"/>
-              <a:t>15/09/2025</a:t>
+              <a:t>17/09/2025</a:t>
             </a:fld>
             <a:endParaRPr lang="en-GB"/>
           </a:p>
@@ -9590,7 +9591,7 @@
           <a:p>
             <a:fld id="{A14D99B0-2926-4194-B668-6A0D6123824C}" type="datetime1">
               <a:rPr lang="en-GB" smtClean="0"/>
-              <a:t>15/09/2025</a:t>
+              <a:t>17/09/2025</a:t>
             </a:fld>
             <a:endParaRPr lang="en-GB"/>
           </a:p>
@@ -9879,7 +9880,7 @@
           <a:p>
             <a:fld id="{29F03426-21FD-40F4-9F0B-AD19F2317DCA}" type="datetime1">
               <a:rPr lang="en-GB" smtClean="0"/>
-              <a:t>15/09/2025</a:t>
+              <a:t>17/09/2025</a:t>
             </a:fld>
             <a:endParaRPr lang="en-GB"/>
           </a:p>
@@ -10122,7 +10123,7 @@
           <a:p>
             <a:fld id="{0369896D-5D36-4D31-A0CE-0C2BFB17B225}" type="datetime1">
               <a:rPr lang="en-GB" smtClean="0"/>
-              <a:t>15/09/2025</a:t>
+              <a:t>17/09/2025</a:t>
             </a:fld>
             <a:endParaRPr lang="en-GB"/>
           </a:p>
@@ -15401,6 +15402,365 @@
     <p:extLst>
       <p:ext uri="{BB962C8B-B14F-4D97-AF65-F5344CB8AC3E}">
         <p14:creationId xmlns:p14="http://schemas.microsoft.com/office/powerpoint/2010/main" val="2061575047"/>
+      </p:ext>
+    </p:extLst>
+  </p:cSld>
+  <p:clrMapOvr>
+    <a:masterClrMapping/>
+  </p:clrMapOvr>
+</p:sld>
+</file>
+
+<file path=ppt/slides/slide17.xml><?xml version="1.0" encoding="utf-8"?>
+<p:sld xmlns:a="http://schemas.openxmlformats.org/drawingml/2006/main" xmlns:r="http://schemas.openxmlformats.org/officeDocument/2006/relationships" xmlns:p="http://schemas.openxmlformats.org/presentationml/2006/main">
+  <p:cSld>
+    <p:spTree>
+      <p:nvGrpSpPr>
+        <p:cNvPr id="1" name=""/>
+        <p:cNvGrpSpPr/>
+        <p:nvPr/>
+      </p:nvGrpSpPr>
+      <p:grpSpPr>
+        <a:xfrm>
+          <a:off x="0" y="0"/>
+          <a:ext cx="0" cy="0"/>
+          <a:chOff x="0" y="0"/>
+          <a:chExt cx="0" cy="0"/>
+        </a:xfrm>
+      </p:grpSpPr>
+      <p:sp>
+        <p:nvSpPr>
+          <p:cNvPr id="2" name="Titel 1">
+            <a:extLst>
+              <a:ext uri="{FF2B5EF4-FFF2-40B4-BE49-F238E27FC236}">
+                <a16:creationId xmlns:a16="http://schemas.microsoft.com/office/drawing/2014/main" id="{20EF1E6E-F30A-7F8D-50CD-E883ED2259DD}"/>
+              </a:ext>
+            </a:extLst>
+          </p:cNvPr>
+          <p:cNvSpPr>
+            <a:spLocks noGrp="1"/>
+          </p:cNvSpPr>
+          <p:nvPr>
+            <p:ph type="title"/>
+          </p:nvPr>
+        </p:nvSpPr>
+        <p:spPr/>
+        <p:txBody>
+          <a:bodyPr/>
+          <a:lstStyle/>
+          <a:p>
+            <a:r>
+              <a:rPr lang="de-DE" dirty="0"/>
+              <a:t>Next: </a:t>
+            </a:r>
+            <a:r>
+              <a:rPr lang="de-DE" dirty="0" err="1"/>
+              <a:t>Context</a:t>
+            </a:r>
+            <a:r>
+              <a:rPr lang="de-DE" dirty="0"/>
+              <a:t> Engineering</a:t>
+            </a:r>
+          </a:p>
+        </p:txBody>
+      </p:sp>
+      <p:sp>
+        <p:nvSpPr>
+          <p:cNvPr id="3" name="Inhaltsplatzhalter 2">
+            <a:extLst>
+              <a:ext uri="{FF2B5EF4-FFF2-40B4-BE49-F238E27FC236}">
+                <a16:creationId xmlns:a16="http://schemas.microsoft.com/office/drawing/2014/main" id="{AA51F7B0-46FA-7E09-1BEB-4B91C37A0215}"/>
+              </a:ext>
+            </a:extLst>
+          </p:cNvPr>
+          <p:cNvSpPr>
+            <a:spLocks noGrp="1"/>
+          </p:cNvSpPr>
+          <p:nvPr>
+            <p:ph idx="1"/>
+          </p:nvPr>
+        </p:nvSpPr>
+        <p:spPr/>
+        <p:txBody>
+          <a:bodyPr/>
+          <a:lstStyle/>
+          <a:p>
+            <a:pPr marL="0" indent="0">
+              <a:buNone/>
+            </a:pPr>
+            <a:endParaRPr lang="de-DE" dirty="0"/>
+          </a:p>
+          <a:p>
+            <a:pPr marL="0" indent="0">
+              <a:buNone/>
+            </a:pPr>
+            <a:r>
+              <a:rPr lang="de-DE" dirty="0" err="1"/>
+              <a:t>To</a:t>
+            </a:r>
+            <a:r>
+              <a:rPr lang="de-DE" dirty="0"/>
+              <a:t> </a:t>
+            </a:r>
+            <a:r>
+              <a:rPr lang="de-DE" dirty="0" err="1"/>
+              <a:t>get</a:t>
+            </a:r>
+            <a:r>
+              <a:rPr lang="de-DE" dirty="0"/>
+              <a:t> </a:t>
+            </a:r>
+            <a:r>
+              <a:rPr lang="de-DE" dirty="0" err="1"/>
+              <a:t>the</a:t>
+            </a:r>
+            <a:r>
+              <a:rPr lang="de-DE" dirty="0"/>
+              <a:t> </a:t>
+            </a:r>
+            <a:r>
+              <a:rPr lang="de-DE" dirty="0" err="1"/>
+              <a:t>most</a:t>
+            </a:r>
+            <a:r>
+              <a:rPr lang="de-DE" dirty="0"/>
+              <a:t> out </a:t>
+            </a:r>
+            <a:r>
+              <a:rPr lang="de-DE" dirty="0" err="1"/>
+              <a:t>of</a:t>
+            </a:r>
+            <a:r>
+              <a:rPr lang="de-DE" dirty="0"/>
+              <a:t> LLMs, </a:t>
+            </a:r>
+            <a:r>
+              <a:rPr lang="de-DE" dirty="0" err="1"/>
+              <a:t>you</a:t>
+            </a:r>
+            <a:r>
+              <a:rPr lang="de-DE" dirty="0"/>
+              <a:t> </a:t>
+            </a:r>
+            <a:r>
+              <a:rPr lang="de-DE" dirty="0" err="1"/>
+              <a:t>need</a:t>
+            </a:r>
+            <a:r>
+              <a:rPr lang="de-DE" dirty="0"/>
+              <a:t> </a:t>
+            </a:r>
+            <a:r>
+              <a:rPr lang="de-DE" dirty="0" err="1"/>
+              <a:t>to</a:t>
+            </a:r>
+            <a:r>
+              <a:rPr lang="de-DE" dirty="0"/>
+              <a:t> prompt in </a:t>
+            </a:r>
+            <a:r>
+              <a:rPr lang="de-DE" dirty="0" err="1"/>
+              <a:t>the</a:t>
+            </a:r>
+            <a:r>
+              <a:rPr lang="de-DE" dirty="0"/>
+              <a:t> </a:t>
+            </a:r>
+            <a:r>
+              <a:rPr lang="de-DE" dirty="0" err="1"/>
+              <a:t>right</a:t>
+            </a:r>
+            <a:r>
+              <a:rPr lang="de-DE" dirty="0"/>
+              <a:t> </a:t>
+            </a:r>
+            <a:r>
+              <a:rPr lang="de-DE" dirty="0" err="1"/>
+              <a:t>way</a:t>
+            </a:r>
+            <a:r>
+              <a:rPr lang="de-DE" dirty="0"/>
+              <a:t>.</a:t>
+            </a:r>
+          </a:p>
+          <a:p>
+            <a:pPr marL="0" indent="0">
+              <a:buNone/>
+            </a:pPr>
+            <a:r>
+              <a:rPr lang="de-DE" dirty="0">
+                <a:sym typeface="Wingdings" pitchFamily="2" charset="2"/>
+              </a:rPr>
+              <a:t> p</a:t>
+            </a:r>
+            <a:r>
+              <a:rPr lang="de-DE" dirty="0"/>
+              <a:t>rompt </a:t>
+            </a:r>
+            <a:r>
+              <a:rPr lang="de-DE" dirty="0" err="1"/>
+              <a:t>engineering</a:t>
+            </a:r>
+            <a:endParaRPr lang="de-DE" dirty="0"/>
+          </a:p>
+          <a:p>
+            <a:pPr marL="0" indent="0">
+              <a:buNone/>
+            </a:pPr>
+            <a:endParaRPr lang="de-DE" dirty="0"/>
+          </a:p>
+          <a:p>
+            <a:pPr marL="0" indent="0">
+              <a:buNone/>
+            </a:pPr>
+            <a:r>
+              <a:rPr lang="de-DE" dirty="0" err="1"/>
+              <a:t>Furthermore</a:t>
+            </a:r>
+            <a:r>
+              <a:rPr lang="de-DE" dirty="0"/>
+              <a:t>, </a:t>
+            </a:r>
+            <a:r>
+              <a:rPr lang="de-DE" dirty="0" err="1"/>
+              <a:t>the</a:t>
+            </a:r>
+            <a:r>
+              <a:rPr lang="de-DE" dirty="0"/>
+              <a:t> </a:t>
+            </a:r>
+            <a:r>
+              <a:rPr lang="de-DE" dirty="0" err="1"/>
+              <a:t>capabilities</a:t>
+            </a:r>
+            <a:r>
+              <a:rPr lang="de-DE" dirty="0"/>
+              <a:t> </a:t>
+            </a:r>
+            <a:r>
+              <a:rPr lang="de-DE" dirty="0" err="1"/>
+              <a:t>of</a:t>
+            </a:r>
+            <a:r>
+              <a:rPr lang="de-DE" dirty="0"/>
+              <a:t> LLMs </a:t>
+            </a:r>
+            <a:r>
+              <a:rPr lang="de-DE" dirty="0" err="1"/>
+              <a:t>can</a:t>
+            </a:r>
+            <a:r>
+              <a:rPr lang="de-DE" dirty="0"/>
+              <a:t> </a:t>
+            </a:r>
+            <a:r>
+              <a:rPr lang="de-DE" dirty="0" err="1"/>
+              <a:t>be</a:t>
+            </a:r>
+            <a:r>
+              <a:rPr lang="de-DE" dirty="0"/>
+              <a:t> </a:t>
+            </a:r>
+            <a:r>
+              <a:rPr lang="de-DE" dirty="0" err="1"/>
+              <a:t>enhanced</a:t>
+            </a:r>
+            <a:r>
+              <a:rPr lang="de-DE" dirty="0"/>
+              <a:t> </a:t>
+            </a:r>
+            <a:r>
+              <a:rPr lang="de-DE" dirty="0" err="1"/>
+              <a:t>by</a:t>
+            </a:r>
+            <a:r>
+              <a:rPr lang="de-DE" dirty="0"/>
+              <a:t> </a:t>
+            </a:r>
+            <a:r>
+              <a:rPr lang="de-DE" dirty="0" err="1"/>
+              <a:t>including</a:t>
+            </a:r>
+            <a:r>
+              <a:rPr lang="de-DE" dirty="0"/>
+              <a:t> additional </a:t>
+            </a:r>
+            <a:r>
+              <a:rPr lang="de-DE" dirty="0" err="1"/>
+              <a:t>information</a:t>
+            </a:r>
+            <a:r>
+              <a:rPr lang="de-DE" dirty="0"/>
+              <a:t> in </a:t>
+            </a:r>
+            <a:r>
+              <a:rPr lang="de-DE" dirty="0" err="1"/>
+              <a:t>the</a:t>
+            </a:r>
+            <a:r>
+              <a:rPr lang="de-DE" dirty="0"/>
+              <a:t> prompt.</a:t>
+            </a:r>
+          </a:p>
+          <a:p>
+            <a:pPr marL="0" indent="0">
+              <a:buNone/>
+            </a:pPr>
+            <a:r>
+              <a:rPr lang="de-DE" dirty="0">
+                <a:sym typeface="Wingdings" pitchFamily="2" charset="2"/>
+              </a:rPr>
+              <a:t> </a:t>
+            </a:r>
+            <a:r>
+              <a:rPr lang="de-DE" dirty="0" err="1"/>
+              <a:t>context</a:t>
+            </a:r>
+            <a:r>
+              <a:rPr lang="de-DE" dirty="0"/>
+              <a:t> </a:t>
+            </a:r>
+            <a:r>
+              <a:rPr lang="de-DE" dirty="0" err="1"/>
+              <a:t>engineering</a:t>
+            </a:r>
+            <a:endParaRPr lang="de-DE" dirty="0"/>
+          </a:p>
+        </p:txBody>
+      </p:sp>
+      <p:sp>
+        <p:nvSpPr>
+          <p:cNvPr id="4" name="Foliennummernplatzhalter 3">
+            <a:extLst>
+              <a:ext uri="{FF2B5EF4-FFF2-40B4-BE49-F238E27FC236}">
+                <a16:creationId xmlns:a16="http://schemas.microsoft.com/office/drawing/2014/main" id="{DCED79EF-B4D0-08EC-3556-26AD11F2166E}"/>
+              </a:ext>
+            </a:extLst>
+          </p:cNvPr>
+          <p:cNvSpPr>
+            <a:spLocks noGrp="1"/>
+          </p:cNvSpPr>
+          <p:nvPr>
+            <p:ph type="sldNum" sz="quarter" idx="12"/>
+          </p:nvPr>
+        </p:nvSpPr>
+        <p:spPr/>
+        <p:txBody>
+          <a:bodyPr/>
+          <a:lstStyle/>
+          <a:p>
+            <a:fld id="{3D4C94FE-FF23-4504-88E9-14D481113291}" type="slidenum">
+              <a:rPr lang="en-GB" smtClean="0"/>
+              <a:t>17</a:t>
+            </a:fld>
+            <a:endParaRPr lang="en-GB"/>
+          </a:p>
+        </p:txBody>
+      </p:sp>
+    </p:spTree>
+    <p:extLst>
+      <p:ext uri="{BB962C8B-B14F-4D97-AF65-F5344CB8AC3E}">
+        <p14:creationId xmlns:p14="http://schemas.microsoft.com/office/powerpoint/2010/main" val="2350334961"/>
       </p:ext>
     </p:extLst>
   </p:cSld>

--- a/slides/3_LLMs.pptx
+++ b/slides/3_LLMs.pptx
@@ -7037,7 +7037,7 @@
           <a:p>
             <a:fld id="{B854A0A5-3125-4A93-A463-B2CA0DCE058B}" type="datetimeFigureOut">
               <a:rPr lang="en-GB" smtClean="0"/>
-              <a:t>17/09/2025</a:t>
+              <a:t>03/11/2025</a:t>
             </a:fld>
             <a:endParaRPr lang="en-GB"/>
           </a:p>
@@ -7454,7 +7454,7 @@
           <a:p>
             <a:fld id="{7128456D-5ACD-4673-BCE9-52505EC32CEF}" type="datetime1">
               <a:rPr lang="en-GB" smtClean="0"/>
-              <a:t>17/09/2025</a:t>
+              <a:t>03/11/2025</a:t>
             </a:fld>
             <a:endParaRPr lang="en-GB"/>
           </a:p>
@@ -7654,7 +7654,7 @@
           <a:p>
             <a:fld id="{D99A2639-5270-4811-807B-89D4AE95E7ED}" type="datetime1">
               <a:rPr lang="en-GB" smtClean="0"/>
-              <a:t>17/09/2025</a:t>
+              <a:t>03/11/2025</a:t>
             </a:fld>
             <a:endParaRPr lang="en-GB"/>
           </a:p>
@@ -7864,7 +7864,7 @@
           <a:p>
             <a:fld id="{B552976C-D408-4E27-8D02-D7795F6D8A01}" type="datetime1">
               <a:rPr lang="en-GB" smtClean="0"/>
-              <a:t>17/09/2025</a:t>
+              <a:t>03/11/2025</a:t>
             </a:fld>
             <a:endParaRPr lang="en-GB"/>
           </a:p>
@@ -8064,7 +8064,7 @@
           <a:p>
             <a:fld id="{0B763083-041D-491F-A9FE-D51D99E0B41E}" type="datetime1">
               <a:rPr lang="en-GB" smtClean="0"/>
-              <a:t>17/09/2025</a:t>
+              <a:t>03/11/2025</a:t>
             </a:fld>
             <a:endParaRPr lang="en-GB"/>
           </a:p>
@@ -8340,7 +8340,7 @@
           <a:p>
             <a:fld id="{409455E6-A1CA-4CB6-9964-88D5086DA5CA}" type="datetime1">
               <a:rPr lang="en-GB" smtClean="0"/>
-              <a:t>17/09/2025</a:t>
+              <a:t>03/11/2025</a:t>
             </a:fld>
             <a:endParaRPr lang="en-GB"/>
           </a:p>
@@ -8608,7 +8608,7 @@
           <a:p>
             <a:fld id="{FAD82E38-24C1-4A8F-B916-1E714FC129DD}" type="datetime1">
               <a:rPr lang="en-GB" smtClean="0"/>
-              <a:t>17/09/2025</a:t>
+              <a:t>03/11/2025</a:t>
             </a:fld>
             <a:endParaRPr lang="en-GB"/>
           </a:p>
@@ -9023,7 +9023,7 @@
           <a:p>
             <a:fld id="{BC17BCDC-BAA6-44B5-B642-6F28D623ABB1}" type="datetime1">
               <a:rPr lang="en-GB" smtClean="0"/>
-              <a:t>17/09/2025</a:t>
+              <a:t>03/11/2025</a:t>
             </a:fld>
             <a:endParaRPr lang="en-GB"/>
           </a:p>
@@ -9165,7 +9165,7 @@
           <a:p>
             <a:fld id="{01D4BEC3-2CF9-4B19-A0A5-E70A0675B677}" type="datetime1">
               <a:rPr lang="en-GB" smtClean="0"/>
-              <a:t>17/09/2025</a:t>
+              <a:t>03/11/2025</a:t>
             </a:fld>
             <a:endParaRPr lang="en-GB"/>
           </a:p>
@@ -9278,7 +9278,7 @@
           <a:p>
             <a:fld id="{98E28BFD-B06D-4A45-8453-724AC7BA29C5}" type="datetime1">
               <a:rPr lang="en-GB" smtClean="0"/>
-              <a:t>17/09/2025</a:t>
+              <a:t>03/11/2025</a:t>
             </a:fld>
             <a:endParaRPr lang="en-GB"/>
           </a:p>
@@ -9591,7 +9591,7 @@
           <a:p>
             <a:fld id="{A14D99B0-2926-4194-B668-6A0D6123824C}" type="datetime1">
               <a:rPr lang="en-GB" smtClean="0"/>
-              <a:t>17/09/2025</a:t>
+              <a:t>03/11/2025</a:t>
             </a:fld>
             <a:endParaRPr lang="en-GB"/>
           </a:p>
@@ -9880,7 +9880,7 @@
           <a:p>
             <a:fld id="{29F03426-21FD-40F4-9F0B-AD19F2317DCA}" type="datetime1">
               <a:rPr lang="en-GB" smtClean="0"/>
-              <a:t>17/09/2025</a:t>
+              <a:t>03/11/2025</a:t>
             </a:fld>
             <a:endParaRPr lang="en-GB"/>
           </a:p>
@@ -10123,7 +10123,7 @@
           <a:p>
             <a:fld id="{0369896D-5D36-4D31-A0CE-0C2BFB17B225}" type="datetime1">
               <a:rPr lang="en-GB" smtClean="0"/>
-              <a:t>17/09/2025</a:t>
+              <a:t>03/11/2025</a:t>
             </a:fld>
             <a:endParaRPr lang="en-GB"/>
           </a:p>
@@ -16447,7 +16447,7 @@
         <p:spPr>
           <a:xfrm>
             <a:off x="10821282" y="3788751"/>
-            <a:ext cx="532518" cy="246221"/>
+            <a:ext cx="648130" cy="246221"/>
           </a:xfrm>
           <a:prstGeom prst="rect">
             <a:avLst/>
